--- a/templates/deck.pptx
+++ b/templates/deck.pptx
@@ -138,7 +138,7 @@
       </p:grpSpPr>
       <p:sp>
         <p:nvSpPr>
-          <p:cNvPr id="1181324946" name="Header Placeholder 1"/>
+          <p:cNvPr id="540238394" name="Header Placeholder 1"/>
           <p:cNvSpPr>
             <a:spLocks noGrp="1"/>
           </p:cNvSpPr>
@@ -172,7 +172,7 @@
       </p:sp>
       <p:sp>
         <p:nvSpPr>
-          <p:cNvPr id="1664634370" name="Date Placeholder 2"/>
+          <p:cNvPr id="217229436" name="Date Placeholder 2"/>
           <p:cNvSpPr>
             <a:spLocks noGrp="1"/>
           </p:cNvSpPr>
@@ -210,7 +210,7 @@
       </p:sp>
       <p:sp>
         <p:nvSpPr>
-          <p:cNvPr id="173256063" name="Slide Image Placeholder 3"/>
+          <p:cNvPr id="1558186723" name="Slide Image Placeholder 3"/>
           <p:cNvSpPr>
             <a:spLocks noChangeAspect="1" noGrp="1" noRot="1"/>
           </p:cNvSpPr>
@@ -246,7 +246,7 @@
       </p:sp>
       <p:sp>
         <p:nvSpPr>
-          <p:cNvPr id="1287057185" name="Notes Placeholder 4"/>
+          <p:cNvPr id="987375325" name="Notes Placeholder 4"/>
           <p:cNvSpPr>
             <a:spLocks noGrp="1"/>
           </p:cNvSpPr>
@@ -320,7 +320,7 @@
       </p:sp>
       <p:sp>
         <p:nvSpPr>
-          <p:cNvPr id="1733650562" name="Footer Placeholder 5"/>
+          <p:cNvPr id="1580879256" name="Footer Placeholder 5"/>
           <p:cNvSpPr>
             <a:spLocks noGrp="1"/>
           </p:cNvSpPr>
@@ -354,7 +354,7 @@
       </p:sp>
       <p:sp>
         <p:nvSpPr>
-          <p:cNvPr id="1613337948" name="Slide Number Placeholder 6"/>
+          <p:cNvPr id="2006679635" name="Slide Number Placeholder 6"/>
           <p:cNvSpPr>
             <a:spLocks noGrp="1"/>
           </p:cNvSpPr>
@@ -508,7 +508,7 @@
       </p:grpSpPr>
       <p:sp>
         <p:nvSpPr>
-          <p:cNvPr id="692786677" name="Slide Image Placeholder 1"/>
+          <p:cNvPr id="559321297" name="Slide Image Placeholder 1"/>
           <p:cNvSpPr>
             <a:spLocks noChangeAspect="1" noGrp="1" noRot="1"/>
           </p:cNvSpPr>
@@ -525,7 +525,7 @@
       </p:sp>
       <p:sp>
         <p:nvSpPr>
-          <p:cNvPr id="1120183815" name="Notes Placeholder 2"/>
+          <p:cNvPr id="1164745976" name="Notes Placeholder 2"/>
           <p:cNvSpPr>
             <a:spLocks noGrp="1"/>
           </p:cNvSpPr>
@@ -550,7 +550,7 @@
       </p:sp>
       <p:sp>
         <p:nvSpPr>
-          <p:cNvPr id="1097888834" name="Slide Number Placeholder 3"/>
+          <p:cNvPr id="1051513369" name="Slide Number Placeholder 3"/>
           <p:cNvSpPr>
             <a:spLocks noGrp="1"/>
           </p:cNvSpPr>
@@ -601,7 +601,7 @@
       </p:grpSpPr>
       <p:sp>
         <p:nvSpPr>
-          <p:cNvPr id="1608817616" name="Slide Image Placeholder 1"/>
+          <p:cNvPr id="1268350403" name="Slide Image Placeholder 1"/>
           <p:cNvSpPr>
             <a:spLocks noChangeAspect="1" noGrp="1" noRot="1"/>
           </p:cNvSpPr>
@@ -613,7 +613,7 @@
       </p:sp>
       <p:sp>
         <p:nvSpPr>
-          <p:cNvPr id="1066279672" name="Notes Placeholder 2"/>
+          <p:cNvPr id="494096144" name="Notes Placeholder 2"/>
           <p:cNvSpPr>
             <a:spLocks noGrp="1"/>
           </p:cNvSpPr>
@@ -635,7 +635,7 @@
       </p:sp>
       <p:sp>
         <p:nvSpPr>
-          <p:cNvPr id="1783661483" name="Slide Number Placeholder 3"/>
+          <p:cNvPr id="44797305" name="Slide Number Placeholder 3"/>
           <p:cNvSpPr>
             <a:spLocks noGrp="1"/>
           </p:cNvSpPr>
@@ -686,7 +686,7 @@
       </p:grpSpPr>
       <p:sp>
         <p:nvSpPr>
-          <p:cNvPr id="2020863855" name="Slide Image Placeholder 1"/>
+          <p:cNvPr id="2034682641" name="Slide Image Placeholder 1"/>
           <p:cNvSpPr>
             <a:spLocks noChangeAspect="1" noGrp="1" noRot="1"/>
           </p:cNvSpPr>
@@ -698,7 +698,7 @@
       </p:sp>
       <p:sp>
         <p:nvSpPr>
-          <p:cNvPr id="783321355" name="Notes Placeholder 2"/>
+          <p:cNvPr id="653845687" name="Notes Placeholder 2"/>
           <p:cNvSpPr>
             <a:spLocks noGrp="1"/>
           </p:cNvSpPr>
@@ -720,7 +720,7 @@
       </p:sp>
       <p:sp>
         <p:nvSpPr>
-          <p:cNvPr id="426704873" name="Slide Number Placeholder 3"/>
+          <p:cNvPr id="738503256" name="Slide Number Placeholder 3"/>
           <p:cNvSpPr>
             <a:spLocks noGrp="1"/>
           </p:cNvSpPr>
@@ -771,7 +771,7 @@
       </p:grpSpPr>
       <p:sp>
         <p:nvSpPr>
-          <p:cNvPr id="2059955002" name="Slide Image Placeholder 1"/>
+          <p:cNvPr id="1186086469" name="Slide Image Placeholder 1"/>
           <p:cNvSpPr>
             <a:spLocks noChangeAspect="1" noGrp="1" noRot="1"/>
           </p:cNvSpPr>
@@ -783,7 +783,7 @@
       </p:sp>
       <p:sp>
         <p:nvSpPr>
-          <p:cNvPr id="1968842798" name="Notes Placeholder 2"/>
+          <p:cNvPr id="554648390" name="Notes Placeholder 2"/>
           <p:cNvSpPr>
             <a:spLocks noGrp="1"/>
           </p:cNvSpPr>
@@ -805,7 +805,7 @@
       </p:sp>
       <p:sp>
         <p:nvSpPr>
-          <p:cNvPr id="1808087544" name="Slide Number Placeholder 3"/>
+          <p:cNvPr id="1097206847" name="Slide Number Placeholder 3"/>
           <p:cNvSpPr>
             <a:spLocks noGrp="1"/>
           </p:cNvSpPr>
@@ -856,7 +856,7 @@
       </p:grpSpPr>
       <p:sp>
         <p:nvSpPr>
-          <p:cNvPr id="855188894" name="Slide Image Placeholder 1"/>
+          <p:cNvPr id="1830001397" name="Slide Image Placeholder 1"/>
           <p:cNvSpPr>
             <a:spLocks noChangeAspect="1" noGrp="1" noRot="1"/>
           </p:cNvSpPr>
@@ -868,7 +868,7 @@
       </p:sp>
       <p:sp>
         <p:nvSpPr>
-          <p:cNvPr id="1679043270" name="Notes Placeholder 2"/>
+          <p:cNvPr id="799557467" name="Notes Placeholder 2"/>
           <p:cNvSpPr>
             <a:spLocks noGrp="1"/>
           </p:cNvSpPr>
@@ -890,7 +890,7 @@
       </p:sp>
       <p:sp>
         <p:nvSpPr>
-          <p:cNvPr id="793568310" name="Slide Number Placeholder 3"/>
+          <p:cNvPr id="1534847103" name="Slide Number Placeholder 3"/>
           <p:cNvSpPr>
             <a:spLocks noGrp="1"/>
           </p:cNvSpPr>
@@ -958,7 +958,7 @@
       </p:grpSpPr>
       <p:sp>
         <p:nvSpPr>
-          <p:cNvPr id="129728422" name="Rectangle 1245485961"/>
+          <p:cNvPr id="2129592063" name="Rectangle 1245485961"/>
           <p:cNvSpPr/>
           <p:nvPr/>
         </p:nvSpPr>
@@ -1009,7 +1009,7 @@
       </p:sp>
       <p:cxnSp>
         <p:nvCxnSpPr>
-          <p:cNvPr id="1935252090" name=""/>
+          <p:cNvPr id="1649071720" name=""/>
           <p:cNvCxnSpPr/>
           <p:nvPr/>
         </p:nvCxnSpPr>
@@ -1048,7 +1048,7 @@
       </p:cxnSp>
       <p:sp>
         <p:nvSpPr>
-          <p:cNvPr id="1788444646" name="Title 1"/>
+          <p:cNvPr id="448768677" name="Title 1"/>
           <p:cNvSpPr>
             <a:spLocks noGrp="1"/>
           </p:cNvSpPr>
@@ -1170,7 +1170,7 @@
       </p:sp>
       <p:sp>
         <p:nvSpPr>
-          <p:cNvPr id="81979197" name="Subtitle 2"/>
+          <p:cNvPr id="1975404204" name="Subtitle 2"/>
           <p:cNvSpPr>
             <a:spLocks noGrp="1"/>
           </p:cNvSpPr>
@@ -1333,7 +1333,7 @@
       </p:grpSpPr>
       <p:sp>
         <p:nvSpPr>
-          <p:cNvPr id="312718424" name="Title 1"/>
+          <p:cNvPr id="1955462736" name="Title 1"/>
           <p:cNvSpPr>
             <a:spLocks noGrp="1"/>
           </p:cNvSpPr>
@@ -1457,7 +1457,7 @@
       </p:sp>
       <p:cxnSp>
         <p:nvCxnSpPr>
-          <p:cNvPr id="827847748" name=""/>
+          <p:cNvPr id="554612735" name=""/>
           <p:cNvCxnSpPr/>
           <p:nvPr/>
         </p:nvCxnSpPr>
@@ -1496,7 +1496,7 @@
       </p:cxnSp>
       <p:sp>
         <p:nvSpPr>
-          <p:cNvPr id="1380318532" name="Footer Placeholder 4"/>
+          <p:cNvPr id="749223741" name="Footer Placeholder 4"/>
           <p:cNvSpPr>
             <a:spLocks noGrp="1"/>
           </p:cNvSpPr>
@@ -1648,7 +1648,7 @@
       </p:sp>
       <p:sp>
         <p:nvSpPr>
-          <p:cNvPr id="1113232277" name="Slide Number Placeholder 5"/>
+          <p:cNvPr id="649004938" name="Slide Number Placeholder 5"/>
           <p:cNvSpPr>
             <a:spLocks noGrp="1"/>
           </p:cNvSpPr>
@@ -1832,7 +1832,7 @@
       </p:grpSpPr>
       <p:sp>
         <p:nvSpPr>
-          <p:cNvPr id="332341722" name="Rectangle 1245485961"/>
+          <p:cNvPr id="582745970" name="Rectangle 1245485961"/>
           <p:cNvSpPr/>
           <p:nvPr/>
         </p:nvSpPr>
@@ -1886,7 +1886,7 @@
       </p:sp>
       <p:sp>
         <p:nvSpPr>
-          <p:cNvPr id="1734465960" name="Title 1"/>
+          <p:cNvPr id="998175078" name="Title 1"/>
           <p:cNvSpPr>
             <a:spLocks noGrp="1"/>
           </p:cNvSpPr>
@@ -2010,7 +2010,7 @@
       </p:sp>
       <p:cxnSp>
         <p:nvCxnSpPr>
-          <p:cNvPr id="1899458613" name=""/>
+          <p:cNvPr id="1466616658" name=""/>
           <p:cNvCxnSpPr/>
           <p:nvPr/>
         </p:nvCxnSpPr>
@@ -2049,7 +2049,7 @@
       </p:cxnSp>
       <p:sp>
         <p:nvSpPr>
-          <p:cNvPr id="345965564" name="Footer Placeholder 4"/>
+          <p:cNvPr id="567919916" name="Footer Placeholder 4"/>
           <p:cNvSpPr>
             <a:spLocks noGrp="1"/>
           </p:cNvSpPr>
@@ -2201,7 +2201,7 @@
       </p:sp>
       <p:sp>
         <p:nvSpPr>
-          <p:cNvPr id="1342591257" name="Slide Number Placeholder 5"/>
+          <p:cNvPr id="1859060657" name="Slide Number Placeholder 5"/>
           <p:cNvSpPr>
             <a:spLocks noGrp="1"/>
           </p:cNvSpPr>
@@ -2344,7 +2344,7 @@
       </p:sp>
       <p:cxnSp>
         <p:nvCxnSpPr>
-          <p:cNvPr id="1399509325" name=""/>
+          <p:cNvPr id="641033962" name=""/>
           <p:cNvCxnSpPr/>
           <p:nvPr/>
         </p:nvCxnSpPr>
@@ -2383,7 +2383,7 @@
       </p:cxnSp>
       <p:sp>
         <p:nvSpPr>
-          <p:cNvPr id="1764632441" name="Text Placeholder 9"/>
+          <p:cNvPr id="61211740" name="Text Placeholder 9"/>
           <p:cNvSpPr>
             <a:spLocks noGrp="1"/>
           </p:cNvSpPr>
@@ -2542,7 +2542,7 @@
       </p:grpSpPr>
       <p:sp>
         <p:nvSpPr>
-          <p:cNvPr id="245912178" name="Title Placeholder 1"/>
+          <p:cNvPr id="1439633809" name="Title Placeholder 1"/>
           <p:cNvSpPr>
             <a:spLocks noGrp="1"/>
           </p:cNvSpPr>
@@ -2578,7 +2578,7 @@
       </p:sp>
       <p:sp>
         <p:nvSpPr>
-          <p:cNvPr id="256496069" name="Text Placeholder 2"/>
+          <p:cNvPr id="831233394" name="Text Placeholder 2"/>
           <p:cNvSpPr>
             <a:spLocks noGrp="1"/>
           </p:cNvSpPr>
@@ -2654,7 +2654,7 @@
       </p:sp>
       <p:sp>
         <p:nvSpPr>
-          <p:cNvPr id="1749804489" name="Footer Placeholder 4"/>
+          <p:cNvPr id="703643132" name="Footer Placeholder 4"/>
           <p:cNvSpPr>
             <a:spLocks noGrp="1"/>
           </p:cNvSpPr>
@@ -2722,7 +2722,7 @@
       </p:sp>
       <p:sp>
         <p:nvSpPr>
-          <p:cNvPr id="743246991" name="Slide Number Placeholder 5"/>
+          <p:cNvPr id="1961805422" name="Slide Number Placeholder 5"/>
           <p:cNvSpPr>
             <a:spLocks noGrp="1"/>
           </p:cNvSpPr>
@@ -3075,7 +3075,7 @@
       </p:grpSpPr>
       <p:sp>
         <p:nvSpPr>
-          <p:cNvPr id="631629272" name="Title"/>
+          <p:cNvPr id="1533445921" name="Title"/>
           <p:cNvSpPr>
             <a:spLocks noGrp="1"/>
           </p:cNvSpPr>
@@ -3109,7 +3109,7 @@
       </p:sp>
       <p:sp>
         <p:nvSpPr>
-          <p:cNvPr id="75581108" name="Subtitle"/>
+          <p:cNvPr id="2132179384" name="Subtitle"/>
           <p:cNvSpPr>
             <a:spLocks noGrp="1"/>
           </p:cNvSpPr>
@@ -3202,7 +3202,7 @@
       </p:grpSpPr>
       <p:sp>
         <p:nvSpPr>
-          <p:cNvPr id="396065030" name=""/>
+          <p:cNvPr id="516233200" name=""/>
           <p:cNvSpPr/>
           <p:nvPr/>
         </p:nvSpPr>
@@ -3266,7 +3266,7 @@
       </p:sp>
       <p:sp>
         <p:nvSpPr>
-          <p:cNvPr id="253281551" name=""/>
+          <p:cNvPr id="1054390042" name=""/>
           <p:cNvSpPr/>
           <p:nvPr/>
         </p:nvSpPr>
@@ -3331,7 +3331,7 @@
       </p:sp>
       <p:sp>
         <p:nvSpPr>
-          <p:cNvPr id="1794456649" name="name"/>
+          <p:cNvPr id="1950023693" name="name"/>
           <p:cNvSpPr txBox="1"/>
           <p:nvPr/>
         </p:nvSpPr>
@@ -3376,7 +3376,7 @@
       </p:sp>
       <p:sp>
         <p:nvSpPr>
-          <p:cNvPr id="807606329" name=""/>
+          <p:cNvPr id="705808638" name=""/>
           <p:cNvSpPr txBox="1"/>
           <p:nvPr/>
         </p:nvSpPr>
@@ -3421,7 +3421,7 @@
       </p:sp>
       <p:sp>
         <p:nvSpPr>
-          <p:cNvPr id="998160792" name="symbol"/>
+          <p:cNvPr id="1257498523" name="symbol"/>
           <p:cNvSpPr txBox="1"/>
           <p:nvPr/>
         </p:nvSpPr>
@@ -3466,7 +3466,7 @@
       </p:sp>
       <p:sp>
         <p:nvSpPr>
-          <p:cNvPr id="548597226" name=""/>
+          <p:cNvPr id="1359196504" name=""/>
           <p:cNvSpPr txBox="1"/>
           <p:nvPr/>
         </p:nvSpPr>
@@ -3511,7 +3511,7 @@
       </p:sp>
       <p:sp>
         <p:nvSpPr>
-          <p:cNvPr id="48495992" name="sector"/>
+          <p:cNvPr id="1930075135" name="sector"/>
           <p:cNvSpPr txBox="1"/>
           <p:nvPr/>
         </p:nvSpPr>
@@ -3556,7 +3556,7 @@
       </p:sp>
       <p:sp>
         <p:nvSpPr>
-          <p:cNvPr id="436934560" name=""/>
+          <p:cNvPr id="808899960" name=""/>
           <p:cNvSpPr txBox="1"/>
           <p:nvPr/>
         </p:nvSpPr>
@@ -3601,7 +3601,7 @@
       </p:sp>
       <p:sp>
         <p:nvSpPr>
-          <p:cNvPr id="453978988" name="industry"/>
+          <p:cNvPr id="1341591702" name="industry"/>
           <p:cNvSpPr txBox="1"/>
           <p:nvPr/>
         </p:nvSpPr>
@@ -3646,7 +3646,7 @@
       </p:sp>
       <p:sp>
         <p:nvSpPr>
-          <p:cNvPr id="493881542" name=""/>
+          <p:cNvPr id="1450875343" name=""/>
           <p:cNvSpPr txBox="1"/>
           <p:nvPr/>
         </p:nvSpPr>
@@ -3691,7 +3691,7 @@
       </p:sp>
       <p:sp>
         <p:nvSpPr>
-          <p:cNvPr id="1070463939" name="market_cap"/>
+          <p:cNvPr id="220840966" name="market_cap"/>
           <p:cNvSpPr txBox="1"/>
           <p:nvPr/>
         </p:nvSpPr>
@@ -3736,7 +3736,7 @@
       </p:sp>
       <p:sp>
         <p:nvSpPr>
-          <p:cNvPr id="1179780321" name=""/>
+          <p:cNvPr id="27691689" name=""/>
           <p:cNvSpPr txBox="1"/>
           <p:nvPr/>
         </p:nvSpPr>
@@ -3781,7 +3781,7 @@
       </p:sp>
       <p:sp>
         <p:nvSpPr>
-          <p:cNvPr id="755919576" name="share_price"/>
+          <p:cNvPr id="783459543" name="share_price"/>
           <p:cNvSpPr txBox="1"/>
           <p:nvPr/>
         </p:nvSpPr>
@@ -3826,7 +3826,7 @@
       </p:sp>
       <p:sp>
         <p:nvSpPr>
-          <p:cNvPr id="306380589" name=""/>
+          <p:cNvPr id="1114599991" name=""/>
           <p:cNvSpPr txBox="1"/>
           <p:nvPr/>
         </p:nvSpPr>
@@ -3871,7 +3871,7 @@
       </p:sp>
       <p:sp>
         <p:nvSpPr>
-          <p:cNvPr id="1089497014" name="share_earnings"/>
+          <p:cNvPr id="1560130438" name="share_earnings"/>
           <p:cNvSpPr txBox="1"/>
           <p:nvPr/>
         </p:nvSpPr>
@@ -3916,7 +3916,7 @@
       </p:sp>
       <p:sp>
         <p:nvSpPr>
-          <p:cNvPr id="552005694" name=""/>
+          <p:cNvPr id="243254624" name=""/>
           <p:cNvSpPr txBox="1"/>
           <p:nvPr/>
         </p:nvSpPr>
@@ -3961,7 +3961,7 @@
       </p:sp>
       <p:sp>
         <p:nvSpPr>
-          <p:cNvPr id="1450662428" name="analyst_rating"/>
+          <p:cNvPr id="1654788491" name="analyst_rating"/>
           <p:cNvSpPr txBox="1"/>
           <p:nvPr/>
         </p:nvSpPr>
@@ -4006,7 +4006,7 @@
       </p:sp>
       <p:sp>
         <p:nvSpPr>
-          <p:cNvPr id="32040209" name=""/>
+          <p:cNvPr id="72531646" name=""/>
           <p:cNvSpPr txBox="1"/>
           <p:nvPr/>
         </p:nvSpPr>
@@ -4051,7 +4051,7 @@
       </p:sp>
       <p:sp>
         <p:nvSpPr>
-          <p:cNvPr id="263084448" name="beta"/>
+          <p:cNvPr id="1446073766" name="beta"/>
           <p:cNvSpPr txBox="1"/>
           <p:nvPr/>
         </p:nvSpPr>
@@ -4096,7 +4096,7 @@
       </p:sp>
       <p:sp>
         <p:nvSpPr>
-          <p:cNvPr id="738889831" name=""/>
+          <p:cNvPr id="231457759" name=""/>
           <p:cNvSpPr txBox="1"/>
           <p:nvPr/>
         </p:nvSpPr>
@@ -4141,7 +4141,7 @@
       </p:sp>
       <p:sp>
         <p:nvSpPr>
-          <p:cNvPr id="514861214" name=""/>
+          <p:cNvPr id="1062681903" name=""/>
           <p:cNvSpPr/>
           <p:nvPr/>
         </p:nvSpPr>
@@ -4205,7 +4205,7 @@
       </p:sp>
       <p:sp>
         <p:nvSpPr>
-          <p:cNvPr id="784516632" name="Title 1"/>
+          <p:cNvPr id="1847313029" name="Title 1"/>
           <p:cNvSpPr>
             <a:spLocks noGrp="1"/>
           </p:cNvSpPr>
@@ -4280,7 +4280,7 @@
       </p:sp>
       <p:sp>
         <p:nvSpPr>
-          <p:cNvPr id="1582499558" name="Footer Placeholder 4"/>
+          <p:cNvPr id="1805826670" name="Footer Placeholder 4"/>
           <p:cNvSpPr>
             <a:spLocks noGrp="1"/>
           </p:cNvSpPr>
@@ -4324,7 +4324,7 @@
       </p:sp>
       <p:sp>
         <p:nvSpPr>
-          <p:cNvPr id="138720839" name="Slide Number Placeholder 5"/>
+          <p:cNvPr id="1443953073" name="Slide Number Placeholder 5"/>
           <p:cNvSpPr>
             <a:spLocks noGrp="1"/>
           </p:cNvSpPr>
@@ -4354,7 +4354,7 @@
       </p:sp>
       <p:cxnSp>
         <p:nvCxnSpPr>
-          <p:cNvPr id="1471701991" name=""/>
+          <p:cNvPr id="2045020786" name=""/>
           <p:cNvCxnSpPr/>
           <p:nvPr/>
         </p:nvCxnSpPr>
@@ -4393,7 +4393,7 @@
       </p:cxnSp>
       <p:cxnSp>
         <p:nvCxnSpPr>
-          <p:cNvPr id="867903720" name=""/>
+          <p:cNvPr id="1010499325" name=""/>
           <p:cNvCxnSpPr/>
           <p:nvPr/>
         </p:nvCxnSpPr>
@@ -4432,7 +4432,7 @@
       </p:cxnSp>
       <p:sp>
         <p:nvSpPr>
-          <p:cNvPr id="77826951" name=""/>
+          <p:cNvPr id="2106768878" name=""/>
           <p:cNvSpPr txBox="1"/>
           <p:nvPr/>
         </p:nvSpPr>
@@ -4477,7 +4477,7 @@
       </p:sp>
       <p:sp>
         <p:nvSpPr>
-          <p:cNvPr id="58559491" name=""/>
+          <p:cNvPr id="46466481" name=""/>
           <p:cNvSpPr txBox="1"/>
           <p:nvPr/>
         </p:nvSpPr>
@@ -4522,7 +4522,7 @@
       </p:sp>
       <p:sp>
         <p:nvSpPr>
-          <p:cNvPr id="990774086" name="description"/>
+          <p:cNvPr id="2106652362" name="description"/>
           <p:cNvSpPr txBox="1"/>
           <p:nvPr/>
         </p:nvSpPr>
@@ -4585,7 +4585,7 @@
       </p:sp>
       <p:cxnSp>
         <p:nvCxnSpPr>
-          <p:cNvPr id="147419079" name=""/>
+          <p:cNvPr id="588006342" name=""/>
           <p:cNvCxnSpPr/>
           <p:nvPr/>
         </p:nvCxnSpPr>
@@ -4624,7 +4624,7 @@
       </p:cxnSp>
       <p:sp>
         <p:nvSpPr>
-          <p:cNvPr id="1567165537" name="ltm_revenue"/>
+          <p:cNvPr id="1551511949" name="ltm_revenue"/>
           <p:cNvSpPr txBox="1"/>
           <p:nvPr/>
         </p:nvSpPr>
@@ -4669,7 +4669,7 @@
       </p:sp>
       <p:sp>
         <p:nvSpPr>
-          <p:cNvPr id="1932530012" name=""/>
+          <p:cNvPr id="890579889" name=""/>
           <p:cNvSpPr txBox="1"/>
           <p:nvPr/>
         </p:nvSpPr>
@@ -4714,7 +4714,7 @@
       </p:sp>
       <p:cxnSp>
         <p:nvCxnSpPr>
-          <p:cNvPr id="404498516" name=""/>
+          <p:cNvPr id="1955230199" name=""/>
           <p:cNvCxnSpPr/>
           <p:nvPr/>
         </p:nvCxnSpPr>
@@ -4753,7 +4753,7 @@
       </p:cxnSp>
       <p:sp>
         <p:nvSpPr>
-          <p:cNvPr id="292671431" name="revenue_growth"/>
+          <p:cNvPr id="1516459994" name="revenue_growth"/>
           <p:cNvSpPr txBox="1"/>
           <p:nvPr/>
         </p:nvSpPr>
@@ -4798,7 +4798,7 @@
       </p:sp>
       <p:sp>
         <p:nvSpPr>
-          <p:cNvPr id="1483125152" name=""/>
+          <p:cNvPr id="777123096" name=""/>
           <p:cNvSpPr txBox="1"/>
           <p:nvPr/>
         </p:nvSpPr>
@@ -4843,7 +4843,7 @@
       </p:sp>
       <p:cxnSp>
         <p:nvCxnSpPr>
-          <p:cNvPr id="335314431" name=""/>
+          <p:cNvPr id="56281767" name=""/>
           <p:cNvCxnSpPr/>
           <p:nvPr/>
         </p:nvCxnSpPr>
@@ -4882,7 +4882,7 @@
       </p:cxnSp>
       <p:sp>
         <p:nvSpPr>
-          <p:cNvPr id="1358671320" name="ltm_ebitda"/>
+          <p:cNvPr id="1681012860" name="ltm_ebitda"/>
           <p:cNvSpPr txBox="1"/>
           <p:nvPr/>
         </p:nvSpPr>
@@ -4927,7 +4927,7 @@
       </p:sp>
       <p:sp>
         <p:nvSpPr>
-          <p:cNvPr id="980504154" name=""/>
+          <p:cNvPr id="1743832040" name=""/>
           <p:cNvSpPr txBox="1"/>
           <p:nvPr/>
         </p:nvSpPr>
@@ -4972,7 +4972,7 @@
       </p:sp>
       <p:cxnSp>
         <p:nvCxnSpPr>
-          <p:cNvPr id="780833160" name=""/>
+          <p:cNvPr id="1647538847" name=""/>
           <p:cNvCxnSpPr/>
           <p:nvPr/>
         </p:nvCxnSpPr>
@@ -5011,7 +5011,7 @@
       </p:cxnSp>
       <p:sp>
         <p:nvSpPr>
-          <p:cNvPr id="1950336048" name="ebitda_margin"/>
+          <p:cNvPr id="570703425" name="ebitda_margin"/>
           <p:cNvSpPr txBox="1"/>
           <p:nvPr/>
         </p:nvSpPr>
@@ -5056,7 +5056,7 @@
       </p:sp>
       <p:sp>
         <p:nvSpPr>
-          <p:cNvPr id="431516723" name=""/>
+          <p:cNvPr id="193611717" name=""/>
           <p:cNvSpPr txBox="1"/>
           <p:nvPr/>
         </p:nvSpPr>
@@ -5101,7 +5101,7 @@
       </p:sp>
       <p:sp>
         <p:nvSpPr>
-          <p:cNvPr id="1662243639" name=""/>
+          <p:cNvPr id="1524460156" name=""/>
           <p:cNvSpPr txBox="1"/>
           <p:nvPr/>
         </p:nvSpPr>
@@ -5165,7 +5165,7 @@
       </p:sp>
       <p:cxnSp>
         <p:nvCxnSpPr>
-          <p:cNvPr id="1479653824" name=""/>
+          <p:cNvPr id="985671139" name=""/>
           <p:cNvCxnSpPr/>
           <p:nvPr/>
         </p:nvCxnSpPr>
@@ -5204,7 +5204,7 @@
       </p:cxnSp>
       <p:cxnSp>
         <p:nvCxnSpPr>
-          <p:cNvPr id="1168988888" name=""/>
+          <p:cNvPr id="512490457" name=""/>
           <p:cNvCxnSpPr/>
           <p:nvPr/>
         </p:nvCxnSpPr>
@@ -5243,7 +5243,7 @@
       </p:cxnSp>
       <p:cxnSp>
         <p:nvCxnSpPr>
-          <p:cNvPr id="1797898788" name=""/>
+          <p:cNvPr id="94706145" name=""/>
           <p:cNvCxnSpPr/>
           <p:nvPr/>
         </p:nvCxnSpPr>
@@ -5282,7 +5282,7 @@
       </p:cxnSp>
       <p:cxnSp>
         <p:nvCxnSpPr>
-          <p:cNvPr id="408679420" name=""/>
+          <p:cNvPr id="459992479" name=""/>
           <p:cNvCxnSpPr/>
           <p:nvPr/>
         </p:nvCxnSpPr>
@@ -5321,7 +5321,7 @@
       </p:cxnSp>
       <p:cxnSp>
         <p:nvCxnSpPr>
-          <p:cNvPr id="1076773290" name=""/>
+          <p:cNvPr id="154408427" name=""/>
           <p:cNvCxnSpPr/>
           <p:nvPr/>
         </p:nvCxnSpPr>
@@ -5360,7 +5360,7 @@
       </p:cxnSp>
       <p:cxnSp>
         <p:nvCxnSpPr>
-          <p:cNvPr id="675375697" name=""/>
+          <p:cNvPr id="1577614578" name=""/>
           <p:cNvCxnSpPr/>
           <p:nvPr/>
         </p:nvCxnSpPr>
@@ -5399,7 +5399,7 @@
       </p:cxnSp>
       <p:cxnSp>
         <p:nvCxnSpPr>
-          <p:cNvPr id="1117106442" name=""/>
+          <p:cNvPr id="1569510001" name=""/>
           <p:cNvCxnSpPr/>
           <p:nvPr/>
         </p:nvCxnSpPr>
@@ -5438,7 +5438,7 @@
       </p:cxnSp>
       <p:cxnSp>
         <p:nvCxnSpPr>
-          <p:cNvPr id="195827052" name=""/>
+          <p:cNvPr id="716548198" name=""/>
           <p:cNvCxnSpPr/>
           <p:nvPr/>
         </p:nvCxnSpPr>
@@ -5477,7 +5477,7 @@
       </p:cxnSp>
       <p:cxnSp>
         <p:nvCxnSpPr>
-          <p:cNvPr id="937908721" name=""/>
+          <p:cNvPr id="1123687100" name=""/>
           <p:cNvCxnSpPr/>
           <p:nvPr/>
         </p:nvCxnSpPr>
@@ -5516,7 +5516,7 @@
       </p:cxnSp>
       <p:cxnSp>
         <p:nvCxnSpPr>
-          <p:cNvPr id="1973411694" name=""/>
+          <p:cNvPr id="1563674800" name=""/>
           <p:cNvCxnSpPr/>
           <p:nvPr/>
         </p:nvCxnSpPr>
@@ -5555,7 +5555,7 @@
       </p:cxnSp>
       <p:cxnSp>
         <p:nvCxnSpPr>
-          <p:cNvPr id="1421038922" name=""/>
+          <p:cNvPr id="2020695890" name=""/>
           <p:cNvCxnSpPr/>
           <p:nvPr/>
         </p:nvCxnSpPr>
@@ -5594,7 +5594,7 @@
       </p:cxnSp>
       <p:cxnSp>
         <p:nvCxnSpPr>
-          <p:cNvPr id="1910564203" name=""/>
+          <p:cNvPr id="228484942" name=""/>
           <p:cNvCxnSpPr/>
           <p:nvPr/>
         </p:nvCxnSpPr>
@@ -5633,7 +5633,7 @@
       </p:cxnSp>
       <p:cxnSp>
         <p:nvCxnSpPr>
-          <p:cNvPr id="1984744417" name=""/>
+          <p:cNvPr id="1163883319" name=""/>
           <p:cNvCxnSpPr/>
           <p:nvPr/>
         </p:nvCxnSpPr>
@@ -5672,7 +5672,7 @@
       </p:cxnSp>
       <p:cxnSp>
         <p:nvCxnSpPr>
-          <p:cNvPr id="506705124" name=""/>
+          <p:cNvPr id="802623118" name=""/>
           <p:cNvCxnSpPr/>
           <p:nvPr/>
         </p:nvCxnSpPr>
@@ -5711,7 +5711,7 @@
       </p:cxnSp>
       <p:cxnSp>
         <p:nvCxnSpPr>
-          <p:cNvPr id="1244035447" name=""/>
+          <p:cNvPr id="1715591264" name=""/>
           <p:cNvCxnSpPr/>
           <p:nvPr/>
         </p:nvCxnSpPr>
@@ -5750,7 +5750,7 @@
       </p:cxnSp>
       <p:cxnSp>
         <p:nvCxnSpPr>
-          <p:cNvPr id="1625622056" name=""/>
+          <p:cNvPr id="1081689420" name=""/>
           <p:cNvCxnSpPr/>
           <p:nvPr/>
         </p:nvCxnSpPr>
@@ -5822,7 +5822,7 @@
       </p:grpSpPr>
       <p:sp>
         <p:nvSpPr>
-          <p:cNvPr id="396807972" name="Footer Placeholder 4"/>
+          <p:cNvPr id="1486085382" name="Footer Placeholder 4"/>
           <p:cNvSpPr>
             <a:spLocks noGrp="1"/>
           </p:cNvSpPr>
@@ -5884,7 +5884,7 @@
       </p:sp>
       <p:sp>
         <p:nvSpPr>
-          <p:cNvPr id="762520827" name="Rectangle 155402662"/>
+          <p:cNvPr id="1001666950" name="Rectangle 155402662"/>
           <p:cNvSpPr txBox="1"/>
           <p:nvPr/>
         </p:nvSpPr>
@@ -5940,7 +5940,7 @@
       </p:sp>
       <p:sp>
         <p:nvSpPr>
-          <p:cNvPr id="2076933573" name="Rectangle 155402662"/>
+          <p:cNvPr id="1289769386" name="Rectangle 155402662"/>
           <p:cNvSpPr txBox="1"/>
           <p:nvPr/>
         </p:nvSpPr>
@@ -5985,7 +5985,7 @@
       </p:sp>
       <p:sp>
         <p:nvSpPr>
-          <p:cNvPr id="761747039" name="Rectangle 155402662"/>
+          <p:cNvPr id="751633514" name="Rectangle 155402662"/>
           <p:cNvSpPr txBox="1"/>
           <p:nvPr/>
         </p:nvSpPr>
@@ -6030,7 +6030,7 @@
       </p:sp>
       <p:sp>
         <p:nvSpPr>
-          <p:cNvPr id="1751858872" name=""/>
+          <p:cNvPr id="1386481085" name=""/>
           <p:cNvSpPr/>
           <p:nvPr/>
         </p:nvSpPr>
@@ -6094,7 +6094,7 @@
       </p:sp>
       <p:sp>
         <p:nvSpPr>
-          <p:cNvPr id="228825837" name=""/>
+          <p:cNvPr id="1373598045" name=""/>
           <p:cNvSpPr/>
           <p:nvPr/>
         </p:nvSpPr>
@@ -6158,7 +6158,7 @@
       </p:sp>
       <p:sp>
         <p:nvSpPr>
-          <p:cNvPr id="1512503805" name="Title 1"/>
+          <p:cNvPr id="859449695" name="Title 1"/>
           <p:cNvSpPr>
             <a:spLocks noGrp="1"/>
           </p:cNvSpPr>
@@ -6214,7 +6214,7 @@
       </p:sp>
       <p:sp>
         <p:nvSpPr>
-          <p:cNvPr id="1173172667" name="Slide Number Placeholder 5"/>
+          <p:cNvPr id="1294091885" name="Slide Number Placeholder 5"/>
           <p:cNvSpPr>
             <a:spLocks noGrp="1"/>
           </p:cNvSpPr>
@@ -6251,7 +6251,7 @@
       </p:sp>
       <p:cxnSp>
         <p:nvCxnSpPr>
-          <p:cNvPr id="1020187073" name=""/>
+          <p:cNvPr id="1448612746" name=""/>
           <p:cNvCxnSpPr/>
           <p:nvPr/>
         </p:nvCxnSpPr>
@@ -6290,7 +6290,7 @@
       </p:cxnSp>
       <p:cxnSp>
         <p:nvCxnSpPr>
-          <p:cNvPr id="1128869870" name=""/>
+          <p:cNvPr id="17983894" name=""/>
           <p:cNvCxnSpPr/>
           <p:nvPr/>
         </p:nvCxnSpPr>
@@ -6329,7 +6329,7 @@
       </p:cxnSp>
       <p:sp>
         <p:nvSpPr>
-          <p:cNvPr id="333430683" name=""/>
+          <p:cNvPr id="2140649906" name=""/>
           <p:cNvSpPr txBox="1"/>
           <p:nvPr/>
         </p:nvSpPr>
@@ -6374,7 +6374,7 @@
       </p:sp>
       <p:sp>
         <p:nvSpPr>
-          <p:cNvPr id="1755686751" name=""/>
+          <p:cNvPr id="336136614" name=""/>
           <p:cNvSpPr txBox="1"/>
           <p:nvPr/>
         </p:nvSpPr>
@@ -6419,7 +6419,7 @@
       </p:sp>
       <p:sp>
         <p:nvSpPr>
-          <p:cNvPr id="449931553" name=""/>
+          <p:cNvPr id="1711248219" name=""/>
           <p:cNvSpPr/>
           <p:nvPr/>
         </p:nvSpPr>
@@ -6484,7 +6484,7 @@
       </p:sp>
       <p:cxnSp>
         <p:nvCxnSpPr>
-          <p:cNvPr id="658809714" name=""/>
+          <p:cNvPr id="2095260705" name=""/>
           <p:cNvCxnSpPr/>
           <p:nvPr/>
         </p:nvCxnSpPr>
@@ -6523,7 +6523,7 @@
       </p:cxnSp>
       <p:cxnSp>
         <p:nvCxnSpPr>
-          <p:cNvPr id="1179239553" name=""/>
+          <p:cNvPr id="1661281601" name=""/>
           <p:cNvCxnSpPr/>
           <p:nvPr/>
         </p:nvCxnSpPr>
@@ -6562,7 +6562,7 @@
       </p:cxnSp>
       <p:cxnSp>
         <p:nvCxnSpPr>
-          <p:cNvPr id="1856277281" name=""/>
+          <p:cNvPr id="1475645914" name=""/>
           <p:cNvCxnSpPr/>
           <p:nvPr/>
         </p:nvCxnSpPr>
@@ -6601,7 +6601,7 @@
       </p:cxnSp>
       <p:cxnSp>
         <p:nvCxnSpPr>
-          <p:cNvPr id="1035166381" name=""/>
+          <p:cNvPr id="1442792224" name=""/>
           <p:cNvCxnSpPr/>
           <p:nvPr/>
         </p:nvCxnSpPr>
@@ -6640,7 +6640,7 @@
       </p:cxnSp>
       <p:cxnSp>
         <p:nvCxnSpPr>
-          <p:cNvPr id="1160334" name=""/>
+          <p:cNvPr id="800085064" name=""/>
           <p:cNvCxnSpPr/>
           <p:nvPr/>
         </p:nvCxnSpPr>
@@ -6679,7 +6679,7 @@
       </p:cxnSp>
       <p:sp>
         <p:nvSpPr>
-          <p:cNvPr id="1141648896" name="mean_price"/>
+          <p:cNvPr id="223665145" name="mean_price"/>
           <p:cNvSpPr txBox="1"/>
           <p:nvPr/>
         </p:nvSpPr>
@@ -6724,7 +6724,7 @@
       </p:sp>
       <p:sp>
         <p:nvSpPr>
-          <p:cNvPr id="923469476" name="max_price"/>
+          <p:cNvPr id="1601393755" name="max_price"/>
           <p:cNvSpPr txBox="1"/>
           <p:nvPr/>
         </p:nvSpPr>
@@ -6769,7 +6769,7 @@
       </p:sp>
       <p:sp>
         <p:nvSpPr>
-          <p:cNvPr id="1551805102" name="50p_price"/>
+          <p:cNvPr id="1845117738" name="50p_price"/>
           <p:cNvSpPr txBox="1"/>
           <p:nvPr/>
         </p:nvSpPr>
@@ -6814,7 +6814,7 @@
       </p:sp>
       <p:sp>
         <p:nvSpPr>
-          <p:cNvPr id="1090141207" name="25p_price"/>
+          <p:cNvPr id="1740953749" name="25p_price"/>
           <p:cNvSpPr txBox="1"/>
           <p:nvPr/>
         </p:nvSpPr>
@@ -6859,7 +6859,7 @@
       </p:sp>
       <p:sp>
         <p:nvSpPr>
-          <p:cNvPr id="1979007303" name="min_price"/>
+          <p:cNvPr id="137315719" name="min_price"/>
           <p:cNvSpPr txBox="1"/>
           <p:nvPr/>
         </p:nvSpPr>
@@ -6904,7 +6904,7 @@
       </p:sp>
       <p:sp>
         <p:nvSpPr>
-          <p:cNvPr id="1319544690" name="std_price"/>
+          <p:cNvPr id="2004199795" name="std_price"/>
           <p:cNvSpPr txBox="1"/>
           <p:nvPr/>
         </p:nvSpPr>
@@ -6949,7 +6949,7 @@
       </p:sp>
       <p:sp>
         <p:nvSpPr>
-          <p:cNvPr id="1484647340" name="75p_price"/>
+          <p:cNvPr id="1059496387" name="75p_price"/>
           <p:cNvSpPr txBox="1"/>
           <p:nvPr/>
         </p:nvSpPr>
@@ -6994,7 +6994,7 @@
       </p:sp>
       <p:cxnSp>
         <p:nvCxnSpPr>
-          <p:cNvPr id="1202189354" name=""/>
+          <p:cNvPr id="1178788056" name=""/>
           <p:cNvCxnSpPr/>
           <p:nvPr/>
         </p:nvCxnSpPr>
@@ -7033,7 +7033,7 @@
       </p:cxnSp>
       <p:cxnSp>
         <p:nvCxnSpPr>
-          <p:cNvPr id="1827024410" name=""/>
+          <p:cNvPr id="847120995" name=""/>
           <p:cNvCxnSpPr/>
           <p:nvPr/>
         </p:nvCxnSpPr>
@@ -7072,7 +7072,7 @@
       </p:cxnSp>
       <p:sp>
         <p:nvSpPr>
-          <p:cNvPr id="507416000" name="current_price"/>
+          <p:cNvPr id="1449006489" name="current_price"/>
           <p:cNvSpPr txBox="1"/>
           <p:nvPr/>
         </p:nvSpPr>
@@ -7117,7 +7117,7 @@
       </p:sp>
       <p:cxnSp>
         <p:nvCxnSpPr>
-          <p:cNvPr id="506952152" name=""/>
+          <p:cNvPr id="2097460541" name=""/>
           <p:cNvCxnSpPr/>
           <p:nvPr/>
         </p:nvCxnSpPr>
@@ -7156,7 +7156,7 @@
       </p:cxnSp>
       <p:sp>
         <p:nvSpPr>
-          <p:cNvPr id="1925175518" name=""/>
+          <p:cNvPr id="479386539" name=""/>
           <p:cNvSpPr txBox="1"/>
           <p:nvPr/>
         </p:nvSpPr>
@@ -7201,7 +7201,7 @@
       </p:sp>
       <p:sp>
         <p:nvSpPr>
-          <p:cNvPr id="537574251" name=""/>
+          <p:cNvPr id="1256153236" name=""/>
           <p:cNvSpPr txBox="1"/>
           <p:nvPr/>
         </p:nvSpPr>
@@ -7246,7 +7246,7 @@
       </p:sp>
       <p:sp>
         <p:nvSpPr>
-          <p:cNvPr id="1008654025" name=""/>
+          <p:cNvPr id="1716858685" name=""/>
           <p:cNvSpPr txBox="1"/>
           <p:nvPr/>
         </p:nvSpPr>
@@ -7291,7 +7291,7 @@
       </p:sp>
       <p:sp>
         <p:nvSpPr>
-          <p:cNvPr id="1814418696" name=""/>
+          <p:cNvPr id="1481784956" name=""/>
           <p:cNvSpPr txBox="1"/>
           <p:nvPr/>
         </p:nvSpPr>
@@ -7336,7 +7336,7 @@
       </p:sp>
       <p:sp>
         <p:nvSpPr>
-          <p:cNvPr id="2023233282" name=""/>
+          <p:cNvPr id="1937444029" name=""/>
           <p:cNvSpPr txBox="1"/>
           <p:nvPr/>
         </p:nvSpPr>
@@ -7381,7 +7381,7 @@
       </p:sp>
       <p:sp>
         <p:nvSpPr>
-          <p:cNvPr id="297195731" name=""/>
+          <p:cNvPr id="177430138" name=""/>
           <p:cNvSpPr txBox="1"/>
           <p:nvPr/>
         </p:nvSpPr>
@@ -7426,7 +7426,7 @@
       </p:sp>
       <p:sp>
         <p:nvSpPr>
-          <p:cNvPr id="2005557560" name=""/>
+          <p:cNvPr id="1665710341" name=""/>
           <p:cNvSpPr txBox="1"/>
           <p:nvPr/>
         </p:nvSpPr>
@@ -7471,7 +7471,7 @@
       </p:sp>
       <p:cxnSp>
         <p:nvCxnSpPr>
-          <p:cNvPr id="162344323" name=""/>
+          <p:cNvPr id="1287250037" name=""/>
           <p:cNvCxnSpPr/>
           <p:nvPr/>
         </p:nvCxnSpPr>
@@ -7510,7 +7510,7 @@
       </p:cxnSp>
       <p:cxnSp>
         <p:nvCxnSpPr>
-          <p:cNvPr id="275638788" name=""/>
+          <p:cNvPr id="82423079" name=""/>
           <p:cNvCxnSpPr/>
           <p:nvPr/>
         </p:nvCxnSpPr>
@@ -7549,7 +7549,7 @@
       </p:cxnSp>
       <p:cxnSp>
         <p:nvCxnSpPr>
-          <p:cNvPr id="493671013" name=""/>
+          <p:cNvPr id="1527623632" name=""/>
           <p:cNvCxnSpPr/>
           <p:nvPr/>
         </p:nvCxnSpPr>
@@ -7588,7 +7588,7 @@
       </p:cxnSp>
       <p:cxnSp>
         <p:nvCxnSpPr>
-          <p:cNvPr id="1012152026" name=""/>
+          <p:cNvPr id="1379605977" name=""/>
           <p:cNvCxnSpPr/>
           <p:nvPr/>
         </p:nvCxnSpPr>
@@ -7627,7 +7627,7 @@
       </p:cxnSp>
       <p:cxnSp>
         <p:nvCxnSpPr>
-          <p:cNvPr id="1586660401" name=""/>
+          <p:cNvPr id="1441068192" name=""/>
           <p:cNvCxnSpPr/>
           <p:nvPr/>
         </p:nvCxnSpPr>
@@ -7666,7 +7666,7 @@
       </p:cxnSp>
       <p:cxnSp>
         <p:nvCxnSpPr>
-          <p:cNvPr id="1988497735" name=""/>
+          <p:cNvPr id="1740680581" name=""/>
           <p:cNvCxnSpPr/>
           <p:nvPr/>
         </p:nvCxnSpPr>
@@ -7705,7 +7705,7 @@
       </p:cxnSp>
       <p:sp>
         <p:nvSpPr>
-          <p:cNvPr id="1481250569" name=""/>
+          <p:cNvPr id="1493070000" name=""/>
           <p:cNvSpPr txBox="1"/>
           <p:nvPr/>
         </p:nvSpPr>
@@ -7750,7 +7750,7 @@
       </p:sp>
       <p:cxnSp>
         <p:nvCxnSpPr>
-          <p:cNvPr id="1837176302" name=""/>
+          <p:cNvPr id="1502187079" name=""/>
           <p:cNvCxnSpPr/>
           <p:nvPr/>
         </p:nvCxnSpPr>
@@ -7789,7 +7789,7 @@
       </p:cxnSp>
       <p:cxnSp>
         <p:nvCxnSpPr>
-          <p:cNvPr id="1460547860" name=""/>
+          <p:cNvPr id="425828692" name=""/>
           <p:cNvCxnSpPr/>
           <p:nvPr/>
         </p:nvCxnSpPr>
@@ -7828,7 +7828,7 @@
       </p:cxnSp>
       <p:sp>
         <p:nvSpPr>
-          <p:cNvPr id="1198518617" name="analyst_expectation"/>
+          <p:cNvPr id="1601779174" name="analyst_expectation"/>
           <p:cNvSpPr txBox="1"/>
           <p:nvPr/>
         </p:nvSpPr>
@@ -7873,7 +7873,7 @@
       </p:sp>
       <p:sp>
         <p:nvSpPr>
-          <p:cNvPr id="34756700" name=""/>
+          <p:cNvPr id="488895543" name=""/>
           <p:cNvSpPr txBox="1"/>
           <p:nvPr/>
         </p:nvSpPr>
@@ -7918,7 +7918,7 @@
       </p:sp>
       <p:pic>
         <p:nvPicPr>
-          <p:cNvPr id="1794087279" name="price_chart" descr="image.png"/>
+          <p:cNvPr id="1234850841" name="price_chart" descr="image.png"/>
           <p:cNvPicPr>
             <a:picLocks noChangeAspect="1"/>
           </p:cNvPicPr>
@@ -7940,7 +7940,7 @@
       </p:pic>
       <p:sp>
         <p:nvSpPr>
-          <p:cNvPr id="1548462080" name=""/>
+          <p:cNvPr id="1215015060" name=""/>
           <p:cNvSpPr/>
           <p:nvPr/>
         </p:nvSpPr>
@@ -8003,13 +8003,13 @@
       </p:sp>
       <p:sp>
         <p:nvSpPr>
-          <p:cNvPr id="495644874" name=""/>
+          <p:cNvPr id="1722838419" name=""/>
           <p:cNvSpPr/>
           <p:nvPr/>
         </p:nvSpPr>
         <p:spPr bwMode="auto">
           <a:xfrm rot="0" flipH="0" flipV="0">
-            <a:off x="6299199" y="6273798"/>
+            <a:off x="6299198" y="6273798"/>
             <a:ext cx="406399" cy="101599"/>
           </a:xfrm>
           <a:prstGeom prst="rect">
@@ -8066,7 +8066,7 @@
       </p:sp>
       <p:sp>
         <p:nvSpPr>
-          <p:cNvPr id="1896611820" name=""/>
+          <p:cNvPr id="1038898655" name=""/>
           <p:cNvSpPr/>
           <p:nvPr/>
         </p:nvSpPr>
@@ -8129,7 +8129,7 @@
       </p:sp>
       <p:cxnSp>
         <p:nvCxnSpPr>
-          <p:cNvPr id="978937899" name=""/>
+          <p:cNvPr id="1482358579" name=""/>
           <p:cNvCxnSpPr/>
           <p:nvPr/>
         </p:nvCxnSpPr>
@@ -8168,7 +8168,7 @@
       </p:cxnSp>
       <p:cxnSp>
         <p:nvCxnSpPr>
-          <p:cNvPr id="556302362" name=""/>
+          <p:cNvPr id="667319399" name=""/>
           <p:cNvCxnSpPr/>
           <p:nvPr/>
         </p:nvCxnSpPr>
@@ -8240,7 +8240,7 @@
       </p:grpSpPr>
       <p:sp>
         <p:nvSpPr>
-          <p:cNvPr id="1503324998" name=""/>
+          <p:cNvPr id="930322600" name=""/>
           <p:cNvSpPr/>
           <p:nvPr/>
         </p:nvSpPr>
@@ -8306,7 +8306,7 @@
       </p:sp>
       <p:sp>
         <p:nvSpPr>
-          <p:cNvPr id="958106403" name="Title 1"/>
+          <p:cNvPr id="276116255" name="Title 1"/>
           <p:cNvSpPr>
             <a:spLocks noGrp="1"/>
           </p:cNvSpPr>
@@ -8362,7 +8362,7 @@
       </p:sp>
       <p:sp>
         <p:nvSpPr>
-          <p:cNvPr id="1370881633" name="Footer Placeholder 4"/>
+          <p:cNvPr id="1278217641" name="Footer Placeholder 4"/>
           <p:cNvSpPr>
             <a:spLocks noGrp="1"/>
           </p:cNvSpPr>
@@ -8406,7 +8406,7 @@
       </p:sp>
       <p:sp>
         <p:nvSpPr>
-          <p:cNvPr id="189065790" name="Slide Number Placeholder 5"/>
+          <p:cNvPr id="484035462" name="Slide Number Placeholder 5"/>
           <p:cNvSpPr>
             <a:spLocks noGrp="1"/>
           </p:cNvSpPr>
@@ -8436,7 +8436,7 @@
       </p:sp>
       <p:cxnSp>
         <p:nvCxnSpPr>
-          <p:cNvPr id="1843587741" name=""/>
+          <p:cNvPr id="1587402278" name=""/>
           <p:cNvCxnSpPr/>
           <p:nvPr/>
         </p:nvCxnSpPr>
@@ -8475,7 +8475,7 @@
       </p:cxnSp>
       <p:cxnSp>
         <p:nvCxnSpPr>
-          <p:cNvPr id="1684830872" name=""/>
+          <p:cNvPr id="1146844033" name=""/>
           <p:cNvCxnSpPr/>
           <p:nvPr/>
         </p:nvCxnSpPr>
@@ -8514,7 +8514,7 @@
       </p:cxnSp>
       <p:sp>
         <p:nvSpPr>
-          <p:cNvPr id="1733411061" name=""/>
+          <p:cNvPr id="1030490438" name=""/>
           <p:cNvSpPr txBox="1"/>
           <p:nvPr/>
         </p:nvSpPr>
@@ -8559,7 +8559,7 @@
       </p:sp>
       <p:sp>
         <p:nvSpPr>
-          <p:cNvPr id="90050415" name=""/>
+          <p:cNvPr id="790591218" name=""/>
           <p:cNvSpPr txBox="1"/>
           <p:nvPr/>
         </p:nvSpPr>
@@ -8604,7 +8604,7 @@
       </p:sp>
       <p:sp>
         <p:nvSpPr>
-          <p:cNvPr id="866007323" name=""/>
+          <p:cNvPr id="1361278580" name=""/>
           <p:cNvSpPr/>
           <p:nvPr/>
         </p:nvSpPr>
@@ -8672,7 +8672,7 @@
       </p:sp>
       <p:sp>
         <p:nvSpPr>
-          <p:cNvPr id="1330825191" name="year_3"/>
+          <p:cNvPr id="1617131712" name="year_3"/>
           <p:cNvSpPr txBox="1"/>
           <p:nvPr/>
         </p:nvSpPr>
@@ -8717,7 +8717,7 @@
       </p:sp>
       <p:sp>
         <p:nvSpPr>
-          <p:cNvPr id="393014178" name="year_2"/>
+          <p:cNvPr id="1575804748" name="year_2"/>
           <p:cNvSpPr txBox="1"/>
           <p:nvPr/>
         </p:nvSpPr>
@@ -8762,7 +8762,7 @@
       </p:sp>
       <p:sp>
         <p:nvSpPr>
-          <p:cNvPr id="1427060766" name="year_1"/>
+          <p:cNvPr id="1539003775" name="year_1"/>
           <p:cNvSpPr txBox="1"/>
           <p:nvPr/>
         </p:nvSpPr>
@@ -8807,7 +8807,7 @@
       </p:sp>
       <p:sp>
         <p:nvSpPr>
-          <p:cNvPr id="1899654307" name="name"/>
+          <p:cNvPr id="318891991" name="name"/>
           <p:cNvSpPr txBox="1"/>
           <p:nvPr/>
         </p:nvSpPr>
@@ -8852,7 +8852,7 @@
       </p:sp>
       <p:sp>
         <p:nvSpPr>
-          <p:cNvPr id="1884215692" name="name"/>
+          <p:cNvPr id="831194222" name="name"/>
           <p:cNvSpPr txBox="1"/>
           <p:nvPr/>
         </p:nvSpPr>
@@ -8895,3048 +8895,2868 @@
           </a:p>
         </p:txBody>
       </p:sp>
+      <p:sp>
+        <p:nvSpPr>
+          <p:cNvPr id="754968806" name=""/>
+          <p:cNvSpPr/>
+          <p:nvPr/>
+        </p:nvSpPr>
+        <p:spPr bwMode="auto">
+          <a:xfrm rot="0" flipH="0" flipV="0">
+            <a:off x="7721597" y="1803398"/>
+            <a:ext cx="406400" cy="1219198"/>
+          </a:xfrm>
+          <a:prstGeom prst="rect">
+            <a:avLst/>
+          </a:prstGeom>
+          <a:gradFill>
+            <a:gsLst>
+              <a:gs pos="0">
+                <a:schemeClr val="tx1"/>
+              </a:gs>
+              <a:gs pos="100000">
+                <a:schemeClr val="tx1">
+                  <a:lumMod val="65000"/>
+                  <a:lumOff val="35000"/>
+                </a:schemeClr>
+              </a:gs>
+            </a:gsLst>
+            <a:lin ang="2700000" scaled="1"/>
+          </a:gradFill>
+          <a:ln w="12700" cap="flat" cmpd="sng" algn="ctr">
+            <a:solidFill>
+              <a:schemeClr val="tx1"/>
+            </a:solidFill>
+            <a:prstDash val="solid"/>
+            <a:miter lim="800000"/>
+          </a:ln>
+        </p:spPr>
+        <p:style>
+          <a:lnRef idx="2">
+            <a:schemeClr val="accent1">
+              <a:shade val="50000"/>
+            </a:schemeClr>
+          </a:lnRef>
+          <a:fillRef idx="1">
+            <a:schemeClr val="accent1"/>
+          </a:fillRef>
+          <a:effectRef idx="0">
+            <a:schemeClr val="accent1"/>
+          </a:effectRef>
+          <a:fontRef idx="minor">
+            <a:schemeClr val="lt1"/>
+          </a:fontRef>
+        </p:style>
+        <p:txBody>
+          <a:bodyPr/>
+          <a:p>
+            <a:pPr>
+              <a:defRPr/>
+            </a:pPr>
+            <a:endParaRPr>
+              <a:latin typeface="Liberation Sans"/>
+              <a:cs typeface="Liberation Sans"/>
+            </a:endParaRPr>
+          </a:p>
+        </p:txBody>
+      </p:sp>
+      <p:sp>
+        <p:nvSpPr>
+          <p:cNvPr id="989363525" name="comment_1"/>
+          <p:cNvSpPr/>
+          <p:nvPr/>
+        </p:nvSpPr>
+        <p:spPr bwMode="auto">
+          <a:xfrm rot="0" flipH="0" flipV="0">
+            <a:off x="8127997" y="1803398"/>
+            <a:ext cx="3657595" cy="1219198"/>
+          </a:xfrm>
+          <a:prstGeom prst="rect">
+            <a:avLst/>
+          </a:prstGeom>
+          <a:gradFill>
+            <a:gsLst>
+              <a:gs pos="0">
+                <a:schemeClr val="bg1"/>
+              </a:gs>
+              <a:gs pos="100000">
+                <a:schemeClr val="bg1">
+                  <a:lumMod val="85000"/>
+                </a:schemeClr>
+              </a:gs>
+            </a:gsLst>
+            <a:lin ang="2700000" scaled="1"/>
+          </a:gradFill>
+          <a:ln w="12700" cap="flat" cmpd="sng" algn="ctr">
+            <a:solidFill>
+              <a:schemeClr val="tx1"/>
+            </a:solidFill>
+            <a:prstDash val="solid"/>
+            <a:miter lim="800000"/>
+          </a:ln>
+        </p:spPr>
+        <p:style>
+          <a:lnRef idx="2">
+            <a:schemeClr val="accent1">
+              <a:shade val="50000"/>
+            </a:schemeClr>
+          </a:lnRef>
+          <a:fillRef idx="1">
+            <a:schemeClr val="accent1"/>
+          </a:fillRef>
+          <a:effectRef idx="0">
+            <a:schemeClr val="accent1"/>
+          </a:effectRef>
+          <a:fontRef idx="minor">
+            <a:schemeClr val="lt1"/>
+          </a:fontRef>
+        </p:style>
+        <p:txBody>
+          <a:bodyPr vertOverflow="overflow" horzOverflow="overflow" vert="horz" wrap="square" lIns="91440" tIns="45720" rIns="91440" bIns="45720" numCol="1" spcCol="0" rtlCol="0" fromWordArt="0" anchor="ctr" anchorCtr="0" forceAA="0" upright="0" compatLnSpc="0"/>
+          <a:p>
+            <a:pPr algn="l">
+              <a:defRPr/>
+            </a:pPr>
+            <a:r>
+              <a:rPr lang="it-IT" sz="1600" b="0" i="0" u="none" strike="noStrike" cap="none" spc="0">
+                <a:solidFill>
+                  <a:schemeClr val="tx1"/>
+                </a:solidFill>
+                <a:latin typeface="Liberation Sans"/>
+                <a:ea typeface="Liberation Sans"/>
+                <a:cs typeface="Liberation Sans"/>
+              </a:rPr>
+              <a:t>Lorem ipsum dolor sit amet, consectetur adipiscing elit. Maecenas sed turpis ante.</a:t>
+            </a:r>
+            <a:endParaRPr sz="1600">
+              <a:solidFill>
+                <a:schemeClr val="tx1"/>
+              </a:solidFill>
+              <a:latin typeface="Liberation Sans"/>
+              <a:cs typeface="Liberation Sans"/>
+            </a:endParaRPr>
+          </a:p>
+        </p:txBody>
+      </p:sp>
+      <p:sp>
+        <p:nvSpPr>
+          <p:cNvPr id="1601369363" name=""/>
+          <p:cNvSpPr/>
+          <p:nvPr/>
+        </p:nvSpPr>
+        <p:spPr bwMode="auto">
+          <a:xfrm rot="0" flipH="0" flipV="0">
+            <a:off x="7721597" y="3327399"/>
+            <a:ext cx="406400" cy="1219198"/>
+          </a:xfrm>
+          <a:prstGeom prst="rect">
+            <a:avLst/>
+          </a:prstGeom>
+          <a:gradFill>
+            <a:gsLst>
+              <a:gs pos="0">
+                <a:schemeClr val="tx1"/>
+              </a:gs>
+              <a:gs pos="100000">
+                <a:schemeClr val="tx1">
+                  <a:lumMod val="65000"/>
+                  <a:lumOff val="35000"/>
+                </a:schemeClr>
+              </a:gs>
+            </a:gsLst>
+            <a:lin ang="2700000" scaled="1"/>
+          </a:gradFill>
+          <a:ln w="12700" cap="flat" cmpd="sng" algn="ctr">
+            <a:solidFill>
+              <a:schemeClr val="tx1"/>
+            </a:solidFill>
+            <a:prstDash val="solid"/>
+            <a:miter lim="800000"/>
+          </a:ln>
+        </p:spPr>
+        <p:style>
+          <a:lnRef idx="2">
+            <a:schemeClr val="accent1">
+              <a:shade val="50000"/>
+            </a:schemeClr>
+          </a:lnRef>
+          <a:fillRef idx="1">
+            <a:schemeClr val="accent1"/>
+          </a:fillRef>
+          <a:effectRef idx="0">
+            <a:schemeClr val="accent1"/>
+          </a:effectRef>
+          <a:fontRef idx="minor">
+            <a:schemeClr val="lt1"/>
+          </a:fontRef>
+        </p:style>
+        <p:txBody>
+          <a:bodyPr/>
+          <a:p>
+            <a:pPr>
+              <a:defRPr/>
+            </a:pPr>
+            <a:endParaRPr>
+              <a:latin typeface="Liberation Sans"/>
+              <a:cs typeface="Liberation Sans"/>
+            </a:endParaRPr>
+          </a:p>
+        </p:txBody>
+      </p:sp>
+      <p:sp>
+        <p:nvSpPr>
+          <p:cNvPr id="1133331760" name="comment_2"/>
+          <p:cNvSpPr/>
+          <p:nvPr/>
+        </p:nvSpPr>
+        <p:spPr bwMode="auto">
+          <a:xfrm rot="0" flipH="0" flipV="0">
+            <a:off x="8127997" y="3327399"/>
+            <a:ext cx="3657595" cy="1219198"/>
+          </a:xfrm>
+          <a:prstGeom prst="rect">
+            <a:avLst/>
+          </a:prstGeom>
+          <a:gradFill>
+            <a:gsLst>
+              <a:gs pos="0">
+                <a:schemeClr val="bg1"/>
+              </a:gs>
+              <a:gs pos="100000">
+                <a:schemeClr val="bg1">
+                  <a:lumMod val="85000"/>
+                </a:schemeClr>
+              </a:gs>
+            </a:gsLst>
+            <a:lin ang="2700000" scaled="1"/>
+          </a:gradFill>
+          <a:ln w="12700" cap="flat" cmpd="sng" algn="ctr">
+            <a:solidFill>
+              <a:schemeClr val="tx1"/>
+            </a:solidFill>
+            <a:prstDash val="solid"/>
+            <a:miter lim="800000"/>
+          </a:ln>
+        </p:spPr>
+        <p:style>
+          <a:lnRef idx="2">
+            <a:schemeClr val="accent1">
+              <a:shade val="50000"/>
+            </a:schemeClr>
+          </a:lnRef>
+          <a:fillRef idx="1">
+            <a:schemeClr val="accent1"/>
+          </a:fillRef>
+          <a:effectRef idx="0">
+            <a:schemeClr val="accent1"/>
+          </a:effectRef>
+          <a:fontRef idx="minor">
+            <a:schemeClr val="lt1"/>
+          </a:fontRef>
+        </p:style>
+        <p:txBody>
+          <a:bodyPr vertOverflow="overflow" horzOverflow="overflow" vert="horz" wrap="square" lIns="91440" tIns="45720" rIns="91440" bIns="45720" numCol="1" spcCol="0" rtlCol="0" fromWordArt="0" anchor="ctr" anchorCtr="0" forceAA="0" upright="0" compatLnSpc="0"/>
+          <a:p>
+            <a:pPr algn="l">
+              <a:defRPr/>
+            </a:pPr>
+            <a:r>
+              <a:rPr lang="it-IT" sz="1600" b="0" i="0" u="none" strike="noStrike" cap="none" spc="0">
+                <a:solidFill>
+                  <a:schemeClr val="tx1"/>
+                </a:solidFill>
+                <a:latin typeface="Liberation Sans"/>
+                <a:ea typeface="Liberation Sans"/>
+                <a:cs typeface="Liberation Sans"/>
+              </a:rPr>
+              <a:t>Lorem ipsum dolor sit amet, consectetur adipiscing elit. Maecenas sed turpis ante.</a:t>
+            </a:r>
+            <a:endParaRPr sz="1600">
+              <a:solidFill>
+                <a:schemeClr val="tx1"/>
+              </a:solidFill>
+              <a:latin typeface="Liberation Sans"/>
+              <a:cs typeface="Liberation Sans"/>
+            </a:endParaRPr>
+          </a:p>
+        </p:txBody>
+      </p:sp>
+      <p:sp>
+        <p:nvSpPr>
+          <p:cNvPr id="65443009" name=""/>
+          <p:cNvSpPr/>
+          <p:nvPr/>
+        </p:nvSpPr>
+        <p:spPr bwMode="auto">
+          <a:xfrm rot="0" flipH="0" flipV="0">
+            <a:off x="7721597" y="4851398"/>
+            <a:ext cx="406400" cy="1219198"/>
+          </a:xfrm>
+          <a:prstGeom prst="rect">
+            <a:avLst/>
+          </a:prstGeom>
+          <a:gradFill>
+            <a:gsLst>
+              <a:gs pos="0">
+                <a:schemeClr val="tx1"/>
+              </a:gs>
+              <a:gs pos="100000">
+                <a:schemeClr val="tx1">
+                  <a:lumMod val="65000"/>
+                  <a:lumOff val="35000"/>
+                </a:schemeClr>
+              </a:gs>
+            </a:gsLst>
+            <a:lin ang="2700000" scaled="1"/>
+          </a:gradFill>
+          <a:ln w="12700" cap="flat" cmpd="sng" algn="ctr">
+            <a:solidFill>
+              <a:schemeClr val="tx1"/>
+            </a:solidFill>
+            <a:prstDash val="solid"/>
+            <a:miter lim="800000"/>
+          </a:ln>
+        </p:spPr>
+        <p:style>
+          <a:lnRef idx="2">
+            <a:schemeClr val="accent1">
+              <a:shade val="50000"/>
+            </a:schemeClr>
+          </a:lnRef>
+          <a:fillRef idx="1">
+            <a:schemeClr val="accent1"/>
+          </a:fillRef>
+          <a:effectRef idx="0">
+            <a:schemeClr val="accent1"/>
+          </a:effectRef>
+          <a:fontRef idx="minor">
+            <a:schemeClr val="lt1"/>
+          </a:fontRef>
+        </p:style>
+        <p:txBody>
+          <a:bodyPr/>
+          <a:p>
+            <a:pPr>
+              <a:defRPr/>
+            </a:pPr>
+            <a:endParaRPr>
+              <a:latin typeface="Liberation Sans"/>
+              <a:cs typeface="Liberation Sans"/>
+            </a:endParaRPr>
+          </a:p>
+        </p:txBody>
+      </p:sp>
+      <p:sp>
+        <p:nvSpPr>
+          <p:cNvPr id="897359343" name="comment_3"/>
+          <p:cNvSpPr/>
+          <p:nvPr/>
+        </p:nvSpPr>
+        <p:spPr bwMode="auto">
+          <a:xfrm rot="0" flipH="0" flipV="0">
+            <a:off x="8127997" y="4851398"/>
+            <a:ext cx="3657595" cy="1219198"/>
+          </a:xfrm>
+          <a:prstGeom prst="rect">
+            <a:avLst/>
+          </a:prstGeom>
+          <a:gradFill>
+            <a:gsLst>
+              <a:gs pos="0">
+                <a:schemeClr val="bg1"/>
+              </a:gs>
+              <a:gs pos="100000">
+                <a:schemeClr val="bg1">
+                  <a:lumMod val="85000"/>
+                </a:schemeClr>
+              </a:gs>
+            </a:gsLst>
+            <a:lin ang="2700000" scaled="1"/>
+          </a:gradFill>
+          <a:ln w="12700" cap="flat" cmpd="sng" algn="ctr">
+            <a:solidFill>
+              <a:schemeClr val="tx1"/>
+            </a:solidFill>
+            <a:prstDash val="solid"/>
+            <a:miter lim="800000"/>
+          </a:ln>
+        </p:spPr>
+        <p:style>
+          <a:lnRef idx="2">
+            <a:schemeClr val="accent1">
+              <a:shade val="50000"/>
+            </a:schemeClr>
+          </a:lnRef>
+          <a:fillRef idx="1">
+            <a:schemeClr val="accent1"/>
+          </a:fillRef>
+          <a:effectRef idx="0">
+            <a:schemeClr val="accent1"/>
+          </a:effectRef>
+          <a:fontRef idx="minor">
+            <a:schemeClr val="lt1"/>
+          </a:fontRef>
+        </p:style>
+        <p:txBody>
+          <a:bodyPr vertOverflow="overflow" horzOverflow="overflow" vert="horz" wrap="square" lIns="91440" tIns="45720" rIns="91440" bIns="45720" numCol="1" spcCol="0" rtlCol="0" fromWordArt="0" anchor="ctr" anchorCtr="0" forceAA="0" upright="0" compatLnSpc="0"/>
+          <a:p>
+            <a:pPr algn="l">
+              <a:defRPr/>
+            </a:pPr>
+            <a:r>
+              <a:rPr lang="it-IT" sz="1600" b="0" i="0" u="none" strike="noStrike" cap="none" spc="0">
+                <a:solidFill>
+                  <a:schemeClr val="tx1"/>
+                </a:solidFill>
+                <a:latin typeface="Liberation Sans"/>
+                <a:ea typeface="Liberation Sans"/>
+                <a:cs typeface="Liberation Sans"/>
+              </a:rPr>
+              <a:t>Lorem ipsum dolor sit amet, consectetur adipiscing elit. Maecenas sed turpis ante.</a:t>
+            </a:r>
+            <a:endParaRPr sz="1600">
+              <a:solidFill>
+                <a:schemeClr val="tx1"/>
+              </a:solidFill>
+              <a:latin typeface="Liberation Sans"/>
+              <a:cs typeface="Liberation Sans"/>
+            </a:endParaRPr>
+          </a:p>
+        </p:txBody>
+      </p:sp>
+      <p:sp>
+        <p:nvSpPr>
+          <p:cNvPr id="1832480215" name="revenue_3"/>
+          <p:cNvSpPr txBox="1"/>
+          <p:nvPr/>
+        </p:nvSpPr>
+        <p:spPr bwMode="auto">
+          <a:xfrm rot="0" flipH="0" flipV="0">
+            <a:off x="2438398" y="2209798"/>
+            <a:ext cx="812799" cy="406397"/>
+          </a:xfrm>
+          <a:prstGeom prst="rect">
+            <a:avLst/>
+          </a:prstGeom>
+          <a:noFill/>
+        </p:spPr>
+        <p:txBody>
+          <a:bodyPr vertOverflow="overflow" horzOverflow="overflow" vert="horz" wrap="square" lIns="91440" tIns="45720" rIns="91440" bIns="45720" numCol="1" spcCol="0" rtlCol="0" fromWordArt="0" anchor="ctr" anchorCtr="0" forceAA="0" upright="0" compatLnSpc="0">
+            <a:noAutofit/>
+          </a:bodyPr>
+          <a:p>
+            <a:pPr algn="ctr">
+              <a:defRPr/>
+            </a:pPr>
+            <a:r>
+              <a:rPr lang="it-IT" sz="1400" b="0">
+                <a:solidFill>
+                  <a:schemeClr val="tx1"/>
+                </a:solidFill>
+                <a:latin typeface="Liberation Sans"/>
+                <a:ea typeface="Liberation Sans"/>
+                <a:cs typeface="Liberation Sans"/>
+              </a:rPr>
+              <a:t>XX.XB</a:t>
+            </a:r>
+            <a:endParaRPr sz="1400" b="0">
+              <a:solidFill>
+                <a:schemeClr val="tx1"/>
+              </a:solidFill>
+              <a:latin typeface="Liberation Sans"/>
+              <a:cs typeface="Liberation Sans"/>
+            </a:endParaRPr>
+          </a:p>
+        </p:txBody>
+      </p:sp>
+      <p:sp>
+        <p:nvSpPr>
+          <p:cNvPr id="1496392474" name=""/>
+          <p:cNvSpPr txBox="1"/>
+          <p:nvPr/>
+        </p:nvSpPr>
+        <p:spPr bwMode="auto">
+          <a:xfrm rot="0" flipH="0" flipV="0">
+            <a:off x="406400" y="2209801"/>
+            <a:ext cx="1828797" cy="406396"/>
+          </a:xfrm>
+          <a:prstGeom prst="rect">
+            <a:avLst/>
+          </a:prstGeom>
+          <a:noFill/>
+        </p:spPr>
+        <p:txBody>
+          <a:bodyPr vertOverflow="overflow" horzOverflow="overflow" vert="horz" wrap="square" lIns="91440" tIns="45720" rIns="91440" bIns="45720" numCol="1" spcCol="0" rtlCol="0" fromWordArt="0" anchor="ctr" anchorCtr="0" forceAA="0" upright="0" compatLnSpc="0">
+            <a:noAutofit/>
+          </a:bodyPr>
+          <a:p>
+            <a:pPr algn="ctr">
+              <a:defRPr/>
+            </a:pPr>
+            <a:r>
+              <a:rPr lang="it-IT" sz="1400" b="1">
+                <a:solidFill>
+                  <a:schemeClr val="bg1"/>
+                </a:solidFill>
+                <a:latin typeface="Liberation Sans"/>
+                <a:ea typeface="Liberation Sans"/>
+                <a:cs typeface="Liberation Sans"/>
+              </a:rPr>
+              <a:t>Revenue</a:t>
+            </a:r>
+            <a:endParaRPr sz="1400" b="1">
+              <a:solidFill>
+                <a:schemeClr val="bg1"/>
+              </a:solidFill>
+              <a:latin typeface="Liberation Sans"/>
+              <a:cs typeface="Liberation Sans"/>
+            </a:endParaRPr>
+          </a:p>
+        </p:txBody>
+      </p:sp>
+      <p:sp>
+        <p:nvSpPr>
+          <p:cNvPr id="339690199" name="revenue_2"/>
+          <p:cNvSpPr txBox="1"/>
+          <p:nvPr/>
+        </p:nvSpPr>
+        <p:spPr bwMode="auto">
+          <a:xfrm rot="0" flipH="0" flipV="0">
+            <a:off x="3454398" y="2209798"/>
+            <a:ext cx="812799" cy="406397"/>
+          </a:xfrm>
+          <a:prstGeom prst="rect">
+            <a:avLst/>
+          </a:prstGeom>
+          <a:noFill/>
+        </p:spPr>
+        <p:txBody>
+          <a:bodyPr vertOverflow="overflow" horzOverflow="overflow" vert="horz" wrap="square" lIns="91440" tIns="45720" rIns="91440" bIns="45720" numCol="1" spcCol="0" rtlCol="0" fromWordArt="0" anchor="ctr" anchorCtr="0" forceAA="0" upright="0" compatLnSpc="0">
+            <a:noAutofit/>
+          </a:bodyPr>
+          <a:p>
+            <a:pPr algn="ctr">
+              <a:defRPr/>
+            </a:pPr>
+            <a:r>
+              <a:rPr lang="it-IT" sz="1400" b="0">
+                <a:solidFill>
+                  <a:schemeClr val="tx1"/>
+                </a:solidFill>
+                <a:latin typeface="Liberation Sans"/>
+                <a:ea typeface="Liberation Sans"/>
+                <a:cs typeface="Liberation Sans"/>
+              </a:rPr>
+              <a:t>XX.XB</a:t>
+            </a:r>
+            <a:endParaRPr sz="1400" b="0">
+              <a:solidFill>
+                <a:schemeClr val="tx1"/>
+              </a:solidFill>
+              <a:latin typeface="Liberation Sans"/>
+              <a:cs typeface="Liberation Sans"/>
+            </a:endParaRPr>
+          </a:p>
+        </p:txBody>
+      </p:sp>
+      <p:sp>
+        <p:nvSpPr>
+          <p:cNvPr id="1838244257" name="revenue_1"/>
+          <p:cNvSpPr txBox="1"/>
+          <p:nvPr/>
+        </p:nvSpPr>
+        <p:spPr bwMode="auto">
+          <a:xfrm rot="0" flipH="0" flipV="0">
+            <a:off x="4470397" y="2209798"/>
+            <a:ext cx="812799" cy="406397"/>
+          </a:xfrm>
+          <a:prstGeom prst="rect">
+            <a:avLst/>
+          </a:prstGeom>
+          <a:noFill/>
+        </p:spPr>
+        <p:txBody>
+          <a:bodyPr vertOverflow="overflow" horzOverflow="overflow" vert="horz" wrap="square" lIns="91440" tIns="45720" rIns="91440" bIns="45720" numCol="1" spcCol="0" rtlCol="0" fromWordArt="0" anchor="ctr" anchorCtr="0" forceAA="0" upright="0" compatLnSpc="0">
+            <a:noAutofit/>
+          </a:bodyPr>
+          <a:p>
+            <a:pPr algn="ctr">
+              <a:defRPr/>
+            </a:pPr>
+            <a:r>
+              <a:rPr lang="it-IT" sz="1400" b="0">
+                <a:solidFill>
+                  <a:schemeClr val="tx1"/>
+                </a:solidFill>
+                <a:latin typeface="Liberation Sans"/>
+                <a:ea typeface="Liberation Sans"/>
+                <a:cs typeface="Liberation Sans"/>
+              </a:rPr>
+              <a:t>XX.XB</a:t>
+            </a:r>
+            <a:endParaRPr sz="1400" b="0">
+              <a:solidFill>
+                <a:schemeClr val="tx1"/>
+              </a:solidFill>
+              <a:latin typeface="Liberation Sans"/>
+              <a:cs typeface="Liberation Sans"/>
+            </a:endParaRPr>
+          </a:p>
+        </p:txBody>
+      </p:sp>
+      <p:sp>
+        <p:nvSpPr>
+          <p:cNvPr id="525178788" name="revenue_m"/>
+          <p:cNvSpPr txBox="1"/>
+          <p:nvPr/>
+        </p:nvSpPr>
+        <p:spPr bwMode="auto">
+          <a:xfrm rot="0" flipH="0" flipV="0">
+            <a:off x="5689598" y="2209798"/>
+            <a:ext cx="812799" cy="406396"/>
+          </a:xfrm>
+          <a:prstGeom prst="rect">
+            <a:avLst/>
+          </a:prstGeom>
+          <a:noFill/>
+        </p:spPr>
+        <p:txBody>
+          <a:bodyPr vertOverflow="overflow" horzOverflow="overflow" vert="horz" wrap="square" lIns="91440" tIns="45720" rIns="91440" bIns="45720" numCol="1" spcCol="0" rtlCol="0" fromWordArt="0" anchor="ctr" anchorCtr="0" forceAA="0" upright="0" compatLnSpc="0">
+            <a:noAutofit/>
+          </a:bodyPr>
+          <a:p>
+            <a:pPr algn="ctr">
+              <a:defRPr/>
+            </a:pPr>
+            <a:r>
+              <a:rPr lang="it-IT" sz="1400" b="0">
+                <a:solidFill>
+                  <a:schemeClr val="tx1"/>
+                </a:solidFill>
+                <a:latin typeface="Liberation Sans"/>
+                <a:ea typeface="Liberation Sans"/>
+                <a:cs typeface="Liberation Sans"/>
+              </a:rPr>
+              <a:t>X.X%</a:t>
+            </a:r>
+            <a:endParaRPr sz="1400" b="0">
+              <a:solidFill>
+                <a:schemeClr val="tx1"/>
+              </a:solidFill>
+              <a:latin typeface="Liberation Sans"/>
+              <a:cs typeface="Liberation Sans"/>
+            </a:endParaRPr>
+          </a:p>
+        </p:txBody>
+      </p:sp>
+      <p:sp>
+        <p:nvSpPr>
+          <p:cNvPr id="1255752566" name="name"/>
+          <p:cNvSpPr txBox="1"/>
+          <p:nvPr/>
+        </p:nvSpPr>
+        <p:spPr bwMode="auto">
+          <a:xfrm rot="0" flipH="0" flipV="0">
+            <a:off x="6502397" y="2209798"/>
+            <a:ext cx="1015999" cy="406396"/>
+          </a:xfrm>
+          <a:prstGeom prst="rect">
+            <a:avLst/>
+          </a:prstGeom>
+          <a:noFill/>
+        </p:spPr>
+        <p:txBody>
+          <a:bodyPr vertOverflow="overflow" horzOverflow="overflow" vert="horz" wrap="square" lIns="91440" tIns="45720" rIns="91440" bIns="45720" numCol="1" spcCol="0" rtlCol="0" fromWordArt="0" anchor="ctr" anchorCtr="0" forceAA="0" upright="0" compatLnSpc="0">
+            <a:noAutofit/>
+          </a:bodyPr>
+          <a:p>
+            <a:pPr algn="l">
+              <a:defRPr/>
+            </a:pPr>
+            <a:r>
+              <a:rPr lang="it-IT" sz="1200" b="0">
+                <a:solidFill>
+                  <a:schemeClr val="tx1"/>
+                </a:solidFill>
+                <a:latin typeface="Liberation Sans"/>
+                <a:ea typeface="Liberation Sans"/>
+                <a:cs typeface="Liberation Sans"/>
+              </a:rPr>
+              <a:t>growth</a:t>
+            </a:r>
+            <a:endParaRPr sz="1200" b="0">
+              <a:solidFill>
+                <a:schemeClr val="tx1"/>
+              </a:solidFill>
+              <a:latin typeface="Liberation Sans"/>
+              <a:cs typeface="Liberation Sans"/>
+            </a:endParaRPr>
+          </a:p>
+        </p:txBody>
+      </p:sp>
+      <p:sp>
+        <p:nvSpPr>
+          <p:cNvPr id="2108637618" name="gross_profit_3"/>
+          <p:cNvSpPr txBox="1"/>
+          <p:nvPr/>
+        </p:nvSpPr>
+        <p:spPr bwMode="auto">
+          <a:xfrm rot="0" flipH="0" flipV="0">
+            <a:off x="2438395" y="2641626"/>
+            <a:ext cx="812799" cy="406397"/>
+          </a:xfrm>
+          <a:prstGeom prst="rect">
+            <a:avLst/>
+          </a:prstGeom>
+          <a:noFill/>
+        </p:spPr>
+        <p:txBody>
+          <a:bodyPr vertOverflow="overflow" horzOverflow="overflow" vert="horz" wrap="square" lIns="91440" tIns="45720" rIns="91440" bIns="45720" numCol="1" spcCol="0" rtlCol="0" fromWordArt="0" anchor="ctr" anchorCtr="0" forceAA="0" upright="0" compatLnSpc="0">
+            <a:noAutofit/>
+          </a:bodyPr>
+          <a:p>
+            <a:pPr algn="ctr">
+              <a:defRPr/>
+            </a:pPr>
+            <a:r>
+              <a:rPr lang="it-IT" sz="1400" b="0" i="0" u="none" strike="noStrike" cap="none" spc="0">
+                <a:solidFill>
+                  <a:schemeClr val="tx1"/>
+                </a:solidFill>
+                <a:latin typeface="Liberation Sans"/>
+                <a:ea typeface="Liberation Sans"/>
+                <a:cs typeface="Liberation Sans"/>
+              </a:rPr>
+              <a:t>XX.XB</a:t>
+            </a:r>
+            <a:endParaRPr>
+              <a:solidFill>
+                <a:schemeClr val="tx1"/>
+              </a:solidFill>
+              <a:latin typeface="Liberation Sans"/>
+              <a:cs typeface="Liberation Sans"/>
+            </a:endParaRPr>
+          </a:p>
+        </p:txBody>
+      </p:sp>
+      <p:sp>
+        <p:nvSpPr>
+          <p:cNvPr id="1348452646" name=""/>
+          <p:cNvSpPr txBox="1"/>
+          <p:nvPr/>
+        </p:nvSpPr>
+        <p:spPr bwMode="auto">
+          <a:xfrm rot="0" flipH="0" flipV="0">
+            <a:off x="406400" y="2641626"/>
+            <a:ext cx="1828797" cy="406396"/>
+          </a:xfrm>
+          <a:prstGeom prst="rect">
+            <a:avLst/>
+          </a:prstGeom>
+          <a:noFill/>
+        </p:spPr>
+        <p:txBody>
+          <a:bodyPr vertOverflow="overflow" horzOverflow="overflow" vert="horz" wrap="square" lIns="91440" tIns="45720" rIns="91440" bIns="45720" numCol="1" spcCol="0" rtlCol="0" fromWordArt="0" anchor="ctr" anchorCtr="0" forceAA="0" upright="0" compatLnSpc="0">
+            <a:noAutofit/>
+          </a:bodyPr>
+          <a:p>
+            <a:pPr algn="ctr">
+              <a:defRPr/>
+            </a:pPr>
+            <a:r>
+              <a:rPr lang="it-IT" sz="1400" b="1">
+                <a:solidFill>
+                  <a:schemeClr val="bg1"/>
+                </a:solidFill>
+                <a:latin typeface="Liberation Sans"/>
+                <a:ea typeface="Liberation Sans"/>
+                <a:cs typeface="Liberation Sans"/>
+              </a:rPr>
+              <a:t>Gross profit</a:t>
+            </a:r>
+            <a:endParaRPr sz="1400" b="1">
+              <a:solidFill>
+                <a:schemeClr val="bg1"/>
+              </a:solidFill>
+              <a:latin typeface="Liberation Sans"/>
+              <a:cs typeface="Liberation Sans"/>
+            </a:endParaRPr>
+          </a:p>
+        </p:txBody>
+      </p:sp>
+      <p:sp>
+        <p:nvSpPr>
+          <p:cNvPr id="1170215058" name="gross_profit_2"/>
+          <p:cNvSpPr txBox="1"/>
+          <p:nvPr/>
+        </p:nvSpPr>
+        <p:spPr bwMode="auto">
+          <a:xfrm rot="0" flipH="0" flipV="0">
+            <a:off x="3454398" y="2641626"/>
+            <a:ext cx="812799" cy="406397"/>
+          </a:xfrm>
+          <a:prstGeom prst="rect">
+            <a:avLst/>
+          </a:prstGeom>
+          <a:noFill/>
+        </p:spPr>
+        <p:txBody>
+          <a:bodyPr vertOverflow="overflow" horzOverflow="overflow" vert="horz" wrap="square" lIns="91440" tIns="45720" rIns="91440" bIns="45720" numCol="1" spcCol="0" rtlCol="0" fromWordArt="0" anchor="ctr" anchorCtr="0" forceAA="0" upright="0" compatLnSpc="0">
+            <a:noAutofit/>
+          </a:bodyPr>
+          <a:p>
+            <a:pPr algn="ctr">
+              <a:defRPr/>
+            </a:pPr>
+            <a:r>
+              <a:rPr lang="it-IT" sz="1400" b="0" i="0" u="none" strike="noStrike" cap="none" spc="0">
+                <a:solidFill>
+                  <a:schemeClr val="tx1"/>
+                </a:solidFill>
+                <a:latin typeface="Liberation Sans"/>
+                <a:ea typeface="Liberation Sans"/>
+                <a:cs typeface="Liberation Sans"/>
+              </a:rPr>
+              <a:t>XX.XB</a:t>
+            </a:r>
+            <a:endParaRPr>
+              <a:solidFill>
+                <a:schemeClr val="tx1"/>
+              </a:solidFill>
+              <a:latin typeface="Liberation Sans"/>
+              <a:cs typeface="Liberation Sans"/>
+            </a:endParaRPr>
+          </a:p>
+        </p:txBody>
+      </p:sp>
+      <p:sp>
+        <p:nvSpPr>
+          <p:cNvPr id="368056361" name="gross_profit_1"/>
+          <p:cNvSpPr txBox="1"/>
+          <p:nvPr/>
+        </p:nvSpPr>
+        <p:spPr bwMode="auto">
+          <a:xfrm rot="0" flipH="0" flipV="0">
+            <a:off x="4470397" y="2641626"/>
+            <a:ext cx="812799" cy="406397"/>
+          </a:xfrm>
+          <a:prstGeom prst="rect">
+            <a:avLst/>
+          </a:prstGeom>
+          <a:noFill/>
+        </p:spPr>
+        <p:txBody>
+          <a:bodyPr vertOverflow="overflow" horzOverflow="overflow" vert="horz" wrap="square" lIns="91440" tIns="45720" rIns="91440" bIns="45720" numCol="1" spcCol="0" rtlCol="0" fromWordArt="0" anchor="ctr" anchorCtr="0" forceAA="0" upright="0" compatLnSpc="0">
+            <a:noAutofit/>
+          </a:bodyPr>
+          <a:p>
+            <a:pPr algn="ctr">
+              <a:defRPr/>
+            </a:pPr>
+            <a:r>
+              <a:rPr lang="it-IT" sz="1400" b="0" i="0" u="none" strike="noStrike" cap="none" spc="0">
+                <a:solidFill>
+                  <a:schemeClr val="tx1"/>
+                </a:solidFill>
+                <a:latin typeface="Liberation Sans"/>
+                <a:ea typeface="Liberation Sans"/>
+                <a:cs typeface="Liberation Sans"/>
+              </a:rPr>
+              <a:t>XX.XB</a:t>
+            </a:r>
+            <a:endParaRPr>
+              <a:solidFill>
+                <a:schemeClr val="tx1"/>
+              </a:solidFill>
+              <a:latin typeface="Liberation Sans"/>
+              <a:cs typeface="Liberation Sans"/>
+            </a:endParaRPr>
+          </a:p>
+        </p:txBody>
+      </p:sp>
+      <p:sp>
+        <p:nvSpPr>
+          <p:cNvPr id="1559578225" name="gross_profit_m"/>
+          <p:cNvSpPr txBox="1"/>
+          <p:nvPr/>
+        </p:nvSpPr>
+        <p:spPr bwMode="auto">
+          <a:xfrm rot="0" flipH="0" flipV="0">
+            <a:off x="5689598" y="2641626"/>
+            <a:ext cx="812799" cy="406396"/>
+          </a:xfrm>
+          <a:prstGeom prst="rect">
+            <a:avLst/>
+          </a:prstGeom>
+          <a:noFill/>
+        </p:spPr>
+        <p:txBody>
+          <a:bodyPr vertOverflow="overflow" horzOverflow="overflow" vert="horz" wrap="square" lIns="91440" tIns="45720" rIns="91440" bIns="45720" numCol="1" spcCol="0" rtlCol="0" fromWordArt="0" anchor="ctr" anchorCtr="0" forceAA="0" upright="0" compatLnSpc="0">
+            <a:noAutofit/>
+          </a:bodyPr>
+          <a:p>
+            <a:pPr algn="ctr">
+              <a:defRPr/>
+            </a:pPr>
+            <a:r>
+              <a:rPr lang="it-IT" sz="1400" b="0">
+                <a:solidFill>
+                  <a:schemeClr val="tx1"/>
+                </a:solidFill>
+                <a:latin typeface="Liberation Sans"/>
+                <a:ea typeface="Liberation Sans"/>
+                <a:cs typeface="Liberation Sans"/>
+              </a:rPr>
+              <a:t>X.X%</a:t>
+            </a:r>
+            <a:endParaRPr sz="1400" b="0">
+              <a:solidFill>
+                <a:schemeClr val="tx1"/>
+              </a:solidFill>
+              <a:latin typeface="Liberation Sans"/>
+              <a:cs typeface="Liberation Sans"/>
+            </a:endParaRPr>
+          </a:p>
+        </p:txBody>
+      </p:sp>
+      <p:sp>
+        <p:nvSpPr>
+          <p:cNvPr id="831652213" name="symbol"/>
+          <p:cNvSpPr txBox="1"/>
+          <p:nvPr/>
+        </p:nvSpPr>
+        <p:spPr bwMode="auto">
+          <a:xfrm rot="0" flipH="0" flipV="0">
+            <a:off x="6502397" y="2641626"/>
+            <a:ext cx="1015999" cy="406396"/>
+          </a:xfrm>
+          <a:prstGeom prst="rect">
+            <a:avLst/>
+          </a:prstGeom>
+          <a:noFill/>
+        </p:spPr>
+        <p:txBody>
+          <a:bodyPr vertOverflow="overflow" horzOverflow="overflow" vert="horz" wrap="square" lIns="91440" tIns="45720" rIns="91440" bIns="45720" numCol="1" spcCol="0" rtlCol="0" fromWordArt="0" anchor="ctr" anchorCtr="0" forceAA="0" upright="0" compatLnSpc="0">
+            <a:noAutofit/>
+          </a:bodyPr>
+          <a:p>
+            <a:pPr algn="l">
+              <a:defRPr/>
+            </a:pPr>
+            <a:r>
+              <a:rPr lang="it-IT" sz="1200" b="0">
+                <a:solidFill>
+                  <a:schemeClr val="tx1"/>
+                </a:solidFill>
+                <a:latin typeface="Liberation Sans"/>
+                <a:ea typeface="Liberation Sans"/>
+                <a:cs typeface="Liberation Sans"/>
+              </a:rPr>
+              <a:t>margin</a:t>
+            </a:r>
+            <a:endParaRPr sz="1200" b="0">
+              <a:solidFill>
+                <a:schemeClr val="tx1"/>
+              </a:solidFill>
+              <a:latin typeface="Liberation Sans"/>
+              <a:cs typeface="Liberation Sans"/>
+            </a:endParaRPr>
+          </a:p>
+        </p:txBody>
+      </p:sp>
+      <p:sp>
+        <p:nvSpPr>
+          <p:cNvPr id="2034043532" name="operating_profit_3"/>
+          <p:cNvSpPr txBox="1"/>
+          <p:nvPr/>
+        </p:nvSpPr>
+        <p:spPr bwMode="auto">
+          <a:xfrm rot="0" flipH="0" flipV="0">
+            <a:off x="2438395" y="3073449"/>
+            <a:ext cx="812799" cy="406397"/>
+          </a:xfrm>
+          <a:prstGeom prst="rect">
+            <a:avLst/>
+          </a:prstGeom>
+          <a:noFill/>
+        </p:spPr>
+        <p:txBody>
+          <a:bodyPr vertOverflow="overflow" horzOverflow="overflow" vert="horz" wrap="square" lIns="91440" tIns="45720" rIns="91440" bIns="45720" numCol="1" spcCol="0" rtlCol="0" fromWordArt="0" anchor="ctr" anchorCtr="0" forceAA="0" upright="0" compatLnSpc="0">
+            <a:noAutofit/>
+          </a:bodyPr>
+          <a:p>
+            <a:pPr algn="ctr">
+              <a:defRPr/>
+            </a:pPr>
+            <a:r>
+              <a:rPr lang="it-IT" sz="1400" b="0" i="0" u="none" strike="noStrike" cap="none" spc="0">
+                <a:solidFill>
+                  <a:schemeClr val="tx1"/>
+                </a:solidFill>
+                <a:latin typeface="Liberation Sans"/>
+                <a:ea typeface="Liberation Sans"/>
+                <a:cs typeface="Liberation Sans"/>
+              </a:rPr>
+              <a:t>XX.XB</a:t>
+            </a:r>
+            <a:endParaRPr>
+              <a:solidFill>
+                <a:schemeClr val="tx1"/>
+              </a:solidFill>
+              <a:latin typeface="Liberation Sans"/>
+              <a:cs typeface="Liberation Sans"/>
+            </a:endParaRPr>
+          </a:p>
+        </p:txBody>
+      </p:sp>
+      <p:sp>
+        <p:nvSpPr>
+          <p:cNvPr id="70336290" name=""/>
+          <p:cNvSpPr txBox="1"/>
+          <p:nvPr/>
+        </p:nvSpPr>
+        <p:spPr bwMode="auto">
+          <a:xfrm rot="0" flipH="0" flipV="0">
+            <a:off x="406400" y="3073449"/>
+            <a:ext cx="1828797" cy="406396"/>
+          </a:xfrm>
+          <a:prstGeom prst="rect">
+            <a:avLst/>
+          </a:prstGeom>
+          <a:noFill/>
+        </p:spPr>
+        <p:txBody>
+          <a:bodyPr vertOverflow="overflow" horzOverflow="overflow" vert="horz" wrap="square" lIns="91440" tIns="45720" rIns="91440" bIns="45720" numCol="1" spcCol="0" rtlCol="0" fromWordArt="0" anchor="ctr" anchorCtr="0" forceAA="0" upright="0" compatLnSpc="0">
+            <a:noAutofit/>
+          </a:bodyPr>
+          <a:p>
+            <a:pPr algn="ctr">
+              <a:defRPr/>
+            </a:pPr>
+            <a:r>
+              <a:rPr lang="it-IT" sz="1400" b="1">
+                <a:solidFill>
+                  <a:schemeClr val="bg1"/>
+                </a:solidFill>
+                <a:latin typeface="Liberation Sans"/>
+                <a:ea typeface="Liberation Sans"/>
+                <a:cs typeface="Liberation Sans"/>
+              </a:rPr>
+              <a:t>Operating profit</a:t>
+            </a:r>
+            <a:endParaRPr sz="1400" b="1">
+              <a:solidFill>
+                <a:schemeClr val="bg1"/>
+              </a:solidFill>
+              <a:latin typeface="Liberation Sans"/>
+              <a:cs typeface="Liberation Sans"/>
+            </a:endParaRPr>
+          </a:p>
+        </p:txBody>
+      </p:sp>
+      <p:sp>
+        <p:nvSpPr>
+          <p:cNvPr id="1043401128" name="operating_profit_2"/>
+          <p:cNvSpPr txBox="1"/>
+          <p:nvPr/>
+        </p:nvSpPr>
+        <p:spPr bwMode="auto">
+          <a:xfrm rot="0" flipH="0" flipV="0">
+            <a:off x="3454398" y="3073449"/>
+            <a:ext cx="812799" cy="406397"/>
+          </a:xfrm>
+          <a:prstGeom prst="rect">
+            <a:avLst/>
+          </a:prstGeom>
+          <a:noFill/>
+        </p:spPr>
+        <p:txBody>
+          <a:bodyPr vertOverflow="overflow" horzOverflow="overflow" vert="horz" wrap="square" lIns="91440" tIns="45720" rIns="91440" bIns="45720" numCol="1" spcCol="0" rtlCol="0" fromWordArt="0" anchor="ctr" anchorCtr="0" forceAA="0" upright="0" compatLnSpc="0">
+            <a:noAutofit/>
+          </a:bodyPr>
+          <a:p>
+            <a:pPr algn="ctr">
+              <a:defRPr/>
+            </a:pPr>
+            <a:r>
+              <a:rPr lang="it-IT" sz="1400" b="0" i="0" u="none" strike="noStrike" cap="none" spc="0">
+                <a:solidFill>
+                  <a:schemeClr val="tx1"/>
+                </a:solidFill>
+                <a:latin typeface="Liberation Sans"/>
+                <a:ea typeface="Liberation Sans"/>
+                <a:cs typeface="Liberation Sans"/>
+              </a:rPr>
+              <a:t>XX.XB</a:t>
+            </a:r>
+            <a:endParaRPr>
+              <a:solidFill>
+                <a:schemeClr val="tx1"/>
+              </a:solidFill>
+              <a:latin typeface="Liberation Sans"/>
+              <a:cs typeface="Liberation Sans"/>
+            </a:endParaRPr>
+          </a:p>
+        </p:txBody>
+      </p:sp>
+      <p:sp>
+        <p:nvSpPr>
+          <p:cNvPr id="1285542416" name="operating_profit_1"/>
+          <p:cNvSpPr txBox="1"/>
+          <p:nvPr/>
+        </p:nvSpPr>
+        <p:spPr bwMode="auto">
+          <a:xfrm rot="0" flipH="0" flipV="0">
+            <a:off x="4470397" y="3073449"/>
+            <a:ext cx="812799" cy="406397"/>
+          </a:xfrm>
+          <a:prstGeom prst="rect">
+            <a:avLst/>
+          </a:prstGeom>
+          <a:noFill/>
+        </p:spPr>
+        <p:txBody>
+          <a:bodyPr vertOverflow="overflow" horzOverflow="overflow" vert="horz" wrap="square" lIns="91440" tIns="45720" rIns="91440" bIns="45720" numCol="1" spcCol="0" rtlCol="0" fromWordArt="0" anchor="ctr" anchorCtr="0" forceAA="0" upright="0" compatLnSpc="0">
+            <a:noAutofit/>
+          </a:bodyPr>
+          <a:p>
+            <a:pPr algn="ctr">
+              <a:defRPr/>
+            </a:pPr>
+            <a:r>
+              <a:rPr lang="it-IT" sz="1400" b="0" i="0" u="none" strike="noStrike" cap="none" spc="0">
+                <a:solidFill>
+                  <a:schemeClr val="tx1"/>
+                </a:solidFill>
+                <a:latin typeface="Liberation Sans"/>
+                <a:ea typeface="Liberation Sans"/>
+                <a:cs typeface="Liberation Sans"/>
+              </a:rPr>
+              <a:t>XX.XB</a:t>
+            </a:r>
+            <a:endParaRPr>
+              <a:solidFill>
+                <a:schemeClr val="tx1"/>
+              </a:solidFill>
+              <a:latin typeface="Liberation Sans"/>
+              <a:cs typeface="Liberation Sans"/>
+            </a:endParaRPr>
+          </a:p>
+        </p:txBody>
+      </p:sp>
+      <p:sp>
+        <p:nvSpPr>
+          <p:cNvPr id="1603109262" name="operating_profit_m"/>
+          <p:cNvSpPr txBox="1"/>
+          <p:nvPr/>
+        </p:nvSpPr>
+        <p:spPr bwMode="auto">
+          <a:xfrm rot="0" flipH="0" flipV="0">
+            <a:off x="5689598" y="3073449"/>
+            <a:ext cx="812799" cy="406396"/>
+          </a:xfrm>
+          <a:prstGeom prst="rect">
+            <a:avLst/>
+          </a:prstGeom>
+          <a:noFill/>
+        </p:spPr>
+        <p:txBody>
+          <a:bodyPr vertOverflow="overflow" horzOverflow="overflow" vert="horz" wrap="square" lIns="91440" tIns="45720" rIns="91440" bIns="45720" numCol="1" spcCol="0" rtlCol="0" fromWordArt="0" anchor="ctr" anchorCtr="0" forceAA="0" upright="0" compatLnSpc="0">
+            <a:noAutofit/>
+          </a:bodyPr>
+          <a:p>
+            <a:pPr algn="ctr">
+              <a:defRPr/>
+            </a:pPr>
+            <a:r>
+              <a:rPr lang="it-IT" sz="1400" b="0">
+                <a:solidFill>
+                  <a:schemeClr val="tx1"/>
+                </a:solidFill>
+                <a:latin typeface="Liberation Sans"/>
+                <a:ea typeface="Liberation Sans"/>
+                <a:cs typeface="Liberation Sans"/>
+              </a:rPr>
+              <a:t>X.X%</a:t>
+            </a:r>
+            <a:endParaRPr sz="1400" b="0">
+              <a:solidFill>
+                <a:schemeClr val="tx1"/>
+              </a:solidFill>
+              <a:latin typeface="Liberation Sans"/>
+              <a:cs typeface="Liberation Sans"/>
+            </a:endParaRPr>
+          </a:p>
+        </p:txBody>
+      </p:sp>
+      <p:sp>
+        <p:nvSpPr>
+          <p:cNvPr id="923565239" name="sector"/>
+          <p:cNvSpPr txBox="1"/>
+          <p:nvPr/>
+        </p:nvSpPr>
+        <p:spPr bwMode="auto">
+          <a:xfrm rot="0" flipH="0" flipV="0">
+            <a:off x="6502397" y="3073449"/>
+            <a:ext cx="1015999" cy="406396"/>
+          </a:xfrm>
+          <a:prstGeom prst="rect">
+            <a:avLst/>
+          </a:prstGeom>
+          <a:noFill/>
+        </p:spPr>
+        <p:txBody>
+          <a:bodyPr vertOverflow="overflow" horzOverflow="overflow" vert="horz" wrap="square" lIns="91440" tIns="45720" rIns="91440" bIns="45720" numCol="1" spcCol="0" rtlCol="0" fromWordArt="0" anchor="ctr" anchorCtr="0" forceAA="0" upright="0" compatLnSpc="0">
+            <a:noAutofit/>
+          </a:bodyPr>
+          <a:p>
+            <a:pPr algn="l">
+              <a:defRPr/>
+            </a:pPr>
+            <a:r>
+              <a:rPr lang="it-IT" sz="1200" b="0">
+                <a:solidFill>
+                  <a:schemeClr val="tx1"/>
+                </a:solidFill>
+                <a:latin typeface="Liberation Sans"/>
+                <a:ea typeface="Liberation Sans"/>
+                <a:cs typeface="Liberation Sans"/>
+              </a:rPr>
+              <a:t>margin</a:t>
+            </a:r>
+            <a:endParaRPr sz="1200" b="0">
+              <a:solidFill>
+                <a:schemeClr val="tx1"/>
+              </a:solidFill>
+              <a:latin typeface="Liberation Sans"/>
+              <a:cs typeface="Liberation Sans"/>
+            </a:endParaRPr>
+          </a:p>
+        </p:txBody>
+      </p:sp>
+      <p:sp>
+        <p:nvSpPr>
+          <p:cNvPr id="55736236" name="net_income_3"/>
+          <p:cNvSpPr txBox="1"/>
+          <p:nvPr/>
+        </p:nvSpPr>
+        <p:spPr bwMode="auto">
+          <a:xfrm rot="0" flipH="0" flipV="0">
+            <a:off x="2438395" y="3505208"/>
+            <a:ext cx="812799" cy="406397"/>
+          </a:xfrm>
+          <a:prstGeom prst="rect">
+            <a:avLst/>
+          </a:prstGeom>
+          <a:noFill/>
+        </p:spPr>
+        <p:txBody>
+          <a:bodyPr vertOverflow="overflow" horzOverflow="overflow" vert="horz" wrap="square" lIns="91440" tIns="45720" rIns="91440" bIns="45720" numCol="1" spcCol="0" rtlCol="0" fromWordArt="0" anchor="ctr" anchorCtr="0" forceAA="0" upright="0" compatLnSpc="0">
+            <a:noAutofit/>
+          </a:bodyPr>
+          <a:p>
+            <a:pPr algn="ctr">
+              <a:defRPr/>
+            </a:pPr>
+            <a:r>
+              <a:rPr lang="it-IT" sz="1400" b="0" i="0" u="none" strike="noStrike" cap="none" spc="0">
+                <a:solidFill>
+                  <a:schemeClr val="tx1"/>
+                </a:solidFill>
+                <a:latin typeface="Liberation Sans"/>
+                <a:ea typeface="Liberation Sans"/>
+                <a:cs typeface="Liberation Sans"/>
+              </a:rPr>
+              <a:t>XX.XB</a:t>
+            </a:r>
+            <a:endParaRPr>
+              <a:solidFill>
+                <a:schemeClr val="tx1"/>
+              </a:solidFill>
+              <a:latin typeface="Liberation Sans"/>
+              <a:cs typeface="Liberation Sans"/>
+            </a:endParaRPr>
+          </a:p>
+        </p:txBody>
+      </p:sp>
+      <p:sp>
+        <p:nvSpPr>
+          <p:cNvPr id="620009610" name=""/>
+          <p:cNvSpPr txBox="1"/>
+          <p:nvPr/>
+        </p:nvSpPr>
+        <p:spPr bwMode="auto">
+          <a:xfrm rot="0" flipH="0" flipV="0">
+            <a:off x="406400" y="3505249"/>
+            <a:ext cx="1828797" cy="406396"/>
+          </a:xfrm>
+          <a:prstGeom prst="rect">
+            <a:avLst/>
+          </a:prstGeom>
+          <a:noFill/>
+        </p:spPr>
+        <p:txBody>
+          <a:bodyPr vertOverflow="overflow" horzOverflow="overflow" vert="horz" wrap="square" lIns="91440" tIns="45720" rIns="91440" bIns="45720" numCol="1" spcCol="0" rtlCol="0" fromWordArt="0" anchor="ctr" anchorCtr="0" forceAA="0" upright="0" compatLnSpc="0">
+            <a:noAutofit/>
+          </a:bodyPr>
+          <a:p>
+            <a:pPr algn="ctr">
+              <a:defRPr/>
+            </a:pPr>
+            <a:r>
+              <a:rPr lang="it-IT" sz="1400" b="1">
+                <a:solidFill>
+                  <a:schemeClr val="bg1"/>
+                </a:solidFill>
+                <a:latin typeface="Liberation Sans"/>
+                <a:ea typeface="Liberation Sans"/>
+                <a:cs typeface="Liberation Sans"/>
+              </a:rPr>
+              <a:t>Net income</a:t>
+            </a:r>
+            <a:endParaRPr sz="1400" b="1">
+              <a:solidFill>
+                <a:schemeClr val="bg1"/>
+              </a:solidFill>
+              <a:latin typeface="Liberation Sans"/>
+              <a:cs typeface="Liberation Sans"/>
+            </a:endParaRPr>
+          </a:p>
+        </p:txBody>
+      </p:sp>
+      <p:sp>
+        <p:nvSpPr>
+          <p:cNvPr id="1053461506" name="net_income_2"/>
+          <p:cNvSpPr txBox="1"/>
+          <p:nvPr/>
+        </p:nvSpPr>
+        <p:spPr bwMode="auto">
+          <a:xfrm rot="0" flipH="0" flipV="0">
+            <a:off x="3454398" y="3505208"/>
+            <a:ext cx="812799" cy="406397"/>
+          </a:xfrm>
+          <a:prstGeom prst="rect">
+            <a:avLst/>
+          </a:prstGeom>
+          <a:noFill/>
+        </p:spPr>
+        <p:txBody>
+          <a:bodyPr vertOverflow="overflow" horzOverflow="overflow" vert="horz" wrap="square" lIns="91440" tIns="45720" rIns="91440" bIns="45720" numCol="1" spcCol="0" rtlCol="0" fromWordArt="0" anchor="ctr" anchorCtr="0" forceAA="0" upright="0" compatLnSpc="0">
+            <a:noAutofit/>
+          </a:bodyPr>
+          <a:p>
+            <a:pPr algn="ctr">
+              <a:defRPr/>
+            </a:pPr>
+            <a:r>
+              <a:rPr lang="it-IT" sz="1400" b="0" i="0" u="none" strike="noStrike" cap="none" spc="0">
+                <a:solidFill>
+                  <a:schemeClr val="tx1"/>
+                </a:solidFill>
+                <a:latin typeface="Liberation Sans"/>
+                <a:ea typeface="Liberation Sans"/>
+                <a:cs typeface="Liberation Sans"/>
+              </a:rPr>
+              <a:t>XX.XB</a:t>
+            </a:r>
+            <a:endParaRPr>
+              <a:solidFill>
+                <a:schemeClr val="tx1"/>
+              </a:solidFill>
+              <a:latin typeface="Liberation Sans"/>
+              <a:cs typeface="Liberation Sans"/>
+            </a:endParaRPr>
+          </a:p>
+        </p:txBody>
+      </p:sp>
+      <p:sp>
+        <p:nvSpPr>
+          <p:cNvPr id="24027059" name="net_income_1"/>
+          <p:cNvSpPr txBox="1"/>
+          <p:nvPr/>
+        </p:nvSpPr>
+        <p:spPr bwMode="auto">
+          <a:xfrm rot="0" flipH="0" flipV="0">
+            <a:off x="4470397" y="3505208"/>
+            <a:ext cx="812799" cy="406397"/>
+          </a:xfrm>
+          <a:prstGeom prst="rect">
+            <a:avLst/>
+          </a:prstGeom>
+          <a:noFill/>
+        </p:spPr>
+        <p:txBody>
+          <a:bodyPr vertOverflow="overflow" horzOverflow="overflow" vert="horz" wrap="square" lIns="91440" tIns="45720" rIns="91440" bIns="45720" numCol="1" spcCol="0" rtlCol="0" fromWordArt="0" anchor="ctr" anchorCtr="0" forceAA="0" upright="0" compatLnSpc="0">
+            <a:noAutofit/>
+          </a:bodyPr>
+          <a:p>
+            <a:pPr algn="ctr">
+              <a:defRPr/>
+            </a:pPr>
+            <a:r>
+              <a:rPr lang="it-IT" sz="1400" b="0" i="0" u="none" strike="noStrike" cap="none" spc="0">
+                <a:solidFill>
+                  <a:schemeClr val="tx1"/>
+                </a:solidFill>
+                <a:latin typeface="Liberation Sans"/>
+                <a:ea typeface="Liberation Sans"/>
+                <a:cs typeface="Liberation Sans"/>
+              </a:rPr>
+              <a:t>XX.XB</a:t>
+            </a:r>
+            <a:endParaRPr>
+              <a:solidFill>
+                <a:schemeClr val="tx1"/>
+              </a:solidFill>
+              <a:latin typeface="Liberation Sans"/>
+              <a:cs typeface="Liberation Sans"/>
+            </a:endParaRPr>
+          </a:p>
+        </p:txBody>
+      </p:sp>
+      <p:sp>
+        <p:nvSpPr>
+          <p:cNvPr id="1113419882" name="net_income_m"/>
+          <p:cNvSpPr txBox="1"/>
+          <p:nvPr/>
+        </p:nvSpPr>
+        <p:spPr bwMode="auto">
+          <a:xfrm rot="0" flipH="0" flipV="0">
+            <a:off x="5689598" y="3505208"/>
+            <a:ext cx="812799" cy="406396"/>
+          </a:xfrm>
+          <a:prstGeom prst="rect">
+            <a:avLst/>
+          </a:prstGeom>
+          <a:noFill/>
+        </p:spPr>
+        <p:txBody>
+          <a:bodyPr vertOverflow="overflow" horzOverflow="overflow" vert="horz" wrap="square" lIns="91440" tIns="45720" rIns="91440" bIns="45720" numCol="1" spcCol="0" rtlCol="0" fromWordArt="0" anchor="ctr" anchorCtr="0" forceAA="0" upright="0" compatLnSpc="0">
+            <a:noAutofit/>
+          </a:bodyPr>
+          <a:p>
+            <a:pPr algn="ctr">
+              <a:defRPr/>
+            </a:pPr>
+            <a:r>
+              <a:rPr lang="it-IT" sz="1400" b="0" i="0" u="none" strike="noStrike" cap="none" spc="0">
+                <a:solidFill>
+                  <a:schemeClr val="tx1"/>
+                </a:solidFill>
+                <a:latin typeface="Liberation Sans"/>
+                <a:ea typeface="Liberation Sans"/>
+                <a:cs typeface="Liberation Sans"/>
+              </a:rPr>
+              <a:t>X.X%</a:t>
+            </a:r>
+            <a:endParaRPr sz="1400" b="0">
+              <a:solidFill>
+                <a:schemeClr val="tx1"/>
+              </a:solidFill>
+              <a:latin typeface="Liberation Sans"/>
+              <a:cs typeface="Liberation Sans"/>
+            </a:endParaRPr>
+          </a:p>
+        </p:txBody>
+      </p:sp>
+      <p:sp>
+        <p:nvSpPr>
+          <p:cNvPr id="1384149297" name="industry"/>
+          <p:cNvSpPr txBox="1"/>
+          <p:nvPr/>
+        </p:nvSpPr>
+        <p:spPr bwMode="auto">
+          <a:xfrm rot="0" flipH="0" flipV="0">
+            <a:off x="6502397" y="3505209"/>
+            <a:ext cx="1015999" cy="406396"/>
+          </a:xfrm>
+          <a:prstGeom prst="rect">
+            <a:avLst/>
+          </a:prstGeom>
+          <a:noFill/>
+        </p:spPr>
+        <p:txBody>
+          <a:bodyPr vertOverflow="overflow" horzOverflow="overflow" vert="horz" wrap="square" lIns="91440" tIns="45720" rIns="91440" bIns="45720" numCol="1" spcCol="0" rtlCol="0" fromWordArt="0" anchor="ctr" anchorCtr="0" forceAA="0" upright="0" compatLnSpc="0">
+            <a:noAutofit/>
+          </a:bodyPr>
+          <a:p>
+            <a:pPr algn="l">
+              <a:defRPr/>
+            </a:pPr>
+            <a:r>
+              <a:rPr lang="it-IT" sz="1200" b="0">
+                <a:solidFill>
+                  <a:schemeClr val="tx1"/>
+                </a:solidFill>
+                <a:latin typeface="Liberation Sans"/>
+                <a:ea typeface="Liberation Sans"/>
+                <a:cs typeface="Liberation Sans"/>
+              </a:rPr>
+              <a:t>margin</a:t>
+            </a:r>
+            <a:endParaRPr sz="1200" b="0">
+              <a:solidFill>
+                <a:schemeClr val="tx1"/>
+              </a:solidFill>
+              <a:latin typeface="Liberation Sans"/>
+              <a:cs typeface="Liberation Sans"/>
+            </a:endParaRPr>
+          </a:p>
+        </p:txBody>
+      </p:sp>
+      <p:sp>
+        <p:nvSpPr>
+          <p:cNvPr id="309366340" name="invested_capital_3"/>
+          <p:cNvSpPr txBox="1"/>
+          <p:nvPr/>
+        </p:nvSpPr>
+        <p:spPr bwMode="auto">
+          <a:xfrm rot="0" flipH="0" flipV="0">
+            <a:off x="2438395" y="3937010"/>
+            <a:ext cx="812799" cy="406397"/>
+          </a:xfrm>
+          <a:prstGeom prst="rect">
+            <a:avLst/>
+          </a:prstGeom>
+          <a:noFill/>
+        </p:spPr>
+        <p:txBody>
+          <a:bodyPr vertOverflow="overflow" horzOverflow="overflow" vert="horz" wrap="square" lIns="91440" tIns="45720" rIns="91440" bIns="45720" numCol="1" spcCol="0" rtlCol="0" fromWordArt="0" anchor="ctr" anchorCtr="0" forceAA="0" upright="0" compatLnSpc="0">
+            <a:noAutofit/>
+          </a:bodyPr>
+          <a:p>
+            <a:pPr algn="ctr">
+              <a:defRPr/>
+            </a:pPr>
+            <a:r>
+              <a:rPr lang="it-IT" sz="1400" b="0" i="0" u="none" strike="noStrike" cap="none" spc="0">
+                <a:solidFill>
+                  <a:schemeClr val="tx1"/>
+                </a:solidFill>
+                <a:latin typeface="Liberation Sans"/>
+                <a:ea typeface="Liberation Sans"/>
+                <a:cs typeface="Liberation Sans"/>
+              </a:rPr>
+              <a:t>XX.XB</a:t>
+            </a:r>
+            <a:endParaRPr>
+              <a:solidFill>
+                <a:schemeClr val="tx1"/>
+              </a:solidFill>
+              <a:latin typeface="Liberation Sans"/>
+              <a:cs typeface="Liberation Sans"/>
+            </a:endParaRPr>
+          </a:p>
+        </p:txBody>
+      </p:sp>
+      <p:sp>
+        <p:nvSpPr>
+          <p:cNvPr id="130604559" name=""/>
+          <p:cNvSpPr txBox="1"/>
+          <p:nvPr/>
+        </p:nvSpPr>
+        <p:spPr bwMode="auto">
+          <a:xfrm rot="0" flipH="0" flipV="0">
+            <a:off x="406400" y="3937010"/>
+            <a:ext cx="1828797" cy="406396"/>
+          </a:xfrm>
+          <a:prstGeom prst="rect">
+            <a:avLst/>
+          </a:prstGeom>
+          <a:noFill/>
+        </p:spPr>
+        <p:txBody>
+          <a:bodyPr vertOverflow="overflow" horzOverflow="overflow" vert="horz" wrap="square" lIns="91440" tIns="45720" rIns="91440" bIns="45720" numCol="1" spcCol="0" rtlCol="0" fromWordArt="0" anchor="ctr" anchorCtr="0" forceAA="0" upright="0" compatLnSpc="0">
+            <a:noAutofit/>
+          </a:bodyPr>
+          <a:p>
+            <a:pPr algn="ctr">
+              <a:defRPr/>
+            </a:pPr>
+            <a:r>
+              <a:rPr lang="it-IT" sz="1400" b="1">
+                <a:solidFill>
+                  <a:schemeClr val="bg1"/>
+                </a:solidFill>
+                <a:latin typeface="Liberation Sans"/>
+                <a:ea typeface="Liberation Sans"/>
+                <a:cs typeface="Liberation Sans"/>
+              </a:rPr>
+              <a:t>Invested capital</a:t>
+            </a:r>
+            <a:endParaRPr sz="1400" b="1">
+              <a:solidFill>
+                <a:schemeClr val="bg1"/>
+              </a:solidFill>
+              <a:latin typeface="Liberation Sans"/>
+              <a:cs typeface="Liberation Sans"/>
+            </a:endParaRPr>
+          </a:p>
+        </p:txBody>
+      </p:sp>
+      <p:sp>
+        <p:nvSpPr>
+          <p:cNvPr id="1459423099" name="invested_capital_2"/>
+          <p:cNvSpPr txBox="1"/>
+          <p:nvPr/>
+        </p:nvSpPr>
+        <p:spPr bwMode="auto">
+          <a:xfrm rot="0" flipH="0" flipV="0">
+            <a:off x="3454398" y="3937010"/>
+            <a:ext cx="812799" cy="406397"/>
+          </a:xfrm>
+          <a:prstGeom prst="rect">
+            <a:avLst/>
+          </a:prstGeom>
+          <a:noFill/>
+        </p:spPr>
+        <p:txBody>
+          <a:bodyPr vertOverflow="overflow" horzOverflow="overflow" vert="horz" wrap="square" lIns="91440" tIns="45720" rIns="91440" bIns="45720" numCol="1" spcCol="0" rtlCol="0" fromWordArt="0" anchor="ctr" anchorCtr="0" forceAA="0" upright="0" compatLnSpc="0">
+            <a:noAutofit/>
+          </a:bodyPr>
+          <a:p>
+            <a:pPr algn="ctr">
+              <a:defRPr/>
+            </a:pPr>
+            <a:r>
+              <a:rPr lang="it-IT" sz="1400" b="0" i="0" u="none" strike="noStrike" cap="none" spc="0">
+                <a:solidFill>
+                  <a:schemeClr val="tx1"/>
+                </a:solidFill>
+                <a:latin typeface="Liberation Sans"/>
+                <a:ea typeface="Liberation Sans"/>
+                <a:cs typeface="Liberation Sans"/>
+              </a:rPr>
+              <a:t>XX.XB</a:t>
+            </a:r>
+            <a:endParaRPr>
+              <a:solidFill>
+                <a:schemeClr val="tx1"/>
+              </a:solidFill>
+              <a:latin typeface="Liberation Sans"/>
+              <a:cs typeface="Liberation Sans"/>
+            </a:endParaRPr>
+          </a:p>
+        </p:txBody>
+      </p:sp>
+      <p:sp>
+        <p:nvSpPr>
+          <p:cNvPr id="1874515150" name="invested_capital_1"/>
+          <p:cNvSpPr txBox="1"/>
+          <p:nvPr/>
+        </p:nvSpPr>
+        <p:spPr bwMode="auto">
+          <a:xfrm rot="0" flipH="0" flipV="0">
+            <a:off x="4470397" y="3937010"/>
+            <a:ext cx="812799" cy="406397"/>
+          </a:xfrm>
+          <a:prstGeom prst="rect">
+            <a:avLst/>
+          </a:prstGeom>
+          <a:noFill/>
+        </p:spPr>
+        <p:txBody>
+          <a:bodyPr vertOverflow="overflow" horzOverflow="overflow" vert="horz" wrap="square" lIns="91440" tIns="45720" rIns="91440" bIns="45720" numCol="1" spcCol="0" rtlCol="0" fromWordArt="0" anchor="ctr" anchorCtr="0" forceAA="0" upright="0" compatLnSpc="0">
+            <a:noAutofit/>
+          </a:bodyPr>
+          <a:p>
+            <a:pPr algn="ctr">
+              <a:defRPr/>
+            </a:pPr>
+            <a:r>
+              <a:rPr lang="it-IT" sz="1400" b="0" i="0" u="none" strike="noStrike" cap="none" spc="0">
+                <a:solidFill>
+                  <a:schemeClr val="tx1"/>
+                </a:solidFill>
+                <a:latin typeface="Liberation Sans"/>
+                <a:ea typeface="Liberation Sans"/>
+                <a:cs typeface="Liberation Sans"/>
+              </a:rPr>
+              <a:t>XX.XB</a:t>
+            </a:r>
+            <a:endParaRPr>
+              <a:solidFill>
+                <a:schemeClr val="tx1"/>
+              </a:solidFill>
+              <a:latin typeface="Liberation Sans"/>
+              <a:cs typeface="Liberation Sans"/>
+            </a:endParaRPr>
+          </a:p>
+        </p:txBody>
+      </p:sp>
+      <p:sp>
+        <p:nvSpPr>
+          <p:cNvPr id="208921915" name="invested_capital_m"/>
+          <p:cNvSpPr txBox="1"/>
+          <p:nvPr/>
+        </p:nvSpPr>
+        <p:spPr bwMode="auto">
+          <a:xfrm rot="0" flipH="0" flipV="0">
+            <a:off x="5689598" y="3937010"/>
+            <a:ext cx="812799" cy="406396"/>
+          </a:xfrm>
+          <a:prstGeom prst="rect">
+            <a:avLst/>
+          </a:prstGeom>
+          <a:noFill/>
+        </p:spPr>
+        <p:txBody>
+          <a:bodyPr vertOverflow="overflow" horzOverflow="overflow" vert="horz" wrap="square" lIns="91440" tIns="45720" rIns="91440" bIns="45720" numCol="1" spcCol="0" rtlCol="0" fromWordArt="0" anchor="ctr" anchorCtr="0" forceAA="0" upright="0" compatLnSpc="0">
+            <a:noAutofit/>
+          </a:bodyPr>
+          <a:p>
+            <a:pPr algn="ctr">
+              <a:defRPr/>
+            </a:pPr>
+            <a:r>
+              <a:rPr lang="it-IT" sz="1400" b="0" i="0" u="none" strike="noStrike" cap="none" spc="0">
+                <a:solidFill>
+                  <a:schemeClr val="tx1"/>
+                </a:solidFill>
+                <a:latin typeface="Liberation Sans"/>
+                <a:ea typeface="Liberation Sans"/>
+                <a:cs typeface="Liberation Sans"/>
+              </a:rPr>
+              <a:t>X.X%</a:t>
+            </a:r>
+            <a:endParaRPr sz="1400" b="0">
+              <a:solidFill>
+                <a:schemeClr val="tx1"/>
+              </a:solidFill>
+              <a:latin typeface="Liberation Sans"/>
+              <a:cs typeface="Liberation Sans"/>
+            </a:endParaRPr>
+          </a:p>
+        </p:txBody>
+      </p:sp>
+      <p:sp>
+        <p:nvSpPr>
+          <p:cNvPr id="445514744" name="market_cap"/>
+          <p:cNvSpPr txBox="1"/>
+          <p:nvPr/>
+        </p:nvSpPr>
+        <p:spPr bwMode="auto">
+          <a:xfrm rot="0" flipH="0" flipV="0">
+            <a:off x="6502397" y="3937011"/>
+            <a:ext cx="1015999" cy="406396"/>
+          </a:xfrm>
+          <a:prstGeom prst="rect">
+            <a:avLst/>
+          </a:prstGeom>
+          <a:noFill/>
+        </p:spPr>
+        <p:txBody>
+          <a:bodyPr vertOverflow="overflow" horzOverflow="overflow" vert="horz" wrap="square" lIns="91440" tIns="45720" rIns="91440" bIns="45720" numCol="1" spcCol="0" rtlCol="0" fromWordArt="0" anchor="ctr" anchorCtr="0" forceAA="0" upright="0" compatLnSpc="0">
+            <a:noAutofit/>
+          </a:bodyPr>
+          <a:p>
+            <a:pPr algn="l">
+              <a:defRPr/>
+            </a:pPr>
+            <a:r>
+              <a:rPr lang="it-IT" sz="1200" b="0">
+                <a:solidFill>
+                  <a:schemeClr val="tx1"/>
+                </a:solidFill>
+                <a:latin typeface="Liberation Sans"/>
+                <a:ea typeface="Liberation Sans"/>
+                <a:cs typeface="Liberation Sans"/>
+              </a:rPr>
+              <a:t>ROIC</a:t>
+            </a:r>
+            <a:endParaRPr sz="1200" b="0">
+              <a:solidFill>
+                <a:schemeClr val="tx1"/>
+              </a:solidFill>
+              <a:latin typeface="Liberation Sans"/>
+              <a:cs typeface="Liberation Sans"/>
+            </a:endParaRPr>
+          </a:p>
+        </p:txBody>
+      </p:sp>
+      <p:sp>
+        <p:nvSpPr>
+          <p:cNvPr id="306574910" name="debt_3"/>
+          <p:cNvSpPr txBox="1"/>
+          <p:nvPr/>
+        </p:nvSpPr>
+        <p:spPr bwMode="auto">
+          <a:xfrm rot="0" flipH="0" flipV="0">
+            <a:off x="2438395" y="4368771"/>
+            <a:ext cx="812799" cy="406397"/>
+          </a:xfrm>
+          <a:prstGeom prst="rect">
+            <a:avLst/>
+          </a:prstGeom>
+          <a:noFill/>
+        </p:spPr>
+        <p:txBody>
+          <a:bodyPr vertOverflow="overflow" horzOverflow="overflow" vert="horz" wrap="square" lIns="91440" tIns="45720" rIns="91440" bIns="45720" numCol="1" spcCol="0" rtlCol="0" fromWordArt="0" anchor="ctr" anchorCtr="0" forceAA="0" upright="0" compatLnSpc="0">
+            <a:noAutofit/>
+          </a:bodyPr>
+          <a:p>
+            <a:pPr algn="ctr">
+              <a:defRPr/>
+            </a:pPr>
+            <a:r>
+              <a:rPr lang="it-IT" sz="1400" b="0" i="0" u="none" strike="noStrike" cap="none" spc="0">
+                <a:solidFill>
+                  <a:schemeClr val="tx1"/>
+                </a:solidFill>
+                <a:latin typeface="Liberation Sans"/>
+                <a:ea typeface="Liberation Sans"/>
+                <a:cs typeface="Liberation Sans"/>
+              </a:rPr>
+              <a:t>XX.XB</a:t>
+            </a:r>
+            <a:endParaRPr>
+              <a:solidFill>
+                <a:schemeClr val="tx1"/>
+              </a:solidFill>
+              <a:latin typeface="Liberation Sans"/>
+              <a:cs typeface="Liberation Sans"/>
+            </a:endParaRPr>
+          </a:p>
+        </p:txBody>
+      </p:sp>
+      <p:sp>
+        <p:nvSpPr>
+          <p:cNvPr id="1902781788" name=""/>
+          <p:cNvSpPr txBox="1"/>
+          <p:nvPr/>
+        </p:nvSpPr>
+        <p:spPr bwMode="auto">
+          <a:xfrm rot="0" flipH="0" flipV="0">
+            <a:off x="406400" y="4368771"/>
+            <a:ext cx="1828797" cy="406396"/>
+          </a:xfrm>
+          <a:prstGeom prst="rect">
+            <a:avLst/>
+          </a:prstGeom>
+          <a:noFill/>
+        </p:spPr>
+        <p:txBody>
+          <a:bodyPr vertOverflow="overflow" horzOverflow="overflow" vert="horz" wrap="square" lIns="91440" tIns="45720" rIns="91440" bIns="45720" numCol="1" spcCol="0" rtlCol="0" fromWordArt="0" anchor="ctr" anchorCtr="0" forceAA="0" upright="0" compatLnSpc="0">
+            <a:noAutofit/>
+          </a:bodyPr>
+          <a:p>
+            <a:pPr algn="ctr">
+              <a:defRPr/>
+            </a:pPr>
+            <a:r>
+              <a:rPr lang="it-IT" sz="1400" b="1">
+                <a:solidFill>
+                  <a:schemeClr val="bg1"/>
+                </a:solidFill>
+                <a:latin typeface="Liberation Sans"/>
+                <a:ea typeface="Liberation Sans"/>
+                <a:cs typeface="Liberation Sans"/>
+              </a:rPr>
+              <a:t>Debt</a:t>
+            </a:r>
+            <a:endParaRPr sz="1400" b="1">
+              <a:solidFill>
+                <a:schemeClr val="bg1"/>
+              </a:solidFill>
+              <a:latin typeface="Liberation Sans"/>
+              <a:cs typeface="Liberation Sans"/>
+            </a:endParaRPr>
+          </a:p>
+        </p:txBody>
+      </p:sp>
+      <p:sp>
+        <p:nvSpPr>
+          <p:cNvPr id="1900073939" name="debt_2"/>
+          <p:cNvSpPr txBox="1"/>
+          <p:nvPr/>
+        </p:nvSpPr>
+        <p:spPr bwMode="auto">
+          <a:xfrm rot="0" flipH="0" flipV="0">
+            <a:off x="3454398" y="4368771"/>
+            <a:ext cx="812799" cy="406397"/>
+          </a:xfrm>
+          <a:prstGeom prst="rect">
+            <a:avLst/>
+          </a:prstGeom>
+          <a:noFill/>
+        </p:spPr>
+        <p:txBody>
+          <a:bodyPr vertOverflow="overflow" horzOverflow="overflow" vert="horz" wrap="square" lIns="91440" tIns="45720" rIns="91440" bIns="45720" numCol="1" spcCol="0" rtlCol="0" fromWordArt="0" anchor="ctr" anchorCtr="0" forceAA="0" upright="0" compatLnSpc="0">
+            <a:noAutofit/>
+          </a:bodyPr>
+          <a:p>
+            <a:pPr algn="ctr">
+              <a:defRPr/>
+            </a:pPr>
+            <a:r>
+              <a:rPr lang="it-IT" sz="1400" b="0" i="0" u="none" strike="noStrike" cap="none" spc="0">
+                <a:solidFill>
+                  <a:schemeClr val="tx1"/>
+                </a:solidFill>
+                <a:latin typeface="Liberation Sans"/>
+                <a:ea typeface="Liberation Sans"/>
+                <a:cs typeface="Liberation Sans"/>
+              </a:rPr>
+              <a:t>XX.XB</a:t>
+            </a:r>
+            <a:endParaRPr>
+              <a:solidFill>
+                <a:schemeClr val="tx1"/>
+              </a:solidFill>
+              <a:latin typeface="Liberation Sans"/>
+              <a:cs typeface="Liberation Sans"/>
+            </a:endParaRPr>
+          </a:p>
+        </p:txBody>
+      </p:sp>
+      <p:sp>
+        <p:nvSpPr>
+          <p:cNvPr id="313930224" name="debt_1"/>
+          <p:cNvSpPr txBox="1"/>
+          <p:nvPr/>
+        </p:nvSpPr>
+        <p:spPr bwMode="auto">
+          <a:xfrm rot="0" flipH="0" flipV="0">
+            <a:off x="4470397" y="4368771"/>
+            <a:ext cx="812799" cy="406397"/>
+          </a:xfrm>
+          <a:prstGeom prst="rect">
+            <a:avLst/>
+          </a:prstGeom>
+          <a:noFill/>
+        </p:spPr>
+        <p:txBody>
+          <a:bodyPr vertOverflow="overflow" horzOverflow="overflow" vert="horz" wrap="square" lIns="91440" tIns="45720" rIns="91440" bIns="45720" numCol="1" spcCol="0" rtlCol="0" fromWordArt="0" anchor="ctr" anchorCtr="0" forceAA="0" upright="0" compatLnSpc="0">
+            <a:noAutofit/>
+          </a:bodyPr>
+          <a:p>
+            <a:pPr algn="ctr">
+              <a:defRPr/>
+            </a:pPr>
+            <a:r>
+              <a:rPr lang="it-IT" sz="1400" b="0" i="0" u="none" strike="noStrike" cap="none" spc="0">
+                <a:solidFill>
+                  <a:schemeClr val="tx1"/>
+                </a:solidFill>
+                <a:latin typeface="Liberation Sans"/>
+                <a:ea typeface="Liberation Sans"/>
+                <a:cs typeface="Liberation Sans"/>
+              </a:rPr>
+              <a:t>XX.XB</a:t>
+            </a:r>
+            <a:endParaRPr>
+              <a:solidFill>
+                <a:schemeClr val="tx1"/>
+              </a:solidFill>
+              <a:latin typeface="Liberation Sans"/>
+              <a:cs typeface="Liberation Sans"/>
+            </a:endParaRPr>
+          </a:p>
+        </p:txBody>
+      </p:sp>
+      <p:sp>
+        <p:nvSpPr>
+          <p:cNvPr id="1028770126" name="debt_m"/>
+          <p:cNvSpPr txBox="1"/>
+          <p:nvPr/>
+        </p:nvSpPr>
+        <p:spPr bwMode="auto">
+          <a:xfrm rot="0" flipH="0" flipV="0">
+            <a:off x="5689598" y="4368771"/>
+            <a:ext cx="812799" cy="406396"/>
+          </a:xfrm>
+          <a:prstGeom prst="rect">
+            <a:avLst/>
+          </a:prstGeom>
+          <a:noFill/>
+        </p:spPr>
+        <p:txBody>
+          <a:bodyPr vertOverflow="overflow" horzOverflow="overflow" vert="horz" wrap="square" lIns="91440" tIns="45720" rIns="91440" bIns="45720" numCol="1" spcCol="0" rtlCol="0" fromWordArt="0" anchor="ctr" anchorCtr="0" forceAA="0" upright="0" compatLnSpc="0">
+            <a:noAutofit/>
+          </a:bodyPr>
+          <a:p>
+            <a:pPr algn="ctr">
+              <a:defRPr/>
+            </a:pPr>
+            <a:r>
+              <a:rPr lang="it-IT" sz="1400" b="0" i="0" u="none" strike="noStrike" cap="none" spc="0">
+                <a:solidFill>
+                  <a:schemeClr val="tx1"/>
+                </a:solidFill>
+                <a:latin typeface="Liberation Sans"/>
+                <a:ea typeface="Liberation Sans"/>
+                <a:cs typeface="Liberation Sans"/>
+              </a:rPr>
+              <a:t>X.X%</a:t>
+            </a:r>
+            <a:endParaRPr sz="1400" b="0">
+              <a:solidFill>
+                <a:schemeClr val="tx1"/>
+              </a:solidFill>
+              <a:latin typeface="Liberation Sans"/>
+              <a:cs typeface="Liberation Sans"/>
+            </a:endParaRPr>
+          </a:p>
+        </p:txBody>
+      </p:sp>
+      <p:sp>
+        <p:nvSpPr>
+          <p:cNvPr id="1031783940" name="earnings"/>
+          <p:cNvSpPr txBox="1"/>
+          <p:nvPr/>
+        </p:nvSpPr>
+        <p:spPr bwMode="auto">
+          <a:xfrm rot="0" flipH="0" flipV="0">
+            <a:off x="6502397" y="4368771"/>
+            <a:ext cx="1015999" cy="406396"/>
+          </a:xfrm>
+          <a:prstGeom prst="rect">
+            <a:avLst/>
+          </a:prstGeom>
+          <a:noFill/>
+        </p:spPr>
+        <p:txBody>
+          <a:bodyPr vertOverflow="overflow" horzOverflow="overflow" vert="horz" wrap="square" lIns="91440" tIns="45720" rIns="91440" bIns="45720" numCol="1" spcCol="0" rtlCol="0" fromWordArt="0" anchor="ctr" anchorCtr="0" forceAA="0" upright="0" compatLnSpc="0">
+            <a:noAutofit/>
+          </a:bodyPr>
+          <a:p>
+            <a:pPr algn="l">
+              <a:defRPr/>
+            </a:pPr>
+            <a:r>
+              <a:rPr lang="it-IT" sz="1200" b="0">
+                <a:solidFill>
+                  <a:schemeClr val="tx1"/>
+                </a:solidFill>
+                <a:latin typeface="Liberation Sans"/>
+                <a:ea typeface="Liberation Sans"/>
+                <a:cs typeface="Liberation Sans"/>
+              </a:rPr>
+              <a:t>D/C ratio</a:t>
+            </a:r>
+            <a:endParaRPr sz="1200" b="0">
+              <a:solidFill>
+                <a:schemeClr val="tx1"/>
+              </a:solidFill>
+              <a:latin typeface="Liberation Sans"/>
+              <a:cs typeface="Liberation Sans"/>
+            </a:endParaRPr>
+          </a:p>
+        </p:txBody>
+      </p:sp>
+      <p:sp>
+        <p:nvSpPr>
+          <p:cNvPr id="645729051" name="operating_cash_flow_3"/>
+          <p:cNvSpPr txBox="1"/>
+          <p:nvPr/>
+        </p:nvSpPr>
+        <p:spPr bwMode="auto">
+          <a:xfrm rot="0" flipH="0" flipV="0">
+            <a:off x="2438395" y="4800530"/>
+            <a:ext cx="812799" cy="406397"/>
+          </a:xfrm>
+          <a:prstGeom prst="rect">
+            <a:avLst/>
+          </a:prstGeom>
+          <a:noFill/>
+        </p:spPr>
+        <p:txBody>
+          <a:bodyPr vertOverflow="overflow" horzOverflow="overflow" vert="horz" wrap="square" lIns="91440" tIns="45720" rIns="91440" bIns="45720" numCol="1" spcCol="0" rtlCol="0" fromWordArt="0" anchor="ctr" anchorCtr="0" forceAA="0" upright="0" compatLnSpc="0">
+            <a:noAutofit/>
+          </a:bodyPr>
+          <a:p>
+            <a:pPr algn="ctr">
+              <a:defRPr/>
+            </a:pPr>
+            <a:r>
+              <a:rPr lang="it-IT" sz="1400" b="0" i="0" u="none" strike="noStrike" cap="none" spc="0">
+                <a:solidFill>
+                  <a:schemeClr val="tx1"/>
+                </a:solidFill>
+                <a:latin typeface="Liberation Sans"/>
+                <a:ea typeface="Liberation Sans"/>
+                <a:cs typeface="Liberation Sans"/>
+              </a:rPr>
+              <a:t>XX.XB</a:t>
+            </a:r>
+            <a:endParaRPr>
+              <a:solidFill>
+                <a:schemeClr val="tx1"/>
+              </a:solidFill>
+              <a:latin typeface="Liberation Sans"/>
+              <a:cs typeface="Liberation Sans"/>
+            </a:endParaRPr>
+          </a:p>
+        </p:txBody>
+      </p:sp>
+      <p:sp>
+        <p:nvSpPr>
+          <p:cNvPr id="1539096327" name=""/>
+          <p:cNvSpPr txBox="1"/>
+          <p:nvPr/>
+        </p:nvSpPr>
+        <p:spPr bwMode="auto">
+          <a:xfrm rot="0" flipH="0" flipV="0">
+            <a:off x="406400" y="4800573"/>
+            <a:ext cx="1828797" cy="406396"/>
+          </a:xfrm>
+          <a:prstGeom prst="rect">
+            <a:avLst/>
+          </a:prstGeom>
+          <a:noFill/>
+        </p:spPr>
+        <p:txBody>
+          <a:bodyPr vertOverflow="overflow" horzOverflow="overflow" vert="horz" wrap="square" lIns="91440" tIns="45720" rIns="91440" bIns="45720" numCol="1" spcCol="0" rtlCol="0" fromWordArt="0" anchor="ctr" anchorCtr="0" forceAA="0" upright="0" compatLnSpc="0">
+            <a:noAutofit/>
+          </a:bodyPr>
+          <a:p>
+            <a:pPr algn="ctr">
+              <a:defRPr/>
+            </a:pPr>
+            <a:r>
+              <a:rPr lang="it-IT" sz="1400" b="1">
+                <a:solidFill>
+                  <a:schemeClr val="bg1"/>
+                </a:solidFill>
+                <a:latin typeface="Liberation Sans"/>
+                <a:ea typeface="Liberation Sans"/>
+                <a:cs typeface="Liberation Sans"/>
+              </a:rPr>
+              <a:t>Opearting CF</a:t>
+            </a:r>
+            <a:endParaRPr sz="1400" b="1">
+              <a:solidFill>
+                <a:schemeClr val="bg1"/>
+              </a:solidFill>
+              <a:latin typeface="Liberation Sans"/>
+              <a:cs typeface="Liberation Sans"/>
+            </a:endParaRPr>
+          </a:p>
+        </p:txBody>
+      </p:sp>
+      <p:sp>
+        <p:nvSpPr>
+          <p:cNvPr id="2122910770" name="operating_cash_flow_2"/>
+          <p:cNvSpPr txBox="1"/>
+          <p:nvPr/>
+        </p:nvSpPr>
+        <p:spPr bwMode="auto">
+          <a:xfrm rot="0" flipH="0" flipV="0">
+            <a:off x="3454398" y="4800530"/>
+            <a:ext cx="812799" cy="406397"/>
+          </a:xfrm>
+          <a:prstGeom prst="rect">
+            <a:avLst/>
+          </a:prstGeom>
+          <a:noFill/>
+        </p:spPr>
+        <p:txBody>
+          <a:bodyPr vertOverflow="overflow" horzOverflow="overflow" vert="horz" wrap="square" lIns="91440" tIns="45720" rIns="91440" bIns="45720" numCol="1" spcCol="0" rtlCol="0" fromWordArt="0" anchor="ctr" anchorCtr="0" forceAA="0" upright="0" compatLnSpc="0">
+            <a:noAutofit/>
+          </a:bodyPr>
+          <a:p>
+            <a:pPr algn="ctr">
+              <a:defRPr/>
+            </a:pPr>
+            <a:r>
+              <a:rPr lang="it-IT" sz="1400" b="0" i="0" u="none" strike="noStrike" cap="none" spc="0">
+                <a:solidFill>
+                  <a:schemeClr val="tx1"/>
+                </a:solidFill>
+                <a:latin typeface="Liberation Sans"/>
+                <a:ea typeface="Liberation Sans"/>
+                <a:cs typeface="Liberation Sans"/>
+              </a:rPr>
+              <a:t>XX.XB</a:t>
+            </a:r>
+            <a:endParaRPr>
+              <a:solidFill>
+                <a:schemeClr val="tx1"/>
+              </a:solidFill>
+              <a:latin typeface="Liberation Sans"/>
+              <a:cs typeface="Liberation Sans"/>
+            </a:endParaRPr>
+          </a:p>
+        </p:txBody>
+      </p:sp>
+      <p:sp>
+        <p:nvSpPr>
+          <p:cNvPr id="599570348" name="operating_cash_flow_1"/>
+          <p:cNvSpPr txBox="1"/>
+          <p:nvPr/>
+        </p:nvSpPr>
+        <p:spPr bwMode="auto">
+          <a:xfrm rot="0" flipH="0" flipV="0">
+            <a:off x="4470397" y="4800530"/>
+            <a:ext cx="812799" cy="406397"/>
+          </a:xfrm>
+          <a:prstGeom prst="rect">
+            <a:avLst/>
+          </a:prstGeom>
+          <a:noFill/>
+        </p:spPr>
+        <p:txBody>
+          <a:bodyPr vertOverflow="overflow" horzOverflow="overflow" vert="horz" wrap="square" lIns="91440" tIns="45720" rIns="91440" bIns="45720" numCol="1" spcCol="0" rtlCol="0" fromWordArt="0" anchor="ctr" anchorCtr="0" forceAA="0" upright="0" compatLnSpc="0">
+            <a:noAutofit/>
+          </a:bodyPr>
+          <a:p>
+            <a:pPr algn="ctr">
+              <a:defRPr/>
+            </a:pPr>
+            <a:r>
+              <a:rPr lang="it-IT" sz="1400" b="0" i="0" u="none" strike="noStrike" cap="none" spc="0">
+                <a:solidFill>
+                  <a:schemeClr val="tx1"/>
+                </a:solidFill>
+                <a:latin typeface="Liberation Sans"/>
+                <a:ea typeface="Liberation Sans"/>
+                <a:cs typeface="Liberation Sans"/>
+              </a:rPr>
+              <a:t>XX.XB</a:t>
+            </a:r>
+            <a:endParaRPr>
+              <a:solidFill>
+                <a:schemeClr val="tx1"/>
+              </a:solidFill>
+              <a:latin typeface="Liberation Sans"/>
+              <a:cs typeface="Liberation Sans"/>
+            </a:endParaRPr>
+          </a:p>
+        </p:txBody>
+      </p:sp>
+      <p:sp>
+        <p:nvSpPr>
+          <p:cNvPr id="1576519319" name="operating_cash_flow_m"/>
+          <p:cNvSpPr txBox="1"/>
+          <p:nvPr/>
+        </p:nvSpPr>
+        <p:spPr bwMode="auto">
+          <a:xfrm rot="0" flipH="0" flipV="0">
+            <a:off x="5689598" y="4800530"/>
+            <a:ext cx="812799" cy="406396"/>
+          </a:xfrm>
+          <a:prstGeom prst="rect">
+            <a:avLst/>
+          </a:prstGeom>
+          <a:noFill/>
+        </p:spPr>
+        <p:txBody>
+          <a:bodyPr vertOverflow="overflow" horzOverflow="overflow" vert="horz" wrap="square" lIns="91440" tIns="45720" rIns="91440" bIns="45720" numCol="1" spcCol="0" rtlCol="0" fromWordArt="0" anchor="ctr" anchorCtr="0" forceAA="0" upright="0" compatLnSpc="0">
+            <a:noAutofit/>
+          </a:bodyPr>
+          <a:p>
+            <a:pPr algn="ctr">
+              <a:defRPr/>
+            </a:pPr>
+            <a:r>
+              <a:rPr lang="it-IT" sz="1400" b="0" i="0" u="none" strike="noStrike" cap="none" spc="0">
+                <a:solidFill>
+                  <a:schemeClr val="tx1"/>
+                </a:solidFill>
+                <a:latin typeface="Liberation Sans"/>
+                <a:ea typeface="Liberation Sans"/>
+                <a:cs typeface="Liberation Sans"/>
+              </a:rPr>
+              <a:t>X.X%</a:t>
+            </a:r>
+            <a:endParaRPr sz="1400" b="0">
+              <a:solidFill>
+                <a:schemeClr val="tx1"/>
+              </a:solidFill>
+              <a:latin typeface="Liberation Sans"/>
+              <a:cs typeface="Liberation Sans"/>
+            </a:endParaRPr>
+          </a:p>
+        </p:txBody>
+      </p:sp>
+      <p:sp>
+        <p:nvSpPr>
+          <p:cNvPr id="1253344835" name="stock_price"/>
+          <p:cNvSpPr txBox="1"/>
+          <p:nvPr/>
+        </p:nvSpPr>
+        <p:spPr bwMode="auto">
+          <a:xfrm rot="0" flipH="0" flipV="0">
+            <a:off x="6502397" y="4800530"/>
+            <a:ext cx="1015999" cy="406396"/>
+          </a:xfrm>
+          <a:prstGeom prst="rect">
+            <a:avLst/>
+          </a:prstGeom>
+          <a:noFill/>
+        </p:spPr>
+        <p:txBody>
+          <a:bodyPr vertOverflow="overflow" horzOverflow="overflow" vert="horz" wrap="square" lIns="91440" tIns="45720" rIns="91440" bIns="45720" numCol="1" spcCol="0" rtlCol="0" fromWordArt="0" anchor="ctr" anchorCtr="0" forceAA="0" upright="0" compatLnSpc="0">
+            <a:noAutofit/>
+          </a:bodyPr>
+          <a:p>
+            <a:pPr algn="l">
+              <a:defRPr/>
+            </a:pPr>
+            <a:r>
+              <a:rPr lang="it-IT" sz="1200" b="0">
+                <a:solidFill>
+                  <a:schemeClr val="tx1"/>
+                </a:solidFill>
+                <a:latin typeface="Liberation Sans"/>
+                <a:ea typeface="Liberation Sans"/>
+                <a:cs typeface="Liberation Sans"/>
+              </a:rPr>
+              <a:t>of revenue</a:t>
+            </a:r>
+            <a:endParaRPr sz="1200" b="0">
+              <a:solidFill>
+                <a:schemeClr val="tx1"/>
+              </a:solidFill>
+              <a:latin typeface="Liberation Sans"/>
+              <a:cs typeface="Liberation Sans"/>
+            </a:endParaRPr>
+          </a:p>
+        </p:txBody>
+      </p:sp>
+      <p:sp>
+        <p:nvSpPr>
+          <p:cNvPr id="313328945" name="investing_cash_flow_3"/>
+          <p:cNvSpPr txBox="1"/>
+          <p:nvPr/>
+        </p:nvSpPr>
+        <p:spPr bwMode="auto">
+          <a:xfrm rot="0" flipH="0" flipV="0">
+            <a:off x="2438395" y="5232331"/>
+            <a:ext cx="812799" cy="406397"/>
+          </a:xfrm>
+          <a:prstGeom prst="rect">
+            <a:avLst/>
+          </a:prstGeom>
+          <a:noFill/>
+        </p:spPr>
+        <p:txBody>
+          <a:bodyPr vertOverflow="overflow" horzOverflow="overflow" vert="horz" wrap="square" lIns="91440" tIns="45720" rIns="91440" bIns="45720" numCol="1" spcCol="0" rtlCol="0" fromWordArt="0" anchor="ctr" anchorCtr="0" forceAA="0" upright="0" compatLnSpc="0">
+            <a:noAutofit/>
+          </a:bodyPr>
+          <a:p>
+            <a:pPr algn="ctr">
+              <a:defRPr/>
+            </a:pPr>
+            <a:r>
+              <a:rPr lang="it-IT" sz="1400" b="0" i="0" u="none" strike="noStrike" cap="none" spc="0">
+                <a:solidFill>
+                  <a:schemeClr val="tx1"/>
+                </a:solidFill>
+                <a:latin typeface="Liberation Sans"/>
+                <a:ea typeface="Liberation Sans"/>
+                <a:cs typeface="Liberation Sans"/>
+              </a:rPr>
+              <a:t>XX.XB</a:t>
+            </a:r>
+            <a:endParaRPr>
+              <a:solidFill>
+                <a:schemeClr val="tx1"/>
+              </a:solidFill>
+              <a:latin typeface="Liberation Sans"/>
+              <a:cs typeface="Liberation Sans"/>
+            </a:endParaRPr>
+          </a:p>
+        </p:txBody>
+      </p:sp>
+      <p:sp>
+        <p:nvSpPr>
+          <p:cNvPr id="1257300371" name=""/>
+          <p:cNvSpPr txBox="1"/>
+          <p:nvPr/>
+        </p:nvSpPr>
+        <p:spPr bwMode="auto">
+          <a:xfrm rot="0" flipH="0" flipV="0">
+            <a:off x="406400" y="5232331"/>
+            <a:ext cx="1828797" cy="406396"/>
+          </a:xfrm>
+          <a:prstGeom prst="rect">
+            <a:avLst/>
+          </a:prstGeom>
+          <a:noFill/>
+        </p:spPr>
+        <p:txBody>
+          <a:bodyPr vertOverflow="overflow" horzOverflow="overflow" vert="horz" wrap="square" lIns="91440" tIns="45720" rIns="91440" bIns="45720" numCol="1" spcCol="0" rtlCol="0" fromWordArt="0" anchor="ctr" anchorCtr="0" forceAA="0" upright="0" compatLnSpc="0">
+            <a:noAutofit/>
+          </a:bodyPr>
+          <a:p>
+            <a:pPr algn="ctr">
+              <a:defRPr/>
+            </a:pPr>
+            <a:r>
+              <a:rPr lang="it-IT" sz="1400" b="1">
+                <a:solidFill>
+                  <a:schemeClr val="bg1"/>
+                </a:solidFill>
+                <a:latin typeface="Liberation Sans"/>
+                <a:ea typeface="Liberation Sans"/>
+                <a:cs typeface="Liberation Sans"/>
+              </a:rPr>
+              <a:t>Investing CF</a:t>
+            </a:r>
+            <a:endParaRPr sz="1400" b="1">
+              <a:solidFill>
+                <a:schemeClr val="bg1"/>
+              </a:solidFill>
+              <a:latin typeface="Liberation Sans"/>
+              <a:cs typeface="Liberation Sans"/>
+            </a:endParaRPr>
+          </a:p>
+        </p:txBody>
+      </p:sp>
+      <p:sp>
+        <p:nvSpPr>
+          <p:cNvPr id="70168265" name="investing_cash_flow_2"/>
+          <p:cNvSpPr txBox="1"/>
+          <p:nvPr/>
+        </p:nvSpPr>
+        <p:spPr bwMode="auto">
+          <a:xfrm rot="0" flipH="0" flipV="0">
+            <a:off x="3454398" y="5232331"/>
+            <a:ext cx="812799" cy="406397"/>
+          </a:xfrm>
+          <a:prstGeom prst="rect">
+            <a:avLst/>
+          </a:prstGeom>
+          <a:noFill/>
+        </p:spPr>
+        <p:txBody>
+          <a:bodyPr vertOverflow="overflow" horzOverflow="overflow" vert="horz" wrap="square" lIns="91440" tIns="45720" rIns="91440" bIns="45720" numCol="1" spcCol="0" rtlCol="0" fromWordArt="0" anchor="ctr" anchorCtr="0" forceAA="0" upright="0" compatLnSpc="0">
+            <a:noAutofit/>
+          </a:bodyPr>
+          <a:p>
+            <a:pPr algn="ctr">
+              <a:defRPr/>
+            </a:pPr>
+            <a:r>
+              <a:rPr lang="it-IT" sz="1400" b="0" i="0" u="none" strike="noStrike" cap="none" spc="0">
+                <a:solidFill>
+                  <a:schemeClr val="tx1"/>
+                </a:solidFill>
+                <a:latin typeface="Liberation Sans"/>
+                <a:ea typeface="Liberation Sans"/>
+                <a:cs typeface="Liberation Sans"/>
+              </a:rPr>
+              <a:t>XX.XB</a:t>
+            </a:r>
+            <a:endParaRPr>
+              <a:solidFill>
+                <a:schemeClr val="tx1"/>
+              </a:solidFill>
+              <a:latin typeface="Liberation Sans"/>
+              <a:cs typeface="Liberation Sans"/>
+            </a:endParaRPr>
+          </a:p>
+        </p:txBody>
+      </p:sp>
+      <p:sp>
+        <p:nvSpPr>
+          <p:cNvPr id="2098840917" name="investing_cash_flow_1"/>
+          <p:cNvSpPr txBox="1"/>
+          <p:nvPr/>
+        </p:nvSpPr>
+        <p:spPr bwMode="auto">
+          <a:xfrm rot="0" flipH="0" flipV="0">
+            <a:off x="4470397" y="5232331"/>
+            <a:ext cx="812799" cy="406397"/>
+          </a:xfrm>
+          <a:prstGeom prst="rect">
+            <a:avLst/>
+          </a:prstGeom>
+          <a:noFill/>
+        </p:spPr>
+        <p:txBody>
+          <a:bodyPr vertOverflow="overflow" horzOverflow="overflow" vert="horz" wrap="square" lIns="91440" tIns="45720" rIns="91440" bIns="45720" numCol="1" spcCol="0" rtlCol="0" fromWordArt="0" anchor="ctr" anchorCtr="0" forceAA="0" upright="0" compatLnSpc="0">
+            <a:noAutofit/>
+          </a:bodyPr>
+          <a:p>
+            <a:pPr algn="ctr">
+              <a:defRPr/>
+            </a:pPr>
+            <a:r>
+              <a:rPr lang="it-IT" sz="1400" b="0" i="0" u="none" strike="noStrike" cap="none" spc="0">
+                <a:solidFill>
+                  <a:schemeClr val="tx1"/>
+                </a:solidFill>
+                <a:latin typeface="Liberation Sans"/>
+                <a:ea typeface="Liberation Sans"/>
+                <a:cs typeface="Liberation Sans"/>
+              </a:rPr>
+              <a:t>XX.XB</a:t>
+            </a:r>
+            <a:endParaRPr>
+              <a:solidFill>
+                <a:schemeClr val="tx1"/>
+              </a:solidFill>
+              <a:latin typeface="Liberation Sans"/>
+              <a:cs typeface="Liberation Sans"/>
+            </a:endParaRPr>
+          </a:p>
+        </p:txBody>
+      </p:sp>
+      <p:sp>
+        <p:nvSpPr>
+          <p:cNvPr id="1467057746" name="investing_cash_flow_m"/>
+          <p:cNvSpPr txBox="1"/>
+          <p:nvPr/>
+        </p:nvSpPr>
+        <p:spPr bwMode="auto">
+          <a:xfrm rot="0" flipH="0" flipV="0">
+            <a:off x="5689598" y="5232331"/>
+            <a:ext cx="812799" cy="406396"/>
+          </a:xfrm>
+          <a:prstGeom prst="rect">
+            <a:avLst/>
+          </a:prstGeom>
+          <a:noFill/>
+        </p:spPr>
+        <p:txBody>
+          <a:bodyPr vertOverflow="overflow" horzOverflow="overflow" vert="horz" wrap="square" lIns="91440" tIns="45720" rIns="91440" bIns="45720" numCol="1" spcCol="0" rtlCol="0" fromWordArt="0" anchor="ctr" anchorCtr="0" forceAA="0" upright="0" compatLnSpc="0">
+            <a:noAutofit/>
+          </a:bodyPr>
+          <a:p>
+            <a:pPr algn="ctr">
+              <a:defRPr/>
+            </a:pPr>
+            <a:r>
+              <a:rPr lang="it-IT" sz="1400" b="0" i="0" u="none" strike="noStrike" cap="none" spc="0">
+                <a:solidFill>
+                  <a:schemeClr val="tx1"/>
+                </a:solidFill>
+                <a:latin typeface="Liberation Sans"/>
+                <a:ea typeface="Liberation Sans"/>
+                <a:cs typeface="Liberation Sans"/>
+              </a:rPr>
+              <a:t>X.X%</a:t>
+            </a:r>
+            <a:endParaRPr sz="1400" b="0">
+              <a:solidFill>
+                <a:schemeClr val="tx1"/>
+              </a:solidFill>
+              <a:latin typeface="Liberation Sans"/>
+              <a:cs typeface="Liberation Sans"/>
+            </a:endParaRPr>
+          </a:p>
+        </p:txBody>
+      </p:sp>
+      <p:sp>
+        <p:nvSpPr>
+          <p:cNvPr id="939470111" name="analyst_rating"/>
+          <p:cNvSpPr txBox="1"/>
+          <p:nvPr/>
+        </p:nvSpPr>
+        <p:spPr bwMode="auto">
+          <a:xfrm rot="0" flipH="0" flipV="0">
+            <a:off x="6502397" y="5232332"/>
+            <a:ext cx="1015999" cy="406396"/>
+          </a:xfrm>
+          <a:prstGeom prst="rect">
+            <a:avLst/>
+          </a:prstGeom>
+          <a:noFill/>
+        </p:spPr>
+        <p:txBody>
+          <a:bodyPr vertOverflow="overflow" horzOverflow="overflow" vert="horz" wrap="square" lIns="91440" tIns="45720" rIns="91440" bIns="45720" numCol="1" spcCol="0" rtlCol="0" fromWordArt="0" anchor="ctr" anchorCtr="0" forceAA="0" upright="0" compatLnSpc="0">
+            <a:noAutofit/>
+          </a:bodyPr>
+          <a:p>
+            <a:pPr algn="l">
+              <a:defRPr/>
+            </a:pPr>
+            <a:r>
+              <a:rPr lang="it-IT" sz="1200" b="0">
+                <a:solidFill>
+                  <a:schemeClr val="tx1"/>
+                </a:solidFill>
+                <a:latin typeface="Liberation Sans"/>
+                <a:ea typeface="Liberation Sans"/>
+                <a:cs typeface="Liberation Sans"/>
+              </a:rPr>
+              <a:t>of revenue</a:t>
+            </a:r>
+            <a:endParaRPr sz="1200" b="0">
+              <a:solidFill>
+                <a:schemeClr val="tx1"/>
+              </a:solidFill>
+              <a:latin typeface="Liberation Sans"/>
+              <a:cs typeface="Liberation Sans"/>
+            </a:endParaRPr>
+          </a:p>
+        </p:txBody>
+      </p:sp>
+      <p:sp>
+        <p:nvSpPr>
+          <p:cNvPr id="347780473" name=""/>
+          <p:cNvSpPr txBox="1"/>
+          <p:nvPr/>
+        </p:nvSpPr>
+        <p:spPr bwMode="auto">
+          <a:xfrm rot="0" flipH="0" flipV="0">
+            <a:off x="406400" y="5664198"/>
+            <a:ext cx="1828797" cy="406396"/>
+          </a:xfrm>
+          <a:prstGeom prst="rect">
+            <a:avLst/>
+          </a:prstGeom>
+          <a:noFill/>
+        </p:spPr>
+        <p:txBody>
+          <a:bodyPr vertOverflow="overflow" horzOverflow="overflow" vert="horz" wrap="square" lIns="91440" tIns="45720" rIns="91440" bIns="45720" numCol="1" spcCol="0" rtlCol="0" fromWordArt="0" anchor="ctr" anchorCtr="0" forceAA="0" upright="0" compatLnSpc="0">
+            <a:noAutofit/>
+          </a:bodyPr>
+          <a:p>
+            <a:pPr algn="ctr">
+              <a:defRPr/>
+            </a:pPr>
+            <a:r>
+              <a:rPr lang="it-IT" sz="1400" b="1">
+                <a:solidFill>
+                  <a:schemeClr val="bg1"/>
+                </a:solidFill>
+                <a:latin typeface="Liberation Sans"/>
+                <a:ea typeface="Liberation Sans"/>
+                <a:cs typeface="Liberation Sans"/>
+              </a:rPr>
+              <a:t>Free cash flow</a:t>
+            </a:r>
+            <a:endParaRPr sz="1400" b="1">
+              <a:solidFill>
+                <a:schemeClr val="bg1"/>
+              </a:solidFill>
+              <a:latin typeface="Liberation Sans"/>
+              <a:cs typeface="Liberation Sans"/>
+            </a:endParaRPr>
+          </a:p>
+        </p:txBody>
+      </p:sp>
+      <p:sp>
+        <p:nvSpPr>
+          <p:cNvPr id="1373723498" name="free_cash_flow_3"/>
+          <p:cNvSpPr txBox="1"/>
+          <p:nvPr/>
+        </p:nvSpPr>
+        <p:spPr bwMode="auto">
+          <a:xfrm rot="0" flipH="0" flipV="0">
+            <a:off x="2438395" y="5664198"/>
+            <a:ext cx="812799" cy="406397"/>
+          </a:xfrm>
+          <a:prstGeom prst="rect">
+            <a:avLst/>
+          </a:prstGeom>
+          <a:noFill/>
+        </p:spPr>
+        <p:txBody>
+          <a:bodyPr vertOverflow="overflow" horzOverflow="overflow" vert="horz" wrap="square" lIns="91440" tIns="45720" rIns="91440" bIns="45720" numCol="1" spcCol="0" rtlCol="0" fromWordArt="0" anchor="ctr" anchorCtr="0" forceAA="0" upright="0" compatLnSpc="0">
+            <a:noAutofit/>
+          </a:bodyPr>
+          <a:p>
+            <a:pPr algn="ctr">
+              <a:defRPr/>
+            </a:pPr>
+            <a:r>
+              <a:rPr lang="it-IT" sz="1400" b="0" i="0" u="none" strike="noStrike" cap="none" spc="0">
+                <a:solidFill>
+                  <a:schemeClr val="tx1"/>
+                </a:solidFill>
+                <a:latin typeface="Liberation Sans"/>
+                <a:ea typeface="Liberation Sans"/>
+                <a:cs typeface="Liberation Sans"/>
+              </a:rPr>
+              <a:t>XX.XB</a:t>
+            </a:r>
+            <a:endParaRPr>
+              <a:solidFill>
+                <a:schemeClr val="tx1"/>
+              </a:solidFill>
+              <a:latin typeface="Liberation Sans"/>
+              <a:cs typeface="Liberation Sans"/>
+            </a:endParaRPr>
+          </a:p>
+        </p:txBody>
+      </p:sp>
+      <p:sp>
+        <p:nvSpPr>
+          <p:cNvPr id="72698928" name="free_cash_flow_2"/>
+          <p:cNvSpPr txBox="1"/>
+          <p:nvPr/>
+        </p:nvSpPr>
+        <p:spPr bwMode="auto">
+          <a:xfrm rot="0" flipH="0" flipV="0">
+            <a:off x="3454398" y="5664198"/>
+            <a:ext cx="812799" cy="406397"/>
+          </a:xfrm>
+          <a:prstGeom prst="rect">
+            <a:avLst/>
+          </a:prstGeom>
+          <a:noFill/>
+        </p:spPr>
+        <p:txBody>
+          <a:bodyPr vertOverflow="overflow" horzOverflow="overflow" vert="horz" wrap="square" lIns="91440" tIns="45720" rIns="91440" bIns="45720" numCol="1" spcCol="0" rtlCol="0" fromWordArt="0" anchor="ctr" anchorCtr="0" forceAA="0" upright="0" compatLnSpc="0">
+            <a:noAutofit/>
+          </a:bodyPr>
+          <a:p>
+            <a:pPr algn="ctr">
+              <a:defRPr/>
+            </a:pPr>
+            <a:r>
+              <a:rPr lang="it-IT" sz="1400" b="0" i="0" u="none" strike="noStrike" cap="none" spc="0">
+                <a:solidFill>
+                  <a:schemeClr val="tx1"/>
+                </a:solidFill>
+                <a:latin typeface="Liberation Sans"/>
+                <a:ea typeface="Liberation Sans"/>
+                <a:cs typeface="Liberation Sans"/>
+              </a:rPr>
+              <a:t>XX.XB</a:t>
+            </a:r>
+            <a:endParaRPr>
+              <a:solidFill>
+                <a:schemeClr val="tx1"/>
+              </a:solidFill>
+              <a:latin typeface="Liberation Sans"/>
+              <a:cs typeface="Liberation Sans"/>
+            </a:endParaRPr>
+          </a:p>
+        </p:txBody>
+      </p:sp>
+      <p:sp>
+        <p:nvSpPr>
+          <p:cNvPr id="63053690" name="free_cash_flow_1"/>
+          <p:cNvSpPr txBox="1"/>
+          <p:nvPr/>
+        </p:nvSpPr>
+        <p:spPr bwMode="auto">
+          <a:xfrm rot="0" flipH="0" flipV="0">
+            <a:off x="4470397" y="5664198"/>
+            <a:ext cx="812799" cy="406397"/>
+          </a:xfrm>
+          <a:prstGeom prst="rect">
+            <a:avLst/>
+          </a:prstGeom>
+          <a:noFill/>
+        </p:spPr>
+        <p:txBody>
+          <a:bodyPr vertOverflow="overflow" horzOverflow="overflow" vert="horz" wrap="square" lIns="91440" tIns="45720" rIns="91440" bIns="45720" numCol="1" spcCol="0" rtlCol="0" fromWordArt="0" anchor="ctr" anchorCtr="0" forceAA="0" upright="0" compatLnSpc="0">
+            <a:noAutofit/>
+          </a:bodyPr>
+          <a:p>
+            <a:pPr algn="ctr">
+              <a:defRPr/>
+            </a:pPr>
+            <a:r>
+              <a:rPr lang="it-IT" sz="1400" b="0" i="0" u="none" strike="noStrike" cap="none" spc="0">
+                <a:solidFill>
+                  <a:schemeClr val="tx1"/>
+                </a:solidFill>
+                <a:latin typeface="Liberation Sans"/>
+                <a:ea typeface="Liberation Sans"/>
+                <a:cs typeface="Liberation Sans"/>
+              </a:rPr>
+              <a:t>XX.XB</a:t>
+            </a:r>
+            <a:endParaRPr>
+              <a:solidFill>
+                <a:schemeClr val="tx1"/>
+              </a:solidFill>
+              <a:latin typeface="Liberation Sans"/>
+              <a:cs typeface="Liberation Sans"/>
+            </a:endParaRPr>
+          </a:p>
+        </p:txBody>
+      </p:sp>
+      <p:sp>
+        <p:nvSpPr>
+          <p:cNvPr id="1912630732" name="free_cash_flow_m"/>
+          <p:cNvSpPr txBox="1"/>
+          <p:nvPr/>
+        </p:nvSpPr>
+        <p:spPr bwMode="auto">
+          <a:xfrm rot="0" flipH="0" flipV="0">
+            <a:off x="5689598" y="5664198"/>
+            <a:ext cx="812799" cy="406396"/>
+          </a:xfrm>
+          <a:prstGeom prst="rect">
+            <a:avLst/>
+          </a:prstGeom>
+          <a:noFill/>
+        </p:spPr>
+        <p:txBody>
+          <a:bodyPr vertOverflow="overflow" horzOverflow="overflow" vert="horz" wrap="square" lIns="91440" tIns="45720" rIns="91440" bIns="45720" numCol="1" spcCol="0" rtlCol="0" fromWordArt="0" anchor="ctr" anchorCtr="0" forceAA="0" upright="0" compatLnSpc="0">
+            <a:noAutofit/>
+          </a:bodyPr>
+          <a:p>
+            <a:pPr algn="ctr">
+              <a:defRPr/>
+            </a:pPr>
+            <a:r>
+              <a:rPr lang="it-IT" sz="1400" b="0" i="0" u="none" strike="noStrike" cap="none" spc="0">
+                <a:solidFill>
+                  <a:schemeClr val="tx1"/>
+                </a:solidFill>
+                <a:latin typeface="Liberation Sans"/>
+                <a:ea typeface="Liberation Sans"/>
+                <a:cs typeface="Liberation Sans"/>
+              </a:rPr>
+              <a:t>X.X%</a:t>
+            </a:r>
+            <a:endParaRPr sz="1400" b="0">
+              <a:solidFill>
+                <a:schemeClr val="tx1"/>
+              </a:solidFill>
+              <a:latin typeface="Liberation Sans"/>
+              <a:cs typeface="Liberation Sans"/>
+            </a:endParaRPr>
+          </a:p>
+        </p:txBody>
+      </p:sp>
+      <p:sp>
+        <p:nvSpPr>
+          <p:cNvPr id="403836670" name="beta"/>
+          <p:cNvSpPr txBox="1"/>
+          <p:nvPr/>
+        </p:nvSpPr>
+        <p:spPr bwMode="auto">
+          <a:xfrm rot="0" flipH="0" flipV="0">
+            <a:off x="6502397" y="5664200"/>
+            <a:ext cx="1015999" cy="406396"/>
+          </a:xfrm>
+          <a:prstGeom prst="rect">
+            <a:avLst/>
+          </a:prstGeom>
+          <a:noFill/>
+        </p:spPr>
+        <p:txBody>
+          <a:bodyPr vertOverflow="overflow" horzOverflow="overflow" vert="horz" wrap="square" lIns="91440" tIns="45720" rIns="91440" bIns="45720" numCol="1" spcCol="0" rtlCol="0" fromWordArt="0" anchor="ctr" anchorCtr="0" forceAA="0" upright="0" compatLnSpc="0">
+            <a:noAutofit/>
+          </a:bodyPr>
+          <a:p>
+            <a:pPr algn="l">
+              <a:defRPr/>
+            </a:pPr>
+            <a:r>
+              <a:rPr lang="it-IT" sz="1200" b="0">
+                <a:solidFill>
+                  <a:schemeClr val="tx1"/>
+                </a:solidFill>
+                <a:latin typeface="Liberation Sans"/>
+                <a:ea typeface="Liberation Sans"/>
+                <a:cs typeface="Liberation Sans"/>
+              </a:rPr>
+              <a:t>growth</a:t>
+            </a:r>
+            <a:endParaRPr sz="1200" b="0">
+              <a:solidFill>
+                <a:schemeClr val="tx1"/>
+              </a:solidFill>
+              <a:latin typeface="Liberation Sans"/>
+              <a:cs typeface="Liberation Sans"/>
+            </a:endParaRPr>
+          </a:p>
+        </p:txBody>
+      </p:sp>
       <p:grpSp>
         <p:nvGrpSpPr>
-          <p:cNvPr id="1118741245" name=""/>
-          <p:cNvGrpSpPr/>
-          <p:nvPr/>
-        </p:nvGrpSpPr>
-        <p:grpSpPr bwMode="auto">
-          <a:xfrm>
-            <a:off x="7721598" y="1803399"/>
-            <a:ext cx="4063996" cy="1219198"/>
-            <a:chOff x="0" y="0"/>
-            <a:chExt cx="4063996" cy="1219198"/>
-          </a:xfrm>
-        </p:grpSpPr>
-        <p:sp>
-          <p:nvSpPr>
-            <p:cNvPr id="754968806" name=""/>
-            <p:cNvSpPr/>
-            <p:nvPr/>
-          </p:nvSpPr>
-          <p:spPr bwMode="auto">
-            <a:xfrm rot="0" flipH="0" flipV="0">
-              <a:off x="0" y="0"/>
-              <a:ext cx="406400" cy="1219198"/>
-            </a:xfrm>
-            <a:prstGeom prst="rect">
-              <a:avLst/>
-            </a:prstGeom>
-            <a:gradFill>
-              <a:gsLst>
-                <a:gs pos="0">
-                  <a:schemeClr val="tx1"/>
-                </a:gs>
-                <a:gs pos="100000">
-                  <a:schemeClr val="tx1">
-                    <a:lumMod val="65000"/>
-                    <a:lumOff val="35000"/>
-                  </a:schemeClr>
-                </a:gs>
-              </a:gsLst>
-              <a:lin ang="2700000" scaled="1"/>
-            </a:gradFill>
-            <a:ln w="12700" cap="flat" cmpd="sng" algn="ctr">
-              <a:solidFill>
-                <a:schemeClr val="tx1"/>
-              </a:solidFill>
-              <a:prstDash val="solid"/>
-              <a:miter lim="800000"/>
-            </a:ln>
-          </p:spPr>
-          <p:style>
-            <a:lnRef idx="2">
-              <a:schemeClr val="accent1">
-                <a:shade val="50000"/>
-              </a:schemeClr>
-            </a:lnRef>
-            <a:fillRef idx="1">
-              <a:schemeClr val="accent1"/>
-            </a:fillRef>
-            <a:effectRef idx="0">
-              <a:schemeClr val="accent1"/>
-            </a:effectRef>
-            <a:fontRef idx="minor">
-              <a:schemeClr val="lt1"/>
-            </a:fontRef>
-          </p:style>
-          <p:txBody>
-            <a:bodyPr/>
-            <a:p>
-              <a:pPr>
-                <a:defRPr/>
-              </a:pPr>
-              <a:endParaRPr>
-                <a:latin typeface="Liberation Sans"/>
-                <a:cs typeface="Liberation Sans"/>
-              </a:endParaRPr>
-            </a:p>
-          </p:txBody>
-        </p:sp>
-        <p:sp>
-          <p:nvSpPr>
-            <p:cNvPr id="989363525" name="comment_1"/>
-            <p:cNvSpPr/>
-            <p:nvPr/>
-          </p:nvSpPr>
-          <p:spPr bwMode="auto">
-            <a:xfrm rot="0" flipH="0" flipV="0">
-              <a:off x="406400" y="0"/>
-              <a:ext cx="3657595" cy="1219198"/>
-            </a:xfrm>
-            <a:prstGeom prst="rect">
-              <a:avLst/>
-            </a:prstGeom>
-            <a:gradFill>
-              <a:gsLst>
-                <a:gs pos="0">
-                  <a:schemeClr val="bg1"/>
-                </a:gs>
-                <a:gs pos="100000">
-                  <a:schemeClr val="bg1">
-                    <a:lumMod val="85000"/>
-                  </a:schemeClr>
-                </a:gs>
-              </a:gsLst>
-              <a:lin ang="2700000" scaled="1"/>
-            </a:gradFill>
-            <a:ln w="12700" cap="flat" cmpd="sng" algn="ctr">
-              <a:solidFill>
-                <a:schemeClr val="tx1"/>
-              </a:solidFill>
-              <a:prstDash val="solid"/>
-              <a:miter lim="800000"/>
-            </a:ln>
-          </p:spPr>
-          <p:style>
-            <a:lnRef idx="2">
-              <a:schemeClr val="accent1">
-                <a:shade val="50000"/>
-              </a:schemeClr>
-            </a:lnRef>
-            <a:fillRef idx="1">
-              <a:schemeClr val="accent1"/>
-            </a:fillRef>
-            <a:effectRef idx="0">
-              <a:schemeClr val="accent1"/>
-            </a:effectRef>
-            <a:fontRef idx="minor">
-              <a:schemeClr val="lt1"/>
-            </a:fontRef>
-          </p:style>
-          <p:txBody>
-            <a:bodyPr vertOverflow="overflow" horzOverflow="overflow" vert="horz" wrap="square" lIns="91440" tIns="45720" rIns="91440" bIns="45720" numCol="1" spcCol="0" rtlCol="0" fromWordArt="0" anchor="ctr" anchorCtr="0" forceAA="0" upright="0" compatLnSpc="0"/>
-            <a:p>
-              <a:pPr algn="l">
-                <a:defRPr/>
-              </a:pPr>
-              <a:r>
-                <a:rPr lang="it-IT" sz="1600" b="0" i="0" u="none" strike="noStrike" cap="none" spc="0">
-                  <a:solidFill>
-                    <a:schemeClr val="tx1"/>
-                  </a:solidFill>
-                  <a:latin typeface="Liberation Sans"/>
-                  <a:ea typeface="Liberation Sans"/>
-                  <a:cs typeface="Liberation Sans"/>
-                </a:rPr>
-                <a:t>Lorem ipsum dolor sit amet, consectetur adipiscing elit. Maecenas sed turpis ante.</a:t>
-              </a:r>
-              <a:endParaRPr sz="1600">
-                <a:solidFill>
-                  <a:schemeClr val="tx1"/>
-                </a:solidFill>
-                <a:latin typeface="Liberation Sans"/>
-                <a:cs typeface="Liberation Sans"/>
-              </a:endParaRPr>
-            </a:p>
-          </p:txBody>
-        </p:sp>
-      </p:grpSp>
-      <p:grpSp>
-        <p:nvGrpSpPr>
-          <p:cNvPr id="302005866" name=""/>
-          <p:cNvGrpSpPr/>
-          <p:nvPr/>
-        </p:nvGrpSpPr>
-        <p:grpSpPr bwMode="auto">
-          <a:xfrm>
-            <a:off x="7721598" y="3327399"/>
-            <a:ext cx="4063996" cy="1219198"/>
-            <a:chOff x="0" y="0"/>
-            <a:chExt cx="4063996" cy="1219198"/>
-          </a:xfrm>
-        </p:grpSpPr>
-        <p:sp>
-          <p:nvSpPr>
-            <p:cNvPr id="1601369363" name=""/>
-            <p:cNvSpPr/>
-            <p:nvPr/>
-          </p:nvSpPr>
-          <p:spPr bwMode="auto">
-            <a:xfrm rot="0" flipH="0" flipV="0">
-              <a:off x="0" y="0"/>
-              <a:ext cx="406400" cy="1219198"/>
-            </a:xfrm>
-            <a:prstGeom prst="rect">
-              <a:avLst/>
-            </a:prstGeom>
-            <a:gradFill>
-              <a:gsLst>
-                <a:gs pos="0">
-                  <a:schemeClr val="tx1"/>
-                </a:gs>
-                <a:gs pos="100000">
-                  <a:schemeClr val="tx1">
-                    <a:lumMod val="65000"/>
-                    <a:lumOff val="35000"/>
-                  </a:schemeClr>
-                </a:gs>
-              </a:gsLst>
-              <a:lin ang="2700000" scaled="1"/>
-            </a:gradFill>
-            <a:ln w="12700" cap="flat" cmpd="sng" algn="ctr">
-              <a:solidFill>
-                <a:schemeClr val="tx1"/>
-              </a:solidFill>
-              <a:prstDash val="solid"/>
-              <a:miter lim="800000"/>
-            </a:ln>
-          </p:spPr>
-          <p:style>
-            <a:lnRef idx="2">
-              <a:schemeClr val="accent1">
-                <a:shade val="50000"/>
-              </a:schemeClr>
-            </a:lnRef>
-            <a:fillRef idx="1">
-              <a:schemeClr val="accent1"/>
-            </a:fillRef>
-            <a:effectRef idx="0">
-              <a:schemeClr val="accent1"/>
-            </a:effectRef>
-            <a:fontRef idx="minor">
-              <a:schemeClr val="lt1"/>
-            </a:fontRef>
-          </p:style>
-          <p:txBody>
-            <a:bodyPr/>
-            <a:p>
-              <a:pPr>
-                <a:defRPr/>
-              </a:pPr>
-              <a:endParaRPr>
-                <a:latin typeface="Liberation Sans"/>
-                <a:cs typeface="Liberation Sans"/>
-              </a:endParaRPr>
-            </a:p>
-          </p:txBody>
-        </p:sp>
-        <p:sp>
-          <p:nvSpPr>
-            <p:cNvPr id="1133331760" name="comment_2"/>
-            <p:cNvSpPr/>
-            <p:nvPr/>
-          </p:nvSpPr>
-          <p:spPr bwMode="auto">
-            <a:xfrm rot="0" flipH="0" flipV="0">
-              <a:off x="406400" y="0"/>
-              <a:ext cx="3657595" cy="1219198"/>
-            </a:xfrm>
-            <a:prstGeom prst="rect">
-              <a:avLst/>
-            </a:prstGeom>
-            <a:gradFill>
-              <a:gsLst>
-                <a:gs pos="0">
-                  <a:schemeClr val="bg1"/>
-                </a:gs>
-                <a:gs pos="100000">
-                  <a:schemeClr val="bg1">
-                    <a:lumMod val="85000"/>
-                  </a:schemeClr>
-                </a:gs>
-              </a:gsLst>
-              <a:lin ang="2700000" scaled="1"/>
-            </a:gradFill>
-            <a:ln w="12700" cap="flat" cmpd="sng" algn="ctr">
-              <a:solidFill>
-                <a:schemeClr val="tx1"/>
-              </a:solidFill>
-              <a:prstDash val="solid"/>
-              <a:miter lim="800000"/>
-            </a:ln>
-          </p:spPr>
-          <p:style>
-            <a:lnRef idx="2">
-              <a:schemeClr val="accent1">
-                <a:shade val="50000"/>
-              </a:schemeClr>
-            </a:lnRef>
-            <a:fillRef idx="1">
-              <a:schemeClr val="accent1"/>
-            </a:fillRef>
-            <a:effectRef idx="0">
-              <a:schemeClr val="accent1"/>
-            </a:effectRef>
-            <a:fontRef idx="minor">
-              <a:schemeClr val="lt1"/>
-            </a:fontRef>
-          </p:style>
-          <p:txBody>
-            <a:bodyPr vertOverflow="overflow" horzOverflow="overflow" vert="horz" wrap="square" lIns="91440" tIns="45720" rIns="91440" bIns="45720" numCol="1" spcCol="0" rtlCol="0" fromWordArt="0" anchor="ctr" anchorCtr="0" forceAA="0" upright="0" compatLnSpc="0"/>
-            <a:p>
-              <a:pPr algn="l">
-                <a:defRPr/>
-              </a:pPr>
-              <a:r>
-                <a:rPr lang="it-IT" sz="1600" b="0" i="0" u="none" strike="noStrike" cap="none" spc="0">
-                  <a:solidFill>
-                    <a:schemeClr val="tx1"/>
-                  </a:solidFill>
-                  <a:latin typeface="Liberation Sans"/>
-                  <a:ea typeface="Liberation Sans"/>
-                  <a:cs typeface="Liberation Sans"/>
-                </a:rPr>
-                <a:t>Lorem ipsum dolor sit amet, consectetur adipiscing elit. Maecenas sed turpis ante.</a:t>
-              </a:r>
-              <a:endParaRPr sz="1600">
-                <a:solidFill>
-                  <a:schemeClr val="tx1"/>
-                </a:solidFill>
-                <a:latin typeface="Liberation Sans"/>
-                <a:cs typeface="Liberation Sans"/>
-              </a:endParaRPr>
-            </a:p>
-          </p:txBody>
-        </p:sp>
-      </p:grpSp>
-      <p:grpSp>
-        <p:nvGrpSpPr>
-          <p:cNvPr id="124309868" name=""/>
-          <p:cNvGrpSpPr/>
-          <p:nvPr/>
-        </p:nvGrpSpPr>
-        <p:grpSpPr bwMode="auto">
-          <a:xfrm>
-            <a:off x="7721598" y="4851399"/>
-            <a:ext cx="4063996" cy="1219199"/>
-            <a:chOff x="0" y="0"/>
-            <a:chExt cx="4063996" cy="1219199"/>
-          </a:xfrm>
-        </p:grpSpPr>
-        <p:sp>
-          <p:nvSpPr>
-            <p:cNvPr id="65443009" name=""/>
-            <p:cNvSpPr/>
-            <p:nvPr/>
-          </p:nvSpPr>
-          <p:spPr bwMode="auto">
-            <a:xfrm rot="0" flipH="0" flipV="0">
-              <a:off x="0" y="0"/>
-              <a:ext cx="406400" cy="1219198"/>
-            </a:xfrm>
-            <a:prstGeom prst="rect">
-              <a:avLst/>
-            </a:prstGeom>
-            <a:gradFill>
-              <a:gsLst>
-                <a:gs pos="0">
-                  <a:schemeClr val="tx1"/>
-                </a:gs>
-                <a:gs pos="100000">
-                  <a:schemeClr val="tx1">
-                    <a:lumMod val="65000"/>
-                    <a:lumOff val="35000"/>
-                  </a:schemeClr>
-                </a:gs>
-              </a:gsLst>
-              <a:lin ang="2700000" scaled="1"/>
-            </a:gradFill>
-            <a:ln w="12700" cap="flat" cmpd="sng" algn="ctr">
-              <a:solidFill>
-                <a:schemeClr val="tx1"/>
-              </a:solidFill>
-              <a:prstDash val="solid"/>
-              <a:miter lim="800000"/>
-            </a:ln>
-          </p:spPr>
-          <p:style>
-            <a:lnRef idx="2">
-              <a:schemeClr val="accent1">
-                <a:shade val="50000"/>
-              </a:schemeClr>
-            </a:lnRef>
-            <a:fillRef idx="1">
-              <a:schemeClr val="accent1"/>
-            </a:fillRef>
-            <a:effectRef idx="0">
-              <a:schemeClr val="accent1"/>
-            </a:effectRef>
-            <a:fontRef idx="minor">
-              <a:schemeClr val="lt1"/>
-            </a:fontRef>
-          </p:style>
-          <p:txBody>
-            <a:bodyPr/>
-            <a:p>
-              <a:pPr>
-                <a:defRPr/>
-              </a:pPr>
-              <a:endParaRPr>
-                <a:latin typeface="Liberation Sans"/>
-                <a:cs typeface="Liberation Sans"/>
-              </a:endParaRPr>
-            </a:p>
-          </p:txBody>
-        </p:sp>
-        <p:sp>
-          <p:nvSpPr>
-            <p:cNvPr id="897359343" name="comment_3"/>
-            <p:cNvSpPr/>
-            <p:nvPr/>
-          </p:nvSpPr>
-          <p:spPr bwMode="auto">
-            <a:xfrm rot="0" flipH="0" flipV="0">
-              <a:off x="406400" y="0"/>
-              <a:ext cx="3657595" cy="1219198"/>
-            </a:xfrm>
-            <a:prstGeom prst="rect">
-              <a:avLst/>
-            </a:prstGeom>
-            <a:gradFill>
-              <a:gsLst>
-                <a:gs pos="0">
-                  <a:schemeClr val="bg1"/>
-                </a:gs>
-                <a:gs pos="100000">
-                  <a:schemeClr val="bg1">
-                    <a:lumMod val="85000"/>
-                  </a:schemeClr>
-                </a:gs>
-              </a:gsLst>
-              <a:lin ang="2700000" scaled="1"/>
-            </a:gradFill>
-            <a:ln w="12700" cap="flat" cmpd="sng" algn="ctr">
-              <a:solidFill>
-                <a:schemeClr val="tx1"/>
-              </a:solidFill>
-              <a:prstDash val="solid"/>
-              <a:miter lim="800000"/>
-            </a:ln>
-          </p:spPr>
-          <p:style>
-            <a:lnRef idx="2">
-              <a:schemeClr val="accent1">
-                <a:shade val="50000"/>
-              </a:schemeClr>
-            </a:lnRef>
-            <a:fillRef idx="1">
-              <a:schemeClr val="accent1"/>
-            </a:fillRef>
-            <a:effectRef idx="0">
-              <a:schemeClr val="accent1"/>
-            </a:effectRef>
-            <a:fontRef idx="minor">
-              <a:schemeClr val="lt1"/>
-            </a:fontRef>
-          </p:style>
-          <p:txBody>
-            <a:bodyPr vertOverflow="overflow" horzOverflow="overflow" vert="horz" wrap="square" lIns="91440" tIns="45720" rIns="91440" bIns="45720" numCol="1" spcCol="0" rtlCol="0" fromWordArt="0" anchor="ctr" anchorCtr="0" forceAA="0" upright="0" compatLnSpc="0"/>
-            <a:p>
-              <a:pPr algn="l">
-                <a:defRPr/>
-              </a:pPr>
-              <a:r>
-                <a:rPr lang="it-IT" sz="1600" b="0" i="0" u="none" strike="noStrike" cap="none" spc="0">
-                  <a:solidFill>
-                    <a:schemeClr val="tx1"/>
-                  </a:solidFill>
-                  <a:latin typeface="Liberation Sans"/>
-                  <a:ea typeface="Liberation Sans"/>
-                  <a:cs typeface="Liberation Sans"/>
-                </a:rPr>
-                <a:t>Lorem ipsum dolor sit amet, consectetur adipiscing elit. Maecenas sed turpis ante.</a:t>
-              </a:r>
-              <a:endParaRPr sz="1600">
-                <a:solidFill>
-                  <a:schemeClr val="tx1"/>
-                </a:solidFill>
-                <a:latin typeface="Liberation Sans"/>
-                <a:cs typeface="Liberation Sans"/>
-              </a:endParaRPr>
-            </a:p>
-          </p:txBody>
-        </p:sp>
-      </p:grpSp>
-      <p:grpSp>
-        <p:nvGrpSpPr>
-          <p:cNvPr id="1632622299" name=""/>
-          <p:cNvGrpSpPr/>
-          <p:nvPr/>
-        </p:nvGrpSpPr>
-        <p:grpSpPr bwMode="auto">
-          <a:xfrm>
-            <a:off x="406401" y="2209799"/>
-            <a:ext cx="7111998" cy="406400"/>
-            <a:chOff x="0" y="0"/>
-            <a:chExt cx="7111998" cy="406400"/>
-          </a:xfrm>
-        </p:grpSpPr>
-        <p:sp>
-          <p:nvSpPr>
-            <p:cNvPr id="1832480215" name="revenue_3"/>
-            <p:cNvSpPr txBox="1"/>
-            <p:nvPr/>
-          </p:nvSpPr>
-          <p:spPr bwMode="auto">
-            <a:xfrm rot="0" flipH="0" flipV="0">
-              <a:off x="2031998" y="0"/>
-              <a:ext cx="812799" cy="406397"/>
-            </a:xfrm>
-            <a:prstGeom prst="rect">
-              <a:avLst/>
-            </a:prstGeom>
-            <a:noFill/>
-          </p:spPr>
-          <p:txBody>
-            <a:bodyPr vertOverflow="overflow" horzOverflow="overflow" vert="horz" wrap="square" lIns="91440" tIns="45720" rIns="91440" bIns="45720" numCol="1" spcCol="0" rtlCol="0" fromWordArt="0" anchor="ctr" anchorCtr="0" forceAA="0" upright="0" compatLnSpc="0">
-              <a:noAutofit/>
-            </a:bodyPr>
-            <a:p>
-              <a:pPr algn="ctr">
-                <a:defRPr/>
-              </a:pPr>
-              <a:r>
-                <a:rPr lang="it-IT" sz="1400" b="0">
-                  <a:solidFill>
-                    <a:schemeClr val="tx1"/>
-                  </a:solidFill>
-                  <a:latin typeface="Liberation Sans"/>
-                  <a:ea typeface="Liberation Sans"/>
-                  <a:cs typeface="Liberation Sans"/>
-                </a:rPr>
-                <a:t>XX.XB</a:t>
-              </a:r>
-              <a:endParaRPr sz="1400" b="0">
-                <a:solidFill>
-                  <a:schemeClr val="tx1"/>
-                </a:solidFill>
-                <a:latin typeface="Liberation Sans"/>
-                <a:cs typeface="Liberation Sans"/>
-              </a:endParaRPr>
-            </a:p>
-          </p:txBody>
-        </p:sp>
-        <p:sp>
-          <p:nvSpPr>
-            <p:cNvPr id="1496392474" name=""/>
-            <p:cNvSpPr txBox="1"/>
-            <p:nvPr/>
-          </p:nvSpPr>
-          <p:spPr bwMode="auto">
-            <a:xfrm rot="0" flipH="0" flipV="0">
-              <a:off x="0" y="3"/>
-              <a:ext cx="1828797" cy="406396"/>
-            </a:xfrm>
-            <a:prstGeom prst="rect">
-              <a:avLst/>
-            </a:prstGeom>
-            <a:noFill/>
-          </p:spPr>
-          <p:txBody>
-            <a:bodyPr vertOverflow="overflow" horzOverflow="overflow" vert="horz" wrap="square" lIns="91440" tIns="45720" rIns="91440" bIns="45720" numCol="1" spcCol="0" rtlCol="0" fromWordArt="0" anchor="ctr" anchorCtr="0" forceAA="0" upright="0" compatLnSpc="0">
-              <a:noAutofit/>
-            </a:bodyPr>
-            <a:p>
-              <a:pPr algn="ctr">
-                <a:defRPr/>
-              </a:pPr>
-              <a:r>
-                <a:rPr lang="it-IT" sz="1400" b="1">
-                  <a:solidFill>
-                    <a:schemeClr val="bg1"/>
-                  </a:solidFill>
-                  <a:latin typeface="Liberation Sans"/>
-                  <a:ea typeface="Liberation Sans"/>
-                  <a:cs typeface="Liberation Sans"/>
-                </a:rPr>
-                <a:t>Revenue</a:t>
-              </a:r>
-              <a:endParaRPr sz="1400" b="1">
-                <a:solidFill>
-                  <a:schemeClr val="bg1"/>
-                </a:solidFill>
-                <a:latin typeface="Liberation Sans"/>
-                <a:cs typeface="Liberation Sans"/>
-              </a:endParaRPr>
-            </a:p>
-          </p:txBody>
-        </p:sp>
-        <p:sp>
-          <p:nvSpPr>
-            <p:cNvPr id="339690199" name="revenue_2"/>
-            <p:cNvSpPr txBox="1"/>
-            <p:nvPr/>
-          </p:nvSpPr>
-          <p:spPr bwMode="auto">
-            <a:xfrm rot="0" flipH="0" flipV="0">
-              <a:off x="3047997" y="0"/>
-              <a:ext cx="812799" cy="406397"/>
-            </a:xfrm>
-            <a:prstGeom prst="rect">
-              <a:avLst/>
-            </a:prstGeom>
-            <a:noFill/>
-          </p:spPr>
-          <p:txBody>
-            <a:bodyPr vertOverflow="overflow" horzOverflow="overflow" vert="horz" wrap="square" lIns="91440" tIns="45720" rIns="91440" bIns="45720" numCol="1" spcCol="0" rtlCol="0" fromWordArt="0" anchor="ctr" anchorCtr="0" forceAA="0" upright="0" compatLnSpc="0">
-              <a:noAutofit/>
-            </a:bodyPr>
-            <a:p>
-              <a:pPr algn="ctr">
-                <a:defRPr/>
-              </a:pPr>
-              <a:r>
-                <a:rPr lang="it-IT" sz="1400" b="0">
-                  <a:solidFill>
-                    <a:schemeClr val="tx1"/>
-                  </a:solidFill>
-                  <a:latin typeface="Liberation Sans"/>
-                  <a:ea typeface="Liberation Sans"/>
-                  <a:cs typeface="Liberation Sans"/>
-                </a:rPr>
-                <a:t>XX.XB</a:t>
-              </a:r>
-              <a:endParaRPr sz="1400" b="0">
-                <a:solidFill>
-                  <a:schemeClr val="tx1"/>
-                </a:solidFill>
-                <a:latin typeface="Liberation Sans"/>
-                <a:cs typeface="Liberation Sans"/>
-              </a:endParaRPr>
-            </a:p>
-          </p:txBody>
-        </p:sp>
-        <p:sp>
-          <p:nvSpPr>
-            <p:cNvPr id="1838244257" name="revenue_1"/>
-            <p:cNvSpPr txBox="1"/>
-            <p:nvPr/>
-          </p:nvSpPr>
-          <p:spPr bwMode="auto">
-            <a:xfrm rot="0" flipH="0" flipV="0">
-              <a:off x="4063997" y="0"/>
-              <a:ext cx="812799" cy="406397"/>
-            </a:xfrm>
-            <a:prstGeom prst="rect">
-              <a:avLst/>
-            </a:prstGeom>
-            <a:noFill/>
-          </p:spPr>
-          <p:txBody>
-            <a:bodyPr vertOverflow="overflow" horzOverflow="overflow" vert="horz" wrap="square" lIns="91440" tIns="45720" rIns="91440" bIns="45720" numCol="1" spcCol="0" rtlCol="0" fromWordArt="0" anchor="ctr" anchorCtr="0" forceAA="0" upright="0" compatLnSpc="0">
-              <a:noAutofit/>
-            </a:bodyPr>
-            <a:p>
-              <a:pPr algn="ctr">
-                <a:defRPr/>
-              </a:pPr>
-              <a:r>
-                <a:rPr lang="it-IT" sz="1400" b="0">
-                  <a:solidFill>
-                    <a:schemeClr val="tx1"/>
-                  </a:solidFill>
-                  <a:latin typeface="Liberation Sans"/>
-                  <a:ea typeface="Liberation Sans"/>
-                  <a:cs typeface="Liberation Sans"/>
-                </a:rPr>
-                <a:t>XX.XB</a:t>
-              </a:r>
-              <a:endParaRPr sz="1400" b="0">
-                <a:solidFill>
-                  <a:schemeClr val="tx1"/>
-                </a:solidFill>
-                <a:latin typeface="Liberation Sans"/>
-                <a:cs typeface="Liberation Sans"/>
-              </a:endParaRPr>
-            </a:p>
-          </p:txBody>
-        </p:sp>
-        <p:sp>
-          <p:nvSpPr>
-            <p:cNvPr id="525178788" name="revenue_m"/>
-            <p:cNvSpPr txBox="1"/>
-            <p:nvPr/>
-          </p:nvSpPr>
-          <p:spPr bwMode="auto">
-            <a:xfrm rot="0" flipH="0" flipV="0">
-              <a:off x="5283198" y="0"/>
-              <a:ext cx="812799" cy="406396"/>
-            </a:xfrm>
-            <a:prstGeom prst="rect">
-              <a:avLst/>
-            </a:prstGeom>
-            <a:noFill/>
-          </p:spPr>
-          <p:txBody>
-            <a:bodyPr vertOverflow="overflow" horzOverflow="overflow" vert="horz" wrap="square" lIns="91440" tIns="45720" rIns="91440" bIns="45720" numCol="1" spcCol="0" rtlCol="0" fromWordArt="0" anchor="ctr" anchorCtr="0" forceAA="0" upright="0" compatLnSpc="0">
-              <a:noAutofit/>
-            </a:bodyPr>
-            <a:p>
-              <a:pPr algn="ctr">
-                <a:defRPr/>
-              </a:pPr>
-              <a:r>
-                <a:rPr lang="it-IT" sz="1400" b="0">
-                  <a:solidFill>
-                    <a:schemeClr val="tx1"/>
-                  </a:solidFill>
-                  <a:latin typeface="Liberation Sans"/>
-                  <a:ea typeface="Liberation Sans"/>
-                  <a:cs typeface="Liberation Sans"/>
-                </a:rPr>
-                <a:t>X.X%</a:t>
-              </a:r>
-              <a:endParaRPr sz="1400" b="0">
-                <a:solidFill>
-                  <a:schemeClr val="tx1"/>
-                </a:solidFill>
-                <a:latin typeface="Liberation Sans"/>
-                <a:cs typeface="Liberation Sans"/>
-              </a:endParaRPr>
-            </a:p>
-          </p:txBody>
-        </p:sp>
-        <p:sp>
-          <p:nvSpPr>
-            <p:cNvPr id="1255752566" name="name"/>
-            <p:cNvSpPr txBox="1"/>
-            <p:nvPr/>
-          </p:nvSpPr>
-          <p:spPr bwMode="auto">
-            <a:xfrm rot="0" flipH="0" flipV="0">
-              <a:off x="6095997" y="0"/>
-              <a:ext cx="1015999" cy="406396"/>
-            </a:xfrm>
-            <a:prstGeom prst="rect">
-              <a:avLst/>
-            </a:prstGeom>
-            <a:noFill/>
-          </p:spPr>
-          <p:txBody>
-            <a:bodyPr vertOverflow="overflow" horzOverflow="overflow" vert="horz" wrap="square" lIns="91440" tIns="45720" rIns="91440" bIns="45720" numCol="1" spcCol="0" rtlCol="0" fromWordArt="0" anchor="ctr" anchorCtr="0" forceAA="0" upright="0" compatLnSpc="0">
-              <a:noAutofit/>
-            </a:bodyPr>
-            <a:p>
-              <a:pPr algn="l">
-                <a:defRPr/>
-              </a:pPr>
-              <a:r>
-                <a:rPr lang="it-IT" sz="1200" b="0">
-                  <a:solidFill>
-                    <a:schemeClr val="tx1"/>
-                  </a:solidFill>
-                  <a:latin typeface="Liberation Sans"/>
-                  <a:ea typeface="Liberation Sans"/>
-                  <a:cs typeface="Liberation Sans"/>
-                </a:rPr>
-                <a:t>growth</a:t>
-              </a:r>
-              <a:endParaRPr sz="1200" b="0">
-                <a:solidFill>
-                  <a:schemeClr val="tx1"/>
-                </a:solidFill>
-                <a:latin typeface="Liberation Sans"/>
-                <a:cs typeface="Liberation Sans"/>
-              </a:endParaRPr>
-            </a:p>
-          </p:txBody>
-        </p:sp>
-      </p:grpSp>
-      <p:grpSp>
-        <p:nvGrpSpPr>
-          <p:cNvPr id="1023865108" name=""/>
-          <p:cNvGrpSpPr/>
-          <p:nvPr/>
-        </p:nvGrpSpPr>
-        <p:grpSpPr bwMode="auto">
-          <a:xfrm>
-            <a:off x="406401" y="2641626"/>
-            <a:ext cx="7111998" cy="406397"/>
-            <a:chOff x="0" y="0"/>
-            <a:chExt cx="7111998" cy="406397"/>
-          </a:xfrm>
-        </p:grpSpPr>
-        <p:sp>
-          <p:nvSpPr>
-            <p:cNvPr id="2108637618" name="gross_profit_3"/>
-            <p:cNvSpPr txBox="1"/>
-            <p:nvPr/>
-          </p:nvSpPr>
-          <p:spPr bwMode="auto">
-            <a:xfrm rot="0" flipH="0" flipV="0">
-              <a:off x="2031995" y="0"/>
-              <a:ext cx="812799" cy="406397"/>
-            </a:xfrm>
-            <a:prstGeom prst="rect">
-              <a:avLst/>
-            </a:prstGeom>
-            <a:noFill/>
-          </p:spPr>
-          <p:txBody>
-            <a:bodyPr vertOverflow="overflow" horzOverflow="overflow" vert="horz" wrap="square" lIns="91440" tIns="45720" rIns="91440" bIns="45720" numCol="1" spcCol="0" rtlCol="0" fromWordArt="0" anchor="ctr" anchorCtr="0" forceAA="0" upright="0" compatLnSpc="0">
-              <a:noAutofit/>
-            </a:bodyPr>
-            <a:p>
-              <a:pPr algn="ctr">
-                <a:defRPr/>
-              </a:pPr>
-              <a:r>
-                <a:rPr lang="it-IT" sz="1400" b="0" i="0" u="none" strike="noStrike" cap="none" spc="0">
-                  <a:solidFill>
-                    <a:schemeClr val="tx1"/>
-                  </a:solidFill>
-                  <a:latin typeface="Liberation Sans"/>
-                  <a:ea typeface="Liberation Sans"/>
-                  <a:cs typeface="Liberation Sans"/>
-                </a:rPr>
-                <a:t>XX.XB</a:t>
-              </a:r>
-              <a:endParaRPr>
-                <a:solidFill>
-                  <a:schemeClr val="tx1"/>
-                </a:solidFill>
-                <a:latin typeface="Liberation Sans"/>
-                <a:cs typeface="Liberation Sans"/>
-              </a:endParaRPr>
-            </a:p>
-          </p:txBody>
-        </p:sp>
-        <p:sp>
-          <p:nvSpPr>
-            <p:cNvPr id="1348452646" name=""/>
-            <p:cNvSpPr txBox="1"/>
-            <p:nvPr/>
-          </p:nvSpPr>
-          <p:spPr bwMode="auto">
-            <a:xfrm rot="0" flipH="0" flipV="0">
-              <a:off x="0" y="0"/>
-              <a:ext cx="1828797" cy="406396"/>
-            </a:xfrm>
-            <a:prstGeom prst="rect">
-              <a:avLst/>
-            </a:prstGeom>
-            <a:noFill/>
-          </p:spPr>
-          <p:txBody>
-            <a:bodyPr vertOverflow="overflow" horzOverflow="overflow" vert="horz" wrap="square" lIns="91440" tIns="45720" rIns="91440" bIns="45720" numCol="1" spcCol="0" rtlCol="0" fromWordArt="0" anchor="ctr" anchorCtr="0" forceAA="0" upright="0" compatLnSpc="0">
-              <a:noAutofit/>
-            </a:bodyPr>
-            <a:p>
-              <a:pPr algn="ctr">
-                <a:defRPr/>
-              </a:pPr>
-              <a:r>
-                <a:rPr lang="it-IT" sz="1400" b="1">
-                  <a:solidFill>
-                    <a:schemeClr val="bg1"/>
-                  </a:solidFill>
-                  <a:latin typeface="Liberation Sans"/>
-                  <a:ea typeface="Liberation Sans"/>
-                  <a:cs typeface="Liberation Sans"/>
-                </a:rPr>
-                <a:t>Gross profit</a:t>
-              </a:r>
-              <a:endParaRPr sz="1400" b="1">
-                <a:solidFill>
-                  <a:schemeClr val="bg1"/>
-                </a:solidFill>
-                <a:latin typeface="Liberation Sans"/>
-                <a:cs typeface="Liberation Sans"/>
-              </a:endParaRPr>
-            </a:p>
-          </p:txBody>
-        </p:sp>
-        <p:sp>
-          <p:nvSpPr>
-            <p:cNvPr id="1170215058" name="gross_profit_2"/>
-            <p:cNvSpPr txBox="1"/>
-            <p:nvPr/>
-          </p:nvSpPr>
-          <p:spPr bwMode="auto">
-            <a:xfrm rot="0" flipH="0" flipV="0">
-              <a:off x="3047997" y="0"/>
-              <a:ext cx="812799" cy="406397"/>
-            </a:xfrm>
-            <a:prstGeom prst="rect">
-              <a:avLst/>
-            </a:prstGeom>
-            <a:noFill/>
-          </p:spPr>
-          <p:txBody>
-            <a:bodyPr vertOverflow="overflow" horzOverflow="overflow" vert="horz" wrap="square" lIns="91440" tIns="45720" rIns="91440" bIns="45720" numCol="1" spcCol="0" rtlCol="0" fromWordArt="0" anchor="ctr" anchorCtr="0" forceAA="0" upright="0" compatLnSpc="0">
-              <a:noAutofit/>
-            </a:bodyPr>
-            <a:p>
-              <a:pPr algn="ctr">
-                <a:defRPr/>
-              </a:pPr>
-              <a:r>
-                <a:rPr lang="it-IT" sz="1400" b="0" i="0" u="none" strike="noStrike" cap="none" spc="0">
-                  <a:solidFill>
-                    <a:schemeClr val="tx1"/>
-                  </a:solidFill>
-                  <a:latin typeface="Liberation Sans"/>
-                  <a:ea typeface="Liberation Sans"/>
-                  <a:cs typeface="Liberation Sans"/>
-                </a:rPr>
-                <a:t>XX.XB</a:t>
-              </a:r>
-              <a:endParaRPr>
-                <a:solidFill>
-                  <a:schemeClr val="tx1"/>
-                </a:solidFill>
-                <a:latin typeface="Liberation Sans"/>
-                <a:cs typeface="Liberation Sans"/>
-              </a:endParaRPr>
-            </a:p>
-          </p:txBody>
-        </p:sp>
-        <p:sp>
-          <p:nvSpPr>
-            <p:cNvPr id="368056361" name="gross_profit_1"/>
-            <p:cNvSpPr txBox="1"/>
-            <p:nvPr/>
-          </p:nvSpPr>
-          <p:spPr bwMode="auto">
-            <a:xfrm rot="0" flipH="0" flipV="0">
-              <a:off x="4063997" y="0"/>
-              <a:ext cx="812799" cy="406397"/>
-            </a:xfrm>
-            <a:prstGeom prst="rect">
-              <a:avLst/>
-            </a:prstGeom>
-            <a:noFill/>
-          </p:spPr>
-          <p:txBody>
-            <a:bodyPr vertOverflow="overflow" horzOverflow="overflow" vert="horz" wrap="square" lIns="91440" tIns="45720" rIns="91440" bIns="45720" numCol="1" spcCol="0" rtlCol="0" fromWordArt="0" anchor="ctr" anchorCtr="0" forceAA="0" upright="0" compatLnSpc="0">
-              <a:noAutofit/>
-            </a:bodyPr>
-            <a:p>
-              <a:pPr algn="ctr">
-                <a:defRPr/>
-              </a:pPr>
-              <a:r>
-                <a:rPr lang="it-IT" sz="1400" b="0" i="0" u="none" strike="noStrike" cap="none" spc="0">
-                  <a:solidFill>
-                    <a:schemeClr val="tx1"/>
-                  </a:solidFill>
-                  <a:latin typeface="Liberation Sans"/>
-                  <a:ea typeface="Liberation Sans"/>
-                  <a:cs typeface="Liberation Sans"/>
-                </a:rPr>
-                <a:t>XX.XB</a:t>
-              </a:r>
-              <a:endParaRPr>
-                <a:solidFill>
-                  <a:schemeClr val="tx1"/>
-                </a:solidFill>
-                <a:latin typeface="Liberation Sans"/>
-                <a:cs typeface="Liberation Sans"/>
-              </a:endParaRPr>
-            </a:p>
-          </p:txBody>
-        </p:sp>
-        <p:sp>
-          <p:nvSpPr>
-            <p:cNvPr id="1559578225" name="gross_profit_m"/>
-            <p:cNvSpPr txBox="1"/>
-            <p:nvPr/>
-          </p:nvSpPr>
-          <p:spPr bwMode="auto">
-            <a:xfrm rot="0" flipH="0" flipV="0">
-              <a:off x="5283198" y="0"/>
-              <a:ext cx="812799" cy="406396"/>
-            </a:xfrm>
-            <a:prstGeom prst="rect">
-              <a:avLst/>
-            </a:prstGeom>
-            <a:noFill/>
-          </p:spPr>
-          <p:txBody>
-            <a:bodyPr vertOverflow="overflow" horzOverflow="overflow" vert="horz" wrap="square" lIns="91440" tIns="45720" rIns="91440" bIns="45720" numCol="1" spcCol="0" rtlCol="0" fromWordArt="0" anchor="ctr" anchorCtr="0" forceAA="0" upright="0" compatLnSpc="0">
-              <a:noAutofit/>
-            </a:bodyPr>
-            <a:p>
-              <a:pPr algn="ctr">
-                <a:defRPr/>
-              </a:pPr>
-              <a:r>
-                <a:rPr lang="it-IT" sz="1400" b="0">
-                  <a:solidFill>
-                    <a:schemeClr val="tx1"/>
-                  </a:solidFill>
-                  <a:latin typeface="Liberation Sans"/>
-                  <a:ea typeface="Liberation Sans"/>
-                  <a:cs typeface="Liberation Sans"/>
-                </a:rPr>
-                <a:t>X.X%</a:t>
-              </a:r>
-              <a:endParaRPr sz="1400" b="0">
-                <a:solidFill>
-                  <a:schemeClr val="tx1"/>
-                </a:solidFill>
-                <a:latin typeface="Liberation Sans"/>
-                <a:cs typeface="Liberation Sans"/>
-              </a:endParaRPr>
-            </a:p>
-          </p:txBody>
-        </p:sp>
-        <p:sp>
-          <p:nvSpPr>
-            <p:cNvPr id="831652213" name="symbol"/>
-            <p:cNvSpPr txBox="1"/>
-            <p:nvPr/>
-          </p:nvSpPr>
-          <p:spPr bwMode="auto">
-            <a:xfrm rot="0" flipH="0" flipV="0">
-              <a:off x="6095997" y="0"/>
-              <a:ext cx="1015999" cy="406396"/>
-            </a:xfrm>
-            <a:prstGeom prst="rect">
-              <a:avLst/>
-            </a:prstGeom>
-            <a:noFill/>
-          </p:spPr>
-          <p:txBody>
-            <a:bodyPr vertOverflow="overflow" horzOverflow="overflow" vert="horz" wrap="square" lIns="91440" tIns="45720" rIns="91440" bIns="45720" numCol="1" spcCol="0" rtlCol="0" fromWordArt="0" anchor="ctr" anchorCtr="0" forceAA="0" upright="0" compatLnSpc="0">
-              <a:noAutofit/>
-            </a:bodyPr>
-            <a:p>
-              <a:pPr algn="l">
-                <a:defRPr/>
-              </a:pPr>
-              <a:r>
-                <a:rPr lang="it-IT" sz="1200" b="0">
-                  <a:solidFill>
-                    <a:schemeClr val="tx1"/>
-                  </a:solidFill>
-                  <a:latin typeface="Liberation Sans"/>
-                  <a:ea typeface="Liberation Sans"/>
-                  <a:cs typeface="Liberation Sans"/>
-                </a:rPr>
-                <a:t>margin</a:t>
-              </a:r>
-              <a:endParaRPr sz="1200" b="0">
-                <a:solidFill>
-                  <a:schemeClr val="tx1"/>
-                </a:solidFill>
-                <a:latin typeface="Liberation Sans"/>
-                <a:cs typeface="Liberation Sans"/>
-              </a:endParaRPr>
-            </a:p>
-          </p:txBody>
-        </p:sp>
-      </p:grpSp>
-      <p:grpSp>
-        <p:nvGrpSpPr>
-          <p:cNvPr id="148747279" name=""/>
-          <p:cNvGrpSpPr/>
-          <p:nvPr/>
-        </p:nvGrpSpPr>
-        <p:grpSpPr bwMode="auto">
-          <a:xfrm>
-            <a:off x="406401" y="3073450"/>
-            <a:ext cx="7111998" cy="406397"/>
-            <a:chOff x="0" y="0"/>
-            <a:chExt cx="7111998" cy="406397"/>
-          </a:xfrm>
-        </p:grpSpPr>
-        <p:sp>
-          <p:nvSpPr>
-            <p:cNvPr id="2034043532" name="operating_profit_3"/>
-            <p:cNvSpPr txBox="1"/>
-            <p:nvPr/>
-          </p:nvSpPr>
-          <p:spPr bwMode="auto">
-            <a:xfrm rot="0" flipH="0" flipV="0">
-              <a:off x="2031995" y="0"/>
-              <a:ext cx="812799" cy="406397"/>
-            </a:xfrm>
-            <a:prstGeom prst="rect">
-              <a:avLst/>
-            </a:prstGeom>
-            <a:noFill/>
-          </p:spPr>
-          <p:txBody>
-            <a:bodyPr vertOverflow="overflow" horzOverflow="overflow" vert="horz" wrap="square" lIns="91440" tIns="45720" rIns="91440" bIns="45720" numCol="1" spcCol="0" rtlCol="0" fromWordArt="0" anchor="ctr" anchorCtr="0" forceAA="0" upright="0" compatLnSpc="0">
-              <a:noAutofit/>
-            </a:bodyPr>
-            <a:p>
-              <a:pPr algn="ctr">
-                <a:defRPr/>
-              </a:pPr>
-              <a:r>
-                <a:rPr lang="it-IT" sz="1400" b="0" i="0" u="none" strike="noStrike" cap="none" spc="0">
-                  <a:solidFill>
-                    <a:schemeClr val="tx1"/>
-                  </a:solidFill>
-                  <a:latin typeface="Liberation Sans"/>
-                  <a:ea typeface="Liberation Sans"/>
-                  <a:cs typeface="Liberation Sans"/>
-                </a:rPr>
-                <a:t>XX.XB</a:t>
-              </a:r>
-              <a:endParaRPr>
-                <a:solidFill>
-                  <a:schemeClr val="tx1"/>
-                </a:solidFill>
-                <a:latin typeface="Liberation Sans"/>
-                <a:cs typeface="Liberation Sans"/>
-              </a:endParaRPr>
-            </a:p>
-          </p:txBody>
-        </p:sp>
-        <p:sp>
-          <p:nvSpPr>
-            <p:cNvPr id="70336290" name=""/>
-            <p:cNvSpPr txBox="1"/>
-            <p:nvPr/>
-          </p:nvSpPr>
-          <p:spPr bwMode="auto">
-            <a:xfrm rot="0" flipH="0" flipV="0">
-              <a:off x="0" y="0"/>
-              <a:ext cx="1828797" cy="406396"/>
-            </a:xfrm>
-            <a:prstGeom prst="rect">
-              <a:avLst/>
-            </a:prstGeom>
-            <a:noFill/>
-          </p:spPr>
-          <p:txBody>
-            <a:bodyPr vertOverflow="overflow" horzOverflow="overflow" vert="horz" wrap="square" lIns="91440" tIns="45720" rIns="91440" bIns="45720" numCol="1" spcCol="0" rtlCol="0" fromWordArt="0" anchor="ctr" anchorCtr="0" forceAA="0" upright="0" compatLnSpc="0">
-              <a:noAutofit/>
-            </a:bodyPr>
-            <a:p>
-              <a:pPr algn="ctr">
-                <a:defRPr/>
-              </a:pPr>
-              <a:r>
-                <a:rPr lang="it-IT" sz="1400" b="1">
-                  <a:solidFill>
-                    <a:schemeClr val="bg1"/>
-                  </a:solidFill>
-                  <a:latin typeface="Liberation Sans"/>
-                  <a:ea typeface="Liberation Sans"/>
-                  <a:cs typeface="Liberation Sans"/>
-                </a:rPr>
-                <a:t>Operating profit</a:t>
-              </a:r>
-              <a:endParaRPr sz="1400" b="1">
-                <a:solidFill>
-                  <a:schemeClr val="bg1"/>
-                </a:solidFill>
-                <a:latin typeface="Liberation Sans"/>
-                <a:cs typeface="Liberation Sans"/>
-              </a:endParaRPr>
-            </a:p>
-          </p:txBody>
-        </p:sp>
-        <p:sp>
-          <p:nvSpPr>
-            <p:cNvPr id="1043401128" name="operating_profit_2"/>
-            <p:cNvSpPr txBox="1"/>
-            <p:nvPr/>
-          </p:nvSpPr>
-          <p:spPr bwMode="auto">
-            <a:xfrm rot="0" flipH="0" flipV="0">
-              <a:off x="3047997" y="0"/>
-              <a:ext cx="812799" cy="406397"/>
-            </a:xfrm>
-            <a:prstGeom prst="rect">
-              <a:avLst/>
-            </a:prstGeom>
-            <a:noFill/>
-          </p:spPr>
-          <p:txBody>
-            <a:bodyPr vertOverflow="overflow" horzOverflow="overflow" vert="horz" wrap="square" lIns="91440" tIns="45720" rIns="91440" bIns="45720" numCol="1" spcCol="0" rtlCol="0" fromWordArt="0" anchor="ctr" anchorCtr="0" forceAA="0" upright="0" compatLnSpc="0">
-              <a:noAutofit/>
-            </a:bodyPr>
-            <a:p>
-              <a:pPr algn="ctr">
-                <a:defRPr/>
-              </a:pPr>
-              <a:r>
-                <a:rPr lang="it-IT" sz="1400" b="0" i="0" u="none" strike="noStrike" cap="none" spc="0">
-                  <a:solidFill>
-                    <a:schemeClr val="tx1"/>
-                  </a:solidFill>
-                  <a:latin typeface="Liberation Sans"/>
-                  <a:ea typeface="Liberation Sans"/>
-                  <a:cs typeface="Liberation Sans"/>
-                </a:rPr>
-                <a:t>XX.XB</a:t>
-              </a:r>
-              <a:endParaRPr>
-                <a:solidFill>
-                  <a:schemeClr val="tx1"/>
-                </a:solidFill>
-                <a:latin typeface="Liberation Sans"/>
-                <a:cs typeface="Liberation Sans"/>
-              </a:endParaRPr>
-            </a:p>
-          </p:txBody>
-        </p:sp>
-        <p:sp>
-          <p:nvSpPr>
-            <p:cNvPr id="1285542416" name="operating_profit_1"/>
-            <p:cNvSpPr txBox="1"/>
-            <p:nvPr/>
-          </p:nvSpPr>
-          <p:spPr bwMode="auto">
-            <a:xfrm rot="0" flipH="0" flipV="0">
-              <a:off x="4063997" y="0"/>
-              <a:ext cx="812799" cy="406397"/>
-            </a:xfrm>
-            <a:prstGeom prst="rect">
-              <a:avLst/>
-            </a:prstGeom>
-            <a:noFill/>
-          </p:spPr>
-          <p:txBody>
-            <a:bodyPr vertOverflow="overflow" horzOverflow="overflow" vert="horz" wrap="square" lIns="91440" tIns="45720" rIns="91440" bIns="45720" numCol="1" spcCol="0" rtlCol="0" fromWordArt="0" anchor="ctr" anchorCtr="0" forceAA="0" upright="0" compatLnSpc="0">
-              <a:noAutofit/>
-            </a:bodyPr>
-            <a:p>
-              <a:pPr algn="ctr">
-                <a:defRPr/>
-              </a:pPr>
-              <a:r>
-                <a:rPr lang="it-IT" sz="1400" b="0" i="0" u="none" strike="noStrike" cap="none" spc="0">
-                  <a:solidFill>
-                    <a:schemeClr val="tx1"/>
-                  </a:solidFill>
-                  <a:latin typeface="Liberation Sans"/>
-                  <a:ea typeface="Liberation Sans"/>
-                  <a:cs typeface="Liberation Sans"/>
-                </a:rPr>
-                <a:t>XX.XB</a:t>
-              </a:r>
-              <a:endParaRPr>
-                <a:solidFill>
-                  <a:schemeClr val="tx1"/>
-                </a:solidFill>
-                <a:latin typeface="Liberation Sans"/>
-                <a:cs typeface="Liberation Sans"/>
-              </a:endParaRPr>
-            </a:p>
-          </p:txBody>
-        </p:sp>
-        <p:sp>
-          <p:nvSpPr>
-            <p:cNvPr id="1603109262" name="operating_profit_m"/>
-            <p:cNvSpPr txBox="1"/>
-            <p:nvPr/>
-          </p:nvSpPr>
-          <p:spPr bwMode="auto">
-            <a:xfrm rot="0" flipH="0" flipV="0">
-              <a:off x="5283198" y="0"/>
-              <a:ext cx="812799" cy="406396"/>
-            </a:xfrm>
-            <a:prstGeom prst="rect">
-              <a:avLst/>
-            </a:prstGeom>
-            <a:noFill/>
-          </p:spPr>
-          <p:txBody>
-            <a:bodyPr vertOverflow="overflow" horzOverflow="overflow" vert="horz" wrap="square" lIns="91440" tIns="45720" rIns="91440" bIns="45720" numCol="1" spcCol="0" rtlCol="0" fromWordArt="0" anchor="ctr" anchorCtr="0" forceAA="0" upright="0" compatLnSpc="0">
-              <a:noAutofit/>
-            </a:bodyPr>
-            <a:p>
-              <a:pPr algn="ctr">
-                <a:defRPr/>
-              </a:pPr>
-              <a:r>
-                <a:rPr lang="it-IT" sz="1400" b="0">
-                  <a:solidFill>
-                    <a:schemeClr val="tx1"/>
-                  </a:solidFill>
-                  <a:latin typeface="Liberation Sans"/>
-                  <a:ea typeface="Liberation Sans"/>
-                  <a:cs typeface="Liberation Sans"/>
-                </a:rPr>
-                <a:t>X.X%</a:t>
-              </a:r>
-              <a:endParaRPr sz="1400" b="0">
-                <a:solidFill>
-                  <a:schemeClr val="tx1"/>
-                </a:solidFill>
-                <a:latin typeface="Liberation Sans"/>
-                <a:cs typeface="Liberation Sans"/>
-              </a:endParaRPr>
-            </a:p>
-          </p:txBody>
-        </p:sp>
-        <p:sp>
-          <p:nvSpPr>
-            <p:cNvPr id="923565239" name="sector"/>
-            <p:cNvSpPr txBox="1"/>
-            <p:nvPr/>
-          </p:nvSpPr>
-          <p:spPr bwMode="auto">
-            <a:xfrm rot="0" flipH="0" flipV="0">
-              <a:off x="6095997" y="0"/>
-              <a:ext cx="1015999" cy="406396"/>
-            </a:xfrm>
-            <a:prstGeom prst="rect">
-              <a:avLst/>
-            </a:prstGeom>
-            <a:noFill/>
-          </p:spPr>
-          <p:txBody>
-            <a:bodyPr vertOverflow="overflow" horzOverflow="overflow" vert="horz" wrap="square" lIns="91440" tIns="45720" rIns="91440" bIns="45720" numCol="1" spcCol="0" rtlCol="0" fromWordArt="0" anchor="ctr" anchorCtr="0" forceAA="0" upright="0" compatLnSpc="0">
-              <a:noAutofit/>
-            </a:bodyPr>
-            <a:p>
-              <a:pPr algn="l">
-                <a:defRPr/>
-              </a:pPr>
-              <a:r>
-                <a:rPr lang="it-IT" sz="1200" b="0">
-                  <a:solidFill>
-                    <a:schemeClr val="tx1"/>
-                  </a:solidFill>
-                  <a:latin typeface="Liberation Sans"/>
-                  <a:ea typeface="Liberation Sans"/>
-                  <a:cs typeface="Liberation Sans"/>
-                </a:rPr>
-                <a:t>margin</a:t>
-              </a:r>
-              <a:endParaRPr sz="1200" b="0">
-                <a:solidFill>
-                  <a:schemeClr val="tx1"/>
-                </a:solidFill>
-                <a:latin typeface="Liberation Sans"/>
-                <a:cs typeface="Liberation Sans"/>
-              </a:endParaRPr>
-            </a:p>
-          </p:txBody>
-        </p:sp>
-      </p:grpSp>
-      <p:grpSp>
-        <p:nvGrpSpPr>
-          <p:cNvPr id="795219393" name=""/>
-          <p:cNvGrpSpPr/>
-          <p:nvPr/>
-        </p:nvGrpSpPr>
-        <p:grpSpPr bwMode="auto">
-          <a:xfrm>
-            <a:off x="406401" y="3505209"/>
-            <a:ext cx="7111998" cy="406438"/>
-            <a:chOff x="0" y="0"/>
-            <a:chExt cx="7111998" cy="406438"/>
-          </a:xfrm>
-        </p:grpSpPr>
-        <p:sp>
-          <p:nvSpPr>
-            <p:cNvPr id="55736236" name="net_income_3"/>
-            <p:cNvSpPr txBox="1"/>
-            <p:nvPr/>
-          </p:nvSpPr>
-          <p:spPr bwMode="auto">
-            <a:xfrm rot="0" flipH="0" flipV="0">
-              <a:off x="2031995" y="0"/>
-              <a:ext cx="812799" cy="406397"/>
-            </a:xfrm>
-            <a:prstGeom prst="rect">
-              <a:avLst/>
-            </a:prstGeom>
-            <a:noFill/>
-          </p:spPr>
-          <p:txBody>
-            <a:bodyPr vertOverflow="overflow" horzOverflow="overflow" vert="horz" wrap="square" lIns="91440" tIns="45720" rIns="91440" bIns="45720" numCol="1" spcCol="0" rtlCol="0" fromWordArt="0" anchor="ctr" anchorCtr="0" forceAA="0" upright="0" compatLnSpc="0">
-              <a:noAutofit/>
-            </a:bodyPr>
-            <a:p>
-              <a:pPr algn="ctr">
-                <a:defRPr/>
-              </a:pPr>
-              <a:r>
-                <a:rPr lang="it-IT" sz="1400" b="0" i="0" u="none" strike="noStrike" cap="none" spc="0">
-                  <a:solidFill>
-                    <a:schemeClr val="tx1"/>
-                  </a:solidFill>
-                  <a:latin typeface="Liberation Sans"/>
-                  <a:ea typeface="Liberation Sans"/>
-                  <a:cs typeface="Liberation Sans"/>
-                </a:rPr>
-                <a:t>XX.XB</a:t>
-              </a:r>
-              <a:endParaRPr>
-                <a:solidFill>
-                  <a:schemeClr val="tx1"/>
-                </a:solidFill>
-                <a:latin typeface="Liberation Sans"/>
-                <a:cs typeface="Liberation Sans"/>
-              </a:endParaRPr>
-            </a:p>
-          </p:txBody>
-        </p:sp>
-        <p:sp>
-          <p:nvSpPr>
-            <p:cNvPr id="620009610" name=""/>
-            <p:cNvSpPr txBox="1"/>
-            <p:nvPr/>
-          </p:nvSpPr>
-          <p:spPr bwMode="auto">
-            <a:xfrm rot="0" flipH="0" flipV="0">
-              <a:off x="0" y="41"/>
-              <a:ext cx="1828797" cy="406396"/>
-            </a:xfrm>
-            <a:prstGeom prst="rect">
-              <a:avLst/>
-            </a:prstGeom>
-            <a:noFill/>
-          </p:spPr>
-          <p:txBody>
-            <a:bodyPr vertOverflow="overflow" horzOverflow="overflow" vert="horz" wrap="square" lIns="91440" tIns="45720" rIns="91440" bIns="45720" numCol="1" spcCol="0" rtlCol="0" fromWordArt="0" anchor="ctr" anchorCtr="0" forceAA="0" upright="0" compatLnSpc="0">
-              <a:noAutofit/>
-            </a:bodyPr>
-            <a:p>
-              <a:pPr algn="ctr">
-                <a:defRPr/>
-              </a:pPr>
-              <a:r>
-                <a:rPr lang="it-IT" sz="1400" b="1">
-                  <a:solidFill>
-                    <a:schemeClr val="bg1"/>
-                  </a:solidFill>
-                  <a:latin typeface="Liberation Sans"/>
-                  <a:ea typeface="Liberation Sans"/>
-                  <a:cs typeface="Liberation Sans"/>
-                </a:rPr>
-                <a:t>Net income</a:t>
-              </a:r>
-              <a:endParaRPr sz="1400" b="1">
-                <a:solidFill>
-                  <a:schemeClr val="bg1"/>
-                </a:solidFill>
-                <a:latin typeface="Liberation Sans"/>
-                <a:cs typeface="Liberation Sans"/>
-              </a:endParaRPr>
-            </a:p>
-          </p:txBody>
-        </p:sp>
-        <p:sp>
-          <p:nvSpPr>
-            <p:cNvPr id="1053461506" name="net_income_2"/>
-            <p:cNvSpPr txBox="1"/>
-            <p:nvPr/>
-          </p:nvSpPr>
-          <p:spPr bwMode="auto">
-            <a:xfrm rot="0" flipH="0" flipV="0">
-              <a:off x="3047997" y="0"/>
-              <a:ext cx="812799" cy="406397"/>
-            </a:xfrm>
-            <a:prstGeom prst="rect">
-              <a:avLst/>
-            </a:prstGeom>
-            <a:noFill/>
-          </p:spPr>
-          <p:txBody>
-            <a:bodyPr vertOverflow="overflow" horzOverflow="overflow" vert="horz" wrap="square" lIns="91440" tIns="45720" rIns="91440" bIns="45720" numCol="1" spcCol="0" rtlCol="0" fromWordArt="0" anchor="ctr" anchorCtr="0" forceAA="0" upright="0" compatLnSpc="0">
-              <a:noAutofit/>
-            </a:bodyPr>
-            <a:p>
-              <a:pPr algn="ctr">
-                <a:defRPr/>
-              </a:pPr>
-              <a:r>
-                <a:rPr lang="it-IT" sz="1400" b="0" i="0" u="none" strike="noStrike" cap="none" spc="0">
-                  <a:solidFill>
-                    <a:schemeClr val="tx1"/>
-                  </a:solidFill>
-                  <a:latin typeface="Liberation Sans"/>
-                  <a:ea typeface="Liberation Sans"/>
-                  <a:cs typeface="Liberation Sans"/>
-                </a:rPr>
-                <a:t>XX.XB</a:t>
-              </a:r>
-              <a:endParaRPr>
-                <a:solidFill>
-                  <a:schemeClr val="tx1"/>
-                </a:solidFill>
-                <a:latin typeface="Liberation Sans"/>
-                <a:cs typeface="Liberation Sans"/>
-              </a:endParaRPr>
-            </a:p>
-          </p:txBody>
-        </p:sp>
-        <p:sp>
-          <p:nvSpPr>
-            <p:cNvPr id="24027059" name="net_income_1"/>
-            <p:cNvSpPr txBox="1"/>
-            <p:nvPr/>
-          </p:nvSpPr>
-          <p:spPr bwMode="auto">
-            <a:xfrm rot="0" flipH="0" flipV="0">
-              <a:off x="4063997" y="0"/>
-              <a:ext cx="812799" cy="406397"/>
-            </a:xfrm>
-            <a:prstGeom prst="rect">
-              <a:avLst/>
-            </a:prstGeom>
-            <a:noFill/>
-          </p:spPr>
-          <p:txBody>
-            <a:bodyPr vertOverflow="overflow" horzOverflow="overflow" vert="horz" wrap="square" lIns="91440" tIns="45720" rIns="91440" bIns="45720" numCol="1" spcCol="0" rtlCol="0" fromWordArt="0" anchor="ctr" anchorCtr="0" forceAA="0" upright="0" compatLnSpc="0">
-              <a:noAutofit/>
-            </a:bodyPr>
-            <a:p>
-              <a:pPr algn="ctr">
-                <a:defRPr/>
-              </a:pPr>
-              <a:r>
-                <a:rPr lang="it-IT" sz="1400" b="0" i="0" u="none" strike="noStrike" cap="none" spc="0">
-                  <a:solidFill>
-                    <a:schemeClr val="tx1"/>
-                  </a:solidFill>
-                  <a:latin typeface="Liberation Sans"/>
-                  <a:ea typeface="Liberation Sans"/>
-                  <a:cs typeface="Liberation Sans"/>
-                </a:rPr>
-                <a:t>XX.XB</a:t>
-              </a:r>
-              <a:endParaRPr>
-                <a:solidFill>
-                  <a:schemeClr val="tx1"/>
-                </a:solidFill>
-                <a:latin typeface="Liberation Sans"/>
-                <a:cs typeface="Liberation Sans"/>
-              </a:endParaRPr>
-            </a:p>
-          </p:txBody>
-        </p:sp>
-        <p:sp>
-          <p:nvSpPr>
-            <p:cNvPr id="1113419882" name="net_income_m"/>
-            <p:cNvSpPr txBox="1"/>
-            <p:nvPr/>
-          </p:nvSpPr>
-          <p:spPr bwMode="auto">
-            <a:xfrm rot="0" flipH="0" flipV="0">
-              <a:off x="5283198" y="0"/>
-              <a:ext cx="812799" cy="406396"/>
-            </a:xfrm>
-            <a:prstGeom prst="rect">
-              <a:avLst/>
-            </a:prstGeom>
-            <a:noFill/>
-          </p:spPr>
-          <p:txBody>
-            <a:bodyPr vertOverflow="overflow" horzOverflow="overflow" vert="horz" wrap="square" lIns="91440" tIns="45720" rIns="91440" bIns="45720" numCol="1" spcCol="0" rtlCol="0" fromWordArt="0" anchor="ctr" anchorCtr="0" forceAA="0" upright="0" compatLnSpc="0">
-              <a:noAutofit/>
-            </a:bodyPr>
-            <a:p>
-              <a:pPr algn="ctr">
-                <a:defRPr/>
-              </a:pPr>
-              <a:r>
-                <a:rPr lang="it-IT" sz="1400" b="0" i="0" u="none" strike="noStrike" cap="none" spc="0">
-                  <a:solidFill>
-                    <a:schemeClr val="tx1"/>
-                  </a:solidFill>
-                  <a:latin typeface="Liberation Sans"/>
-                  <a:ea typeface="Liberation Sans"/>
-                  <a:cs typeface="Liberation Sans"/>
-                </a:rPr>
-                <a:t>X.X%</a:t>
-              </a:r>
-              <a:endParaRPr sz="1400" b="0">
-                <a:solidFill>
-                  <a:schemeClr val="tx1"/>
-                </a:solidFill>
-                <a:latin typeface="Liberation Sans"/>
-                <a:cs typeface="Liberation Sans"/>
-              </a:endParaRPr>
-            </a:p>
-          </p:txBody>
-        </p:sp>
-        <p:sp>
-          <p:nvSpPr>
-            <p:cNvPr id="1384149297" name="industry"/>
-            <p:cNvSpPr txBox="1"/>
-            <p:nvPr/>
-          </p:nvSpPr>
-          <p:spPr bwMode="auto">
-            <a:xfrm rot="0" flipH="0" flipV="0">
-              <a:off x="6095997" y="1"/>
-              <a:ext cx="1015999" cy="406396"/>
-            </a:xfrm>
-            <a:prstGeom prst="rect">
-              <a:avLst/>
-            </a:prstGeom>
-            <a:noFill/>
-          </p:spPr>
-          <p:txBody>
-            <a:bodyPr vertOverflow="overflow" horzOverflow="overflow" vert="horz" wrap="square" lIns="91440" tIns="45720" rIns="91440" bIns="45720" numCol="1" spcCol="0" rtlCol="0" fromWordArt="0" anchor="ctr" anchorCtr="0" forceAA="0" upright="0" compatLnSpc="0">
-              <a:noAutofit/>
-            </a:bodyPr>
-            <a:p>
-              <a:pPr algn="l">
-                <a:defRPr/>
-              </a:pPr>
-              <a:r>
-                <a:rPr lang="it-IT" sz="1200" b="0">
-                  <a:solidFill>
-                    <a:schemeClr val="tx1"/>
-                  </a:solidFill>
-                  <a:latin typeface="Liberation Sans"/>
-                  <a:ea typeface="Liberation Sans"/>
-                  <a:cs typeface="Liberation Sans"/>
-                </a:rPr>
-                <a:t>margin</a:t>
-              </a:r>
-              <a:endParaRPr sz="1200" b="0">
-                <a:solidFill>
-                  <a:schemeClr val="tx1"/>
-                </a:solidFill>
-                <a:latin typeface="Liberation Sans"/>
-                <a:cs typeface="Liberation Sans"/>
-              </a:endParaRPr>
-            </a:p>
-          </p:txBody>
-        </p:sp>
-      </p:grpSp>
-      <p:grpSp>
-        <p:nvGrpSpPr>
-          <p:cNvPr id="1088136387" name=""/>
-          <p:cNvGrpSpPr/>
-          <p:nvPr/>
-        </p:nvGrpSpPr>
-        <p:grpSpPr bwMode="auto">
-          <a:xfrm>
-            <a:off x="406401" y="3937011"/>
-            <a:ext cx="7111998" cy="406398"/>
-            <a:chOff x="0" y="0"/>
-            <a:chExt cx="7111998" cy="406398"/>
-          </a:xfrm>
-        </p:grpSpPr>
-        <p:sp>
-          <p:nvSpPr>
-            <p:cNvPr id="309366340" name="invested_capital_3"/>
-            <p:cNvSpPr txBox="1"/>
-            <p:nvPr/>
-          </p:nvSpPr>
-          <p:spPr bwMode="auto">
-            <a:xfrm rot="0" flipH="0" flipV="0">
-              <a:off x="2031995" y="0"/>
-              <a:ext cx="812799" cy="406397"/>
-            </a:xfrm>
-            <a:prstGeom prst="rect">
-              <a:avLst/>
-            </a:prstGeom>
-            <a:noFill/>
-          </p:spPr>
-          <p:txBody>
-            <a:bodyPr vertOverflow="overflow" horzOverflow="overflow" vert="horz" wrap="square" lIns="91440" tIns="45720" rIns="91440" bIns="45720" numCol="1" spcCol="0" rtlCol="0" fromWordArt="0" anchor="ctr" anchorCtr="0" forceAA="0" upright="0" compatLnSpc="0">
-              <a:noAutofit/>
-            </a:bodyPr>
-            <a:p>
-              <a:pPr algn="ctr">
-                <a:defRPr/>
-              </a:pPr>
-              <a:r>
-                <a:rPr lang="it-IT" sz="1400" b="0" i="0" u="none" strike="noStrike" cap="none" spc="0">
-                  <a:solidFill>
-                    <a:schemeClr val="tx1"/>
-                  </a:solidFill>
-                  <a:latin typeface="Liberation Sans"/>
-                  <a:ea typeface="Liberation Sans"/>
-                  <a:cs typeface="Liberation Sans"/>
-                </a:rPr>
-                <a:t>XX.XB</a:t>
-              </a:r>
-              <a:endParaRPr>
-                <a:solidFill>
-                  <a:schemeClr val="tx1"/>
-                </a:solidFill>
-                <a:latin typeface="Liberation Sans"/>
-                <a:cs typeface="Liberation Sans"/>
-              </a:endParaRPr>
-            </a:p>
-          </p:txBody>
-        </p:sp>
-        <p:sp>
-          <p:nvSpPr>
-            <p:cNvPr id="130604559" name=""/>
-            <p:cNvSpPr txBox="1"/>
-            <p:nvPr/>
-          </p:nvSpPr>
-          <p:spPr bwMode="auto">
-            <a:xfrm rot="0" flipH="0" flipV="0">
-              <a:off x="0" y="0"/>
-              <a:ext cx="1828797" cy="406396"/>
-            </a:xfrm>
-            <a:prstGeom prst="rect">
-              <a:avLst/>
-            </a:prstGeom>
-            <a:noFill/>
-          </p:spPr>
-          <p:txBody>
-            <a:bodyPr vertOverflow="overflow" horzOverflow="overflow" vert="horz" wrap="square" lIns="91440" tIns="45720" rIns="91440" bIns="45720" numCol="1" spcCol="0" rtlCol="0" fromWordArt="0" anchor="ctr" anchorCtr="0" forceAA="0" upright="0" compatLnSpc="0">
-              <a:noAutofit/>
-            </a:bodyPr>
-            <a:p>
-              <a:pPr algn="ctr">
-                <a:defRPr/>
-              </a:pPr>
-              <a:r>
-                <a:rPr lang="it-IT" sz="1400" b="1">
-                  <a:solidFill>
-                    <a:schemeClr val="bg1"/>
-                  </a:solidFill>
-                  <a:latin typeface="Liberation Sans"/>
-                  <a:ea typeface="Liberation Sans"/>
-                  <a:cs typeface="Liberation Sans"/>
-                </a:rPr>
-                <a:t>Invested capital</a:t>
-              </a:r>
-              <a:endParaRPr sz="1400" b="1">
-                <a:solidFill>
-                  <a:schemeClr val="bg1"/>
-                </a:solidFill>
-                <a:latin typeface="Liberation Sans"/>
-                <a:cs typeface="Liberation Sans"/>
-              </a:endParaRPr>
-            </a:p>
-          </p:txBody>
-        </p:sp>
-        <p:sp>
-          <p:nvSpPr>
-            <p:cNvPr id="1459423099" name="invested_capital_2"/>
-            <p:cNvSpPr txBox="1"/>
-            <p:nvPr/>
-          </p:nvSpPr>
-          <p:spPr bwMode="auto">
-            <a:xfrm rot="0" flipH="0" flipV="0">
-              <a:off x="3047997" y="0"/>
-              <a:ext cx="812799" cy="406397"/>
-            </a:xfrm>
-            <a:prstGeom prst="rect">
-              <a:avLst/>
-            </a:prstGeom>
-            <a:noFill/>
-          </p:spPr>
-          <p:txBody>
-            <a:bodyPr vertOverflow="overflow" horzOverflow="overflow" vert="horz" wrap="square" lIns="91440" tIns="45720" rIns="91440" bIns="45720" numCol="1" spcCol="0" rtlCol="0" fromWordArt="0" anchor="ctr" anchorCtr="0" forceAA="0" upright="0" compatLnSpc="0">
-              <a:noAutofit/>
-            </a:bodyPr>
-            <a:p>
-              <a:pPr algn="ctr">
-                <a:defRPr/>
-              </a:pPr>
-              <a:r>
-                <a:rPr lang="it-IT" sz="1400" b="0" i="0" u="none" strike="noStrike" cap="none" spc="0">
-                  <a:solidFill>
-                    <a:schemeClr val="tx1"/>
-                  </a:solidFill>
-                  <a:latin typeface="Liberation Sans"/>
-                  <a:ea typeface="Liberation Sans"/>
-                  <a:cs typeface="Liberation Sans"/>
-                </a:rPr>
-                <a:t>XX.XB</a:t>
-              </a:r>
-              <a:endParaRPr>
-                <a:solidFill>
-                  <a:schemeClr val="tx1"/>
-                </a:solidFill>
-                <a:latin typeface="Liberation Sans"/>
-                <a:cs typeface="Liberation Sans"/>
-              </a:endParaRPr>
-            </a:p>
-          </p:txBody>
-        </p:sp>
-        <p:sp>
-          <p:nvSpPr>
-            <p:cNvPr id="1874515150" name="invested_capital_1"/>
-            <p:cNvSpPr txBox="1"/>
-            <p:nvPr/>
-          </p:nvSpPr>
-          <p:spPr bwMode="auto">
-            <a:xfrm rot="0" flipH="0" flipV="0">
-              <a:off x="4063997" y="0"/>
-              <a:ext cx="812799" cy="406397"/>
-            </a:xfrm>
-            <a:prstGeom prst="rect">
-              <a:avLst/>
-            </a:prstGeom>
-            <a:noFill/>
-          </p:spPr>
-          <p:txBody>
-            <a:bodyPr vertOverflow="overflow" horzOverflow="overflow" vert="horz" wrap="square" lIns="91440" tIns="45720" rIns="91440" bIns="45720" numCol="1" spcCol="0" rtlCol="0" fromWordArt="0" anchor="ctr" anchorCtr="0" forceAA="0" upright="0" compatLnSpc="0">
-              <a:noAutofit/>
-            </a:bodyPr>
-            <a:p>
-              <a:pPr algn="ctr">
-                <a:defRPr/>
-              </a:pPr>
-              <a:r>
-                <a:rPr lang="it-IT" sz="1400" b="0" i="0" u="none" strike="noStrike" cap="none" spc="0">
-                  <a:solidFill>
-                    <a:schemeClr val="tx1"/>
-                  </a:solidFill>
-                  <a:latin typeface="Liberation Sans"/>
-                  <a:ea typeface="Liberation Sans"/>
-                  <a:cs typeface="Liberation Sans"/>
-                </a:rPr>
-                <a:t>XX.XB</a:t>
-              </a:r>
-              <a:endParaRPr>
-                <a:solidFill>
-                  <a:schemeClr val="tx1"/>
-                </a:solidFill>
-                <a:latin typeface="Liberation Sans"/>
-                <a:cs typeface="Liberation Sans"/>
-              </a:endParaRPr>
-            </a:p>
-          </p:txBody>
-        </p:sp>
-        <p:sp>
-          <p:nvSpPr>
-            <p:cNvPr id="208921915" name="invested_capital_m"/>
-            <p:cNvSpPr txBox="1"/>
-            <p:nvPr/>
-          </p:nvSpPr>
-          <p:spPr bwMode="auto">
-            <a:xfrm rot="0" flipH="0" flipV="0">
-              <a:off x="5283198" y="0"/>
-              <a:ext cx="812799" cy="406396"/>
-            </a:xfrm>
-            <a:prstGeom prst="rect">
-              <a:avLst/>
-            </a:prstGeom>
-            <a:noFill/>
-          </p:spPr>
-          <p:txBody>
-            <a:bodyPr vertOverflow="overflow" horzOverflow="overflow" vert="horz" wrap="square" lIns="91440" tIns="45720" rIns="91440" bIns="45720" numCol="1" spcCol="0" rtlCol="0" fromWordArt="0" anchor="ctr" anchorCtr="0" forceAA="0" upright="0" compatLnSpc="0">
-              <a:noAutofit/>
-            </a:bodyPr>
-            <a:p>
-              <a:pPr algn="ctr">
-                <a:defRPr/>
-              </a:pPr>
-              <a:r>
-                <a:rPr lang="it-IT" sz="1400" b="0" i="0" u="none" strike="noStrike" cap="none" spc="0">
-                  <a:solidFill>
-                    <a:schemeClr val="tx1"/>
-                  </a:solidFill>
-                  <a:latin typeface="Liberation Sans"/>
-                  <a:ea typeface="Liberation Sans"/>
-                  <a:cs typeface="Liberation Sans"/>
-                </a:rPr>
-                <a:t>X.X%</a:t>
-              </a:r>
-              <a:endParaRPr sz="1400" b="0">
-                <a:solidFill>
-                  <a:schemeClr val="tx1"/>
-                </a:solidFill>
-                <a:latin typeface="Liberation Sans"/>
-                <a:cs typeface="Liberation Sans"/>
-              </a:endParaRPr>
-            </a:p>
-          </p:txBody>
-        </p:sp>
-        <p:sp>
-          <p:nvSpPr>
-            <p:cNvPr id="445514744" name="market_cap"/>
-            <p:cNvSpPr txBox="1"/>
-            <p:nvPr/>
-          </p:nvSpPr>
-          <p:spPr bwMode="auto">
-            <a:xfrm rot="0" flipH="0" flipV="0">
-              <a:off x="6095997" y="1"/>
-              <a:ext cx="1015999" cy="406396"/>
-            </a:xfrm>
-            <a:prstGeom prst="rect">
-              <a:avLst/>
-            </a:prstGeom>
-            <a:noFill/>
-          </p:spPr>
-          <p:txBody>
-            <a:bodyPr vertOverflow="overflow" horzOverflow="overflow" vert="horz" wrap="square" lIns="91440" tIns="45720" rIns="91440" bIns="45720" numCol="1" spcCol="0" rtlCol="0" fromWordArt="0" anchor="ctr" anchorCtr="0" forceAA="0" upright="0" compatLnSpc="0">
-              <a:noAutofit/>
-            </a:bodyPr>
-            <a:p>
-              <a:pPr algn="l">
-                <a:defRPr/>
-              </a:pPr>
-              <a:r>
-                <a:rPr lang="it-IT" sz="1200" b="0">
-                  <a:solidFill>
-                    <a:schemeClr val="tx1"/>
-                  </a:solidFill>
-                  <a:latin typeface="Liberation Sans"/>
-                  <a:ea typeface="Liberation Sans"/>
-                  <a:cs typeface="Liberation Sans"/>
-                </a:rPr>
-                <a:t>ROIC</a:t>
-              </a:r>
-              <a:endParaRPr sz="1200" b="0">
-                <a:solidFill>
-                  <a:schemeClr val="tx1"/>
-                </a:solidFill>
-                <a:latin typeface="Liberation Sans"/>
-                <a:cs typeface="Liberation Sans"/>
-              </a:endParaRPr>
-            </a:p>
-          </p:txBody>
-        </p:sp>
-      </p:grpSp>
-      <p:grpSp>
-        <p:nvGrpSpPr>
-          <p:cNvPr id="241463679" name=""/>
-          <p:cNvGrpSpPr/>
-          <p:nvPr/>
-        </p:nvGrpSpPr>
-        <p:grpSpPr bwMode="auto">
-          <a:xfrm>
-            <a:off x="406401" y="4368772"/>
-            <a:ext cx="7111998" cy="406397"/>
-            <a:chOff x="0" y="0"/>
-            <a:chExt cx="7111998" cy="406397"/>
-          </a:xfrm>
-        </p:grpSpPr>
-        <p:sp>
-          <p:nvSpPr>
-            <p:cNvPr id="306574910" name="debt_3"/>
-            <p:cNvSpPr txBox="1"/>
-            <p:nvPr/>
-          </p:nvSpPr>
-          <p:spPr bwMode="auto">
-            <a:xfrm rot="0" flipH="0" flipV="0">
-              <a:off x="2031995" y="0"/>
-              <a:ext cx="812799" cy="406397"/>
-            </a:xfrm>
-            <a:prstGeom prst="rect">
-              <a:avLst/>
-            </a:prstGeom>
-            <a:noFill/>
-          </p:spPr>
-          <p:txBody>
-            <a:bodyPr vertOverflow="overflow" horzOverflow="overflow" vert="horz" wrap="square" lIns="91440" tIns="45720" rIns="91440" bIns="45720" numCol="1" spcCol="0" rtlCol="0" fromWordArt="0" anchor="ctr" anchorCtr="0" forceAA="0" upright="0" compatLnSpc="0">
-              <a:noAutofit/>
-            </a:bodyPr>
-            <a:p>
-              <a:pPr algn="ctr">
-                <a:defRPr/>
-              </a:pPr>
-              <a:r>
-                <a:rPr lang="it-IT" sz="1400" b="0" i="0" u="none" strike="noStrike" cap="none" spc="0">
-                  <a:solidFill>
-                    <a:schemeClr val="tx1"/>
-                  </a:solidFill>
-                  <a:latin typeface="Liberation Sans"/>
-                  <a:ea typeface="Liberation Sans"/>
-                  <a:cs typeface="Liberation Sans"/>
-                </a:rPr>
-                <a:t>XX.XB</a:t>
-              </a:r>
-              <a:endParaRPr>
-                <a:solidFill>
-                  <a:schemeClr val="tx1"/>
-                </a:solidFill>
-                <a:latin typeface="Liberation Sans"/>
-                <a:cs typeface="Liberation Sans"/>
-              </a:endParaRPr>
-            </a:p>
-          </p:txBody>
-        </p:sp>
-        <p:sp>
-          <p:nvSpPr>
-            <p:cNvPr id="1902781788" name=""/>
-            <p:cNvSpPr txBox="1"/>
-            <p:nvPr/>
-          </p:nvSpPr>
-          <p:spPr bwMode="auto">
-            <a:xfrm rot="0" flipH="0" flipV="0">
-              <a:off x="0" y="0"/>
-              <a:ext cx="1828797" cy="406396"/>
-            </a:xfrm>
-            <a:prstGeom prst="rect">
-              <a:avLst/>
-            </a:prstGeom>
-            <a:noFill/>
-          </p:spPr>
-          <p:txBody>
-            <a:bodyPr vertOverflow="overflow" horzOverflow="overflow" vert="horz" wrap="square" lIns="91440" tIns="45720" rIns="91440" bIns="45720" numCol="1" spcCol="0" rtlCol="0" fromWordArt="0" anchor="ctr" anchorCtr="0" forceAA="0" upright="0" compatLnSpc="0">
-              <a:noAutofit/>
-            </a:bodyPr>
-            <a:p>
-              <a:pPr algn="ctr">
-                <a:defRPr/>
-              </a:pPr>
-              <a:r>
-                <a:rPr lang="it-IT" sz="1400" b="1">
-                  <a:solidFill>
-                    <a:schemeClr val="bg1"/>
-                  </a:solidFill>
-                  <a:latin typeface="Liberation Sans"/>
-                  <a:ea typeface="Liberation Sans"/>
-                  <a:cs typeface="Liberation Sans"/>
-                </a:rPr>
-                <a:t>Debt</a:t>
-              </a:r>
-              <a:endParaRPr sz="1400" b="1">
-                <a:solidFill>
-                  <a:schemeClr val="bg1"/>
-                </a:solidFill>
-                <a:latin typeface="Liberation Sans"/>
-                <a:cs typeface="Liberation Sans"/>
-              </a:endParaRPr>
-            </a:p>
-          </p:txBody>
-        </p:sp>
-        <p:sp>
-          <p:nvSpPr>
-            <p:cNvPr id="1900073939" name="debt_2"/>
-            <p:cNvSpPr txBox="1"/>
-            <p:nvPr/>
-          </p:nvSpPr>
-          <p:spPr bwMode="auto">
-            <a:xfrm rot="0" flipH="0" flipV="0">
-              <a:off x="3047997" y="0"/>
-              <a:ext cx="812799" cy="406397"/>
-            </a:xfrm>
-            <a:prstGeom prst="rect">
-              <a:avLst/>
-            </a:prstGeom>
-            <a:noFill/>
-          </p:spPr>
-          <p:txBody>
-            <a:bodyPr vertOverflow="overflow" horzOverflow="overflow" vert="horz" wrap="square" lIns="91440" tIns="45720" rIns="91440" bIns="45720" numCol="1" spcCol="0" rtlCol="0" fromWordArt="0" anchor="ctr" anchorCtr="0" forceAA="0" upright="0" compatLnSpc="0">
-              <a:noAutofit/>
-            </a:bodyPr>
-            <a:p>
-              <a:pPr algn="ctr">
-                <a:defRPr/>
-              </a:pPr>
-              <a:r>
-                <a:rPr lang="it-IT" sz="1400" b="0" i="0" u="none" strike="noStrike" cap="none" spc="0">
-                  <a:solidFill>
-                    <a:schemeClr val="tx1"/>
-                  </a:solidFill>
-                  <a:latin typeface="Liberation Sans"/>
-                  <a:ea typeface="Liberation Sans"/>
-                  <a:cs typeface="Liberation Sans"/>
-                </a:rPr>
-                <a:t>XX.XB</a:t>
-              </a:r>
-              <a:endParaRPr>
-                <a:solidFill>
-                  <a:schemeClr val="tx1"/>
-                </a:solidFill>
-                <a:latin typeface="Liberation Sans"/>
-                <a:cs typeface="Liberation Sans"/>
-              </a:endParaRPr>
-            </a:p>
-          </p:txBody>
-        </p:sp>
-        <p:sp>
-          <p:nvSpPr>
-            <p:cNvPr id="313930224" name="debt_1"/>
-            <p:cNvSpPr txBox="1"/>
-            <p:nvPr/>
-          </p:nvSpPr>
-          <p:spPr bwMode="auto">
-            <a:xfrm rot="0" flipH="0" flipV="0">
-              <a:off x="4063997" y="0"/>
-              <a:ext cx="812799" cy="406397"/>
-            </a:xfrm>
-            <a:prstGeom prst="rect">
-              <a:avLst/>
-            </a:prstGeom>
-            <a:noFill/>
-          </p:spPr>
-          <p:txBody>
-            <a:bodyPr vertOverflow="overflow" horzOverflow="overflow" vert="horz" wrap="square" lIns="91440" tIns="45720" rIns="91440" bIns="45720" numCol="1" spcCol="0" rtlCol="0" fromWordArt="0" anchor="ctr" anchorCtr="0" forceAA="0" upright="0" compatLnSpc="0">
-              <a:noAutofit/>
-            </a:bodyPr>
-            <a:p>
-              <a:pPr algn="ctr">
-                <a:defRPr/>
-              </a:pPr>
-              <a:r>
-                <a:rPr lang="it-IT" sz="1400" b="0" i="0" u="none" strike="noStrike" cap="none" spc="0">
-                  <a:solidFill>
-                    <a:schemeClr val="tx1"/>
-                  </a:solidFill>
-                  <a:latin typeface="Liberation Sans"/>
-                  <a:ea typeface="Liberation Sans"/>
-                  <a:cs typeface="Liberation Sans"/>
-                </a:rPr>
-                <a:t>XX.XB</a:t>
-              </a:r>
-              <a:endParaRPr>
-                <a:solidFill>
-                  <a:schemeClr val="tx1"/>
-                </a:solidFill>
-                <a:latin typeface="Liberation Sans"/>
-                <a:cs typeface="Liberation Sans"/>
-              </a:endParaRPr>
-            </a:p>
-          </p:txBody>
-        </p:sp>
-        <p:sp>
-          <p:nvSpPr>
-            <p:cNvPr id="1028770126" name="debt_m"/>
-            <p:cNvSpPr txBox="1"/>
-            <p:nvPr/>
-          </p:nvSpPr>
-          <p:spPr bwMode="auto">
-            <a:xfrm rot="0" flipH="0" flipV="0">
-              <a:off x="5283198" y="0"/>
-              <a:ext cx="812799" cy="406396"/>
-            </a:xfrm>
-            <a:prstGeom prst="rect">
-              <a:avLst/>
-            </a:prstGeom>
-            <a:noFill/>
-          </p:spPr>
-          <p:txBody>
-            <a:bodyPr vertOverflow="overflow" horzOverflow="overflow" vert="horz" wrap="square" lIns="91440" tIns="45720" rIns="91440" bIns="45720" numCol="1" spcCol="0" rtlCol="0" fromWordArt="0" anchor="ctr" anchorCtr="0" forceAA="0" upright="0" compatLnSpc="0">
-              <a:noAutofit/>
-            </a:bodyPr>
-            <a:p>
-              <a:pPr algn="ctr">
-                <a:defRPr/>
-              </a:pPr>
-              <a:r>
-                <a:rPr lang="it-IT" sz="1400" b="0" i="0" u="none" strike="noStrike" cap="none" spc="0">
-                  <a:solidFill>
-                    <a:schemeClr val="tx1"/>
-                  </a:solidFill>
-                  <a:latin typeface="Liberation Sans"/>
-                  <a:ea typeface="Liberation Sans"/>
-                  <a:cs typeface="Liberation Sans"/>
-                </a:rPr>
-                <a:t>X.X%</a:t>
-              </a:r>
-              <a:endParaRPr sz="1400" b="0">
-                <a:solidFill>
-                  <a:schemeClr val="tx1"/>
-                </a:solidFill>
-                <a:latin typeface="Liberation Sans"/>
-                <a:cs typeface="Liberation Sans"/>
-              </a:endParaRPr>
-            </a:p>
-          </p:txBody>
-        </p:sp>
-        <p:sp>
-          <p:nvSpPr>
-            <p:cNvPr id="1031783940" name="earnings"/>
-            <p:cNvSpPr txBox="1"/>
-            <p:nvPr/>
-          </p:nvSpPr>
-          <p:spPr bwMode="auto">
-            <a:xfrm rot="0" flipH="0" flipV="0">
-              <a:off x="6095997" y="0"/>
-              <a:ext cx="1015999" cy="406396"/>
-            </a:xfrm>
-            <a:prstGeom prst="rect">
-              <a:avLst/>
-            </a:prstGeom>
-            <a:noFill/>
-          </p:spPr>
-          <p:txBody>
-            <a:bodyPr vertOverflow="overflow" horzOverflow="overflow" vert="horz" wrap="square" lIns="91440" tIns="45720" rIns="91440" bIns="45720" numCol="1" spcCol="0" rtlCol="0" fromWordArt="0" anchor="ctr" anchorCtr="0" forceAA="0" upright="0" compatLnSpc="0">
-              <a:noAutofit/>
-            </a:bodyPr>
-            <a:p>
-              <a:pPr algn="l">
-                <a:defRPr/>
-              </a:pPr>
-              <a:r>
-                <a:rPr lang="it-IT" sz="1200" b="0">
-                  <a:solidFill>
-                    <a:schemeClr val="tx1"/>
-                  </a:solidFill>
-                  <a:latin typeface="Liberation Sans"/>
-                  <a:ea typeface="Liberation Sans"/>
-                  <a:cs typeface="Liberation Sans"/>
-                </a:rPr>
-                <a:t>D/C ratio</a:t>
-              </a:r>
-              <a:endParaRPr sz="1200" b="0">
-                <a:solidFill>
-                  <a:schemeClr val="tx1"/>
-                </a:solidFill>
-                <a:latin typeface="Liberation Sans"/>
-                <a:cs typeface="Liberation Sans"/>
-              </a:endParaRPr>
-            </a:p>
-          </p:txBody>
-        </p:sp>
-      </p:grpSp>
-      <p:grpSp>
-        <p:nvGrpSpPr>
-          <p:cNvPr id="1773017766" name=""/>
-          <p:cNvGrpSpPr/>
-          <p:nvPr/>
-        </p:nvGrpSpPr>
-        <p:grpSpPr bwMode="auto">
-          <a:xfrm>
-            <a:off x="406401" y="4800531"/>
-            <a:ext cx="7111998" cy="406439"/>
-            <a:chOff x="0" y="0"/>
-            <a:chExt cx="7111998" cy="406439"/>
-          </a:xfrm>
-        </p:grpSpPr>
-        <p:sp>
-          <p:nvSpPr>
-            <p:cNvPr id="645729051" name="operating_cash_flow_3"/>
-            <p:cNvSpPr txBox="1"/>
-            <p:nvPr/>
-          </p:nvSpPr>
-          <p:spPr bwMode="auto">
-            <a:xfrm rot="0" flipH="0" flipV="0">
-              <a:off x="2031995" y="0"/>
-              <a:ext cx="812799" cy="406397"/>
-            </a:xfrm>
-            <a:prstGeom prst="rect">
-              <a:avLst/>
-            </a:prstGeom>
-            <a:noFill/>
-          </p:spPr>
-          <p:txBody>
-            <a:bodyPr vertOverflow="overflow" horzOverflow="overflow" vert="horz" wrap="square" lIns="91440" tIns="45720" rIns="91440" bIns="45720" numCol="1" spcCol="0" rtlCol="0" fromWordArt="0" anchor="ctr" anchorCtr="0" forceAA="0" upright="0" compatLnSpc="0">
-              <a:noAutofit/>
-            </a:bodyPr>
-            <a:p>
-              <a:pPr algn="ctr">
-                <a:defRPr/>
-              </a:pPr>
-              <a:r>
-                <a:rPr lang="it-IT" sz="1400" b="0" i="0" u="none" strike="noStrike" cap="none" spc="0">
-                  <a:solidFill>
-                    <a:schemeClr val="tx1"/>
-                  </a:solidFill>
-                  <a:latin typeface="Liberation Sans"/>
-                  <a:ea typeface="Liberation Sans"/>
-                  <a:cs typeface="Liberation Sans"/>
-                </a:rPr>
-                <a:t>XX.XB</a:t>
-              </a:r>
-              <a:endParaRPr>
-                <a:solidFill>
-                  <a:schemeClr val="tx1"/>
-                </a:solidFill>
-                <a:latin typeface="Liberation Sans"/>
-                <a:cs typeface="Liberation Sans"/>
-              </a:endParaRPr>
-            </a:p>
-          </p:txBody>
-        </p:sp>
-        <p:sp>
-          <p:nvSpPr>
-            <p:cNvPr id="1539096327" name=""/>
-            <p:cNvSpPr txBox="1"/>
-            <p:nvPr/>
-          </p:nvSpPr>
-          <p:spPr bwMode="auto">
-            <a:xfrm rot="0" flipH="0" flipV="0">
-              <a:off x="0" y="42"/>
-              <a:ext cx="1828797" cy="406396"/>
-            </a:xfrm>
-            <a:prstGeom prst="rect">
-              <a:avLst/>
-            </a:prstGeom>
-            <a:noFill/>
-          </p:spPr>
-          <p:txBody>
-            <a:bodyPr vertOverflow="overflow" horzOverflow="overflow" vert="horz" wrap="square" lIns="91440" tIns="45720" rIns="91440" bIns="45720" numCol="1" spcCol="0" rtlCol="0" fromWordArt="0" anchor="ctr" anchorCtr="0" forceAA="0" upright="0" compatLnSpc="0">
-              <a:noAutofit/>
-            </a:bodyPr>
-            <a:p>
-              <a:pPr algn="ctr">
-                <a:defRPr/>
-              </a:pPr>
-              <a:r>
-                <a:rPr lang="it-IT" sz="1400" b="1">
-                  <a:solidFill>
-                    <a:schemeClr val="bg1"/>
-                  </a:solidFill>
-                  <a:latin typeface="Liberation Sans"/>
-                  <a:ea typeface="Liberation Sans"/>
-                  <a:cs typeface="Liberation Sans"/>
-                </a:rPr>
-                <a:t>Opearting CF</a:t>
-              </a:r>
-              <a:endParaRPr sz="1400" b="1">
-                <a:solidFill>
-                  <a:schemeClr val="bg1"/>
-                </a:solidFill>
-                <a:latin typeface="Liberation Sans"/>
-                <a:cs typeface="Liberation Sans"/>
-              </a:endParaRPr>
-            </a:p>
-          </p:txBody>
-        </p:sp>
-        <p:sp>
-          <p:nvSpPr>
-            <p:cNvPr id="2122910770" name="operating_cash_flow_2"/>
-            <p:cNvSpPr txBox="1"/>
-            <p:nvPr/>
-          </p:nvSpPr>
-          <p:spPr bwMode="auto">
-            <a:xfrm rot="0" flipH="0" flipV="0">
-              <a:off x="3047997" y="0"/>
-              <a:ext cx="812799" cy="406397"/>
-            </a:xfrm>
-            <a:prstGeom prst="rect">
-              <a:avLst/>
-            </a:prstGeom>
-            <a:noFill/>
-          </p:spPr>
-          <p:txBody>
-            <a:bodyPr vertOverflow="overflow" horzOverflow="overflow" vert="horz" wrap="square" lIns="91440" tIns="45720" rIns="91440" bIns="45720" numCol="1" spcCol="0" rtlCol="0" fromWordArt="0" anchor="ctr" anchorCtr="0" forceAA="0" upright="0" compatLnSpc="0">
-              <a:noAutofit/>
-            </a:bodyPr>
-            <a:p>
-              <a:pPr algn="ctr">
-                <a:defRPr/>
-              </a:pPr>
-              <a:r>
-                <a:rPr lang="it-IT" sz="1400" b="0" i="0" u="none" strike="noStrike" cap="none" spc="0">
-                  <a:solidFill>
-                    <a:schemeClr val="tx1"/>
-                  </a:solidFill>
-                  <a:latin typeface="Liberation Sans"/>
-                  <a:ea typeface="Liberation Sans"/>
-                  <a:cs typeface="Liberation Sans"/>
-                </a:rPr>
-                <a:t>XX.XB</a:t>
-              </a:r>
-              <a:endParaRPr>
-                <a:solidFill>
-                  <a:schemeClr val="tx1"/>
-                </a:solidFill>
-                <a:latin typeface="Liberation Sans"/>
-                <a:cs typeface="Liberation Sans"/>
-              </a:endParaRPr>
-            </a:p>
-          </p:txBody>
-        </p:sp>
-        <p:sp>
-          <p:nvSpPr>
-            <p:cNvPr id="599570348" name="operating_cash_flow_1"/>
-            <p:cNvSpPr txBox="1"/>
-            <p:nvPr/>
-          </p:nvSpPr>
-          <p:spPr bwMode="auto">
-            <a:xfrm rot="0" flipH="0" flipV="0">
-              <a:off x="4063997" y="0"/>
-              <a:ext cx="812799" cy="406397"/>
-            </a:xfrm>
-            <a:prstGeom prst="rect">
-              <a:avLst/>
-            </a:prstGeom>
-            <a:noFill/>
-          </p:spPr>
-          <p:txBody>
-            <a:bodyPr vertOverflow="overflow" horzOverflow="overflow" vert="horz" wrap="square" lIns="91440" tIns="45720" rIns="91440" bIns="45720" numCol="1" spcCol="0" rtlCol="0" fromWordArt="0" anchor="ctr" anchorCtr="0" forceAA="0" upright="0" compatLnSpc="0">
-              <a:noAutofit/>
-            </a:bodyPr>
-            <a:p>
-              <a:pPr algn="ctr">
-                <a:defRPr/>
-              </a:pPr>
-              <a:r>
-                <a:rPr lang="it-IT" sz="1400" b="0" i="0" u="none" strike="noStrike" cap="none" spc="0">
-                  <a:solidFill>
-                    <a:schemeClr val="tx1"/>
-                  </a:solidFill>
-                  <a:latin typeface="Liberation Sans"/>
-                  <a:ea typeface="Liberation Sans"/>
-                  <a:cs typeface="Liberation Sans"/>
-                </a:rPr>
-                <a:t>XX.XB</a:t>
-              </a:r>
-              <a:endParaRPr>
-                <a:solidFill>
-                  <a:schemeClr val="tx1"/>
-                </a:solidFill>
-                <a:latin typeface="Liberation Sans"/>
-                <a:cs typeface="Liberation Sans"/>
-              </a:endParaRPr>
-            </a:p>
-          </p:txBody>
-        </p:sp>
-        <p:sp>
-          <p:nvSpPr>
-            <p:cNvPr id="1576519319" name="operating_cash_flow_m"/>
-            <p:cNvSpPr txBox="1"/>
-            <p:nvPr/>
-          </p:nvSpPr>
-          <p:spPr bwMode="auto">
-            <a:xfrm rot="0" flipH="0" flipV="0">
-              <a:off x="5283198" y="0"/>
-              <a:ext cx="812799" cy="406396"/>
-            </a:xfrm>
-            <a:prstGeom prst="rect">
-              <a:avLst/>
-            </a:prstGeom>
-            <a:noFill/>
-          </p:spPr>
-          <p:txBody>
-            <a:bodyPr vertOverflow="overflow" horzOverflow="overflow" vert="horz" wrap="square" lIns="91440" tIns="45720" rIns="91440" bIns="45720" numCol="1" spcCol="0" rtlCol="0" fromWordArt="0" anchor="ctr" anchorCtr="0" forceAA="0" upright="0" compatLnSpc="0">
-              <a:noAutofit/>
-            </a:bodyPr>
-            <a:p>
-              <a:pPr algn="ctr">
-                <a:defRPr/>
-              </a:pPr>
-              <a:r>
-                <a:rPr lang="it-IT" sz="1400" b="0" i="0" u="none" strike="noStrike" cap="none" spc="0">
-                  <a:solidFill>
-                    <a:schemeClr val="tx1"/>
-                  </a:solidFill>
-                  <a:latin typeface="Liberation Sans"/>
-                  <a:ea typeface="Liberation Sans"/>
-                  <a:cs typeface="Liberation Sans"/>
-                </a:rPr>
-                <a:t>X.X%</a:t>
-              </a:r>
-              <a:endParaRPr sz="1400" b="0">
-                <a:solidFill>
-                  <a:schemeClr val="tx1"/>
-                </a:solidFill>
-                <a:latin typeface="Liberation Sans"/>
-                <a:cs typeface="Liberation Sans"/>
-              </a:endParaRPr>
-            </a:p>
-          </p:txBody>
-        </p:sp>
-        <p:sp>
-          <p:nvSpPr>
-            <p:cNvPr id="1253344835" name="stock_price"/>
-            <p:cNvSpPr txBox="1"/>
-            <p:nvPr/>
-          </p:nvSpPr>
-          <p:spPr bwMode="auto">
-            <a:xfrm rot="0" flipH="0" flipV="0">
-              <a:off x="6095997" y="0"/>
-              <a:ext cx="1015999" cy="406396"/>
-            </a:xfrm>
-            <a:prstGeom prst="rect">
-              <a:avLst/>
-            </a:prstGeom>
-            <a:noFill/>
-          </p:spPr>
-          <p:txBody>
-            <a:bodyPr vertOverflow="overflow" horzOverflow="overflow" vert="horz" wrap="square" lIns="91440" tIns="45720" rIns="91440" bIns="45720" numCol="1" spcCol="0" rtlCol="0" fromWordArt="0" anchor="ctr" anchorCtr="0" forceAA="0" upright="0" compatLnSpc="0">
-              <a:noAutofit/>
-            </a:bodyPr>
-            <a:p>
-              <a:pPr algn="l">
-                <a:defRPr/>
-              </a:pPr>
-              <a:r>
-                <a:rPr lang="it-IT" sz="1200" b="0">
-                  <a:solidFill>
-                    <a:schemeClr val="tx1"/>
-                  </a:solidFill>
-                  <a:latin typeface="Liberation Sans"/>
-                  <a:ea typeface="Liberation Sans"/>
-                  <a:cs typeface="Liberation Sans"/>
-                </a:rPr>
-                <a:t>of revenue</a:t>
-              </a:r>
-              <a:endParaRPr sz="1200" b="0">
-                <a:solidFill>
-                  <a:schemeClr val="tx1"/>
-                </a:solidFill>
-                <a:latin typeface="Liberation Sans"/>
-                <a:cs typeface="Liberation Sans"/>
-              </a:endParaRPr>
-            </a:p>
-          </p:txBody>
-        </p:sp>
-      </p:grpSp>
-      <p:grpSp>
-        <p:nvGrpSpPr>
-          <p:cNvPr id="813104165" name=""/>
-          <p:cNvGrpSpPr/>
-          <p:nvPr/>
-        </p:nvGrpSpPr>
-        <p:grpSpPr bwMode="auto">
-          <a:xfrm>
-            <a:off x="406401" y="5232332"/>
-            <a:ext cx="7111998" cy="406398"/>
-            <a:chOff x="0" y="0"/>
-            <a:chExt cx="7111998" cy="406398"/>
-          </a:xfrm>
-        </p:grpSpPr>
-        <p:sp>
-          <p:nvSpPr>
-            <p:cNvPr id="313328945" name="investing_cash_flow_3"/>
-            <p:cNvSpPr txBox="1"/>
-            <p:nvPr/>
-          </p:nvSpPr>
-          <p:spPr bwMode="auto">
-            <a:xfrm rot="0" flipH="0" flipV="0">
-              <a:off x="2031995" y="0"/>
-              <a:ext cx="812799" cy="406397"/>
-            </a:xfrm>
-            <a:prstGeom prst="rect">
-              <a:avLst/>
-            </a:prstGeom>
-            <a:noFill/>
-          </p:spPr>
-          <p:txBody>
-            <a:bodyPr vertOverflow="overflow" horzOverflow="overflow" vert="horz" wrap="square" lIns="91440" tIns="45720" rIns="91440" bIns="45720" numCol="1" spcCol="0" rtlCol="0" fromWordArt="0" anchor="ctr" anchorCtr="0" forceAA="0" upright="0" compatLnSpc="0">
-              <a:noAutofit/>
-            </a:bodyPr>
-            <a:p>
-              <a:pPr algn="ctr">
-                <a:defRPr/>
-              </a:pPr>
-              <a:r>
-                <a:rPr lang="it-IT" sz="1400" b="0" i="0" u="none" strike="noStrike" cap="none" spc="0">
-                  <a:solidFill>
-                    <a:schemeClr val="tx1"/>
-                  </a:solidFill>
-                  <a:latin typeface="Liberation Sans"/>
-                  <a:ea typeface="Liberation Sans"/>
-                  <a:cs typeface="Liberation Sans"/>
-                </a:rPr>
-                <a:t>XX.XB</a:t>
-              </a:r>
-              <a:endParaRPr>
-                <a:solidFill>
-                  <a:schemeClr val="tx1"/>
-                </a:solidFill>
-                <a:latin typeface="Liberation Sans"/>
-                <a:cs typeface="Liberation Sans"/>
-              </a:endParaRPr>
-            </a:p>
-          </p:txBody>
-        </p:sp>
-        <p:sp>
-          <p:nvSpPr>
-            <p:cNvPr id="1257300371" name=""/>
-            <p:cNvSpPr txBox="1"/>
-            <p:nvPr/>
-          </p:nvSpPr>
-          <p:spPr bwMode="auto">
-            <a:xfrm rot="0" flipH="0" flipV="0">
-              <a:off x="0" y="0"/>
-              <a:ext cx="1828797" cy="406396"/>
-            </a:xfrm>
-            <a:prstGeom prst="rect">
-              <a:avLst/>
-            </a:prstGeom>
-            <a:noFill/>
-          </p:spPr>
-          <p:txBody>
-            <a:bodyPr vertOverflow="overflow" horzOverflow="overflow" vert="horz" wrap="square" lIns="91440" tIns="45720" rIns="91440" bIns="45720" numCol="1" spcCol="0" rtlCol="0" fromWordArt="0" anchor="ctr" anchorCtr="0" forceAA="0" upright="0" compatLnSpc="0">
-              <a:noAutofit/>
-            </a:bodyPr>
-            <a:p>
-              <a:pPr algn="ctr">
-                <a:defRPr/>
-              </a:pPr>
-              <a:r>
-                <a:rPr lang="it-IT" sz="1400" b="1">
-                  <a:solidFill>
-                    <a:schemeClr val="bg1"/>
-                  </a:solidFill>
-                  <a:latin typeface="Liberation Sans"/>
-                  <a:ea typeface="Liberation Sans"/>
-                  <a:cs typeface="Liberation Sans"/>
-                </a:rPr>
-                <a:t>Investing CF</a:t>
-              </a:r>
-              <a:endParaRPr sz="1400" b="1">
-                <a:solidFill>
-                  <a:schemeClr val="bg1"/>
-                </a:solidFill>
-                <a:latin typeface="Liberation Sans"/>
-                <a:cs typeface="Liberation Sans"/>
-              </a:endParaRPr>
-            </a:p>
-          </p:txBody>
-        </p:sp>
-        <p:sp>
-          <p:nvSpPr>
-            <p:cNvPr id="70168265" name="investing_cash_flow_2"/>
-            <p:cNvSpPr txBox="1"/>
-            <p:nvPr/>
-          </p:nvSpPr>
-          <p:spPr bwMode="auto">
-            <a:xfrm rot="0" flipH="0" flipV="0">
-              <a:off x="3047997" y="0"/>
-              <a:ext cx="812799" cy="406397"/>
-            </a:xfrm>
-            <a:prstGeom prst="rect">
-              <a:avLst/>
-            </a:prstGeom>
-            <a:noFill/>
-          </p:spPr>
-          <p:txBody>
-            <a:bodyPr vertOverflow="overflow" horzOverflow="overflow" vert="horz" wrap="square" lIns="91440" tIns="45720" rIns="91440" bIns="45720" numCol="1" spcCol="0" rtlCol="0" fromWordArt="0" anchor="ctr" anchorCtr="0" forceAA="0" upright="0" compatLnSpc="0">
-              <a:noAutofit/>
-            </a:bodyPr>
-            <a:p>
-              <a:pPr algn="ctr">
-                <a:defRPr/>
-              </a:pPr>
-              <a:r>
-                <a:rPr lang="it-IT" sz="1400" b="0" i="0" u="none" strike="noStrike" cap="none" spc="0">
-                  <a:solidFill>
-                    <a:schemeClr val="tx1"/>
-                  </a:solidFill>
-                  <a:latin typeface="Liberation Sans"/>
-                  <a:ea typeface="Liberation Sans"/>
-                  <a:cs typeface="Liberation Sans"/>
-                </a:rPr>
-                <a:t>XX.XB</a:t>
-              </a:r>
-              <a:endParaRPr>
-                <a:solidFill>
-                  <a:schemeClr val="tx1"/>
-                </a:solidFill>
-                <a:latin typeface="Liberation Sans"/>
-                <a:cs typeface="Liberation Sans"/>
-              </a:endParaRPr>
-            </a:p>
-          </p:txBody>
-        </p:sp>
-        <p:sp>
-          <p:nvSpPr>
-            <p:cNvPr id="2098840917" name="investing_cash_flow_1"/>
-            <p:cNvSpPr txBox="1"/>
-            <p:nvPr/>
-          </p:nvSpPr>
-          <p:spPr bwMode="auto">
-            <a:xfrm rot="0" flipH="0" flipV="0">
-              <a:off x="4063997" y="0"/>
-              <a:ext cx="812799" cy="406397"/>
-            </a:xfrm>
-            <a:prstGeom prst="rect">
-              <a:avLst/>
-            </a:prstGeom>
-            <a:noFill/>
-          </p:spPr>
-          <p:txBody>
-            <a:bodyPr vertOverflow="overflow" horzOverflow="overflow" vert="horz" wrap="square" lIns="91440" tIns="45720" rIns="91440" bIns="45720" numCol="1" spcCol="0" rtlCol="0" fromWordArt="0" anchor="ctr" anchorCtr="0" forceAA="0" upright="0" compatLnSpc="0">
-              <a:noAutofit/>
-            </a:bodyPr>
-            <a:p>
-              <a:pPr algn="ctr">
-                <a:defRPr/>
-              </a:pPr>
-              <a:r>
-                <a:rPr lang="it-IT" sz="1400" b="0" i="0" u="none" strike="noStrike" cap="none" spc="0">
-                  <a:solidFill>
-                    <a:schemeClr val="tx1"/>
-                  </a:solidFill>
-                  <a:latin typeface="Liberation Sans"/>
-                  <a:ea typeface="Liberation Sans"/>
-                  <a:cs typeface="Liberation Sans"/>
-                </a:rPr>
-                <a:t>XX.XB</a:t>
-              </a:r>
-              <a:endParaRPr>
-                <a:solidFill>
-                  <a:schemeClr val="tx1"/>
-                </a:solidFill>
-                <a:latin typeface="Liberation Sans"/>
-                <a:cs typeface="Liberation Sans"/>
-              </a:endParaRPr>
-            </a:p>
-          </p:txBody>
-        </p:sp>
-        <p:sp>
-          <p:nvSpPr>
-            <p:cNvPr id="1467057746" name="investing_cash_flow_m"/>
-            <p:cNvSpPr txBox="1"/>
-            <p:nvPr/>
-          </p:nvSpPr>
-          <p:spPr bwMode="auto">
-            <a:xfrm rot="0" flipH="0" flipV="0">
-              <a:off x="5283198" y="0"/>
-              <a:ext cx="812799" cy="406396"/>
-            </a:xfrm>
-            <a:prstGeom prst="rect">
-              <a:avLst/>
-            </a:prstGeom>
-            <a:noFill/>
-          </p:spPr>
-          <p:txBody>
-            <a:bodyPr vertOverflow="overflow" horzOverflow="overflow" vert="horz" wrap="square" lIns="91440" tIns="45720" rIns="91440" bIns="45720" numCol="1" spcCol="0" rtlCol="0" fromWordArt="0" anchor="ctr" anchorCtr="0" forceAA="0" upright="0" compatLnSpc="0">
-              <a:noAutofit/>
-            </a:bodyPr>
-            <a:p>
-              <a:pPr algn="ctr">
-                <a:defRPr/>
-              </a:pPr>
-              <a:r>
-                <a:rPr lang="it-IT" sz="1400" b="0" i="0" u="none" strike="noStrike" cap="none" spc="0">
-                  <a:solidFill>
-                    <a:schemeClr val="tx1"/>
-                  </a:solidFill>
-                  <a:latin typeface="Liberation Sans"/>
-                  <a:ea typeface="Liberation Sans"/>
-                  <a:cs typeface="Liberation Sans"/>
-                </a:rPr>
-                <a:t>X.X%</a:t>
-              </a:r>
-              <a:endParaRPr sz="1400" b="0">
-                <a:solidFill>
-                  <a:schemeClr val="tx1"/>
-                </a:solidFill>
-                <a:latin typeface="Liberation Sans"/>
-                <a:cs typeface="Liberation Sans"/>
-              </a:endParaRPr>
-            </a:p>
-          </p:txBody>
-        </p:sp>
-        <p:sp>
-          <p:nvSpPr>
-            <p:cNvPr id="939470111" name="analyst_rating"/>
-            <p:cNvSpPr txBox="1"/>
-            <p:nvPr/>
-          </p:nvSpPr>
-          <p:spPr bwMode="auto">
-            <a:xfrm rot="0" flipH="0" flipV="0">
-              <a:off x="6095997" y="1"/>
-              <a:ext cx="1015999" cy="406396"/>
-            </a:xfrm>
-            <a:prstGeom prst="rect">
-              <a:avLst/>
-            </a:prstGeom>
-            <a:noFill/>
-          </p:spPr>
-          <p:txBody>
-            <a:bodyPr vertOverflow="overflow" horzOverflow="overflow" vert="horz" wrap="square" lIns="91440" tIns="45720" rIns="91440" bIns="45720" numCol="1" spcCol="0" rtlCol="0" fromWordArt="0" anchor="ctr" anchorCtr="0" forceAA="0" upright="0" compatLnSpc="0">
-              <a:noAutofit/>
-            </a:bodyPr>
-            <a:p>
-              <a:pPr algn="l">
-                <a:defRPr/>
-              </a:pPr>
-              <a:r>
-                <a:rPr lang="it-IT" sz="1200" b="0">
-                  <a:solidFill>
-                    <a:schemeClr val="tx1"/>
-                  </a:solidFill>
-                  <a:latin typeface="Liberation Sans"/>
-                  <a:ea typeface="Liberation Sans"/>
-                  <a:cs typeface="Liberation Sans"/>
-                </a:rPr>
-                <a:t>of revenue</a:t>
-              </a:r>
-              <a:endParaRPr sz="1200" b="0">
-                <a:solidFill>
-                  <a:schemeClr val="tx1"/>
-                </a:solidFill>
-                <a:latin typeface="Liberation Sans"/>
-                <a:cs typeface="Liberation Sans"/>
-              </a:endParaRPr>
-            </a:p>
-          </p:txBody>
-        </p:sp>
-      </p:grpSp>
-      <p:grpSp>
-        <p:nvGrpSpPr>
-          <p:cNvPr id="887099414" name=""/>
-          <p:cNvGrpSpPr/>
-          <p:nvPr/>
-        </p:nvGrpSpPr>
-        <p:grpSpPr bwMode="auto">
-          <a:xfrm>
-            <a:off x="406401" y="5664199"/>
-            <a:ext cx="7111998" cy="406399"/>
-            <a:chOff x="0" y="0"/>
-            <a:chExt cx="7111998" cy="406399"/>
-          </a:xfrm>
-        </p:grpSpPr>
-        <p:sp>
-          <p:nvSpPr>
-            <p:cNvPr id="347780473" name=""/>
-            <p:cNvSpPr txBox="1"/>
-            <p:nvPr/>
-          </p:nvSpPr>
-          <p:spPr bwMode="auto">
-            <a:xfrm rot="0" flipH="0" flipV="0">
-              <a:off x="0" y="0"/>
-              <a:ext cx="1828797" cy="406396"/>
-            </a:xfrm>
-            <a:prstGeom prst="rect">
-              <a:avLst/>
-            </a:prstGeom>
-            <a:noFill/>
-          </p:spPr>
-          <p:txBody>
-            <a:bodyPr vertOverflow="overflow" horzOverflow="overflow" vert="horz" wrap="square" lIns="91440" tIns="45720" rIns="91440" bIns="45720" numCol="1" spcCol="0" rtlCol="0" fromWordArt="0" anchor="ctr" anchorCtr="0" forceAA="0" upright="0" compatLnSpc="0">
-              <a:noAutofit/>
-            </a:bodyPr>
-            <a:p>
-              <a:pPr algn="ctr">
-                <a:defRPr/>
-              </a:pPr>
-              <a:r>
-                <a:rPr lang="it-IT" sz="1400" b="1">
-                  <a:solidFill>
-                    <a:schemeClr val="bg1"/>
-                  </a:solidFill>
-                  <a:latin typeface="Liberation Sans"/>
-                  <a:ea typeface="Liberation Sans"/>
-                  <a:cs typeface="Liberation Sans"/>
-                </a:rPr>
-                <a:t>Free cash flow</a:t>
-              </a:r>
-              <a:endParaRPr sz="1400" b="1">
-                <a:solidFill>
-                  <a:schemeClr val="bg1"/>
-                </a:solidFill>
-                <a:latin typeface="Liberation Sans"/>
-                <a:cs typeface="Liberation Sans"/>
-              </a:endParaRPr>
-            </a:p>
-          </p:txBody>
-        </p:sp>
-        <p:sp>
-          <p:nvSpPr>
-            <p:cNvPr id="1373723498" name="free_cash_flow_3"/>
-            <p:cNvSpPr txBox="1"/>
-            <p:nvPr/>
-          </p:nvSpPr>
-          <p:spPr bwMode="auto">
-            <a:xfrm rot="0" flipH="0" flipV="0">
-              <a:off x="2031995" y="0"/>
-              <a:ext cx="812799" cy="406397"/>
-            </a:xfrm>
-            <a:prstGeom prst="rect">
-              <a:avLst/>
-            </a:prstGeom>
-            <a:noFill/>
-          </p:spPr>
-          <p:txBody>
-            <a:bodyPr vertOverflow="overflow" horzOverflow="overflow" vert="horz" wrap="square" lIns="91440" tIns="45720" rIns="91440" bIns="45720" numCol="1" spcCol="0" rtlCol="0" fromWordArt="0" anchor="ctr" anchorCtr="0" forceAA="0" upright="0" compatLnSpc="0">
-              <a:noAutofit/>
-            </a:bodyPr>
-            <a:p>
-              <a:pPr algn="ctr">
-                <a:defRPr/>
-              </a:pPr>
-              <a:r>
-                <a:rPr lang="it-IT" sz="1400" b="0" i="0" u="none" strike="noStrike" cap="none" spc="0">
-                  <a:solidFill>
-                    <a:schemeClr val="tx1"/>
-                  </a:solidFill>
-                  <a:latin typeface="Liberation Sans"/>
-                  <a:ea typeface="Liberation Sans"/>
-                  <a:cs typeface="Liberation Sans"/>
-                </a:rPr>
-                <a:t>XX.XB</a:t>
-              </a:r>
-              <a:endParaRPr>
-                <a:solidFill>
-                  <a:schemeClr val="tx1"/>
-                </a:solidFill>
-                <a:latin typeface="Liberation Sans"/>
-                <a:cs typeface="Liberation Sans"/>
-              </a:endParaRPr>
-            </a:p>
-          </p:txBody>
-        </p:sp>
-        <p:sp>
-          <p:nvSpPr>
-            <p:cNvPr id="72698928" name="free_cash_flow_2"/>
-            <p:cNvSpPr txBox="1"/>
-            <p:nvPr/>
-          </p:nvSpPr>
-          <p:spPr bwMode="auto">
-            <a:xfrm rot="0" flipH="0" flipV="0">
-              <a:off x="3047997" y="0"/>
-              <a:ext cx="812799" cy="406397"/>
-            </a:xfrm>
-            <a:prstGeom prst="rect">
-              <a:avLst/>
-            </a:prstGeom>
-            <a:noFill/>
-          </p:spPr>
-          <p:txBody>
-            <a:bodyPr vertOverflow="overflow" horzOverflow="overflow" vert="horz" wrap="square" lIns="91440" tIns="45720" rIns="91440" bIns="45720" numCol="1" spcCol="0" rtlCol="0" fromWordArt="0" anchor="ctr" anchorCtr="0" forceAA="0" upright="0" compatLnSpc="0">
-              <a:noAutofit/>
-            </a:bodyPr>
-            <a:p>
-              <a:pPr algn="ctr">
-                <a:defRPr/>
-              </a:pPr>
-              <a:r>
-                <a:rPr lang="it-IT" sz="1400" b="0" i="0" u="none" strike="noStrike" cap="none" spc="0">
-                  <a:solidFill>
-                    <a:schemeClr val="tx1"/>
-                  </a:solidFill>
-                  <a:latin typeface="Liberation Sans"/>
-                  <a:ea typeface="Liberation Sans"/>
-                  <a:cs typeface="Liberation Sans"/>
-                </a:rPr>
-                <a:t>XX.XB</a:t>
-              </a:r>
-              <a:endParaRPr>
-                <a:solidFill>
-                  <a:schemeClr val="tx1"/>
-                </a:solidFill>
-                <a:latin typeface="Liberation Sans"/>
-                <a:cs typeface="Liberation Sans"/>
-              </a:endParaRPr>
-            </a:p>
-          </p:txBody>
-        </p:sp>
-        <p:sp>
-          <p:nvSpPr>
-            <p:cNvPr id="63053690" name="free_cash_flow_1"/>
-            <p:cNvSpPr txBox="1"/>
-            <p:nvPr/>
-          </p:nvSpPr>
-          <p:spPr bwMode="auto">
-            <a:xfrm rot="0" flipH="0" flipV="0">
-              <a:off x="4063997" y="0"/>
-              <a:ext cx="812799" cy="406397"/>
-            </a:xfrm>
-            <a:prstGeom prst="rect">
-              <a:avLst/>
-            </a:prstGeom>
-            <a:noFill/>
-          </p:spPr>
-          <p:txBody>
-            <a:bodyPr vertOverflow="overflow" horzOverflow="overflow" vert="horz" wrap="square" lIns="91440" tIns="45720" rIns="91440" bIns="45720" numCol="1" spcCol="0" rtlCol="0" fromWordArt="0" anchor="ctr" anchorCtr="0" forceAA="0" upright="0" compatLnSpc="0">
-              <a:noAutofit/>
-            </a:bodyPr>
-            <a:p>
-              <a:pPr algn="ctr">
-                <a:defRPr/>
-              </a:pPr>
-              <a:r>
-                <a:rPr lang="it-IT" sz="1400" b="0" i="0" u="none" strike="noStrike" cap="none" spc="0">
-                  <a:solidFill>
-                    <a:schemeClr val="tx1"/>
-                  </a:solidFill>
-                  <a:latin typeface="Liberation Sans"/>
-                  <a:ea typeface="Liberation Sans"/>
-                  <a:cs typeface="Liberation Sans"/>
-                </a:rPr>
-                <a:t>XX.XB</a:t>
-              </a:r>
-              <a:endParaRPr>
-                <a:solidFill>
-                  <a:schemeClr val="tx1"/>
-                </a:solidFill>
-                <a:latin typeface="Liberation Sans"/>
-                <a:cs typeface="Liberation Sans"/>
-              </a:endParaRPr>
-            </a:p>
-          </p:txBody>
-        </p:sp>
-        <p:sp>
-          <p:nvSpPr>
-            <p:cNvPr id="1912630732" name="free_cash_flow_m"/>
-            <p:cNvSpPr txBox="1"/>
-            <p:nvPr/>
-          </p:nvSpPr>
-          <p:spPr bwMode="auto">
-            <a:xfrm rot="0" flipH="0" flipV="0">
-              <a:off x="5283198" y="0"/>
-              <a:ext cx="812799" cy="406396"/>
-            </a:xfrm>
-            <a:prstGeom prst="rect">
-              <a:avLst/>
-            </a:prstGeom>
-            <a:noFill/>
-          </p:spPr>
-          <p:txBody>
-            <a:bodyPr vertOverflow="overflow" horzOverflow="overflow" vert="horz" wrap="square" lIns="91440" tIns="45720" rIns="91440" bIns="45720" numCol="1" spcCol="0" rtlCol="0" fromWordArt="0" anchor="ctr" anchorCtr="0" forceAA="0" upright="0" compatLnSpc="0">
-              <a:noAutofit/>
-            </a:bodyPr>
-            <a:p>
-              <a:pPr algn="ctr">
-                <a:defRPr/>
-              </a:pPr>
-              <a:r>
-                <a:rPr lang="it-IT" sz="1400" b="0" i="0" u="none" strike="noStrike" cap="none" spc="0">
-                  <a:solidFill>
-                    <a:schemeClr val="tx1"/>
-                  </a:solidFill>
-                  <a:latin typeface="Liberation Sans"/>
-                  <a:ea typeface="Liberation Sans"/>
-                  <a:cs typeface="Liberation Sans"/>
-                </a:rPr>
-                <a:t>X.X%</a:t>
-              </a:r>
-              <a:endParaRPr sz="1400" b="0">
-                <a:solidFill>
-                  <a:schemeClr val="tx1"/>
-                </a:solidFill>
-                <a:latin typeface="Liberation Sans"/>
-                <a:cs typeface="Liberation Sans"/>
-              </a:endParaRPr>
-            </a:p>
-          </p:txBody>
-        </p:sp>
-        <p:sp>
-          <p:nvSpPr>
-            <p:cNvPr id="403836670" name="beta"/>
-            <p:cNvSpPr txBox="1"/>
-            <p:nvPr/>
-          </p:nvSpPr>
-          <p:spPr bwMode="auto">
-            <a:xfrm rot="0" flipH="0" flipV="0">
-              <a:off x="6095997" y="2"/>
-              <a:ext cx="1015999" cy="406396"/>
-            </a:xfrm>
-            <a:prstGeom prst="rect">
-              <a:avLst/>
-            </a:prstGeom>
-            <a:noFill/>
-          </p:spPr>
-          <p:txBody>
-            <a:bodyPr vertOverflow="overflow" horzOverflow="overflow" vert="horz" wrap="square" lIns="91440" tIns="45720" rIns="91440" bIns="45720" numCol="1" spcCol="0" rtlCol="0" fromWordArt="0" anchor="ctr" anchorCtr="0" forceAA="0" upright="0" compatLnSpc="0">
-              <a:noAutofit/>
-            </a:bodyPr>
-            <a:p>
-              <a:pPr algn="l">
-                <a:defRPr/>
-              </a:pPr>
-              <a:r>
-                <a:rPr lang="it-IT" sz="1200" b="0">
-                  <a:solidFill>
-                    <a:schemeClr val="tx1"/>
-                  </a:solidFill>
-                  <a:latin typeface="Liberation Sans"/>
-                  <a:ea typeface="Liberation Sans"/>
-                  <a:cs typeface="Liberation Sans"/>
-                </a:rPr>
-                <a:t>growth</a:t>
-              </a:r>
-              <a:endParaRPr sz="1200" b="0">
-                <a:solidFill>
-                  <a:schemeClr val="tx1"/>
-                </a:solidFill>
-                <a:latin typeface="Liberation Sans"/>
-                <a:cs typeface="Liberation Sans"/>
-              </a:endParaRPr>
-            </a:p>
-          </p:txBody>
-        </p:sp>
-      </p:grpSp>
-      <p:grpSp>
-        <p:nvGrpSpPr>
-          <p:cNvPr id="1535582124" name=""/>
+          <p:cNvPr id="208625309" name=""/>
           <p:cNvGrpSpPr/>
           <p:nvPr/>
         </p:nvGrpSpPr>
@@ -12068,7 +11888,7 @@
       </p:grpSp>
       <p:grpSp>
         <p:nvGrpSpPr>
-          <p:cNvPr id="172888904" name=""/>
+          <p:cNvPr id="269783159" name=""/>
           <p:cNvGrpSpPr/>
           <p:nvPr/>
         </p:nvGrpSpPr>
@@ -12200,7 +12020,7 @@
       </p:grpSp>
       <p:grpSp>
         <p:nvGrpSpPr>
-          <p:cNvPr id="1039065169" name=""/>
+          <p:cNvPr id="280321001" name=""/>
           <p:cNvGrpSpPr/>
           <p:nvPr/>
         </p:nvGrpSpPr>
@@ -12332,7 +12152,7 @@
       </p:grpSp>
       <p:grpSp>
         <p:nvGrpSpPr>
-          <p:cNvPr id="1313233950" name=""/>
+          <p:cNvPr id="1356685955" name=""/>
           <p:cNvGrpSpPr/>
           <p:nvPr/>
         </p:nvGrpSpPr>
@@ -12464,7 +12284,7 @@
       </p:grpSp>
       <p:grpSp>
         <p:nvGrpSpPr>
-          <p:cNvPr id="895732318" name=""/>
+          <p:cNvPr id="1718716677" name=""/>
           <p:cNvGrpSpPr/>
           <p:nvPr/>
         </p:nvGrpSpPr>
@@ -12596,7 +12416,7 @@
       </p:grpSp>
       <p:grpSp>
         <p:nvGrpSpPr>
-          <p:cNvPr id="711070091" name=""/>
+          <p:cNvPr id="1854769100" name=""/>
           <p:cNvGrpSpPr/>
           <p:nvPr/>
         </p:nvGrpSpPr>
@@ -12728,7 +12548,7 @@
       </p:grpSp>
       <p:grpSp>
         <p:nvGrpSpPr>
-          <p:cNvPr id="1421292216" name=""/>
+          <p:cNvPr id="252307598" name=""/>
           <p:cNvGrpSpPr/>
           <p:nvPr/>
         </p:nvGrpSpPr>
@@ -12860,7 +12680,7 @@
       </p:grpSp>
       <p:grpSp>
         <p:nvGrpSpPr>
-          <p:cNvPr id="2106601427" name=""/>
+          <p:cNvPr id="2084922379" name=""/>
           <p:cNvGrpSpPr/>
           <p:nvPr/>
         </p:nvGrpSpPr>
@@ -13025,7 +12845,7 @@
       </p:grpSpPr>
       <p:sp>
         <p:nvSpPr>
-          <p:cNvPr id="1718226957" name="Title 1"/>
+          <p:cNvPr id="1333325587" name="Title 1"/>
           <p:cNvSpPr>
             <a:spLocks noGrp="1"/>
           </p:cNvSpPr>
@@ -13084,7 +12904,7 @@
       </p:sp>
       <p:sp>
         <p:nvSpPr>
-          <p:cNvPr id="1660622916" name="Footer Placeholder 4"/>
+          <p:cNvPr id="1761126578" name="Footer Placeholder 4"/>
           <p:cNvSpPr>
             <a:spLocks noGrp="1"/>
           </p:cNvSpPr>
@@ -13118,7 +12938,7 @@
       </p:sp>
       <p:sp>
         <p:nvSpPr>
-          <p:cNvPr id="778689812" name="Slide Number Placeholder 5"/>
+          <p:cNvPr id="1679673919" name="Slide Number Placeholder 5"/>
           <p:cNvSpPr>
             <a:spLocks noGrp="1"/>
           </p:cNvSpPr>
@@ -13148,7 +12968,7 @@
       </p:sp>
       <p:cxnSp>
         <p:nvCxnSpPr>
-          <p:cNvPr id="136714021" name=""/>
+          <p:cNvPr id="1311678184" name=""/>
           <p:cNvCxnSpPr/>
           <p:nvPr/>
         </p:nvCxnSpPr>
@@ -13187,7 +13007,7 @@
       </p:cxnSp>
       <p:sp>
         <p:nvSpPr>
-          <p:cNvPr id="849729139" name=""/>
+          <p:cNvPr id="2106336156" name=""/>
           <p:cNvSpPr txBox="1"/>
           <p:nvPr/>
         </p:nvSpPr>
@@ -13232,7 +13052,7 @@
       </p:sp>
       <p:sp>
         <p:nvSpPr>
-          <p:cNvPr id="237766193" name="news_name_1"/>
+          <p:cNvPr id="795405105" name="news_name_1"/>
           <p:cNvSpPr/>
           <p:nvPr/>
         </p:nvSpPr>
@@ -13311,7 +13131,7 @@
       </p:sp>
       <p:sp>
         <p:nvSpPr>
-          <p:cNvPr id="344628738" name="news_1"/>
+          <p:cNvPr id="1121890905" name="news_1"/>
           <p:cNvSpPr/>
           <p:nvPr/>
         </p:nvSpPr>
@@ -13389,7 +13209,7 @@
       </p:sp>
       <p:sp>
         <p:nvSpPr>
-          <p:cNvPr id="1554986541" name="news_name_2"/>
+          <p:cNvPr id="201742281" name="news_name_2"/>
           <p:cNvSpPr/>
           <p:nvPr/>
         </p:nvSpPr>
@@ -13468,7 +13288,7 @@
       </p:sp>
       <p:sp>
         <p:nvSpPr>
-          <p:cNvPr id="1396502487" name="news_2"/>
+          <p:cNvPr id="263475843" name="news_2"/>
           <p:cNvSpPr/>
           <p:nvPr/>
         </p:nvSpPr>
@@ -13546,7 +13366,7 @@
       </p:sp>
       <p:sp>
         <p:nvSpPr>
-          <p:cNvPr id="1591602346" name="news_name_3"/>
+          <p:cNvPr id="22942487" name="news_name_3"/>
           <p:cNvSpPr/>
           <p:nvPr/>
         </p:nvSpPr>
@@ -13625,7 +13445,7 @@
       </p:sp>
       <p:sp>
         <p:nvSpPr>
-          <p:cNvPr id="1588360844" name="news_3"/>
+          <p:cNvPr id="907737130" name="news_3"/>
           <p:cNvSpPr/>
           <p:nvPr/>
         </p:nvSpPr>

--- a/templates/deck.pptx
+++ b/templates/deck.pptx
@@ -138,7 +138,7 @@
       </p:grpSpPr>
       <p:sp>
         <p:nvSpPr>
-          <p:cNvPr id="540238394" name="Header Placeholder 1"/>
+          <p:cNvPr id="23593898" name="Header Placeholder 1"/>
           <p:cNvSpPr>
             <a:spLocks noGrp="1"/>
           </p:cNvSpPr>
@@ -172,7 +172,7 @@
       </p:sp>
       <p:sp>
         <p:nvSpPr>
-          <p:cNvPr id="217229436" name="Date Placeholder 2"/>
+          <p:cNvPr id="1892694564" name="Date Placeholder 2"/>
           <p:cNvSpPr>
             <a:spLocks noGrp="1"/>
           </p:cNvSpPr>
@@ -210,7 +210,7 @@
       </p:sp>
       <p:sp>
         <p:nvSpPr>
-          <p:cNvPr id="1558186723" name="Slide Image Placeholder 3"/>
+          <p:cNvPr id="955964301" name="Slide Image Placeholder 3"/>
           <p:cNvSpPr>
             <a:spLocks noChangeAspect="1" noGrp="1" noRot="1"/>
           </p:cNvSpPr>
@@ -246,7 +246,7 @@
       </p:sp>
       <p:sp>
         <p:nvSpPr>
-          <p:cNvPr id="987375325" name="Notes Placeholder 4"/>
+          <p:cNvPr id="116100726" name="Notes Placeholder 4"/>
           <p:cNvSpPr>
             <a:spLocks noGrp="1"/>
           </p:cNvSpPr>
@@ -320,7 +320,7 @@
       </p:sp>
       <p:sp>
         <p:nvSpPr>
-          <p:cNvPr id="1580879256" name="Footer Placeholder 5"/>
+          <p:cNvPr id="1691835220" name="Footer Placeholder 5"/>
           <p:cNvSpPr>
             <a:spLocks noGrp="1"/>
           </p:cNvSpPr>
@@ -354,7 +354,7 @@
       </p:sp>
       <p:sp>
         <p:nvSpPr>
-          <p:cNvPr id="2006679635" name="Slide Number Placeholder 6"/>
+          <p:cNvPr id="1978663792" name="Slide Number Placeholder 6"/>
           <p:cNvSpPr>
             <a:spLocks noGrp="1"/>
           </p:cNvSpPr>
@@ -508,7 +508,7 @@
       </p:grpSpPr>
       <p:sp>
         <p:nvSpPr>
-          <p:cNvPr id="559321297" name="Slide Image Placeholder 1"/>
+          <p:cNvPr id="1277807648" name="Slide Image Placeholder 1"/>
           <p:cNvSpPr>
             <a:spLocks noChangeAspect="1" noGrp="1" noRot="1"/>
           </p:cNvSpPr>
@@ -525,7 +525,7 @@
       </p:sp>
       <p:sp>
         <p:nvSpPr>
-          <p:cNvPr id="1164745976" name="Notes Placeholder 2"/>
+          <p:cNvPr id="1192272784" name="Notes Placeholder 2"/>
           <p:cNvSpPr>
             <a:spLocks noGrp="1"/>
           </p:cNvSpPr>
@@ -550,7 +550,7 @@
       </p:sp>
       <p:sp>
         <p:nvSpPr>
-          <p:cNvPr id="1051513369" name="Slide Number Placeholder 3"/>
+          <p:cNvPr id="342950881" name="Slide Number Placeholder 3"/>
           <p:cNvSpPr>
             <a:spLocks noGrp="1"/>
           </p:cNvSpPr>
@@ -601,7 +601,7 @@
       </p:grpSpPr>
       <p:sp>
         <p:nvSpPr>
-          <p:cNvPr id="1268350403" name="Slide Image Placeholder 1"/>
+          <p:cNvPr id="1637395676" name="Slide Image Placeholder 1"/>
           <p:cNvSpPr>
             <a:spLocks noChangeAspect="1" noGrp="1" noRot="1"/>
           </p:cNvSpPr>
@@ -613,7 +613,7 @@
       </p:sp>
       <p:sp>
         <p:nvSpPr>
-          <p:cNvPr id="494096144" name="Notes Placeholder 2"/>
+          <p:cNvPr id="1379254967" name="Notes Placeholder 2"/>
           <p:cNvSpPr>
             <a:spLocks noGrp="1"/>
           </p:cNvSpPr>
@@ -635,7 +635,7 @@
       </p:sp>
       <p:sp>
         <p:nvSpPr>
-          <p:cNvPr id="44797305" name="Slide Number Placeholder 3"/>
+          <p:cNvPr id="731807742" name="Slide Number Placeholder 3"/>
           <p:cNvSpPr>
             <a:spLocks noGrp="1"/>
           </p:cNvSpPr>
@@ -686,7 +686,7 @@
       </p:grpSpPr>
       <p:sp>
         <p:nvSpPr>
-          <p:cNvPr id="2034682641" name="Slide Image Placeholder 1"/>
+          <p:cNvPr id="198765881" name="Slide Image Placeholder 1"/>
           <p:cNvSpPr>
             <a:spLocks noChangeAspect="1" noGrp="1" noRot="1"/>
           </p:cNvSpPr>
@@ -698,7 +698,7 @@
       </p:sp>
       <p:sp>
         <p:nvSpPr>
-          <p:cNvPr id="653845687" name="Notes Placeholder 2"/>
+          <p:cNvPr id="956551937" name="Notes Placeholder 2"/>
           <p:cNvSpPr>
             <a:spLocks noGrp="1"/>
           </p:cNvSpPr>
@@ -720,7 +720,7 @@
       </p:sp>
       <p:sp>
         <p:nvSpPr>
-          <p:cNvPr id="738503256" name="Slide Number Placeholder 3"/>
+          <p:cNvPr id="854612861" name="Slide Number Placeholder 3"/>
           <p:cNvSpPr>
             <a:spLocks noGrp="1"/>
           </p:cNvSpPr>
@@ -771,7 +771,7 @@
       </p:grpSpPr>
       <p:sp>
         <p:nvSpPr>
-          <p:cNvPr id="1186086469" name="Slide Image Placeholder 1"/>
+          <p:cNvPr id="1621052958" name="Slide Image Placeholder 1"/>
           <p:cNvSpPr>
             <a:spLocks noChangeAspect="1" noGrp="1" noRot="1"/>
           </p:cNvSpPr>
@@ -783,7 +783,7 @@
       </p:sp>
       <p:sp>
         <p:nvSpPr>
-          <p:cNvPr id="554648390" name="Notes Placeholder 2"/>
+          <p:cNvPr id="397380033" name="Notes Placeholder 2"/>
           <p:cNvSpPr>
             <a:spLocks noGrp="1"/>
           </p:cNvSpPr>
@@ -805,7 +805,7 @@
       </p:sp>
       <p:sp>
         <p:nvSpPr>
-          <p:cNvPr id="1097206847" name="Slide Number Placeholder 3"/>
+          <p:cNvPr id="1704994492" name="Slide Number Placeholder 3"/>
           <p:cNvSpPr>
             <a:spLocks noGrp="1"/>
           </p:cNvSpPr>
@@ -856,7 +856,7 @@
       </p:grpSpPr>
       <p:sp>
         <p:nvSpPr>
-          <p:cNvPr id="1830001397" name="Slide Image Placeholder 1"/>
+          <p:cNvPr id="1717412697" name="Slide Image Placeholder 1"/>
           <p:cNvSpPr>
             <a:spLocks noChangeAspect="1" noGrp="1" noRot="1"/>
           </p:cNvSpPr>
@@ -868,7 +868,7 @@
       </p:sp>
       <p:sp>
         <p:nvSpPr>
-          <p:cNvPr id="799557467" name="Notes Placeholder 2"/>
+          <p:cNvPr id="470450832" name="Notes Placeholder 2"/>
           <p:cNvSpPr>
             <a:spLocks noGrp="1"/>
           </p:cNvSpPr>
@@ -890,7 +890,7 @@
       </p:sp>
       <p:sp>
         <p:nvSpPr>
-          <p:cNvPr id="1534847103" name="Slide Number Placeholder 3"/>
+          <p:cNvPr id="213769102" name="Slide Number Placeholder 3"/>
           <p:cNvSpPr>
             <a:spLocks noGrp="1"/>
           </p:cNvSpPr>
@@ -958,7 +958,7 @@
       </p:grpSpPr>
       <p:sp>
         <p:nvSpPr>
-          <p:cNvPr id="2129592063" name="Rectangle 1245485961"/>
+          <p:cNvPr id="1048155354" name="Rectangle 1245485961"/>
           <p:cNvSpPr/>
           <p:nvPr/>
         </p:nvSpPr>
@@ -1009,7 +1009,7 @@
       </p:sp>
       <p:cxnSp>
         <p:nvCxnSpPr>
-          <p:cNvPr id="1649071720" name=""/>
+          <p:cNvPr id="1307799707" name=""/>
           <p:cNvCxnSpPr/>
           <p:nvPr/>
         </p:nvCxnSpPr>
@@ -1048,7 +1048,7 @@
       </p:cxnSp>
       <p:sp>
         <p:nvSpPr>
-          <p:cNvPr id="448768677" name="Title 1"/>
+          <p:cNvPr id="304512434" name="Title 1"/>
           <p:cNvSpPr>
             <a:spLocks noGrp="1"/>
           </p:cNvSpPr>
@@ -1170,7 +1170,7 @@
       </p:sp>
       <p:sp>
         <p:nvSpPr>
-          <p:cNvPr id="1975404204" name="Subtitle 2"/>
+          <p:cNvPr id="245793783" name="Subtitle 2"/>
           <p:cNvSpPr>
             <a:spLocks noGrp="1"/>
           </p:cNvSpPr>
@@ -1333,7 +1333,7 @@
       </p:grpSpPr>
       <p:sp>
         <p:nvSpPr>
-          <p:cNvPr id="1955462736" name="Title 1"/>
+          <p:cNvPr id="187451782" name="Title 1"/>
           <p:cNvSpPr>
             <a:spLocks noGrp="1"/>
           </p:cNvSpPr>
@@ -1457,7 +1457,7 @@
       </p:sp>
       <p:cxnSp>
         <p:nvCxnSpPr>
-          <p:cNvPr id="554612735" name=""/>
+          <p:cNvPr id="134335019" name=""/>
           <p:cNvCxnSpPr/>
           <p:nvPr/>
         </p:nvCxnSpPr>
@@ -1496,7 +1496,7 @@
       </p:cxnSp>
       <p:sp>
         <p:nvSpPr>
-          <p:cNvPr id="749223741" name="Footer Placeholder 4"/>
+          <p:cNvPr id="718585496" name="Footer Placeholder 4"/>
           <p:cNvSpPr>
             <a:spLocks noGrp="1"/>
           </p:cNvSpPr>
@@ -1648,7 +1648,7 @@
       </p:sp>
       <p:sp>
         <p:nvSpPr>
-          <p:cNvPr id="649004938" name="Slide Number Placeholder 5"/>
+          <p:cNvPr id="1415138488" name="Slide Number Placeholder 5"/>
           <p:cNvSpPr>
             <a:spLocks noGrp="1"/>
           </p:cNvSpPr>
@@ -1832,7 +1832,7 @@
       </p:grpSpPr>
       <p:sp>
         <p:nvSpPr>
-          <p:cNvPr id="582745970" name="Rectangle 1245485961"/>
+          <p:cNvPr id="1224374373" name="Rectangle 1245485961"/>
           <p:cNvSpPr/>
           <p:nvPr/>
         </p:nvSpPr>
@@ -1886,7 +1886,7 @@
       </p:sp>
       <p:sp>
         <p:nvSpPr>
-          <p:cNvPr id="998175078" name="Title 1"/>
+          <p:cNvPr id="1857367551" name="Title 1"/>
           <p:cNvSpPr>
             <a:spLocks noGrp="1"/>
           </p:cNvSpPr>
@@ -2010,7 +2010,7 @@
       </p:sp>
       <p:cxnSp>
         <p:nvCxnSpPr>
-          <p:cNvPr id="1466616658" name=""/>
+          <p:cNvPr id="665241031" name=""/>
           <p:cNvCxnSpPr/>
           <p:nvPr/>
         </p:nvCxnSpPr>
@@ -2049,7 +2049,7 @@
       </p:cxnSp>
       <p:sp>
         <p:nvSpPr>
-          <p:cNvPr id="567919916" name="Footer Placeholder 4"/>
+          <p:cNvPr id="57425960" name="Footer Placeholder 4"/>
           <p:cNvSpPr>
             <a:spLocks noGrp="1"/>
           </p:cNvSpPr>
@@ -2201,7 +2201,7 @@
       </p:sp>
       <p:sp>
         <p:nvSpPr>
-          <p:cNvPr id="1859060657" name="Slide Number Placeholder 5"/>
+          <p:cNvPr id="1806851520" name="Slide Number Placeholder 5"/>
           <p:cNvSpPr>
             <a:spLocks noGrp="1"/>
           </p:cNvSpPr>
@@ -2344,7 +2344,7 @@
       </p:sp>
       <p:cxnSp>
         <p:nvCxnSpPr>
-          <p:cNvPr id="641033962" name=""/>
+          <p:cNvPr id="198327388" name=""/>
           <p:cNvCxnSpPr/>
           <p:nvPr/>
         </p:nvCxnSpPr>
@@ -2383,7 +2383,7 @@
       </p:cxnSp>
       <p:sp>
         <p:nvSpPr>
-          <p:cNvPr id="61211740" name="Text Placeholder 9"/>
+          <p:cNvPr id="1353279992" name="Text Placeholder 9"/>
           <p:cNvSpPr>
             <a:spLocks noGrp="1"/>
           </p:cNvSpPr>
@@ -2542,7 +2542,7 @@
       </p:grpSpPr>
       <p:sp>
         <p:nvSpPr>
-          <p:cNvPr id="1439633809" name="Title Placeholder 1"/>
+          <p:cNvPr id="1791999038" name="Title Placeholder 1"/>
           <p:cNvSpPr>
             <a:spLocks noGrp="1"/>
           </p:cNvSpPr>
@@ -2578,7 +2578,7 @@
       </p:sp>
       <p:sp>
         <p:nvSpPr>
-          <p:cNvPr id="831233394" name="Text Placeholder 2"/>
+          <p:cNvPr id="1459677418" name="Text Placeholder 2"/>
           <p:cNvSpPr>
             <a:spLocks noGrp="1"/>
           </p:cNvSpPr>
@@ -2654,7 +2654,7 @@
       </p:sp>
       <p:sp>
         <p:nvSpPr>
-          <p:cNvPr id="703643132" name="Footer Placeholder 4"/>
+          <p:cNvPr id="1146356192" name="Footer Placeholder 4"/>
           <p:cNvSpPr>
             <a:spLocks noGrp="1"/>
           </p:cNvSpPr>
@@ -2722,7 +2722,7 @@
       </p:sp>
       <p:sp>
         <p:nvSpPr>
-          <p:cNvPr id="1961805422" name="Slide Number Placeholder 5"/>
+          <p:cNvPr id="2118605098" name="Slide Number Placeholder 5"/>
           <p:cNvSpPr>
             <a:spLocks noGrp="1"/>
           </p:cNvSpPr>
@@ -3075,7 +3075,7 @@
       </p:grpSpPr>
       <p:sp>
         <p:nvSpPr>
-          <p:cNvPr id="1533445921" name="Title"/>
+          <p:cNvPr id="911383372" name="Title"/>
           <p:cNvSpPr>
             <a:spLocks noGrp="1"/>
           </p:cNvSpPr>
@@ -3096,6 +3096,9 @@
                 <a:solidFill>
                   <a:schemeClr val="accent1"/>
                 </a:solidFill>
+                <a:latin typeface="Aptos Narrow"/>
+                <a:ea typeface="Aptos Narrow"/>
+                <a:cs typeface="Aptos Narrow"/>
               </a:rPr>
               <a:t>{company_name}</a:t>
             </a:r>
@@ -3103,13 +3106,15 @@
               <a:solidFill>
                 <a:schemeClr val="accent1"/>
               </a:solidFill>
-            </a:endParaRPr>
-          </a:p>
-        </p:txBody>
-      </p:sp>
-      <p:sp>
-        <p:nvSpPr>
-          <p:cNvPr id="2132179384" name="Subtitle"/>
+              <a:latin typeface="Aptos Narrow"/>
+              <a:cs typeface="Aptos Narrow"/>
+            </a:endParaRPr>
+          </a:p>
+        </p:txBody>
+      </p:sp>
+      <p:sp>
+        <p:nvSpPr>
+          <p:cNvPr id="744943182" name="Subtitle"/>
           <p:cNvSpPr>
             <a:spLocks noGrp="1"/>
           </p:cNvSpPr>
@@ -3132,6 +3137,9 @@
                 <a:solidFill>
                   <a:schemeClr val="tx1"/>
                 </a:solidFill>
+                <a:latin typeface="Aptos Narrow"/>
+                <a:ea typeface="Aptos Narrow"/>
+                <a:cs typeface="Aptos Narrow"/>
               </a:rPr>
               <a:t>Automatically generated </a:t>
             </a:r>
@@ -3140,6 +3148,9 @@
                 <a:solidFill>
                   <a:schemeClr val="tx1"/>
                 </a:solidFill>
+                <a:latin typeface="Aptos Narrow"/>
+                <a:ea typeface="Aptos Narrow"/>
+                <a:cs typeface="Aptos Narrow"/>
               </a:rPr>
               <a:t>c</a:t>
             </a:r>
@@ -3148,6 +3159,9 @@
                 <a:solidFill>
                   <a:schemeClr val="tx1"/>
                 </a:solidFill>
+                <a:latin typeface="Aptos Narrow"/>
+                <a:ea typeface="Aptos Narrow"/>
+                <a:cs typeface="Aptos Narrow"/>
               </a:rPr>
               <a:t>ompany report as of </a:t>
             </a:r>
@@ -3156,13 +3170,18 @@
                 <a:solidFill>
                   <a:schemeClr val="tx1"/>
                 </a:solidFill>
+                <a:latin typeface="Aptos Narrow"/>
+                <a:ea typeface="Aptos Narrow"/>
+                <a:cs typeface="Aptos Narrow"/>
               </a:rPr>
               <a:t>{current_date}.</a:t>
             </a:r>
-            <a:endParaRPr lang="it-IT" i="1">
+            <a:endParaRPr i="1">
               <a:solidFill>
                 <a:schemeClr val="tx1"/>
               </a:solidFill>
+              <a:latin typeface="Aptos Narrow"/>
+              <a:cs typeface="Aptos Narrow"/>
             </a:endParaRPr>
           </a:p>
         </p:txBody>
@@ -3202,7 +3221,7 @@
       </p:grpSpPr>
       <p:sp>
         <p:nvSpPr>
-          <p:cNvPr id="516233200" name=""/>
+          <p:cNvPr id="1075670188" name=""/>
           <p:cNvSpPr/>
           <p:nvPr/>
         </p:nvSpPr>
@@ -3258,15 +3277,15 @@
               <a:defRPr/>
             </a:pPr>
             <a:endParaRPr>
-              <a:latin typeface="Liberation Sans"/>
-              <a:cs typeface="Liberation Sans"/>
-            </a:endParaRPr>
-          </a:p>
-        </p:txBody>
-      </p:sp>
-      <p:sp>
-        <p:nvSpPr>
-          <p:cNvPr id="1054390042" name=""/>
+              <a:latin typeface="Aptos Narrow"/>
+              <a:cs typeface="Aptos Narrow"/>
+            </a:endParaRPr>
+          </a:p>
+        </p:txBody>
+      </p:sp>
+      <p:sp>
+        <p:nvSpPr>
+          <p:cNvPr id="326445734" name=""/>
           <p:cNvSpPr/>
           <p:nvPr/>
         </p:nvSpPr>
@@ -3323,15 +3342,15 @@
               <a:defRPr/>
             </a:pPr>
             <a:endParaRPr>
-              <a:latin typeface="Liberation Sans"/>
-              <a:cs typeface="Liberation Sans"/>
-            </a:endParaRPr>
-          </a:p>
-        </p:txBody>
-      </p:sp>
-      <p:sp>
-        <p:nvSpPr>
-          <p:cNvPr id="1950023693" name="name"/>
+              <a:latin typeface="Aptos Narrow"/>
+              <a:cs typeface="Aptos Narrow"/>
+            </a:endParaRPr>
+          </a:p>
+        </p:txBody>
+      </p:sp>
+      <p:sp>
+        <p:nvSpPr>
+          <p:cNvPr id="1624332511" name="name"/>
           <p:cNvSpPr txBox="1"/>
           <p:nvPr/>
         </p:nvSpPr>
@@ -3358,9 +3377,9 @@
                 <a:solidFill>
                   <a:schemeClr val="tx1"/>
                 </a:solidFill>
-                <a:latin typeface="Liberation Sans"/>
-                <a:ea typeface="Liberation Sans"/>
-                <a:cs typeface="Liberation Sans"/>
+                <a:latin typeface="Aptos Narrow"/>
+                <a:ea typeface="Aptos Narrow"/>
+                <a:cs typeface="Aptos Narrow"/>
               </a:rPr>
               <a:t>{name}</a:t>
             </a:r>
@@ -3368,15 +3387,15 @@
               <a:solidFill>
                 <a:schemeClr val="tx1"/>
               </a:solidFill>
-              <a:latin typeface="Liberation Sans"/>
-              <a:cs typeface="Liberation Sans"/>
-            </a:endParaRPr>
-          </a:p>
-        </p:txBody>
-      </p:sp>
-      <p:sp>
-        <p:nvSpPr>
-          <p:cNvPr id="705808638" name=""/>
+              <a:latin typeface="Aptos Narrow"/>
+              <a:cs typeface="Aptos Narrow"/>
+            </a:endParaRPr>
+          </a:p>
+        </p:txBody>
+      </p:sp>
+      <p:sp>
+        <p:nvSpPr>
+          <p:cNvPr id="1505637232" name=""/>
           <p:cNvSpPr txBox="1"/>
           <p:nvPr/>
         </p:nvSpPr>
@@ -3403,9 +3422,9 @@
                 <a:solidFill>
                   <a:schemeClr val="bg1"/>
                 </a:solidFill>
-                <a:latin typeface="Liberation Sans"/>
-                <a:ea typeface="Liberation Sans"/>
-                <a:cs typeface="Liberation Sans"/>
+                <a:latin typeface="Aptos Narrow"/>
+                <a:ea typeface="Aptos Narrow"/>
+                <a:cs typeface="Aptos Narrow"/>
               </a:rPr>
               <a:t>Name</a:t>
             </a:r>
@@ -3413,15 +3432,15 @@
               <a:solidFill>
                 <a:schemeClr val="bg1"/>
               </a:solidFill>
-              <a:latin typeface="Liberation Sans"/>
-              <a:cs typeface="Liberation Sans"/>
-            </a:endParaRPr>
-          </a:p>
-        </p:txBody>
-      </p:sp>
-      <p:sp>
-        <p:nvSpPr>
-          <p:cNvPr id="1257498523" name="symbol"/>
+              <a:latin typeface="Aptos Narrow"/>
+              <a:cs typeface="Aptos Narrow"/>
+            </a:endParaRPr>
+          </a:p>
+        </p:txBody>
+      </p:sp>
+      <p:sp>
+        <p:nvSpPr>
+          <p:cNvPr id="1346480302" name="symbol"/>
           <p:cNvSpPr txBox="1"/>
           <p:nvPr/>
         </p:nvSpPr>
@@ -3448,9 +3467,9 @@
                 <a:solidFill>
                   <a:schemeClr val="tx1"/>
                 </a:solidFill>
-                <a:latin typeface="Liberation Sans"/>
-                <a:ea typeface="Liberation Sans"/>
-                <a:cs typeface="Liberation Sans"/>
+                <a:latin typeface="Aptos Narrow"/>
+                <a:ea typeface="Aptos Narrow"/>
+                <a:cs typeface="Aptos Narrow"/>
               </a:rPr>
               <a:t>{ticker}</a:t>
             </a:r>
@@ -3458,15 +3477,15 @@
               <a:solidFill>
                 <a:schemeClr val="tx1"/>
               </a:solidFill>
-              <a:latin typeface="Liberation Sans"/>
-              <a:cs typeface="Liberation Sans"/>
-            </a:endParaRPr>
-          </a:p>
-        </p:txBody>
-      </p:sp>
-      <p:sp>
-        <p:nvSpPr>
-          <p:cNvPr id="1359196504" name=""/>
+              <a:latin typeface="Aptos Narrow"/>
+              <a:cs typeface="Aptos Narrow"/>
+            </a:endParaRPr>
+          </a:p>
+        </p:txBody>
+      </p:sp>
+      <p:sp>
+        <p:nvSpPr>
+          <p:cNvPr id="498847722" name=""/>
           <p:cNvSpPr txBox="1"/>
           <p:nvPr/>
         </p:nvSpPr>
@@ -3493,9 +3512,9 @@
                 <a:solidFill>
                   <a:schemeClr val="bg1"/>
                 </a:solidFill>
-                <a:latin typeface="Liberation Sans"/>
-                <a:ea typeface="Liberation Sans"/>
-                <a:cs typeface="Liberation Sans"/>
+                <a:latin typeface="Aptos Narrow"/>
+                <a:ea typeface="Aptos Narrow"/>
+                <a:cs typeface="Aptos Narrow"/>
               </a:rPr>
               <a:t>Symbol</a:t>
             </a:r>
@@ -3503,15 +3522,15 @@
               <a:solidFill>
                 <a:schemeClr val="bg1"/>
               </a:solidFill>
-              <a:latin typeface="Liberation Sans"/>
-              <a:cs typeface="Liberation Sans"/>
-            </a:endParaRPr>
-          </a:p>
-        </p:txBody>
-      </p:sp>
-      <p:sp>
-        <p:nvSpPr>
-          <p:cNvPr id="1930075135" name="sector"/>
+              <a:latin typeface="Aptos Narrow"/>
+              <a:cs typeface="Aptos Narrow"/>
+            </a:endParaRPr>
+          </a:p>
+        </p:txBody>
+      </p:sp>
+      <p:sp>
+        <p:nvSpPr>
+          <p:cNvPr id="1569395525" name="sector"/>
           <p:cNvSpPr txBox="1"/>
           <p:nvPr/>
         </p:nvSpPr>
@@ -3538,9 +3557,9 @@
                 <a:solidFill>
                   <a:schemeClr val="tx1"/>
                 </a:solidFill>
-                <a:latin typeface="Liberation Sans"/>
-                <a:ea typeface="Liberation Sans"/>
-                <a:cs typeface="Liberation Sans"/>
+                <a:latin typeface="Aptos Narrow"/>
+                <a:ea typeface="Aptos Narrow"/>
+                <a:cs typeface="Aptos Narrow"/>
               </a:rPr>
               <a:t>{sector}</a:t>
             </a:r>
@@ -3548,15 +3567,15 @@
               <a:solidFill>
                 <a:schemeClr val="tx1"/>
               </a:solidFill>
-              <a:latin typeface="Liberation Sans"/>
-              <a:cs typeface="Liberation Sans"/>
-            </a:endParaRPr>
-          </a:p>
-        </p:txBody>
-      </p:sp>
-      <p:sp>
-        <p:nvSpPr>
-          <p:cNvPr id="808899960" name=""/>
+              <a:latin typeface="Aptos Narrow"/>
+              <a:cs typeface="Aptos Narrow"/>
+            </a:endParaRPr>
+          </a:p>
+        </p:txBody>
+      </p:sp>
+      <p:sp>
+        <p:nvSpPr>
+          <p:cNvPr id="1236601938" name=""/>
           <p:cNvSpPr txBox="1"/>
           <p:nvPr/>
         </p:nvSpPr>
@@ -3583,9 +3602,9 @@
                 <a:solidFill>
                   <a:schemeClr val="bg1"/>
                 </a:solidFill>
-                <a:latin typeface="Liberation Sans"/>
-                <a:ea typeface="Liberation Sans"/>
-                <a:cs typeface="Liberation Sans"/>
+                <a:latin typeface="Aptos Narrow"/>
+                <a:ea typeface="Aptos Narrow"/>
+                <a:cs typeface="Aptos Narrow"/>
               </a:rPr>
               <a:t>Sector</a:t>
             </a:r>
@@ -3593,15 +3612,15 @@
               <a:solidFill>
                 <a:schemeClr val="bg1"/>
               </a:solidFill>
-              <a:latin typeface="Liberation Sans"/>
-              <a:cs typeface="Liberation Sans"/>
-            </a:endParaRPr>
-          </a:p>
-        </p:txBody>
-      </p:sp>
-      <p:sp>
-        <p:nvSpPr>
-          <p:cNvPr id="1341591702" name="industry"/>
+              <a:latin typeface="Aptos Narrow"/>
+              <a:cs typeface="Aptos Narrow"/>
+            </a:endParaRPr>
+          </a:p>
+        </p:txBody>
+      </p:sp>
+      <p:sp>
+        <p:nvSpPr>
+          <p:cNvPr id="1671536131" name="industry"/>
           <p:cNvSpPr txBox="1"/>
           <p:nvPr/>
         </p:nvSpPr>
@@ -3628,9 +3647,9 @@
                 <a:solidFill>
                   <a:schemeClr val="tx1"/>
                 </a:solidFill>
-                <a:latin typeface="Liberation Sans"/>
-                <a:ea typeface="Liberation Sans"/>
-                <a:cs typeface="Liberation Sans"/>
+                <a:latin typeface="Aptos Narrow"/>
+                <a:ea typeface="Aptos Narrow"/>
+                <a:cs typeface="Aptos Narrow"/>
               </a:rPr>
               <a:t>{industry}</a:t>
             </a:r>
@@ -3638,15 +3657,15 @@
               <a:solidFill>
                 <a:schemeClr val="tx1"/>
               </a:solidFill>
-              <a:latin typeface="Liberation Sans"/>
-              <a:cs typeface="Liberation Sans"/>
-            </a:endParaRPr>
-          </a:p>
-        </p:txBody>
-      </p:sp>
-      <p:sp>
-        <p:nvSpPr>
-          <p:cNvPr id="1450875343" name=""/>
+              <a:latin typeface="Aptos Narrow"/>
+              <a:cs typeface="Aptos Narrow"/>
+            </a:endParaRPr>
+          </a:p>
+        </p:txBody>
+      </p:sp>
+      <p:sp>
+        <p:nvSpPr>
+          <p:cNvPr id="388355719" name=""/>
           <p:cNvSpPr txBox="1"/>
           <p:nvPr/>
         </p:nvSpPr>
@@ -3673,9 +3692,9 @@
                 <a:solidFill>
                   <a:schemeClr val="bg1"/>
                 </a:solidFill>
-                <a:latin typeface="Liberation Sans"/>
-                <a:ea typeface="Liberation Sans"/>
-                <a:cs typeface="Liberation Sans"/>
+                <a:latin typeface="Aptos Narrow"/>
+                <a:ea typeface="Aptos Narrow"/>
+                <a:cs typeface="Aptos Narrow"/>
               </a:rPr>
               <a:t>Industry</a:t>
             </a:r>
@@ -3683,15 +3702,15 @@
               <a:solidFill>
                 <a:schemeClr val="bg1"/>
               </a:solidFill>
-              <a:latin typeface="Liberation Sans"/>
-              <a:cs typeface="Liberation Sans"/>
-            </a:endParaRPr>
-          </a:p>
-        </p:txBody>
-      </p:sp>
-      <p:sp>
-        <p:nvSpPr>
-          <p:cNvPr id="220840966" name="market_cap"/>
+              <a:latin typeface="Aptos Narrow"/>
+              <a:cs typeface="Aptos Narrow"/>
+            </a:endParaRPr>
+          </a:p>
+        </p:txBody>
+      </p:sp>
+      <p:sp>
+        <p:nvSpPr>
+          <p:cNvPr id="1469491165" name="market_cap"/>
           <p:cNvSpPr txBox="1"/>
           <p:nvPr/>
         </p:nvSpPr>
@@ -3718,9 +3737,9 @@
                 <a:solidFill>
                   <a:schemeClr val="tx1"/>
                 </a:solidFill>
-                <a:latin typeface="Liberation Sans"/>
-                <a:ea typeface="Liberation Sans"/>
-                <a:cs typeface="Liberation Sans"/>
+                <a:latin typeface="Aptos Narrow"/>
+                <a:ea typeface="Aptos Narrow"/>
+                <a:cs typeface="Aptos Narrow"/>
               </a:rPr>
               <a:t>{market_cap}</a:t>
             </a:r>
@@ -3728,15 +3747,15 @@
               <a:solidFill>
                 <a:schemeClr val="tx1"/>
               </a:solidFill>
-              <a:latin typeface="Liberation Sans"/>
-              <a:cs typeface="Liberation Sans"/>
-            </a:endParaRPr>
-          </a:p>
-        </p:txBody>
-      </p:sp>
-      <p:sp>
-        <p:nvSpPr>
-          <p:cNvPr id="27691689" name=""/>
+              <a:latin typeface="Aptos Narrow"/>
+              <a:cs typeface="Aptos Narrow"/>
+            </a:endParaRPr>
+          </a:p>
+        </p:txBody>
+      </p:sp>
+      <p:sp>
+        <p:nvSpPr>
+          <p:cNvPr id="1654500767" name=""/>
           <p:cNvSpPr txBox="1"/>
           <p:nvPr/>
         </p:nvSpPr>
@@ -3763,9 +3782,9 @@
                 <a:solidFill>
                   <a:schemeClr val="bg1"/>
                 </a:solidFill>
-                <a:latin typeface="Liberation Sans"/>
-                <a:ea typeface="Liberation Sans"/>
-                <a:cs typeface="Liberation Sans"/>
+                <a:latin typeface="Aptos Narrow"/>
+                <a:ea typeface="Aptos Narrow"/>
+                <a:cs typeface="Aptos Narrow"/>
               </a:rPr>
               <a:t>Market cap</a:t>
             </a:r>
@@ -3773,15 +3792,15 @@
               <a:solidFill>
                 <a:schemeClr val="bg1"/>
               </a:solidFill>
-              <a:latin typeface="Liberation Sans"/>
-              <a:cs typeface="Liberation Sans"/>
-            </a:endParaRPr>
-          </a:p>
-        </p:txBody>
-      </p:sp>
-      <p:sp>
-        <p:nvSpPr>
-          <p:cNvPr id="783459543" name="share_price"/>
+              <a:latin typeface="Aptos Narrow"/>
+              <a:cs typeface="Aptos Narrow"/>
+            </a:endParaRPr>
+          </a:p>
+        </p:txBody>
+      </p:sp>
+      <p:sp>
+        <p:nvSpPr>
+          <p:cNvPr id="154398990" name="share_price"/>
           <p:cNvSpPr txBox="1"/>
           <p:nvPr/>
         </p:nvSpPr>
@@ -3808,9 +3827,9 @@
                 <a:solidFill>
                   <a:schemeClr val="tx1"/>
                 </a:solidFill>
-                <a:latin typeface="Liberation Sans"/>
-                <a:ea typeface="Liberation Sans"/>
-                <a:cs typeface="Liberation Sans"/>
+                <a:latin typeface="Aptos Narrow"/>
+                <a:ea typeface="Aptos Narrow"/>
+                <a:cs typeface="Aptos Narrow"/>
               </a:rPr>
               <a:t>{share_price}</a:t>
             </a:r>
@@ -3818,15 +3837,15 @@
               <a:solidFill>
                 <a:schemeClr val="tx1"/>
               </a:solidFill>
-              <a:latin typeface="Liberation Sans"/>
-              <a:cs typeface="Liberation Sans"/>
-            </a:endParaRPr>
-          </a:p>
-        </p:txBody>
-      </p:sp>
-      <p:sp>
-        <p:nvSpPr>
-          <p:cNvPr id="1114599991" name=""/>
+              <a:latin typeface="Aptos Narrow"/>
+              <a:cs typeface="Aptos Narrow"/>
+            </a:endParaRPr>
+          </a:p>
+        </p:txBody>
+      </p:sp>
+      <p:sp>
+        <p:nvSpPr>
+          <p:cNvPr id="361513341" name=""/>
           <p:cNvSpPr txBox="1"/>
           <p:nvPr/>
         </p:nvSpPr>
@@ -3853,9 +3872,9 @@
                 <a:solidFill>
                   <a:schemeClr val="bg1"/>
                 </a:solidFill>
-                <a:latin typeface="Liberation Sans"/>
-                <a:ea typeface="Liberation Sans"/>
-                <a:cs typeface="Liberation Sans"/>
+                <a:latin typeface="Aptos Narrow"/>
+                <a:ea typeface="Aptos Narrow"/>
+                <a:cs typeface="Aptos Narrow"/>
               </a:rPr>
               <a:t>Share price</a:t>
             </a:r>
@@ -3863,15 +3882,15 @@
               <a:solidFill>
                 <a:schemeClr val="bg1"/>
               </a:solidFill>
-              <a:latin typeface="Liberation Sans"/>
-              <a:cs typeface="Liberation Sans"/>
-            </a:endParaRPr>
-          </a:p>
-        </p:txBody>
-      </p:sp>
-      <p:sp>
-        <p:nvSpPr>
-          <p:cNvPr id="1560130438" name="share_earnings"/>
+              <a:latin typeface="Aptos Narrow"/>
+              <a:cs typeface="Aptos Narrow"/>
+            </a:endParaRPr>
+          </a:p>
+        </p:txBody>
+      </p:sp>
+      <p:sp>
+        <p:nvSpPr>
+          <p:cNvPr id="331405036" name="share_earnings"/>
           <p:cNvSpPr txBox="1"/>
           <p:nvPr/>
         </p:nvSpPr>
@@ -3898,9 +3917,9 @@
                 <a:solidFill>
                   <a:schemeClr val="tx1"/>
                 </a:solidFill>
-                <a:latin typeface="Liberation Sans"/>
-                <a:ea typeface="Liberation Sans"/>
-                <a:cs typeface="Liberation Sans"/>
+                <a:latin typeface="Aptos Narrow"/>
+                <a:ea typeface="Aptos Narrow"/>
+                <a:cs typeface="Aptos Narrow"/>
               </a:rPr>
               <a:t>{share_earnings}</a:t>
             </a:r>
@@ -3908,15 +3927,15 @@
               <a:solidFill>
                 <a:schemeClr val="tx1"/>
               </a:solidFill>
-              <a:latin typeface="Liberation Sans"/>
-              <a:cs typeface="Liberation Sans"/>
-            </a:endParaRPr>
-          </a:p>
-        </p:txBody>
-      </p:sp>
-      <p:sp>
-        <p:nvSpPr>
-          <p:cNvPr id="243254624" name=""/>
+              <a:latin typeface="Aptos Narrow"/>
+              <a:cs typeface="Aptos Narrow"/>
+            </a:endParaRPr>
+          </a:p>
+        </p:txBody>
+      </p:sp>
+      <p:sp>
+        <p:nvSpPr>
+          <p:cNvPr id="1750267214" name=""/>
           <p:cNvSpPr txBox="1"/>
           <p:nvPr/>
         </p:nvSpPr>
@@ -3943,9 +3962,9 @@
                 <a:solidFill>
                   <a:schemeClr val="bg1"/>
                 </a:solidFill>
-                <a:latin typeface="Liberation Sans"/>
-                <a:ea typeface="Liberation Sans"/>
-                <a:cs typeface="Liberation Sans"/>
+                <a:latin typeface="Aptos Narrow"/>
+                <a:ea typeface="Aptos Narrow"/>
+                <a:cs typeface="Aptos Narrow"/>
               </a:rPr>
               <a:t>EPS</a:t>
             </a:r>
@@ -3953,15 +3972,15 @@
               <a:solidFill>
                 <a:schemeClr val="bg1"/>
               </a:solidFill>
-              <a:latin typeface="Liberation Sans"/>
-              <a:cs typeface="Liberation Sans"/>
-            </a:endParaRPr>
-          </a:p>
-        </p:txBody>
-      </p:sp>
-      <p:sp>
-        <p:nvSpPr>
-          <p:cNvPr id="1654788491" name="analyst_rating"/>
+              <a:latin typeface="Aptos Narrow"/>
+              <a:cs typeface="Aptos Narrow"/>
+            </a:endParaRPr>
+          </a:p>
+        </p:txBody>
+      </p:sp>
+      <p:sp>
+        <p:nvSpPr>
+          <p:cNvPr id="639771423" name="analyst_rating"/>
           <p:cNvSpPr txBox="1"/>
           <p:nvPr/>
         </p:nvSpPr>
@@ -3988,9 +4007,9 @@
                 <a:solidFill>
                   <a:schemeClr val="tx1"/>
                 </a:solidFill>
-                <a:latin typeface="Liberation Sans"/>
-                <a:ea typeface="Liberation Sans"/>
-                <a:cs typeface="Liberation Sans"/>
+                <a:latin typeface="Aptos Narrow"/>
+                <a:ea typeface="Aptos Narrow"/>
+                <a:cs typeface="Aptos Narrow"/>
               </a:rPr>
               <a:t>{analyst_rating}</a:t>
             </a:r>
@@ -3998,15 +4017,15 @@
               <a:solidFill>
                 <a:schemeClr val="tx1"/>
               </a:solidFill>
-              <a:latin typeface="Liberation Sans"/>
-              <a:cs typeface="Liberation Sans"/>
-            </a:endParaRPr>
-          </a:p>
-        </p:txBody>
-      </p:sp>
-      <p:sp>
-        <p:nvSpPr>
-          <p:cNvPr id="72531646" name=""/>
+              <a:latin typeface="Aptos Narrow"/>
+              <a:cs typeface="Aptos Narrow"/>
+            </a:endParaRPr>
+          </a:p>
+        </p:txBody>
+      </p:sp>
+      <p:sp>
+        <p:nvSpPr>
+          <p:cNvPr id="1125352973" name=""/>
           <p:cNvSpPr txBox="1"/>
           <p:nvPr/>
         </p:nvSpPr>
@@ -4033,9 +4052,9 @@
                 <a:solidFill>
                   <a:schemeClr val="bg1"/>
                 </a:solidFill>
-                <a:latin typeface="Liberation Sans"/>
-                <a:ea typeface="Liberation Sans"/>
-                <a:cs typeface="Liberation Sans"/>
+                <a:latin typeface="Aptos Narrow"/>
+                <a:ea typeface="Aptos Narrow"/>
+                <a:cs typeface="Aptos Narrow"/>
               </a:rPr>
               <a:t>Analyst rating</a:t>
             </a:r>
@@ -4043,15 +4062,15 @@
               <a:solidFill>
                 <a:schemeClr val="bg1"/>
               </a:solidFill>
-              <a:latin typeface="Liberation Sans"/>
-              <a:cs typeface="Liberation Sans"/>
-            </a:endParaRPr>
-          </a:p>
-        </p:txBody>
-      </p:sp>
-      <p:sp>
-        <p:nvSpPr>
-          <p:cNvPr id="1446073766" name="beta"/>
+              <a:latin typeface="Aptos Narrow"/>
+              <a:cs typeface="Aptos Narrow"/>
+            </a:endParaRPr>
+          </a:p>
+        </p:txBody>
+      </p:sp>
+      <p:sp>
+        <p:nvSpPr>
+          <p:cNvPr id="1964121637" name="beta"/>
           <p:cNvSpPr txBox="1"/>
           <p:nvPr/>
         </p:nvSpPr>
@@ -4078,9 +4097,9 @@
                 <a:solidFill>
                   <a:schemeClr val="tx1"/>
                 </a:solidFill>
-                <a:latin typeface="Liberation Sans"/>
-                <a:ea typeface="Liberation Sans"/>
-                <a:cs typeface="Liberation Sans"/>
+                <a:latin typeface="Aptos Narrow"/>
+                <a:ea typeface="Aptos Narrow"/>
+                <a:cs typeface="Aptos Narrow"/>
               </a:rPr>
               <a:t>{share_beta}</a:t>
             </a:r>
@@ -4088,15 +4107,15 @@
               <a:solidFill>
                 <a:schemeClr val="tx1"/>
               </a:solidFill>
-              <a:latin typeface="Liberation Sans"/>
-              <a:cs typeface="Liberation Sans"/>
-            </a:endParaRPr>
-          </a:p>
-        </p:txBody>
-      </p:sp>
-      <p:sp>
-        <p:nvSpPr>
-          <p:cNvPr id="231457759" name=""/>
+              <a:latin typeface="Aptos Narrow"/>
+              <a:cs typeface="Aptos Narrow"/>
+            </a:endParaRPr>
+          </a:p>
+        </p:txBody>
+      </p:sp>
+      <p:sp>
+        <p:nvSpPr>
+          <p:cNvPr id="2006255025" name=""/>
           <p:cNvSpPr txBox="1"/>
           <p:nvPr/>
         </p:nvSpPr>
@@ -4123,9 +4142,9 @@
                 <a:solidFill>
                   <a:schemeClr val="bg1"/>
                 </a:solidFill>
-                <a:latin typeface="Liberation Sans"/>
-                <a:ea typeface="Liberation Sans"/>
-                <a:cs typeface="Liberation Sans"/>
+                <a:latin typeface="Aptos Narrow"/>
+                <a:ea typeface="Aptos Narrow"/>
+                <a:cs typeface="Aptos Narrow"/>
               </a:rPr>
               <a:t>Share beta</a:t>
             </a:r>
@@ -4133,15 +4152,15 @@
               <a:solidFill>
                 <a:schemeClr val="bg1"/>
               </a:solidFill>
-              <a:latin typeface="Liberation Sans"/>
-              <a:cs typeface="Liberation Sans"/>
-            </a:endParaRPr>
-          </a:p>
-        </p:txBody>
-      </p:sp>
-      <p:sp>
-        <p:nvSpPr>
-          <p:cNvPr id="1062681903" name=""/>
+              <a:latin typeface="Aptos Narrow"/>
+              <a:cs typeface="Aptos Narrow"/>
+            </a:endParaRPr>
+          </a:p>
+        </p:txBody>
+      </p:sp>
+      <p:sp>
+        <p:nvSpPr>
+          <p:cNvPr id="2133063032" name=""/>
           <p:cNvSpPr/>
           <p:nvPr/>
         </p:nvSpPr>
@@ -4197,15 +4216,15 @@
               <a:defRPr/>
             </a:pPr>
             <a:endParaRPr>
-              <a:latin typeface="Liberation Sans"/>
-              <a:cs typeface="Liberation Sans"/>
-            </a:endParaRPr>
-          </a:p>
-        </p:txBody>
-      </p:sp>
-      <p:sp>
-        <p:nvSpPr>
-          <p:cNvPr id="1847313029" name="Title 1"/>
+              <a:latin typeface="Aptos Narrow"/>
+              <a:cs typeface="Aptos Narrow"/>
+            </a:endParaRPr>
+          </a:p>
+        </p:txBody>
+      </p:sp>
+      <p:sp>
+        <p:nvSpPr>
+          <p:cNvPr id="177288340" name="Title 1"/>
           <p:cNvSpPr>
             <a:spLocks noGrp="1"/>
           </p:cNvSpPr>
@@ -4226,9 +4245,9 @@
                 <a:solidFill>
                   <a:schemeClr val="accent1"/>
                 </a:solidFill>
-                <a:latin typeface="+mj-lt"/>
-                <a:ea typeface="+mj-ea"/>
-                <a:cs typeface="+mj-cs"/>
+                <a:latin typeface="Aptos Narrow"/>
+                <a:ea typeface="Aptos Narrow"/>
+                <a:cs typeface="Aptos Narrow"/>
               </a:rPr>
               <a:t>{company_name}</a:t>
             </a:r>
@@ -4237,9 +4256,9 @@
                 <a:solidFill>
                   <a:schemeClr val="tx2"/>
                 </a:solidFill>
-                <a:latin typeface="+mj-lt"/>
-                <a:ea typeface="+mj-ea"/>
-                <a:cs typeface="+mj-cs"/>
+                <a:latin typeface="Aptos Narrow"/>
+                <a:ea typeface="Aptos Narrow"/>
+                <a:cs typeface="Aptos Narrow"/>
               </a:rPr>
               <a:t> </a:t>
             </a:r>
@@ -4248,9 +4267,9 @@
                 <a:solidFill>
                   <a:schemeClr val="tx1"/>
                 </a:solidFill>
-                <a:latin typeface="Arial"/>
-                <a:ea typeface="Arial"/>
-                <a:cs typeface="Arial"/>
+                <a:latin typeface="Aptos Narrow"/>
+                <a:ea typeface="Aptos Narrow"/>
+                <a:cs typeface="Aptos Narrow"/>
               </a:rPr>
               <a:t>| </a:t>
             </a:r>
@@ -4259,6 +4278,9 @@
                 <a:solidFill>
                   <a:schemeClr val="tx1"/>
                 </a:solidFill>
+                <a:latin typeface="Aptos Narrow"/>
+                <a:ea typeface="Aptos Narrow"/>
+                <a:cs typeface="Aptos Narrow"/>
               </a:rPr>
               <a:t>Company </a:t>
             </a:r>
@@ -4267,6 +4289,9 @@
                 <a:solidFill>
                   <a:schemeClr val="tx1"/>
                 </a:solidFill>
+                <a:latin typeface="Aptos Narrow"/>
+                <a:ea typeface="Aptos Narrow"/>
+                <a:cs typeface="Aptos Narrow"/>
               </a:rPr>
               <a:t>overview</a:t>
             </a:r>
@@ -4274,13 +4299,15 @@
               <a:solidFill>
                 <a:schemeClr val="tx1"/>
               </a:solidFill>
-            </a:endParaRPr>
-          </a:p>
-        </p:txBody>
-      </p:sp>
-      <p:sp>
-        <p:nvSpPr>
-          <p:cNvPr id="1805826670" name="Footer Placeholder 4"/>
+              <a:latin typeface="Aptos Narrow"/>
+              <a:cs typeface="Aptos Narrow"/>
+            </a:endParaRPr>
+          </a:p>
+        </p:txBody>
+      </p:sp>
+      <p:sp>
+        <p:nvSpPr>
+          <p:cNvPr id="60285565" name="Footer Placeholder 4"/>
           <p:cNvSpPr>
             <a:spLocks noGrp="1"/>
           </p:cNvSpPr>
@@ -4301,30 +4328,48 @@
               <a:defRPr/>
             </a:pPr>
             <a:r>
-              <a:rPr lang="it-IT"/>
+              <a:rPr lang="it-IT">
+                <a:latin typeface="Aptos Narrow"/>
+                <a:ea typeface="Aptos Narrow"/>
+                <a:cs typeface="Aptos Narrow"/>
+              </a:rPr>
               <a:t>Note: All figures expressed in USD</a:t>
             </a:r>
-            <a:endParaRPr/>
+            <a:endParaRPr>
+              <a:latin typeface="Aptos Narrow"/>
+              <a:cs typeface="Aptos Narrow"/>
+            </a:endParaRPr>
           </a:p>
           <a:p>
             <a:pPr>
               <a:defRPr/>
             </a:pPr>
             <a:r>
-              <a:rPr/>
+              <a:rPr>
+                <a:latin typeface="Aptos Narrow"/>
+                <a:ea typeface="Aptos Narrow"/>
+                <a:cs typeface="Aptos Narrow"/>
+              </a:rPr>
               <a:t>Source</a:t>
             </a:r>
             <a:r>
-              <a:rPr lang="it-IT"/>
+              <a:rPr lang="it-IT">
+                <a:latin typeface="Aptos Narrow"/>
+                <a:ea typeface="Aptos Narrow"/>
+                <a:cs typeface="Aptos Narrow"/>
+              </a:rPr>
               <a:t>: Yahoo Finance, Mistral</a:t>
             </a:r>
-            <a:endParaRPr lang="it-IT"/>
-          </a:p>
-        </p:txBody>
-      </p:sp>
-      <p:sp>
-        <p:nvSpPr>
-          <p:cNvPr id="1443953073" name="Slide Number Placeholder 5"/>
+            <a:endParaRPr>
+              <a:latin typeface="Aptos Narrow"/>
+              <a:cs typeface="Aptos Narrow"/>
+            </a:endParaRPr>
+          </a:p>
+        </p:txBody>
+      </p:sp>
+      <p:sp>
+        <p:nvSpPr>
+          <p:cNvPr id="334555045" name="Slide Number Placeholder 5"/>
           <p:cNvSpPr>
             <a:spLocks noGrp="1"/>
           </p:cNvSpPr>
@@ -4345,16 +4390,23 @@
               <a:defRPr/>
             </a:pPr>
             <a:fld id="{A170F022-B519-FB71-528A-C27255DF51EF}" type="slidenum">
-              <a:rPr lang="en-US"/>
+              <a:rPr lang="en-US">
+                <a:latin typeface="Aptos Narrow"/>
+                <a:ea typeface="Aptos Narrow"/>
+                <a:cs typeface="Aptos Narrow"/>
+              </a:rPr>
               <a:t>&lt;#&gt;</a:t>
             </a:fld>
-            <a:endParaRPr lang="en-US"/>
+            <a:endParaRPr>
+              <a:latin typeface="Aptos Narrow"/>
+              <a:cs typeface="Aptos Narrow"/>
+            </a:endParaRPr>
           </a:p>
         </p:txBody>
       </p:sp>
       <p:cxnSp>
         <p:nvCxnSpPr>
-          <p:cNvPr id="2045020786" name=""/>
+          <p:cNvPr id="1842571458" name=""/>
           <p:cNvCxnSpPr/>
           <p:nvPr/>
         </p:nvCxnSpPr>
@@ -4393,7 +4445,7 @@
       </p:cxnSp>
       <p:cxnSp>
         <p:nvCxnSpPr>
-          <p:cNvPr id="1010499325" name=""/>
+          <p:cNvPr id="1065701629" name=""/>
           <p:cNvCxnSpPr/>
           <p:nvPr/>
         </p:nvCxnSpPr>
@@ -4432,7 +4484,7 @@
       </p:cxnSp>
       <p:sp>
         <p:nvSpPr>
-          <p:cNvPr id="2106768878" name=""/>
+          <p:cNvPr id="1842734150" name=""/>
           <p:cNvSpPr txBox="1"/>
           <p:nvPr/>
         </p:nvSpPr>
@@ -4459,9 +4511,9 @@
                 <a:solidFill>
                   <a:schemeClr val="tx1"/>
                 </a:solidFill>
-                <a:latin typeface="Liberation Sans"/>
-                <a:ea typeface="Liberation Sans"/>
-                <a:cs typeface="Liberation Sans"/>
+                <a:latin typeface="Aptos Narrow"/>
+                <a:ea typeface="Aptos Narrow"/>
+                <a:cs typeface="Aptos Narrow"/>
               </a:rPr>
               <a:t>Business description</a:t>
             </a:r>
@@ -4469,15 +4521,15 @@
               <a:solidFill>
                 <a:schemeClr val="tx1"/>
               </a:solidFill>
-              <a:latin typeface="Liberation Sans"/>
-              <a:cs typeface="Liberation Sans"/>
-            </a:endParaRPr>
-          </a:p>
-        </p:txBody>
-      </p:sp>
-      <p:sp>
-        <p:nvSpPr>
-          <p:cNvPr id="46466481" name=""/>
+              <a:latin typeface="Aptos Narrow"/>
+              <a:cs typeface="Aptos Narrow"/>
+            </a:endParaRPr>
+          </a:p>
+        </p:txBody>
+      </p:sp>
+      <p:sp>
+        <p:nvSpPr>
+          <p:cNvPr id="1809521249" name=""/>
           <p:cNvSpPr txBox="1"/>
           <p:nvPr/>
         </p:nvSpPr>
@@ -4504,9 +4556,9 @@
                 <a:solidFill>
                   <a:schemeClr val="tx1"/>
                 </a:solidFill>
-                <a:latin typeface="Liberation Sans"/>
-                <a:ea typeface="Liberation Sans"/>
-                <a:cs typeface="Liberation Sans"/>
+                <a:latin typeface="Aptos Narrow"/>
+                <a:ea typeface="Aptos Narrow"/>
+                <a:cs typeface="Aptos Narrow"/>
               </a:rPr>
               <a:t>Key data</a:t>
             </a:r>
@@ -4514,15 +4566,15 @@
               <a:solidFill>
                 <a:schemeClr val="tx1"/>
               </a:solidFill>
-              <a:latin typeface="Liberation Sans"/>
-              <a:cs typeface="Liberation Sans"/>
-            </a:endParaRPr>
-          </a:p>
-        </p:txBody>
-      </p:sp>
-      <p:sp>
-        <p:nvSpPr>
-          <p:cNvPr id="2106652362" name="description"/>
+              <a:latin typeface="Aptos Narrow"/>
+              <a:cs typeface="Aptos Narrow"/>
+            </a:endParaRPr>
+          </a:p>
+        </p:txBody>
+      </p:sp>
+      <p:sp>
+        <p:nvSpPr>
+          <p:cNvPr id="2027079376" name="description"/>
           <p:cNvSpPr txBox="1"/>
           <p:nvPr/>
         </p:nvSpPr>
@@ -4567,9 +4619,9 @@
                 <a:solidFill>
                   <a:schemeClr val="tx1"/>
                 </a:solidFill>
-                <a:latin typeface="Liberation Sans"/>
-                <a:ea typeface="Liberation Sans"/>
-                <a:cs typeface="Liberation Sans"/>
+                <a:latin typeface="Aptos Narrow"/>
+                <a:ea typeface="Aptos Narrow"/>
+                <a:cs typeface="Aptos Narrow"/>
               </a:rPr>
               <a:t>Lorem ipsum dolor sit amet, consectetur adipiscing elit. Maecenas sed turpis ante. Vivamus id lorem orci. Phasellus ut quam purus. Nulla ligula leo, pharetra vitae sapien sit amet, pretium lacinia libero. Vivamus ligula ipsum, porta vel dapibus vel, tincidunt id libero. Duis euismod sit amet nisl eget molestie. Fusce condimentum quam ante, eu pellentesque eros finibus et. Cras ultricies fringilla tincidunt. </a:t>
             </a:r>
@@ -4577,15 +4629,15 @@
               <a:solidFill>
                 <a:schemeClr val="tx1"/>
               </a:solidFill>
-              <a:latin typeface="Liberation Sans"/>
-              <a:cs typeface="Liberation Sans"/>
+              <a:latin typeface="Aptos Narrow"/>
+              <a:cs typeface="Aptos Narrow"/>
             </a:endParaRPr>
           </a:p>
         </p:txBody>
       </p:sp>
       <p:cxnSp>
         <p:nvCxnSpPr>
-          <p:cNvPr id="588006342" name=""/>
+          <p:cNvPr id="257698639" name=""/>
           <p:cNvCxnSpPr/>
           <p:nvPr/>
         </p:nvCxnSpPr>
@@ -4624,7 +4676,7 @@
       </p:cxnSp>
       <p:sp>
         <p:nvSpPr>
-          <p:cNvPr id="1551511949" name="ltm_revenue"/>
+          <p:cNvPr id="1936355256" name="ltm_revenue"/>
           <p:cNvSpPr txBox="1"/>
           <p:nvPr/>
         </p:nvSpPr>
@@ -4651,9 +4703,9 @@
                 <a:solidFill>
                   <a:schemeClr val="accent1"/>
                 </a:solidFill>
-                <a:latin typeface="Liberation Sans"/>
-                <a:ea typeface="Liberation Sans"/>
-                <a:cs typeface="Liberation Sans"/>
+                <a:latin typeface="Aptos Narrow"/>
+                <a:ea typeface="Aptos Narrow"/>
+                <a:cs typeface="Aptos Narrow"/>
               </a:rPr>
               <a:t>XX.XB</a:t>
             </a:r>
@@ -4661,15 +4713,15 @@
               <a:solidFill>
                 <a:schemeClr val="accent1"/>
               </a:solidFill>
-              <a:latin typeface="Liberation Sans"/>
-              <a:cs typeface="Liberation Sans"/>
-            </a:endParaRPr>
-          </a:p>
-        </p:txBody>
-      </p:sp>
-      <p:sp>
-        <p:nvSpPr>
-          <p:cNvPr id="890579889" name=""/>
+              <a:latin typeface="Aptos Narrow"/>
+              <a:cs typeface="Aptos Narrow"/>
+            </a:endParaRPr>
+          </a:p>
+        </p:txBody>
+      </p:sp>
+      <p:sp>
+        <p:nvSpPr>
+          <p:cNvPr id="1977612834" name=""/>
           <p:cNvSpPr txBox="1"/>
           <p:nvPr/>
         </p:nvSpPr>
@@ -4696,9 +4748,9 @@
                 <a:solidFill>
                   <a:schemeClr val="tx1"/>
                 </a:solidFill>
-                <a:latin typeface="Liberation Sans"/>
-                <a:ea typeface="Liberation Sans"/>
-                <a:cs typeface="Liberation Sans"/>
+                <a:latin typeface="Aptos Narrow"/>
+                <a:ea typeface="Aptos Narrow"/>
+                <a:cs typeface="Aptos Narrow"/>
               </a:rPr>
               <a:t>LTM Revenue</a:t>
             </a:r>
@@ -4706,15 +4758,15 @@
               <a:solidFill>
                 <a:schemeClr val="tx1"/>
               </a:solidFill>
-              <a:latin typeface="Liberation Sans"/>
-              <a:cs typeface="Liberation Sans"/>
+              <a:latin typeface="Aptos Narrow"/>
+              <a:cs typeface="Aptos Narrow"/>
             </a:endParaRPr>
           </a:p>
         </p:txBody>
       </p:sp>
       <p:cxnSp>
         <p:nvCxnSpPr>
-          <p:cNvPr id="1955230199" name=""/>
+          <p:cNvPr id="647898387" name=""/>
           <p:cNvCxnSpPr/>
           <p:nvPr/>
         </p:nvCxnSpPr>
@@ -4753,7 +4805,7 @@
       </p:cxnSp>
       <p:sp>
         <p:nvSpPr>
-          <p:cNvPr id="1516459994" name="revenue_growth"/>
+          <p:cNvPr id="1921017296" name="revenue_growth"/>
           <p:cNvSpPr txBox="1"/>
           <p:nvPr/>
         </p:nvSpPr>
@@ -4780,9 +4832,9 @@
                 <a:solidFill>
                   <a:schemeClr val="accent1"/>
                 </a:solidFill>
-                <a:latin typeface="Liberation Sans"/>
-                <a:ea typeface="Liberation Sans"/>
-                <a:cs typeface="Liberation Sans"/>
+                <a:latin typeface="Aptos Narrow"/>
+                <a:ea typeface="Aptos Narrow"/>
+                <a:cs typeface="Aptos Narrow"/>
               </a:rPr>
               <a:t>XX.X%</a:t>
             </a:r>
@@ -4790,15 +4842,15 @@
               <a:solidFill>
                 <a:schemeClr val="accent1"/>
               </a:solidFill>
-              <a:latin typeface="Liberation Sans"/>
-              <a:cs typeface="Liberation Sans"/>
-            </a:endParaRPr>
-          </a:p>
-        </p:txBody>
-      </p:sp>
-      <p:sp>
-        <p:nvSpPr>
-          <p:cNvPr id="777123096" name=""/>
+              <a:latin typeface="Aptos Narrow"/>
+              <a:cs typeface="Aptos Narrow"/>
+            </a:endParaRPr>
+          </a:p>
+        </p:txBody>
+      </p:sp>
+      <p:sp>
+        <p:nvSpPr>
+          <p:cNvPr id="286425450" name=""/>
           <p:cNvSpPr txBox="1"/>
           <p:nvPr/>
         </p:nvSpPr>
@@ -4825,9 +4877,9 @@
                 <a:solidFill>
                   <a:schemeClr val="tx1"/>
                 </a:solidFill>
-                <a:latin typeface="Liberation Sans"/>
-                <a:ea typeface="Liberation Sans"/>
-                <a:cs typeface="Liberation Sans"/>
+                <a:latin typeface="Aptos Narrow"/>
+                <a:ea typeface="Aptos Narrow"/>
+                <a:cs typeface="Aptos Narrow"/>
               </a:rPr>
               <a:t>Revenue growth</a:t>
             </a:r>
@@ -4835,15 +4887,15 @@
               <a:solidFill>
                 <a:schemeClr val="tx1"/>
               </a:solidFill>
-              <a:latin typeface="Liberation Sans"/>
-              <a:cs typeface="Liberation Sans"/>
+              <a:latin typeface="Aptos Narrow"/>
+              <a:cs typeface="Aptos Narrow"/>
             </a:endParaRPr>
           </a:p>
         </p:txBody>
       </p:sp>
       <p:cxnSp>
         <p:nvCxnSpPr>
-          <p:cNvPr id="56281767" name=""/>
+          <p:cNvPr id="1531801383" name=""/>
           <p:cNvCxnSpPr/>
           <p:nvPr/>
         </p:nvCxnSpPr>
@@ -4882,7 +4934,7 @@
       </p:cxnSp>
       <p:sp>
         <p:nvSpPr>
-          <p:cNvPr id="1681012860" name="ltm_ebitda"/>
+          <p:cNvPr id="1215495915" name="ltm_ebitda"/>
           <p:cNvSpPr txBox="1"/>
           <p:nvPr/>
         </p:nvSpPr>
@@ -4909,9 +4961,9 @@
                 <a:solidFill>
                   <a:schemeClr val="accent1"/>
                 </a:solidFill>
-                <a:latin typeface="Liberation Sans"/>
-                <a:ea typeface="Liberation Sans"/>
-                <a:cs typeface="Liberation Sans"/>
+                <a:latin typeface="Aptos Narrow"/>
+                <a:ea typeface="Aptos Narrow"/>
+                <a:cs typeface="Aptos Narrow"/>
               </a:rPr>
               <a:t>XX.XB</a:t>
             </a:r>
@@ -4919,15 +4971,15 @@
               <a:solidFill>
                 <a:schemeClr val="accent1"/>
               </a:solidFill>
-              <a:latin typeface="Liberation Sans"/>
-              <a:cs typeface="Liberation Sans"/>
-            </a:endParaRPr>
-          </a:p>
-        </p:txBody>
-      </p:sp>
-      <p:sp>
-        <p:nvSpPr>
-          <p:cNvPr id="1743832040" name=""/>
+              <a:latin typeface="Aptos Narrow"/>
+              <a:cs typeface="Aptos Narrow"/>
+            </a:endParaRPr>
+          </a:p>
+        </p:txBody>
+      </p:sp>
+      <p:sp>
+        <p:nvSpPr>
+          <p:cNvPr id="1699076555" name=""/>
           <p:cNvSpPr txBox="1"/>
           <p:nvPr/>
         </p:nvSpPr>
@@ -4954,9 +5006,9 @@
                 <a:solidFill>
                   <a:schemeClr val="tx1"/>
                 </a:solidFill>
-                <a:latin typeface="Liberation Sans"/>
-                <a:ea typeface="Liberation Sans"/>
-                <a:cs typeface="Liberation Sans"/>
+                <a:latin typeface="Aptos Narrow"/>
+                <a:ea typeface="Aptos Narrow"/>
+                <a:cs typeface="Aptos Narrow"/>
               </a:rPr>
               <a:t>LTM EBITDA</a:t>
             </a:r>
@@ -4964,15 +5016,15 @@
               <a:solidFill>
                 <a:schemeClr val="tx1"/>
               </a:solidFill>
-              <a:latin typeface="Liberation Sans"/>
-              <a:cs typeface="Liberation Sans"/>
+              <a:latin typeface="Aptos Narrow"/>
+              <a:cs typeface="Aptos Narrow"/>
             </a:endParaRPr>
           </a:p>
         </p:txBody>
       </p:sp>
       <p:cxnSp>
         <p:nvCxnSpPr>
-          <p:cNvPr id="1647538847" name=""/>
+          <p:cNvPr id="1497541660" name=""/>
           <p:cNvCxnSpPr/>
           <p:nvPr/>
         </p:nvCxnSpPr>
@@ -5011,7 +5063,7 @@
       </p:cxnSp>
       <p:sp>
         <p:nvSpPr>
-          <p:cNvPr id="570703425" name="ebitda_margin"/>
+          <p:cNvPr id="1779395040" name="ebitda_margin"/>
           <p:cNvSpPr txBox="1"/>
           <p:nvPr/>
         </p:nvSpPr>
@@ -5038,9 +5090,9 @@
                 <a:solidFill>
                   <a:schemeClr val="accent1"/>
                 </a:solidFill>
-                <a:latin typeface="Liberation Sans"/>
-                <a:ea typeface="Liberation Sans"/>
-                <a:cs typeface="Liberation Sans"/>
+                <a:latin typeface="Aptos Narrow"/>
+                <a:ea typeface="Aptos Narrow"/>
+                <a:cs typeface="Aptos Narrow"/>
               </a:rPr>
               <a:t>XX.X%</a:t>
             </a:r>
@@ -5048,15 +5100,15 @@
               <a:solidFill>
                 <a:schemeClr val="accent1"/>
               </a:solidFill>
-              <a:latin typeface="Liberation Sans"/>
-              <a:cs typeface="Liberation Sans"/>
-            </a:endParaRPr>
-          </a:p>
-        </p:txBody>
-      </p:sp>
-      <p:sp>
-        <p:nvSpPr>
-          <p:cNvPr id="193611717" name=""/>
+              <a:latin typeface="Aptos Narrow"/>
+              <a:cs typeface="Aptos Narrow"/>
+            </a:endParaRPr>
+          </a:p>
+        </p:txBody>
+      </p:sp>
+      <p:sp>
+        <p:nvSpPr>
+          <p:cNvPr id="480091914" name=""/>
           <p:cNvSpPr txBox="1"/>
           <p:nvPr/>
         </p:nvSpPr>
@@ -5083,9 +5135,9 @@
                 <a:solidFill>
                   <a:schemeClr val="tx1"/>
                 </a:solidFill>
-                <a:latin typeface="Liberation Sans"/>
-                <a:ea typeface="Liberation Sans"/>
-                <a:cs typeface="Liberation Sans"/>
+                <a:latin typeface="Aptos Narrow"/>
+                <a:ea typeface="Aptos Narrow"/>
+                <a:cs typeface="Aptos Narrow"/>
               </a:rPr>
               <a:t>EBITDA margin</a:t>
             </a:r>
@@ -5093,15 +5145,15 @@
               <a:solidFill>
                 <a:schemeClr val="tx1"/>
               </a:solidFill>
-              <a:latin typeface="Liberation Sans"/>
-              <a:cs typeface="Liberation Sans"/>
-            </a:endParaRPr>
-          </a:p>
-        </p:txBody>
-      </p:sp>
-      <p:sp>
-        <p:nvSpPr>
-          <p:cNvPr id="1524460156" name=""/>
+              <a:latin typeface="Aptos Narrow"/>
+              <a:cs typeface="Aptos Narrow"/>
+            </a:endParaRPr>
+          </a:p>
+        </p:txBody>
+      </p:sp>
+      <p:sp>
+        <p:nvSpPr>
+          <p:cNvPr id="953030831" name=""/>
           <p:cNvSpPr txBox="1"/>
           <p:nvPr/>
         </p:nvSpPr>
@@ -5147,9 +5199,9 @@
                 <a:solidFill>
                   <a:schemeClr val="bg2"/>
                 </a:solidFill>
-                <a:latin typeface="Liberation Sans"/>
-                <a:ea typeface="Liberation Sans"/>
-                <a:cs typeface="Liberation Sans"/>
+                <a:latin typeface="Aptos Narrow"/>
+                <a:ea typeface="Aptos Narrow"/>
+                <a:cs typeface="Aptos Narrow"/>
               </a:rPr>
               <a:t>Latest financials</a:t>
             </a:r>
@@ -5157,15 +5209,15 @@
               <a:solidFill>
                 <a:schemeClr val="bg2"/>
               </a:solidFill>
-              <a:latin typeface="Liberation Sans"/>
-              <a:cs typeface="Liberation Sans"/>
+              <a:latin typeface="Aptos Narrow"/>
+              <a:cs typeface="Aptos Narrow"/>
             </a:endParaRPr>
           </a:p>
         </p:txBody>
       </p:sp>
       <p:cxnSp>
         <p:nvCxnSpPr>
-          <p:cNvPr id="985671139" name=""/>
+          <p:cNvPr id="1850083378" name=""/>
           <p:cNvCxnSpPr/>
           <p:nvPr/>
         </p:nvCxnSpPr>
@@ -5204,7 +5256,7 @@
       </p:cxnSp>
       <p:cxnSp>
         <p:nvCxnSpPr>
-          <p:cNvPr id="512490457" name=""/>
+          <p:cNvPr id="1281726721" name=""/>
           <p:cNvCxnSpPr/>
           <p:nvPr/>
         </p:nvCxnSpPr>
@@ -5243,7 +5295,7 @@
       </p:cxnSp>
       <p:cxnSp>
         <p:nvCxnSpPr>
-          <p:cNvPr id="94706145" name=""/>
+          <p:cNvPr id="464366003" name=""/>
           <p:cNvCxnSpPr/>
           <p:nvPr/>
         </p:nvCxnSpPr>
@@ -5282,7 +5334,7 @@
       </p:cxnSp>
       <p:cxnSp>
         <p:nvCxnSpPr>
-          <p:cNvPr id="459992479" name=""/>
+          <p:cNvPr id="1326514694" name=""/>
           <p:cNvCxnSpPr/>
           <p:nvPr/>
         </p:nvCxnSpPr>
@@ -5321,7 +5373,7 @@
       </p:cxnSp>
       <p:cxnSp>
         <p:nvCxnSpPr>
-          <p:cNvPr id="154408427" name=""/>
+          <p:cNvPr id="1208989823" name=""/>
           <p:cNvCxnSpPr/>
           <p:nvPr/>
         </p:nvCxnSpPr>
@@ -5360,7 +5412,7 @@
       </p:cxnSp>
       <p:cxnSp>
         <p:nvCxnSpPr>
-          <p:cNvPr id="1577614578" name=""/>
+          <p:cNvPr id="1103733350" name=""/>
           <p:cNvCxnSpPr/>
           <p:nvPr/>
         </p:nvCxnSpPr>
@@ -5399,7 +5451,7 @@
       </p:cxnSp>
       <p:cxnSp>
         <p:nvCxnSpPr>
-          <p:cNvPr id="1569510001" name=""/>
+          <p:cNvPr id="1730335108" name=""/>
           <p:cNvCxnSpPr/>
           <p:nvPr/>
         </p:nvCxnSpPr>
@@ -5438,7 +5490,7 @@
       </p:cxnSp>
       <p:cxnSp>
         <p:nvCxnSpPr>
-          <p:cNvPr id="716548198" name=""/>
+          <p:cNvPr id="236593648" name=""/>
           <p:cNvCxnSpPr/>
           <p:nvPr/>
         </p:nvCxnSpPr>
@@ -5477,7 +5529,7 @@
       </p:cxnSp>
       <p:cxnSp>
         <p:nvCxnSpPr>
-          <p:cNvPr id="1123687100" name=""/>
+          <p:cNvPr id="1136183172" name=""/>
           <p:cNvCxnSpPr/>
           <p:nvPr/>
         </p:nvCxnSpPr>
@@ -5516,7 +5568,7 @@
       </p:cxnSp>
       <p:cxnSp>
         <p:nvCxnSpPr>
-          <p:cNvPr id="1563674800" name=""/>
+          <p:cNvPr id="1426056785" name=""/>
           <p:cNvCxnSpPr/>
           <p:nvPr/>
         </p:nvCxnSpPr>
@@ -5555,7 +5607,7 @@
       </p:cxnSp>
       <p:cxnSp>
         <p:nvCxnSpPr>
-          <p:cNvPr id="2020695890" name=""/>
+          <p:cNvPr id="824741038" name=""/>
           <p:cNvCxnSpPr/>
           <p:nvPr/>
         </p:nvCxnSpPr>
@@ -5594,7 +5646,7 @@
       </p:cxnSp>
       <p:cxnSp>
         <p:nvCxnSpPr>
-          <p:cNvPr id="228484942" name=""/>
+          <p:cNvPr id="594242458" name=""/>
           <p:cNvCxnSpPr/>
           <p:nvPr/>
         </p:nvCxnSpPr>
@@ -5633,7 +5685,7 @@
       </p:cxnSp>
       <p:cxnSp>
         <p:nvCxnSpPr>
-          <p:cNvPr id="1163883319" name=""/>
+          <p:cNvPr id="1973086408" name=""/>
           <p:cNvCxnSpPr/>
           <p:nvPr/>
         </p:nvCxnSpPr>
@@ -5672,7 +5724,7 @@
       </p:cxnSp>
       <p:cxnSp>
         <p:nvCxnSpPr>
-          <p:cNvPr id="802623118" name=""/>
+          <p:cNvPr id="204858409" name=""/>
           <p:cNvCxnSpPr/>
           <p:nvPr/>
         </p:nvCxnSpPr>
@@ -5711,7 +5763,7 @@
       </p:cxnSp>
       <p:cxnSp>
         <p:nvCxnSpPr>
-          <p:cNvPr id="1715591264" name=""/>
+          <p:cNvPr id="1396683120" name=""/>
           <p:cNvCxnSpPr/>
           <p:nvPr/>
         </p:nvCxnSpPr>
@@ -5750,7 +5802,7 @@
       </p:cxnSp>
       <p:cxnSp>
         <p:nvCxnSpPr>
-          <p:cNvPr id="1081689420" name=""/>
+          <p:cNvPr id="143510679" name=""/>
           <p:cNvCxnSpPr/>
           <p:nvPr/>
         </p:nvCxnSpPr>
@@ -5822,7 +5874,7 @@
       </p:grpSpPr>
       <p:sp>
         <p:nvSpPr>
-          <p:cNvPr id="1486085382" name="Footer Placeholder 4"/>
+          <p:cNvPr id="2105729178" name="Footer Placeholder 4"/>
           <p:cNvSpPr>
             <a:spLocks noGrp="1"/>
           </p:cNvSpPr>
@@ -5844,15 +5896,15 @@
             </a:pPr>
             <a:r>
               <a:rPr lang="it-IT">
-                <a:latin typeface="Liberation Sans"/>
-                <a:ea typeface="Liberation Sans"/>
-                <a:cs typeface="Liberation Sans"/>
+                <a:latin typeface="Aptos Narrow"/>
+                <a:ea typeface="Aptos Narrow"/>
+                <a:cs typeface="Aptos Narrow"/>
               </a:rPr>
               <a:t>Note: All figures expressed in USD</a:t>
             </a:r>
             <a:endParaRPr>
-              <a:latin typeface="Liberation Sans"/>
-              <a:cs typeface="Liberation Sans"/>
+              <a:latin typeface="Aptos Narrow"/>
+              <a:cs typeface="Aptos Narrow"/>
             </a:endParaRPr>
           </a:p>
           <a:p>
@@ -5861,30 +5913,30 @@
             </a:pPr>
             <a:r>
               <a:rPr>
-                <a:latin typeface="Liberation Sans"/>
-                <a:ea typeface="Liberation Sans"/>
-                <a:cs typeface="Liberation Sans"/>
+                <a:latin typeface="Aptos Narrow"/>
+                <a:ea typeface="Aptos Narrow"/>
+                <a:cs typeface="Aptos Narrow"/>
               </a:rPr>
               <a:t>Source</a:t>
             </a:r>
             <a:r>
               <a:rPr lang="it-IT">
-                <a:latin typeface="Liberation Sans"/>
-                <a:ea typeface="Liberation Sans"/>
-                <a:cs typeface="Liberation Sans"/>
+                <a:latin typeface="Aptos Narrow"/>
+                <a:ea typeface="Aptos Narrow"/>
+                <a:cs typeface="Aptos Narrow"/>
               </a:rPr>
               <a:t>: Yahoo Finance</a:t>
             </a:r>
             <a:endParaRPr>
-              <a:latin typeface="Liberation Sans"/>
-              <a:cs typeface="Liberation Sans"/>
-            </a:endParaRPr>
-          </a:p>
-        </p:txBody>
-      </p:sp>
-      <p:sp>
-        <p:nvSpPr>
-          <p:cNvPr id="1001666950" name="Rectangle 155402662"/>
+              <a:latin typeface="Aptos Narrow"/>
+              <a:cs typeface="Aptos Narrow"/>
+            </a:endParaRPr>
+          </a:p>
+        </p:txBody>
+      </p:sp>
+      <p:sp>
+        <p:nvSpPr>
+          <p:cNvPr id="1012086158" name="Rectangle 155402662"/>
           <p:cNvSpPr txBox="1"/>
           <p:nvPr/>
         </p:nvSpPr>
@@ -5911,9 +5963,9 @@
                 <a:solidFill>
                   <a:schemeClr val="tx1"/>
                 </a:solidFill>
-                <a:latin typeface="Liberation Sans"/>
-                <a:ea typeface="Liberation Sans"/>
-                <a:cs typeface="Liberation Sans"/>
+                <a:latin typeface="Aptos Narrow"/>
+                <a:ea typeface="Aptos Narrow"/>
+                <a:cs typeface="Aptos Narrow"/>
               </a:rPr>
               <a:t>Close </a:t>
             </a:r>
@@ -5922,9 +5974,9 @@
                 <a:solidFill>
                   <a:schemeClr val="tx1"/>
                 </a:solidFill>
-                <a:latin typeface="Liberation Sans"/>
-                <a:ea typeface="Liberation Sans"/>
-                <a:cs typeface="Liberation Sans"/>
+                <a:latin typeface="Aptos Narrow"/>
+                <a:ea typeface="Aptos Narrow"/>
+                <a:cs typeface="Aptos Narrow"/>
               </a:rPr>
               <a:t>price</a:t>
             </a:r>
@@ -5932,15 +5984,15 @@
               <a:solidFill>
                 <a:schemeClr val="tx1"/>
               </a:solidFill>
-              <a:latin typeface="Liberation Sans"/>
-              <a:cs typeface="Liberation Sans"/>
-            </a:endParaRPr>
-          </a:p>
-        </p:txBody>
-      </p:sp>
-      <p:sp>
-        <p:nvSpPr>
-          <p:cNvPr id="1289769386" name="Rectangle 155402662"/>
+              <a:latin typeface="Aptos Narrow"/>
+              <a:cs typeface="Aptos Narrow"/>
+            </a:endParaRPr>
+          </a:p>
+        </p:txBody>
+      </p:sp>
+      <p:sp>
+        <p:nvSpPr>
+          <p:cNvPr id="58888146" name="Rectangle 155402662"/>
           <p:cNvSpPr txBox="1"/>
           <p:nvPr/>
         </p:nvSpPr>
@@ -5967,9 +6019,9 @@
                 <a:solidFill>
                   <a:schemeClr val="tx1"/>
                 </a:solidFill>
-                <a:latin typeface="Liberation Sans"/>
-                <a:ea typeface="Liberation Sans"/>
-                <a:cs typeface="Liberation Sans"/>
+                <a:latin typeface="Aptos Narrow"/>
+                <a:ea typeface="Aptos Narrow"/>
+                <a:cs typeface="Aptos Narrow"/>
               </a:rPr>
               <a:t>Mean price</a:t>
             </a:r>
@@ -5977,15 +6029,15 @@
               <a:solidFill>
                 <a:schemeClr val="tx1"/>
               </a:solidFill>
-              <a:latin typeface="Liberation Sans"/>
-              <a:cs typeface="Liberation Sans"/>
-            </a:endParaRPr>
-          </a:p>
-        </p:txBody>
-      </p:sp>
-      <p:sp>
-        <p:nvSpPr>
-          <p:cNvPr id="751633514" name="Rectangle 155402662"/>
+              <a:latin typeface="Aptos Narrow"/>
+              <a:cs typeface="Aptos Narrow"/>
+            </a:endParaRPr>
+          </a:p>
+        </p:txBody>
+      </p:sp>
+      <p:sp>
+        <p:nvSpPr>
+          <p:cNvPr id="196938319" name="Rectangle 155402662"/>
           <p:cNvSpPr txBox="1"/>
           <p:nvPr/>
         </p:nvSpPr>
@@ -6012,9 +6064,9 @@
                 <a:solidFill>
                   <a:schemeClr val="tx1"/>
                 </a:solidFill>
-                <a:latin typeface="Liberation Sans"/>
-                <a:ea typeface="Liberation Sans"/>
-                <a:cs typeface="Liberation Sans"/>
+                <a:latin typeface="Aptos Narrow"/>
+                <a:ea typeface="Aptos Narrow"/>
+                <a:cs typeface="Aptos Narrow"/>
               </a:rPr>
               <a:t>Analyst expectation</a:t>
             </a:r>
@@ -6022,15 +6074,15 @@
               <a:solidFill>
                 <a:schemeClr val="tx1"/>
               </a:solidFill>
-              <a:latin typeface="Liberation Sans"/>
-              <a:cs typeface="Liberation Sans"/>
-            </a:endParaRPr>
-          </a:p>
-        </p:txBody>
-      </p:sp>
-      <p:sp>
-        <p:nvSpPr>
-          <p:cNvPr id="1386481085" name=""/>
+              <a:latin typeface="Aptos Narrow"/>
+              <a:cs typeface="Aptos Narrow"/>
+            </a:endParaRPr>
+          </a:p>
+        </p:txBody>
+      </p:sp>
+      <p:sp>
+        <p:nvSpPr>
+          <p:cNvPr id="395957939" name=""/>
           <p:cNvSpPr/>
           <p:nvPr/>
         </p:nvSpPr>
@@ -6086,15 +6138,15 @@
               <a:defRPr/>
             </a:pPr>
             <a:endParaRPr>
-              <a:latin typeface="Liberation Sans"/>
-              <a:cs typeface="Liberation Sans"/>
-            </a:endParaRPr>
-          </a:p>
-        </p:txBody>
-      </p:sp>
-      <p:sp>
-        <p:nvSpPr>
-          <p:cNvPr id="1373598045" name=""/>
+              <a:latin typeface="Aptos Narrow"/>
+              <a:cs typeface="Aptos Narrow"/>
+            </a:endParaRPr>
+          </a:p>
+        </p:txBody>
+      </p:sp>
+      <p:sp>
+        <p:nvSpPr>
+          <p:cNvPr id="287554380" name=""/>
           <p:cNvSpPr/>
           <p:nvPr/>
         </p:nvSpPr>
@@ -6150,15 +6202,15 @@
               <a:defRPr/>
             </a:pPr>
             <a:endParaRPr>
-              <a:latin typeface="Liberation Sans"/>
-              <a:cs typeface="Liberation Sans"/>
-            </a:endParaRPr>
-          </a:p>
-        </p:txBody>
-      </p:sp>
-      <p:sp>
-        <p:nvSpPr>
-          <p:cNvPr id="859449695" name="Title 1"/>
+              <a:latin typeface="Aptos Narrow"/>
+              <a:cs typeface="Aptos Narrow"/>
+            </a:endParaRPr>
+          </a:p>
+        </p:txBody>
+      </p:sp>
+      <p:sp>
+        <p:nvSpPr>
+          <p:cNvPr id="525072123" name="Title 1"/>
           <p:cNvSpPr>
             <a:spLocks noGrp="1"/>
           </p:cNvSpPr>
@@ -6179,9 +6231,9 @@
                 <a:solidFill>
                   <a:schemeClr val="accent1"/>
                 </a:solidFill>
-                <a:latin typeface="Arial"/>
-                <a:ea typeface="Arial"/>
-                <a:cs typeface="Arial"/>
+                <a:latin typeface="Aptos Narrow"/>
+                <a:ea typeface="Aptos Narrow"/>
+                <a:cs typeface="Aptos Narrow"/>
               </a:rPr>
               <a:t>{company_name}</a:t>
             </a:r>
@@ -6190,9 +6242,9 @@
                 <a:solidFill>
                   <a:schemeClr val="tx2"/>
                 </a:solidFill>
-                <a:latin typeface="Arial"/>
-                <a:ea typeface="Arial"/>
-                <a:cs typeface="Arial"/>
+                <a:latin typeface="Aptos Narrow"/>
+                <a:ea typeface="Aptos Narrow"/>
+                <a:cs typeface="Aptos Narrow"/>
               </a:rPr>
               <a:t> </a:t>
             </a:r>
@@ -6201,6 +6253,9 @@
                 <a:solidFill>
                   <a:schemeClr val="tx1"/>
                 </a:solidFill>
+                <a:latin typeface="Aptos Narrow"/>
+                <a:ea typeface="Aptos Narrow"/>
+                <a:cs typeface="Aptos Narrow"/>
               </a:rPr>
               <a:t>| Historical trading price</a:t>
             </a:r>
@@ -6208,13 +6263,15 @@
               <a:solidFill>
                 <a:schemeClr val="tx1"/>
               </a:solidFill>
-            </a:endParaRPr>
-          </a:p>
-        </p:txBody>
-      </p:sp>
-      <p:sp>
-        <p:nvSpPr>
-          <p:cNvPr id="1294091885" name="Slide Number Placeholder 5"/>
+              <a:latin typeface="Aptos Narrow"/>
+              <a:cs typeface="Aptos Narrow"/>
+            </a:endParaRPr>
+          </a:p>
+        </p:txBody>
+      </p:sp>
+      <p:sp>
+        <p:nvSpPr>
+          <p:cNvPr id="957509489" name="Slide Number Placeholder 5"/>
           <p:cNvSpPr>
             <a:spLocks noGrp="1"/>
           </p:cNvSpPr>
@@ -6236,22 +6293,22 @@
             </a:pPr>
             <a:fld id="{60174F69-8CA3-599D-BB30-EC0F6EAAB2E2}" type="slidenum">
               <a:rPr lang="en-US">
-                <a:latin typeface="Liberation Sans"/>
-                <a:ea typeface="Liberation Sans"/>
-                <a:cs typeface="Liberation Sans"/>
+                <a:latin typeface="Aptos Narrow"/>
+                <a:ea typeface="Aptos Narrow"/>
+                <a:cs typeface="Aptos Narrow"/>
               </a:rPr>
               <a:t>2</a:t>
             </a:fld>
             <a:endParaRPr>
-              <a:latin typeface="Liberation Sans"/>
-              <a:cs typeface="Liberation Sans"/>
+              <a:latin typeface="Aptos Narrow"/>
+              <a:cs typeface="Aptos Narrow"/>
             </a:endParaRPr>
           </a:p>
         </p:txBody>
       </p:sp>
       <p:cxnSp>
         <p:nvCxnSpPr>
-          <p:cNvPr id="1448612746" name=""/>
+          <p:cNvPr id="776401926" name=""/>
           <p:cNvCxnSpPr/>
           <p:nvPr/>
         </p:nvCxnSpPr>
@@ -6290,7 +6347,7 @@
       </p:cxnSp>
       <p:cxnSp>
         <p:nvCxnSpPr>
-          <p:cNvPr id="17983894" name=""/>
+          <p:cNvPr id="690482887" name=""/>
           <p:cNvCxnSpPr/>
           <p:nvPr/>
         </p:nvCxnSpPr>
@@ -6329,7 +6386,7 @@
       </p:cxnSp>
       <p:sp>
         <p:nvSpPr>
-          <p:cNvPr id="2140649906" name=""/>
+          <p:cNvPr id="1695357591" name=""/>
           <p:cNvSpPr txBox="1"/>
           <p:nvPr/>
         </p:nvSpPr>
@@ -6356,9 +6413,9 @@
                 <a:solidFill>
                   <a:schemeClr val="tx1"/>
                 </a:solidFill>
-                <a:latin typeface="Liberation Sans"/>
-                <a:ea typeface="Liberation Sans"/>
-                <a:cs typeface="Liberation Sans"/>
+                <a:latin typeface="Aptos Narrow"/>
+                <a:ea typeface="Aptos Narrow"/>
+                <a:cs typeface="Aptos Narrow"/>
               </a:rPr>
               <a:t>Last 6 months trading price</a:t>
             </a:r>
@@ -6366,15 +6423,15 @@
               <a:solidFill>
                 <a:schemeClr val="tx1"/>
               </a:solidFill>
-              <a:latin typeface="Liberation Sans"/>
-              <a:cs typeface="Liberation Sans"/>
-            </a:endParaRPr>
-          </a:p>
-        </p:txBody>
-      </p:sp>
-      <p:sp>
-        <p:nvSpPr>
-          <p:cNvPr id="336136614" name=""/>
+              <a:latin typeface="Aptos Narrow"/>
+              <a:cs typeface="Aptos Narrow"/>
+            </a:endParaRPr>
+          </a:p>
+        </p:txBody>
+      </p:sp>
+      <p:sp>
+        <p:nvSpPr>
+          <p:cNvPr id="1059978103" name=""/>
           <p:cNvSpPr txBox="1"/>
           <p:nvPr/>
         </p:nvSpPr>
@@ -6401,9 +6458,9 @@
                 <a:solidFill>
                   <a:schemeClr val="tx1"/>
                 </a:solidFill>
-                <a:latin typeface="Liberation Sans"/>
-                <a:ea typeface="Liberation Sans"/>
-                <a:cs typeface="Liberation Sans"/>
+                <a:latin typeface="Aptos Narrow"/>
+                <a:ea typeface="Aptos Narrow"/>
+                <a:cs typeface="Aptos Narrow"/>
               </a:rPr>
               <a:t>Price statistics</a:t>
             </a:r>
@@ -6411,15 +6468,15 @@
               <a:solidFill>
                 <a:schemeClr val="tx1"/>
               </a:solidFill>
-              <a:latin typeface="Liberation Sans"/>
-              <a:cs typeface="Liberation Sans"/>
-            </a:endParaRPr>
-          </a:p>
-        </p:txBody>
-      </p:sp>
-      <p:sp>
-        <p:nvSpPr>
-          <p:cNvPr id="1711248219" name=""/>
+              <a:latin typeface="Aptos Narrow"/>
+              <a:cs typeface="Aptos Narrow"/>
+            </a:endParaRPr>
+          </a:p>
+        </p:txBody>
+      </p:sp>
+      <p:sp>
+        <p:nvSpPr>
+          <p:cNvPr id="2041523442" name=""/>
           <p:cNvSpPr/>
           <p:nvPr/>
         </p:nvSpPr>
@@ -6476,15 +6533,15 @@
               <a:defRPr/>
             </a:pPr>
             <a:endParaRPr>
-              <a:latin typeface="Liberation Sans"/>
-              <a:cs typeface="Liberation Sans"/>
+              <a:latin typeface="Aptos Narrow"/>
+              <a:cs typeface="Aptos Narrow"/>
             </a:endParaRPr>
           </a:p>
         </p:txBody>
       </p:sp>
       <p:cxnSp>
         <p:nvCxnSpPr>
-          <p:cNvPr id="2095260705" name=""/>
+          <p:cNvPr id="1274373384" name=""/>
           <p:cNvCxnSpPr/>
           <p:nvPr/>
         </p:nvCxnSpPr>
@@ -6523,7 +6580,7 @@
       </p:cxnSp>
       <p:cxnSp>
         <p:nvCxnSpPr>
-          <p:cNvPr id="1661281601" name=""/>
+          <p:cNvPr id="983734188" name=""/>
           <p:cNvCxnSpPr/>
           <p:nvPr/>
         </p:nvCxnSpPr>
@@ -6562,7 +6619,7 @@
       </p:cxnSp>
       <p:cxnSp>
         <p:nvCxnSpPr>
-          <p:cNvPr id="1475645914" name=""/>
+          <p:cNvPr id="696171894" name=""/>
           <p:cNvCxnSpPr/>
           <p:nvPr/>
         </p:nvCxnSpPr>
@@ -6601,7 +6658,7 @@
       </p:cxnSp>
       <p:cxnSp>
         <p:nvCxnSpPr>
-          <p:cNvPr id="1442792224" name=""/>
+          <p:cNvPr id="851874978" name=""/>
           <p:cNvCxnSpPr/>
           <p:nvPr/>
         </p:nvCxnSpPr>
@@ -6640,7 +6697,7 @@
       </p:cxnSp>
       <p:cxnSp>
         <p:nvCxnSpPr>
-          <p:cNvPr id="800085064" name=""/>
+          <p:cNvPr id="1044940067" name=""/>
           <p:cNvCxnSpPr/>
           <p:nvPr/>
         </p:nvCxnSpPr>
@@ -6679,7 +6736,7 @@
       </p:cxnSp>
       <p:sp>
         <p:nvSpPr>
-          <p:cNvPr id="223665145" name="mean_price"/>
+          <p:cNvPr id="388147475" name="mean_price"/>
           <p:cNvSpPr txBox="1"/>
           <p:nvPr/>
         </p:nvSpPr>
@@ -6706,9 +6763,9 @@
                 <a:solidFill>
                   <a:schemeClr val="accent3"/>
                 </a:solidFill>
-                <a:latin typeface="Liberation Sans"/>
-                <a:ea typeface="Liberation Sans"/>
-                <a:cs typeface="Liberation Sans"/>
+                <a:latin typeface="Aptos Narrow"/>
+                <a:ea typeface="Aptos Narrow"/>
+                <a:cs typeface="Aptos Narrow"/>
               </a:rPr>
               <a:t>XXX</a:t>
             </a:r>
@@ -6716,15 +6773,15 @@
               <a:solidFill>
                 <a:schemeClr val="accent3"/>
               </a:solidFill>
-              <a:latin typeface="Liberation Sans"/>
-              <a:cs typeface="Liberation Sans"/>
-            </a:endParaRPr>
-          </a:p>
-        </p:txBody>
-      </p:sp>
-      <p:sp>
-        <p:nvSpPr>
-          <p:cNvPr id="1601393755" name="max_price"/>
+              <a:latin typeface="Aptos Narrow"/>
+              <a:cs typeface="Aptos Narrow"/>
+            </a:endParaRPr>
+          </a:p>
+        </p:txBody>
+      </p:sp>
+      <p:sp>
+        <p:nvSpPr>
+          <p:cNvPr id="1091193202" name="max_price"/>
           <p:cNvSpPr txBox="1"/>
           <p:nvPr/>
         </p:nvSpPr>
@@ -6751,9 +6808,9 @@
                 <a:solidFill>
                   <a:schemeClr val="tx1"/>
                 </a:solidFill>
-                <a:latin typeface="Liberation Sans"/>
-                <a:ea typeface="Liberation Sans"/>
-                <a:cs typeface="Liberation Sans"/>
+                <a:latin typeface="Aptos Narrow"/>
+                <a:ea typeface="Aptos Narrow"/>
+                <a:cs typeface="Aptos Narrow"/>
               </a:rPr>
               <a:t>XXX</a:t>
             </a:r>
@@ -6761,15 +6818,15 @@
               <a:solidFill>
                 <a:schemeClr val="tx1"/>
               </a:solidFill>
-              <a:latin typeface="Liberation Sans"/>
-              <a:cs typeface="Liberation Sans"/>
-            </a:endParaRPr>
-          </a:p>
-        </p:txBody>
-      </p:sp>
-      <p:sp>
-        <p:nvSpPr>
-          <p:cNvPr id="1845117738" name="50p_price"/>
+              <a:latin typeface="Aptos Narrow"/>
+              <a:cs typeface="Aptos Narrow"/>
+            </a:endParaRPr>
+          </a:p>
+        </p:txBody>
+      </p:sp>
+      <p:sp>
+        <p:nvSpPr>
+          <p:cNvPr id="1302606865" name="50p_price"/>
           <p:cNvSpPr txBox="1"/>
           <p:nvPr/>
         </p:nvSpPr>
@@ -6796,9 +6853,9 @@
                 <a:solidFill>
                   <a:schemeClr val="tx1"/>
                 </a:solidFill>
-                <a:latin typeface="Liberation Sans"/>
-                <a:ea typeface="Liberation Sans"/>
-                <a:cs typeface="Liberation Sans"/>
+                <a:latin typeface="Aptos Narrow"/>
+                <a:ea typeface="Aptos Narrow"/>
+                <a:cs typeface="Aptos Narrow"/>
               </a:rPr>
               <a:t>XXX</a:t>
             </a:r>
@@ -6806,15 +6863,15 @@
               <a:solidFill>
                 <a:schemeClr val="tx1"/>
               </a:solidFill>
-              <a:latin typeface="Liberation Sans"/>
-              <a:cs typeface="Liberation Sans"/>
-            </a:endParaRPr>
-          </a:p>
-        </p:txBody>
-      </p:sp>
-      <p:sp>
-        <p:nvSpPr>
-          <p:cNvPr id="1740953749" name="25p_price"/>
+              <a:latin typeface="Aptos Narrow"/>
+              <a:cs typeface="Aptos Narrow"/>
+            </a:endParaRPr>
+          </a:p>
+        </p:txBody>
+      </p:sp>
+      <p:sp>
+        <p:nvSpPr>
+          <p:cNvPr id="1704068235" name="25p_price"/>
           <p:cNvSpPr txBox="1"/>
           <p:nvPr/>
         </p:nvSpPr>
@@ -6841,9 +6898,9 @@
                 <a:solidFill>
                   <a:schemeClr val="tx1"/>
                 </a:solidFill>
-                <a:latin typeface="Liberation Sans"/>
-                <a:ea typeface="Liberation Sans"/>
-                <a:cs typeface="Liberation Sans"/>
+                <a:latin typeface="Aptos Narrow"/>
+                <a:ea typeface="Aptos Narrow"/>
+                <a:cs typeface="Aptos Narrow"/>
               </a:rPr>
               <a:t>XXX</a:t>
             </a:r>
@@ -6851,15 +6908,15 @@
               <a:solidFill>
                 <a:schemeClr val="tx1"/>
               </a:solidFill>
-              <a:latin typeface="Liberation Sans"/>
-              <a:cs typeface="Liberation Sans"/>
-            </a:endParaRPr>
-          </a:p>
-        </p:txBody>
-      </p:sp>
-      <p:sp>
-        <p:nvSpPr>
-          <p:cNvPr id="137315719" name="min_price"/>
+              <a:latin typeface="Aptos Narrow"/>
+              <a:cs typeface="Aptos Narrow"/>
+            </a:endParaRPr>
+          </a:p>
+        </p:txBody>
+      </p:sp>
+      <p:sp>
+        <p:nvSpPr>
+          <p:cNvPr id="1998764105" name="min_price"/>
           <p:cNvSpPr txBox="1"/>
           <p:nvPr/>
         </p:nvSpPr>
@@ -6886,9 +6943,9 @@
                 <a:solidFill>
                   <a:schemeClr val="tx1"/>
                 </a:solidFill>
-                <a:latin typeface="Liberation Sans"/>
-                <a:ea typeface="Liberation Sans"/>
-                <a:cs typeface="Liberation Sans"/>
+                <a:latin typeface="Aptos Narrow"/>
+                <a:ea typeface="Aptos Narrow"/>
+                <a:cs typeface="Aptos Narrow"/>
               </a:rPr>
               <a:t>XXX</a:t>
             </a:r>
@@ -6896,15 +6953,15 @@
               <a:solidFill>
                 <a:schemeClr val="tx1"/>
               </a:solidFill>
-              <a:latin typeface="Liberation Sans"/>
-              <a:cs typeface="Liberation Sans"/>
-            </a:endParaRPr>
-          </a:p>
-        </p:txBody>
-      </p:sp>
-      <p:sp>
-        <p:nvSpPr>
-          <p:cNvPr id="2004199795" name="std_price"/>
+              <a:latin typeface="Aptos Narrow"/>
+              <a:cs typeface="Aptos Narrow"/>
+            </a:endParaRPr>
+          </a:p>
+        </p:txBody>
+      </p:sp>
+      <p:sp>
+        <p:nvSpPr>
+          <p:cNvPr id="63745802" name="std_price"/>
           <p:cNvSpPr txBox="1"/>
           <p:nvPr/>
         </p:nvSpPr>
@@ -6931,9 +6988,9 @@
                 <a:solidFill>
                   <a:schemeClr val="tx1"/>
                 </a:solidFill>
-                <a:latin typeface="Liberation Sans"/>
-                <a:ea typeface="Liberation Sans"/>
-                <a:cs typeface="Liberation Sans"/>
+                <a:latin typeface="Aptos Narrow"/>
+                <a:ea typeface="Aptos Narrow"/>
+                <a:cs typeface="Aptos Narrow"/>
               </a:rPr>
               <a:t>XX</a:t>
             </a:r>
@@ -6941,15 +6998,15 @@
               <a:solidFill>
                 <a:schemeClr val="tx1"/>
               </a:solidFill>
-              <a:latin typeface="Liberation Sans"/>
-              <a:cs typeface="Liberation Sans"/>
-            </a:endParaRPr>
-          </a:p>
-        </p:txBody>
-      </p:sp>
-      <p:sp>
-        <p:nvSpPr>
-          <p:cNvPr id="1059496387" name="75p_price"/>
+              <a:latin typeface="Aptos Narrow"/>
+              <a:cs typeface="Aptos Narrow"/>
+            </a:endParaRPr>
+          </a:p>
+        </p:txBody>
+      </p:sp>
+      <p:sp>
+        <p:nvSpPr>
+          <p:cNvPr id="1507845737" name="75p_price"/>
           <p:cNvSpPr txBox="1"/>
           <p:nvPr/>
         </p:nvSpPr>
@@ -6976,9 +7033,9 @@
                 <a:solidFill>
                   <a:schemeClr val="tx1"/>
                 </a:solidFill>
-                <a:latin typeface="Liberation Sans"/>
-                <a:ea typeface="Liberation Sans"/>
-                <a:cs typeface="Liberation Sans"/>
+                <a:latin typeface="Aptos Narrow"/>
+                <a:ea typeface="Aptos Narrow"/>
+                <a:cs typeface="Aptos Narrow"/>
               </a:rPr>
               <a:t>XXX</a:t>
             </a:r>
@@ -6986,15 +7043,15 @@
               <a:solidFill>
                 <a:schemeClr val="tx1"/>
               </a:solidFill>
-              <a:latin typeface="Liberation Sans"/>
-              <a:cs typeface="Liberation Sans"/>
+              <a:latin typeface="Aptos Narrow"/>
+              <a:cs typeface="Aptos Narrow"/>
             </a:endParaRPr>
           </a:p>
         </p:txBody>
       </p:sp>
       <p:cxnSp>
         <p:nvCxnSpPr>
-          <p:cNvPr id="1178788056" name=""/>
+          <p:cNvPr id="1821411618" name=""/>
           <p:cNvCxnSpPr/>
           <p:nvPr/>
         </p:nvCxnSpPr>
@@ -7033,7 +7090,7 @@
       </p:cxnSp>
       <p:cxnSp>
         <p:nvCxnSpPr>
-          <p:cNvPr id="847120995" name=""/>
+          <p:cNvPr id="1669566200" name=""/>
           <p:cNvCxnSpPr/>
           <p:nvPr/>
         </p:nvCxnSpPr>
@@ -7072,7 +7129,7 @@
       </p:cxnSp>
       <p:sp>
         <p:nvSpPr>
-          <p:cNvPr id="1449006489" name="current_price"/>
+          <p:cNvPr id="668639529" name="current_price"/>
           <p:cNvSpPr txBox="1"/>
           <p:nvPr/>
         </p:nvSpPr>
@@ -7099,9 +7156,9 @@
                 <a:solidFill>
                   <a:schemeClr val="tx1"/>
                 </a:solidFill>
-                <a:latin typeface="Liberation Sans"/>
-                <a:ea typeface="Liberation Sans"/>
-                <a:cs typeface="Liberation Sans"/>
+                <a:latin typeface="Aptos Narrow"/>
+                <a:ea typeface="Aptos Narrow"/>
+                <a:cs typeface="Aptos Narrow"/>
               </a:rPr>
               <a:t>XXX</a:t>
             </a:r>
@@ -7109,15 +7166,15 @@
               <a:solidFill>
                 <a:schemeClr val="tx1"/>
               </a:solidFill>
-              <a:latin typeface="Liberation Sans"/>
-              <a:cs typeface="Liberation Sans"/>
+              <a:latin typeface="Aptos Narrow"/>
+              <a:cs typeface="Aptos Narrow"/>
             </a:endParaRPr>
           </a:p>
         </p:txBody>
       </p:sp>
       <p:cxnSp>
         <p:nvCxnSpPr>
-          <p:cNvPr id="2097460541" name=""/>
+          <p:cNvPr id="482991369" name=""/>
           <p:cNvCxnSpPr/>
           <p:nvPr/>
         </p:nvCxnSpPr>
@@ -7156,7 +7213,7 @@
       </p:cxnSp>
       <p:sp>
         <p:nvSpPr>
-          <p:cNvPr id="479386539" name=""/>
+          <p:cNvPr id="1766964854" name=""/>
           <p:cNvSpPr txBox="1"/>
           <p:nvPr/>
         </p:nvSpPr>
@@ -7183,9 +7240,9 @@
                 <a:solidFill>
                   <a:schemeClr val="bg1"/>
                 </a:solidFill>
-                <a:latin typeface="Liberation Sans"/>
-                <a:ea typeface="Liberation Sans"/>
-                <a:cs typeface="Liberation Sans"/>
+                <a:latin typeface="Aptos Narrow"/>
+                <a:ea typeface="Aptos Narrow"/>
+                <a:cs typeface="Aptos Narrow"/>
               </a:rPr>
               <a:t>Mean</a:t>
             </a:r>
@@ -7193,15 +7250,15 @@
               <a:solidFill>
                 <a:schemeClr val="bg1"/>
               </a:solidFill>
-              <a:latin typeface="Liberation Sans"/>
-              <a:cs typeface="Liberation Sans"/>
-            </a:endParaRPr>
-          </a:p>
-        </p:txBody>
-      </p:sp>
-      <p:sp>
-        <p:nvSpPr>
-          <p:cNvPr id="1256153236" name=""/>
+              <a:latin typeface="Aptos Narrow"/>
+              <a:cs typeface="Aptos Narrow"/>
+            </a:endParaRPr>
+          </a:p>
+        </p:txBody>
+      </p:sp>
+      <p:sp>
+        <p:nvSpPr>
+          <p:cNvPr id="820026779" name=""/>
           <p:cNvSpPr txBox="1"/>
           <p:nvPr/>
         </p:nvSpPr>
@@ -7228,9 +7285,9 @@
                 <a:solidFill>
                   <a:schemeClr val="bg1"/>
                 </a:solidFill>
-                <a:latin typeface="Liberation Sans"/>
-                <a:ea typeface="Liberation Sans"/>
-                <a:cs typeface="Liberation Sans"/>
+                <a:latin typeface="Aptos Narrow"/>
+                <a:ea typeface="Aptos Narrow"/>
+                <a:cs typeface="Aptos Narrow"/>
               </a:rPr>
               <a:t>Max</a:t>
             </a:r>
@@ -7238,15 +7295,15 @@
               <a:solidFill>
                 <a:schemeClr val="bg1"/>
               </a:solidFill>
-              <a:latin typeface="Liberation Sans"/>
-              <a:cs typeface="Liberation Sans"/>
-            </a:endParaRPr>
-          </a:p>
-        </p:txBody>
-      </p:sp>
-      <p:sp>
-        <p:nvSpPr>
-          <p:cNvPr id="1716858685" name=""/>
+              <a:latin typeface="Aptos Narrow"/>
+              <a:cs typeface="Aptos Narrow"/>
+            </a:endParaRPr>
+          </a:p>
+        </p:txBody>
+      </p:sp>
+      <p:sp>
+        <p:nvSpPr>
+          <p:cNvPr id="1533868838" name=""/>
           <p:cNvSpPr txBox="1"/>
           <p:nvPr/>
         </p:nvSpPr>
@@ -7273,9 +7330,9 @@
                 <a:solidFill>
                   <a:schemeClr val="bg1"/>
                 </a:solidFill>
-                <a:latin typeface="Liberation Sans"/>
-                <a:ea typeface="Liberation Sans"/>
-                <a:cs typeface="Liberation Sans"/>
+                <a:latin typeface="Aptos Narrow"/>
+                <a:ea typeface="Aptos Narrow"/>
+                <a:cs typeface="Aptos Narrow"/>
               </a:rPr>
               <a:t>50th</a:t>
             </a:r>
@@ -7283,15 +7340,15 @@
               <a:solidFill>
                 <a:schemeClr val="bg1"/>
               </a:solidFill>
-              <a:latin typeface="Liberation Sans"/>
-              <a:cs typeface="Liberation Sans"/>
-            </a:endParaRPr>
-          </a:p>
-        </p:txBody>
-      </p:sp>
-      <p:sp>
-        <p:nvSpPr>
-          <p:cNvPr id="1481784956" name=""/>
+              <a:latin typeface="Aptos Narrow"/>
+              <a:cs typeface="Aptos Narrow"/>
+            </a:endParaRPr>
+          </a:p>
+        </p:txBody>
+      </p:sp>
+      <p:sp>
+        <p:nvSpPr>
+          <p:cNvPr id="39125655" name=""/>
           <p:cNvSpPr txBox="1"/>
           <p:nvPr/>
         </p:nvSpPr>
@@ -7318,9 +7375,9 @@
                 <a:solidFill>
                   <a:schemeClr val="bg1"/>
                 </a:solidFill>
-                <a:latin typeface="Liberation Sans"/>
-                <a:ea typeface="Liberation Sans"/>
-                <a:cs typeface="Liberation Sans"/>
+                <a:latin typeface="Aptos Narrow"/>
+                <a:ea typeface="Aptos Narrow"/>
+                <a:cs typeface="Aptos Narrow"/>
               </a:rPr>
               <a:t>25th</a:t>
             </a:r>
@@ -7328,15 +7385,15 @@
               <a:solidFill>
                 <a:schemeClr val="bg1"/>
               </a:solidFill>
-              <a:latin typeface="Liberation Sans"/>
-              <a:cs typeface="Liberation Sans"/>
-            </a:endParaRPr>
-          </a:p>
-        </p:txBody>
-      </p:sp>
-      <p:sp>
-        <p:nvSpPr>
-          <p:cNvPr id="1937444029" name=""/>
+              <a:latin typeface="Aptos Narrow"/>
+              <a:cs typeface="Aptos Narrow"/>
+            </a:endParaRPr>
+          </a:p>
+        </p:txBody>
+      </p:sp>
+      <p:sp>
+        <p:nvSpPr>
+          <p:cNvPr id="1120492519" name=""/>
           <p:cNvSpPr txBox="1"/>
           <p:nvPr/>
         </p:nvSpPr>
@@ -7363,9 +7420,9 @@
                 <a:solidFill>
                   <a:schemeClr val="bg1"/>
                 </a:solidFill>
-                <a:latin typeface="Liberation Sans"/>
-                <a:ea typeface="Liberation Sans"/>
-                <a:cs typeface="Liberation Sans"/>
+                <a:latin typeface="Aptos Narrow"/>
+                <a:ea typeface="Aptos Narrow"/>
+                <a:cs typeface="Aptos Narrow"/>
               </a:rPr>
               <a:t>Min</a:t>
             </a:r>
@@ -7373,15 +7430,15 @@
               <a:solidFill>
                 <a:schemeClr val="bg1"/>
               </a:solidFill>
-              <a:latin typeface="Liberation Sans"/>
-              <a:cs typeface="Liberation Sans"/>
-            </a:endParaRPr>
-          </a:p>
-        </p:txBody>
-      </p:sp>
-      <p:sp>
-        <p:nvSpPr>
-          <p:cNvPr id="177430138" name=""/>
+              <a:latin typeface="Aptos Narrow"/>
+              <a:cs typeface="Aptos Narrow"/>
+            </a:endParaRPr>
+          </a:p>
+        </p:txBody>
+      </p:sp>
+      <p:sp>
+        <p:nvSpPr>
+          <p:cNvPr id="662308237" name=""/>
           <p:cNvSpPr txBox="1"/>
           <p:nvPr/>
         </p:nvSpPr>
@@ -7408,9 +7465,9 @@
                 <a:solidFill>
                   <a:schemeClr val="bg1"/>
                 </a:solidFill>
-                <a:latin typeface="Liberation Sans"/>
-                <a:ea typeface="Liberation Sans"/>
-                <a:cs typeface="Liberation Sans"/>
+                <a:latin typeface="Aptos Narrow"/>
+                <a:ea typeface="Aptos Narrow"/>
+                <a:cs typeface="Aptos Narrow"/>
               </a:rPr>
               <a:t>Std Dev</a:t>
             </a:r>
@@ -7418,15 +7475,15 @@
               <a:solidFill>
                 <a:schemeClr val="bg1"/>
               </a:solidFill>
-              <a:latin typeface="Liberation Sans"/>
-              <a:cs typeface="Liberation Sans"/>
-            </a:endParaRPr>
-          </a:p>
-        </p:txBody>
-      </p:sp>
-      <p:sp>
-        <p:nvSpPr>
-          <p:cNvPr id="1665710341" name=""/>
+              <a:latin typeface="Aptos Narrow"/>
+              <a:cs typeface="Aptos Narrow"/>
+            </a:endParaRPr>
+          </a:p>
+        </p:txBody>
+      </p:sp>
+      <p:sp>
+        <p:nvSpPr>
+          <p:cNvPr id="1562890499" name=""/>
           <p:cNvSpPr txBox="1"/>
           <p:nvPr/>
         </p:nvSpPr>
@@ -7453,9 +7510,9 @@
                 <a:solidFill>
                   <a:schemeClr val="bg1"/>
                 </a:solidFill>
-                <a:latin typeface="Liberation Sans"/>
-                <a:ea typeface="Liberation Sans"/>
-                <a:cs typeface="Liberation Sans"/>
+                <a:latin typeface="Aptos Narrow"/>
+                <a:ea typeface="Aptos Narrow"/>
+                <a:cs typeface="Aptos Narrow"/>
               </a:rPr>
               <a:t>75th</a:t>
             </a:r>
@@ -7463,15 +7520,15 @@
               <a:solidFill>
                 <a:schemeClr val="bg1"/>
               </a:solidFill>
-              <a:latin typeface="Liberation Sans"/>
-              <a:cs typeface="Liberation Sans"/>
+              <a:latin typeface="Aptos Narrow"/>
+              <a:cs typeface="Aptos Narrow"/>
             </a:endParaRPr>
           </a:p>
         </p:txBody>
       </p:sp>
       <p:cxnSp>
         <p:nvCxnSpPr>
-          <p:cNvPr id="1287250037" name=""/>
+          <p:cNvPr id="1754893700" name=""/>
           <p:cNvCxnSpPr/>
           <p:nvPr/>
         </p:nvCxnSpPr>
@@ -7510,7 +7567,7 @@
       </p:cxnSp>
       <p:cxnSp>
         <p:nvCxnSpPr>
-          <p:cNvPr id="82423079" name=""/>
+          <p:cNvPr id="1179401546" name=""/>
           <p:cNvCxnSpPr/>
           <p:nvPr/>
         </p:nvCxnSpPr>
@@ -7549,7 +7606,7 @@
       </p:cxnSp>
       <p:cxnSp>
         <p:nvCxnSpPr>
-          <p:cNvPr id="1527623632" name=""/>
+          <p:cNvPr id="1412505054" name=""/>
           <p:cNvCxnSpPr/>
           <p:nvPr/>
         </p:nvCxnSpPr>
@@ -7588,7 +7645,7 @@
       </p:cxnSp>
       <p:cxnSp>
         <p:nvCxnSpPr>
-          <p:cNvPr id="1379605977" name=""/>
+          <p:cNvPr id="424243116" name=""/>
           <p:cNvCxnSpPr/>
           <p:nvPr/>
         </p:nvCxnSpPr>
@@ -7627,7 +7684,7 @@
       </p:cxnSp>
       <p:cxnSp>
         <p:nvCxnSpPr>
-          <p:cNvPr id="1441068192" name=""/>
+          <p:cNvPr id="1733251558" name=""/>
           <p:cNvCxnSpPr/>
           <p:nvPr/>
         </p:nvCxnSpPr>
@@ -7666,7 +7723,7 @@
       </p:cxnSp>
       <p:cxnSp>
         <p:nvCxnSpPr>
-          <p:cNvPr id="1740680581" name=""/>
+          <p:cNvPr id="1077223833" name=""/>
           <p:cNvCxnSpPr/>
           <p:nvPr/>
         </p:nvCxnSpPr>
@@ -7705,7 +7762,7 @@
       </p:cxnSp>
       <p:sp>
         <p:nvSpPr>
-          <p:cNvPr id="1493070000" name=""/>
+          <p:cNvPr id="1949939337" name=""/>
           <p:cNvSpPr txBox="1"/>
           <p:nvPr/>
         </p:nvSpPr>
@@ -7732,9 +7789,9 @@
                 <a:solidFill>
                   <a:schemeClr val="bg1"/>
                 </a:solidFill>
-                <a:latin typeface="Liberation Sans"/>
-                <a:ea typeface="Liberation Sans"/>
-                <a:cs typeface="Liberation Sans"/>
+                <a:latin typeface="Aptos Narrow"/>
+                <a:ea typeface="Aptos Narrow"/>
+                <a:cs typeface="Aptos Narrow"/>
               </a:rPr>
               <a:t>Current</a:t>
             </a:r>
@@ -7742,15 +7799,15 @@
               <a:solidFill>
                 <a:schemeClr val="bg1"/>
               </a:solidFill>
-              <a:latin typeface="Liberation Sans"/>
-              <a:cs typeface="Liberation Sans"/>
+              <a:latin typeface="Aptos Narrow"/>
+              <a:cs typeface="Aptos Narrow"/>
             </a:endParaRPr>
           </a:p>
         </p:txBody>
       </p:sp>
       <p:cxnSp>
         <p:nvCxnSpPr>
-          <p:cNvPr id="1502187079" name=""/>
+          <p:cNvPr id="1379343377" name=""/>
           <p:cNvCxnSpPr/>
           <p:nvPr/>
         </p:nvCxnSpPr>
@@ -7789,7 +7846,7 @@
       </p:cxnSp>
       <p:cxnSp>
         <p:nvCxnSpPr>
-          <p:cNvPr id="425828692" name=""/>
+          <p:cNvPr id="1651033834" name=""/>
           <p:cNvCxnSpPr/>
           <p:nvPr/>
         </p:nvCxnSpPr>
@@ -7828,7 +7885,7 @@
       </p:cxnSp>
       <p:sp>
         <p:nvSpPr>
-          <p:cNvPr id="1601779174" name="analyst_expectation"/>
+          <p:cNvPr id="40199576" name="analyst_expectation"/>
           <p:cNvSpPr txBox="1"/>
           <p:nvPr/>
         </p:nvSpPr>
@@ -7855,9 +7912,9 @@
                 <a:solidFill>
                   <a:schemeClr val="accent2"/>
                 </a:solidFill>
-                <a:latin typeface="Liberation Sans"/>
-                <a:ea typeface="Liberation Sans"/>
-                <a:cs typeface="Liberation Sans"/>
+                <a:latin typeface="Aptos Narrow"/>
+                <a:ea typeface="Aptos Narrow"/>
+                <a:cs typeface="Aptos Narrow"/>
               </a:rPr>
               <a:t>XXX</a:t>
             </a:r>
@@ -7865,15 +7922,15 @@
               <a:solidFill>
                 <a:schemeClr val="accent2"/>
               </a:solidFill>
-              <a:latin typeface="Liberation Sans"/>
-              <a:cs typeface="Liberation Sans"/>
-            </a:endParaRPr>
-          </a:p>
-        </p:txBody>
-      </p:sp>
-      <p:sp>
-        <p:nvSpPr>
-          <p:cNvPr id="488895543" name=""/>
+              <a:latin typeface="Aptos Narrow"/>
+              <a:cs typeface="Aptos Narrow"/>
+            </a:endParaRPr>
+          </a:p>
+        </p:txBody>
+      </p:sp>
+      <p:sp>
+        <p:nvSpPr>
+          <p:cNvPr id="2026957689" name=""/>
           <p:cNvSpPr txBox="1"/>
           <p:nvPr/>
         </p:nvSpPr>
@@ -7900,9 +7957,9 @@
                 <a:solidFill>
                   <a:schemeClr val="bg1"/>
                 </a:solidFill>
-                <a:latin typeface="Liberation Sans"/>
-                <a:ea typeface="Liberation Sans"/>
-                <a:cs typeface="Liberation Sans"/>
+                <a:latin typeface="Aptos Narrow"/>
+                <a:ea typeface="Aptos Narrow"/>
+                <a:cs typeface="Aptos Narrow"/>
               </a:rPr>
               <a:t>Expectation</a:t>
             </a:r>
@@ -7910,15 +7967,15 @@
               <a:solidFill>
                 <a:schemeClr val="bg1"/>
               </a:solidFill>
-              <a:latin typeface="Liberation Sans"/>
-              <a:cs typeface="Liberation Sans"/>
+              <a:latin typeface="Aptos Narrow"/>
+              <a:cs typeface="Aptos Narrow"/>
             </a:endParaRPr>
           </a:p>
         </p:txBody>
       </p:sp>
       <p:pic>
         <p:nvPicPr>
-          <p:cNvPr id="1234850841" name="price_chart" descr="image.png"/>
+          <p:cNvPr id="1403495795" name="price_chart" descr="image.png"/>
           <p:cNvPicPr>
             <a:picLocks noChangeAspect="1"/>
           </p:cNvPicPr>
@@ -7940,7 +7997,7 @@
       </p:pic>
       <p:sp>
         <p:nvSpPr>
-          <p:cNvPr id="1215015060" name=""/>
+          <p:cNvPr id="1555835639" name=""/>
           <p:cNvSpPr/>
           <p:nvPr/>
         </p:nvSpPr>
@@ -7995,15 +8052,15 @@
               <a:defRPr/>
             </a:pPr>
             <a:endParaRPr>
-              <a:latin typeface="Liberation Sans"/>
-              <a:cs typeface="Liberation Sans"/>
-            </a:endParaRPr>
-          </a:p>
-        </p:txBody>
-      </p:sp>
-      <p:sp>
-        <p:nvSpPr>
-          <p:cNvPr id="1722838419" name=""/>
+              <a:latin typeface="Aptos Narrow"/>
+              <a:cs typeface="Aptos Narrow"/>
+            </a:endParaRPr>
+          </a:p>
+        </p:txBody>
+      </p:sp>
+      <p:sp>
+        <p:nvSpPr>
+          <p:cNvPr id="744645555" name=""/>
           <p:cNvSpPr/>
           <p:nvPr/>
         </p:nvSpPr>
@@ -8058,15 +8115,15 @@
               <a:defRPr/>
             </a:pPr>
             <a:endParaRPr>
-              <a:latin typeface="Liberation Sans"/>
-              <a:cs typeface="Liberation Sans"/>
-            </a:endParaRPr>
-          </a:p>
-        </p:txBody>
-      </p:sp>
-      <p:sp>
-        <p:nvSpPr>
-          <p:cNvPr id="1038898655" name=""/>
+              <a:latin typeface="Aptos Narrow"/>
+              <a:cs typeface="Aptos Narrow"/>
+            </a:endParaRPr>
+          </a:p>
+        </p:txBody>
+      </p:sp>
+      <p:sp>
+        <p:nvSpPr>
+          <p:cNvPr id="1662835774" name=""/>
           <p:cNvSpPr/>
           <p:nvPr/>
         </p:nvSpPr>
@@ -8121,15 +8178,15 @@
               <a:defRPr/>
             </a:pPr>
             <a:endParaRPr>
-              <a:latin typeface="Liberation Sans"/>
-              <a:cs typeface="Liberation Sans"/>
+              <a:latin typeface="Aptos Narrow"/>
+              <a:cs typeface="Aptos Narrow"/>
             </a:endParaRPr>
           </a:p>
         </p:txBody>
       </p:sp>
       <p:cxnSp>
         <p:nvCxnSpPr>
-          <p:cNvPr id="1482358579" name=""/>
+          <p:cNvPr id="259273861" name=""/>
           <p:cNvCxnSpPr/>
           <p:nvPr/>
         </p:nvCxnSpPr>
@@ -8168,7 +8225,7 @@
       </p:cxnSp>
       <p:cxnSp>
         <p:nvCxnSpPr>
-          <p:cNvPr id="667319399" name=""/>
+          <p:cNvPr id="455745283" name=""/>
           <p:cNvCxnSpPr/>
           <p:nvPr/>
         </p:nvCxnSpPr>
@@ -8240,7 +8297,7 @@
       </p:grpSpPr>
       <p:sp>
         <p:nvSpPr>
-          <p:cNvPr id="930322600" name=""/>
+          <p:cNvPr id="552081189" name=""/>
           <p:cNvSpPr/>
           <p:nvPr/>
         </p:nvSpPr>
@@ -8298,15 +8355,15 @@
               <a:defRPr/>
             </a:pPr>
             <a:endParaRPr>
-              <a:latin typeface="Liberation Sans"/>
-              <a:cs typeface="Liberation Sans"/>
-            </a:endParaRPr>
-          </a:p>
-        </p:txBody>
-      </p:sp>
-      <p:sp>
-        <p:nvSpPr>
-          <p:cNvPr id="276116255" name="Title 1"/>
+              <a:latin typeface="Aptos Narrow"/>
+              <a:cs typeface="Aptos Narrow"/>
+            </a:endParaRPr>
+          </a:p>
+        </p:txBody>
+      </p:sp>
+      <p:sp>
+        <p:nvSpPr>
+          <p:cNvPr id="1215562909" name="Title 1"/>
           <p:cNvSpPr>
             <a:spLocks noGrp="1"/>
           </p:cNvSpPr>
@@ -8327,9 +8384,9 @@
                 <a:solidFill>
                   <a:schemeClr val="accent1"/>
                 </a:solidFill>
-                <a:latin typeface="Arial"/>
-                <a:ea typeface="Arial"/>
-                <a:cs typeface="Arial"/>
+                <a:latin typeface="Aptos Narrow"/>
+                <a:ea typeface="Aptos Narrow"/>
+                <a:cs typeface="Aptos Narrow"/>
               </a:rPr>
               <a:t>{company_name}</a:t>
             </a:r>
@@ -8338,9 +8395,9 @@
                 <a:solidFill>
                   <a:schemeClr val="accent1"/>
                 </a:solidFill>
-                <a:latin typeface="Arial"/>
-                <a:ea typeface="Arial"/>
-                <a:cs typeface="Arial"/>
+                <a:latin typeface="Aptos Narrow"/>
+                <a:ea typeface="Aptos Narrow"/>
+                <a:cs typeface="Aptos Narrow"/>
               </a:rPr>
               <a:t> </a:t>
             </a:r>
@@ -8349,6 +8406,9 @@
                 <a:solidFill>
                   <a:schemeClr val="tx1"/>
                 </a:solidFill>
+                <a:latin typeface="Aptos Narrow"/>
+                <a:ea typeface="Aptos Narrow"/>
+                <a:cs typeface="Aptos Narrow"/>
               </a:rPr>
               <a:t>| Selected historical financial highlights</a:t>
             </a:r>
@@ -8356,13 +8416,15 @@
               <a:solidFill>
                 <a:schemeClr val="tx1"/>
               </a:solidFill>
-            </a:endParaRPr>
-          </a:p>
-        </p:txBody>
-      </p:sp>
-      <p:sp>
-        <p:nvSpPr>
-          <p:cNvPr id="1278217641" name="Footer Placeholder 4"/>
+              <a:latin typeface="Aptos Narrow"/>
+              <a:cs typeface="Aptos Narrow"/>
+            </a:endParaRPr>
+          </a:p>
+        </p:txBody>
+      </p:sp>
+      <p:sp>
+        <p:nvSpPr>
+          <p:cNvPr id="606589058" name="Footer Placeholder 4"/>
           <p:cNvSpPr>
             <a:spLocks noGrp="1"/>
           </p:cNvSpPr>
@@ -8383,30 +8445,48 @@
               <a:defRPr/>
             </a:pPr>
             <a:r>
-              <a:rPr lang="it-IT"/>
+              <a:rPr lang="it-IT">
+                <a:latin typeface="Aptos Narrow"/>
+                <a:ea typeface="Aptos Narrow"/>
+                <a:cs typeface="Aptos Narrow"/>
+              </a:rPr>
               <a:t>Note: All figures expressed in USD</a:t>
             </a:r>
-            <a:endParaRPr/>
+            <a:endParaRPr>
+              <a:latin typeface="Aptos Narrow"/>
+              <a:cs typeface="Aptos Narrow"/>
+            </a:endParaRPr>
           </a:p>
           <a:p>
             <a:pPr>
               <a:defRPr/>
             </a:pPr>
             <a:r>
-              <a:rPr/>
+              <a:rPr>
+                <a:latin typeface="Aptos Narrow"/>
+                <a:ea typeface="Aptos Narrow"/>
+                <a:cs typeface="Aptos Narrow"/>
+              </a:rPr>
               <a:t>Source</a:t>
             </a:r>
             <a:r>
-              <a:rPr lang="it-IT"/>
+              <a:rPr lang="it-IT">
+                <a:latin typeface="Aptos Narrow"/>
+                <a:ea typeface="Aptos Narrow"/>
+                <a:cs typeface="Aptos Narrow"/>
+              </a:rPr>
               <a:t>: Yahoo Finance, Mistral</a:t>
             </a:r>
-            <a:endParaRPr lang="it-IT"/>
-          </a:p>
-        </p:txBody>
-      </p:sp>
-      <p:sp>
-        <p:nvSpPr>
-          <p:cNvPr id="484035462" name="Slide Number Placeholder 5"/>
+            <a:endParaRPr>
+              <a:latin typeface="Aptos Narrow"/>
+              <a:cs typeface="Aptos Narrow"/>
+            </a:endParaRPr>
+          </a:p>
+        </p:txBody>
+      </p:sp>
+      <p:sp>
+        <p:nvSpPr>
+          <p:cNvPr id="1297523459" name="Slide Number Placeholder 5"/>
           <p:cNvSpPr>
             <a:spLocks noGrp="1"/>
           </p:cNvSpPr>
@@ -8427,16 +8507,23 @@
               <a:defRPr/>
             </a:pPr>
             <a:fld id="{82BE44E8-35EF-95C4-D2C3-32175C87F31F}" type="slidenum">
-              <a:rPr lang="en-US"/>
+              <a:rPr lang="en-US">
+                <a:latin typeface="Aptos Narrow"/>
+                <a:ea typeface="Aptos Narrow"/>
+                <a:cs typeface="Aptos Narrow"/>
+              </a:rPr>
               <a:t>3</a:t>
             </a:fld>
-            <a:endParaRPr lang="en-US"/>
+            <a:endParaRPr>
+              <a:latin typeface="Aptos Narrow"/>
+              <a:cs typeface="Aptos Narrow"/>
+            </a:endParaRPr>
           </a:p>
         </p:txBody>
       </p:sp>
       <p:cxnSp>
         <p:nvCxnSpPr>
-          <p:cNvPr id="1587402278" name=""/>
+          <p:cNvPr id="1243110188" name=""/>
           <p:cNvCxnSpPr/>
           <p:nvPr/>
         </p:nvCxnSpPr>
@@ -8475,7 +8562,7 @@
       </p:cxnSp>
       <p:cxnSp>
         <p:nvCxnSpPr>
-          <p:cNvPr id="1146844033" name=""/>
+          <p:cNvPr id="902775469" name=""/>
           <p:cNvCxnSpPr/>
           <p:nvPr/>
         </p:nvCxnSpPr>
@@ -8514,7 +8601,7 @@
       </p:cxnSp>
       <p:sp>
         <p:nvSpPr>
-          <p:cNvPr id="1030490438" name=""/>
+          <p:cNvPr id="298396434" name=""/>
           <p:cNvSpPr txBox="1"/>
           <p:nvPr/>
         </p:nvSpPr>
@@ -8541,9 +8628,9 @@
                 <a:solidFill>
                   <a:schemeClr val="tx1"/>
                 </a:solidFill>
-                <a:latin typeface="Liberation Sans"/>
-                <a:ea typeface="Liberation Sans"/>
-                <a:cs typeface="Liberation Sans"/>
+                <a:latin typeface="Aptos Narrow"/>
+                <a:ea typeface="Aptos Narrow"/>
+                <a:cs typeface="Aptos Narrow"/>
               </a:rPr>
               <a:t>Last 3 years selected financial highlights</a:t>
             </a:r>
@@ -8551,15 +8638,15 @@
               <a:solidFill>
                 <a:schemeClr val="tx1"/>
               </a:solidFill>
-              <a:latin typeface="Liberation Sans"/>
-              <a:cs typeface="Liberation Sans"/>
-            </a:endParaRPr>
-          </a:p>
-        </p:txBody>
-      </p:sp>
-      <p:sp>
-        <p:nvSpPr>
-          <p:cNvPr id="790591218" name=""/>
+              <a:latin typeface="Aptos Narrow"/>
+              <a:cs typeface="Aptos Narrow"/>
+            </a:endParaRPr>
+          </a:p>
+        </p:txBody>
+      </p:sp>
+      <p:sp>
+        <p:nvSpPr>
+          <p:cNvPr id="910370791" name=""/>
           <p:cNvSpPr txBox="1"/>
           <p:nvPr/>
         </p:nvSpPr>
@@ -8586,9 +8673,9 @@
                 <a:solidFill>
                   <a:schemeClr val="tx1"/>
                 </a:solidFill>
-                <a:latin typeface="Liberation Sans"/>
-                <a:ea typeface="Liberation Sans"/>
-                <a:cs typeface="Liberation Sans"/>
+                <a:latin typeface="Aptos Narrow"/>
+                <a:ea typeface="Aptos Narrow"/>
+                <a:cs typeface="Aptos Narrow"/>
               </a:rPr>
               <a:t>Key facts</a:t>
             </a:r>
@@ -8596,15 +8683,15 @@
               <a:solidFill>
                 <a:schemeClr val="tx1"/>
               </a:solidFill>
-              <a:latin typeface="Liberation Sans"/>
-              <a:cs typeface="Liberation Sans"/>
-            </a:endParaRPr>
-          </a:p>
-        </p:txBody>
-      </p:sp>
-      <p:sp>
-        <p:nvSpPr>
-          <p:cNvPr id="1361278580" name=""/>
+              <a:latin typeface="Aptos Narrow"/>
+              <a:cs typeface="Aptos Narrow"/>
+            </a:endParaRPr>
+          </a:p>
+        </p:txBody>
+      </p:sp>
+      <p:sp>
+        <p:nvSpPr>
+          <p:cNvPr id="574208032" name=""/>
           <p:cNvSpPr/>
           <p:nvPr/>
         </p:nvSpPr>
@@ -8664,15 +8751,15 @@
               <a:solidFill>
                 <a:schemeClr val="bg1"/>
               </a:solidFill>
-              <a:latin typeface="Liberation Sans"/>
-              <a:cs typeface="Liberation Sans"/>
-            </a:endParaRPr>
-          </a:p>
-        </p:txBody>
-      </p:sp>
-      <p:sp>
-        <p:nvSpPr>
-          <p:cNvPr id="1617131712" name="year_3"/>
+              <a:latin typeface="Aptos Narrow"/>
+              <a:cs typeface="Aptos Narrow"/>
+            </a:endParaRPr>
+          </a:p>
+        </p:txBody>
+      </p:sp>
+      <p:sp>
+        <p:nvSpPr>
+          <p:cNvPr id="139788643" name="year_3"/>
           <p:cNvSpPr txBox="1"/>
           <p:nvPr/>
         </p:nvSpPr>
@@ -8699,9 +8786,9 @@
                 <a:solidFill>
                   <a:schemeClr val="tx1"/>
                 </a:solidFill>
-                <a:latin typeface="Liberation Sans"/>
-                <a:ea typeface="Liberation Sans"/>
-                <a:cs typeface="Liberation Sans"/>
+                <a:latin typeface="Aptos Narrow"/>
+                <a:ea typeface="Aptos Narrow"/>
+                <a:cs typeface="Aptos Narrow"/>
               </a:rPr>
               <a:t>20XX</a:t>
             </a:r>
@@ -8709,15 +8796,15 @@
               <a:solidFill>
                 <a:schemeClr val="tx1"/>
               </a:solidFill>
-              <a:latin typeface="Liberation Sans"/>
-              <a:cs typeface="Liberation Sans"/>
-            </a:endParaRPr>
-          </a:p>
-        </p:txBody>
-      </p:sp>
-      <p:sp>
-        <p:nvSpPr>
-          <p:cNvPr id="1575804748" name="year_2"/>
+              <a:latin typeface="Aptos Narrow"/>
+              <a:cs typeface="Aptos Narrow"/>
+            </a:endParaRPr>
+          </a:p>
+        </p:txBody>
+      </p:sp>
+      <p:sp>
+        <p:nvSpPr>
+          <p:cNvPr id="888019242" name="year_2"/>
           <p:cNvSpPr txBox="1"/>
           <p:nvPr/>
         </p:nvSpPr>
@@ -8744,9 +8831,9 @@
                 <a:solidFill>
                   <a:schemeClr val="tx1"/>
                 </a:solidFill>
-                <a:latin typeface="Liberation Sans"/>
-                <a:ea typeface="Liberation Sans"/>
-                <a:cs typeface="Liberation Sans"/>
+                <a:latin typeface="Aptos Narrow"/>
+                <a:ea typeface="Aptos Narrow"/>
+                <a:cs typeface="Aptos Narrow"/>
               </a:rPr>
               <a:t>20XX</a:t>
             </a:r>
@@ -8754,15 +8841,15 @@
               <a:solidFill>
                 <a:schemeClr val="tx1"/>
               </a:solidFill>
-              <a:latin typeface="Liberation Sans"/>
-              <a:cs typeface="Liberation Sans"/>
-            </a:endParaRPr>
-          </a:p>
-        </p:txBody>
-      </p:sp>
-      <p:sp>
-        <p:nvSpPr>
-          <p:cNvPr id="1539003775" name="year_1"/>
+              <a:latin typeface="Aptos Narrow"/>
+              <a:cs typeface="Aptos Narrow"/>
+            </a:endParaRPr>
+          </a:p>
+        </p:txBody>
+      </p:sp>
+      <p:sp>
+        <p:nvSpPr>
+          <p:cNvPr id="666675202" name="year_1"/>
           <p:cNvSpPr txBox="1"/>
           <p:nvPr/>
         </p:nvSpPr>
@@ -8789,9 +8876,9 @@
                 <a:solidFill>
                   <a:schemeClr val="tx1"/>
                 </a:solidFill>
-                <a:latin typeface="Liberation Sans"/>
-                <a:ea typeface="Liberation Sans"/>
-                <a:cs typeface="Liberation Sans"/>
+                <a:latin typeface="Aptos Narrow"/>
+                <a:ea typeface="Aptos Narrow"/>
+                <a:cs typeface="Aptos Narrow"/>
               </a:rPr>
               <a:t>20XX</a:t>
             </a:r>
@@ -8799,15 +8886,15 @@
               <a:solidFill>
                 <a:schemeClr val="tx1"/>
               </a:solidFill>
-              <a:latin typeface="Liberation Sans"/>
-              <a:cs typeface="Liberation Sans"/>
-            </a:endParaRPr>
-          </a:p>
-        </p:txBody>
-      </p:sp>
-      <p:sp>
-        <p:nvSpPr>
-          <p:cNvPr id="318891991" name="name"/>
+              <a:latin typeface="Aptos Narrow"/>
+              <a:cs typeface="Aptos Narrow"/>
+            </a:endParaRPr>
+          </a:p>
+        </p:txBody>
+      </p:sp>
+      <p:sp>
+        <p:nvSpPr>
+          <p:cNvPr id="1713036480" name="name"/>
           <p:cNvSpPr txBox="1"/>
           <p:nvPr/>
         </p:nvSpPr>
@@ -8834,9 +8921,9 @@
                 <a:solidFill>
                   <a:schemeClr val="tx1"/>
                 </a:solidFill>
-                <a:latin typeface="Liberation Sans"/>
-                <a:ea typeface="Liberation Sans"/>
-                <a:cs typeface="Liberation Sans"/>
+                <a:latin typeface="Aptos Narrow"/>
+                <a:ea typeface="Aptos Narrow"/>
+                <a:cs typeface="Aptos Narrow"/>
               </a:rPr>
               <a:t>Key insight</a:t>
             </a:r>
@@ -8844,15 +8931,15 @@
               <a:solidFill>
                 <a:schemeClr val="tx1"/>
               </a:solidFill>
-              <a:latin typeface="Liberation Sans"/>
-              <a:cs typeface="Liberation Sans"/>
-            </a:endParaRPr>
-          </a:p>
-        </p:txBody>
-      </p:sp>
-      <p:sp>
-        <p:nvSpPr>
-          <p:cNvPr id="831194222" name="name"/>
+              <a:latin typeface="Aptos Narrow"/>
+              <a:cs typeface="Aptos Narrow"/>
+            </a:endParaRPr>
+          </a:p>
+        </p:txBody>
+      </p:sp>
+      <p:sp>
+        <p:nvSpPr>
+          <p:cNvPr id="907310921" name="name"/>
           <p:cNvSpPr txBox="1"/>
           <p:nvPr/>
         </p:nvSpPr>
@@ -8879,9 +8966,9 @@
                 <a:solidFill>
                   <a:schemeClr val="tx1"/>
                 </a:solidFill>
-                <a:latin typeface="Liberation Sans"/>
-                <a:ea typeface="Liberation Sans"/>
-                <a:cs typeface="Liberation Sans"/>
+                <a:latin typeface="Aptos Narrow"/>
+                <a:ea typeface="Aptos Narrow"/>
+                <a:cs typeface="Aptos Narrow"/>
               </a:rPr>
               <a:t>Item</a:t>
             </a:r>
@@ -8889,15 +8976,15 @@
               <a:solidFill>
                 <a:schemeClr val="tx1"/>
               </a:solidFill>
-              <a:latin typeface="Liberation Sans"/>
-              <a:cs typeface="Liberation Sans"/>
-            </a:endParaRPr>
-          </a:p>
-        </p:txBody>
-      </p:sp>
-      <p:sp>
-        <p:nvSpPr>
-          <p:cNvPr id="754968806" name=""/>
+              <a:latin typeface="Aptos Narrow"/>
+              <a:cs typeface="Aptos Narrow"/>
+            </a:endParaRPr>
+          </a:p>
+        </p:txBody>
+      </p:sp>
+      <p:sp>
+        <p:nvSpPr>
+          <p:cNvPr id="1988098932" name=""/>
           <p:cNvSpPr/>
           <p:nvPr/>
         </p:nvSpPr>
@@ -8954,15 +9041,15 @@
               <a:defRPr/>
             </a:pPr>
             <a:endParaRPr>
-              <a:latin typeface="Liberation Sans"/>
-              <a:cs typeface="Liberation Sans"/>
-            </a:endParaRPr>
-          </a:p>
-        </p:txBody>
-      </p:sp>
-      <p:sp>
-        <p:nvSpPr>
-          <p:cNvPr id="989363525" name="comment_1"/>
+              <a:latin typeface="Aptos Narrow"/>
+              <a:cs typeface="Aptos Narrow"/>
+            </a:endParaRPr>
+          </a:p>
+        </p:txBody>
+      </p:sp>
+      <p:sp>
+        <p:nvSpPr>
+          <p:cNvPr id="1497498320" name="comment_1"/>
           <p:cNvSpPr/>
           <p:nvPr/>
         </p:nvSpPr>
@@ -9022,9 +9109,9 @@
                 <a:solidFill>
                   <a:schemeClr val="tx1"/>
                 </a:solidFill>
-                <a:latin typeface="Liberation Sans"/>
-                <a:ea typeface="Liberation Sans"/>
-                <a:cs typeface="Liberation Sans"/>
+                <a:latin typeface="Aptos Narrow"/>
+                <a:ea typeface="Aptos Narrow"/>
+                <a:cs typeface="Aptos Narrow"/>
               </a:rPr>
               <a:t>Lorem ipsum dolor sit amet, consectetur adipiscing elit. Maecenas sed turpis ante.</a:t>
             </a:r>
@@ -9032,15 +9119,15 @@
               <a:solidFill>
                 <a:schemeClr val="tx1"/>
               </a:solidFill>
-              <a:latin typeface="Liberation Sans"/>
-              <a:cs typeface="Liberation Sans"/>
-            </a:endParaRPr>
-          </a:p>
-        </p:txBody>
-      </p:sp>
-      <p:sp>
-        <p:nvSpPr>
-          <p:cNvPr id="1601369363" name=""/>
+              <a:latin typeface="Aptos Narrow"/>
+              <a:cs typeface="Aptos Narrow"/>
+            </a:endParaRPr>
+          </a:p>
+        </p:txBody>
+      </p:sp>
+      <p:sp>
+        <p:nvSpPr>
+          <p:cNvPr id="802574729" name=""/>
           <p:cNvSpPr/>
           <p:nvPr/>
         </p:nvSpPr>
@@ -9097,15 +9184,15 @@
               <a:defRPr/>
             </a:pPr>
             <a:endParaRPr>
-              <a:latin typeface="Liberation Sans"/>
-              <a:cs typeface="Liberation Sans"/>
-            </a:endParaRPr>
-          </a:p>
-        </p:txBody>
-      </p:sp>
-      <p:sp>
-        <p:nvSpPr>
-          <p:cNvPr id="1133331760" name="comment_2"/>
+              <a:latin typeface="Aptos Narrow"/>
+              <a:cs typeface="Aptos Narrow"/>
+            </a:endParaRPr>
+          </a:p>
+        </p:txBody>
+      </p:sp>
+      <p:sp>
+        <p:nvSpPr>
+          <p:cNvPr id="347230070" name="comment_2"/>
           <p:cNvSpPr/>
           <p:nvPr/>
         </p:nvSpPr>
@@ -9165,9 +9252,9 @@
                 <a:solidFill>
                   <a:schemeClr val="tx1"/>
                 </a:solidFill>
-                <a:latin typeface="Liberation Sans"/>
-                <a:ea typeface="Liberation Sans"/>
-                <a:cs typeface="Liberation Sans"/>
+                <a:latin typeface="Aptos Narrow"/>
+                <a:ea typeface="Aptos Narrow"/>
+                <a:cs typeface="Aptos Narrow"/>
               </a:rPr>
               <a:t>Lorem ipsum dolor sit amet, consectetur adipiscing elit. Maecenas sed turpis ante.</a:t>
             </a:r>
@@ -9175,15 +9262,15 @@
               <a:solidFill>
                 <a:schemeClr val="tx1"/>
               </a:solidFill>
-              <a:latin typeface="Liberation Sans"/>
-              <a:cs typeface="Liberation Sans"/>
-            </a:endParaRPr>
-          </a:p>
-        </p:txBody>
-      </p:sp>
-      <p:sp>
-        <p:nvSpPr>
-          <p:cNvPr id="65443009" name=""/>
+              <a:latin typeface="Aptos Narrow"/>
+              <a:cs typeface="Aptos Narrow"/>
+            </a:endParaRPr>
+          </a:p>
+        </p:txBody>
+      </p:sp>
+      <p:sp>
+        <p:nvSpPr>
+          <p:cNvPr id="213758942" name=""/>
           <p:cNvSpPr/>
           <p:nvPr/>
         </p:nvSpPr>
@@ -9240,15 +9327,15 @@
               <a:defRPr/>
             </a:pPr>
             <a:endParaRPr>
-              <a:latin typeface="Liberation Sans"/>
-              <a:cs typeface="Liberation Sans"/>
-            </a:endParaRPr>
-          </a:p>
-        </p:txBody>
-      </p:sp>
-      <p:sp>
-        <p:nvSpPr>
-          <p:cNvPr id="897359343" name="comment_3"/>
+              <a:latin typeface="Aptos Narrow"/>
+              <a:cs typeface="Aptos Narrow"/>
+            </a:endParaRPr>
+          </a:p>
+        </p:txBody>
+      </p:sp>
+      <p:sp>
+        <p:nvSpPr>
+          <p:cNvPr id="1376940115" name="comment_3"/>
           <p:cNvSpPr/>
           <p:nvPr/>
         </p:nvSpPr>
@@ -9308,9 +9395,9 @@
                 <a:solidFill>
                   <a:schemeClr val="tx1"/>
                 </a:solidFill>
-                <a:latin typeface="Liberation Sans"/>
-                <a:ea typeface="Liberation Sans"/>
-                <a:cs typeface="Liberation Sans"/>
+                <a:latin typeface="Aptos Narrow"/>
+                <a:ea typeface="Aptos Narrow"/>
+                <a:cs typeface="Aptos Narrow"/>
               </a:rPr>
               <a:t>Lorem ipsum dolor sit amet, consectetur adipiscing elit. Maecenas sed turpis ante.</a:t>
             </a:r>
@@ -9318,15 +9405,15 @@
               <a:solidFill>
                 <a:schemeClr val="tx1"/>
               </a:solidFill>
-              <a:latin typeface="Liberation Sans"/>
-              <a:cs typeface="Liberation Sans"/>
-            </a:endParaRPr>
-          </a:p>
-        </p:txBody>
-      </p:sp>
-      <p:sp>
-        <p:nvSpPr>
-          <p:cNvPr id="1832480215" name="revenue_3"/>
+              <a:latin typeface="Aptos Narrow"/>
+              <a:cs typeface="Aptos Narrow"/>
+            </a:endParaRPr>
+          </a:p>
+        </p:txBody>
+      </p:sp>
+      <p:sp>
+        <p:nvSpPr>
+          <p:cNvPr id="778265145" name="revenue_3"/>
           <p:cNvSpPr txBox="1"/>
           <p:nvPr/>
         </p:nvSpPr>
@@ -9353,9 +9440,9 @@
                 <a:solidFill>
                   <a:schemeClr val="tx1"/>
                 </a:solidFill>
-                <a:latin typeface="Liberation Sans"/>
-                <a:ea typeface="Liberation Sans"/>
-                <a:cs typeface="Liberation Sans"/>
+                <a:latin typeface="Aptos Narrow"/>
+                <a:ea typeface="Aptos Narrow"/>
+                <a:cs typeface="Aptos Narrow"/>
               </a:rPr>
               <a:t>XX.XB</a:t>
             </a:r>
@@ -9363,15 +9450,15 @@
               <a:solidFill>
                 <a:schemeClr val="tx1"/>
               </a:solidFill>
-              <a:latin typeface="Liberation Sans"/>
-              <a:cs typeface="Liberation Sans"/>
-            </a:endParaRPr>
-          </a:p>
-        </p:txBody>
-      </p:sp>
-      <p:sp>
-        <p:nvSpPr>
-          <p:cNvPr id="1496392474" name=""/>
+              <a:latin typeface="Aptos Narrow"/>
+              <a:cs typeface="Aptos Narrow"/>
+            </a:endParaRPr>
+          </a:p>
+        </p:txBody>
+      </p:sp>
+      <p:sp>
+        <p:nvSpPr>
+          <p:cNvPr id="1736611552" name=""/>
           <p:cNvSpPr txBox="1"/>
           <p:nvPr/>
         </p:nvSpPr>
@@ -9398,9 +9485,9 @@
                 <a:solidFill>
                   <a:schemeClr val="bg1"/>
                 </a:solidFill>
-                <a:latin typeface="Liberation Sans"/>
-                <a:ea typeface="Liberation Sans"/>
-                <a:cs typeface="Liberation Sans"/>
+                <a:latin typeface="Aptos Narrow"/>
+                <a:ea typeface="Aptos Narrow"/>
+                <a:cs typeface="Aptos Narrow"/>
               </a:rPr>
               <a:t>Revenue</a:t>
             </a:r>
@@ -9408,15 +9495,15 @@
               <a:solidFill>
                 <a:schemeClr val="bg1"/>
               </a:solidFill>
-              <a:latin typeface="Liberation Sans"/>
-              <a:cs typeface="Liberation Sans"/>
-            </a:endParaRPr>
-          </a:p>
-        </p:txBody>
-      </p:sp>
-      <p:sp>
-        <p:nvSpPr>
-          <p:cNvPr id="339690199" name="revenue_2"/>
+              <a:latin typeface="Aptos Narrow"/>
+              <a:cs typeface="Aptos Narrow"/>
+            </a:endParaRPr>
+          </a:p>
+        </p:txBody>
+      </p:sp>
+      <p:sp>
+        <p:nvSpPr>
+          <p:cNvPr id="1910315942" name="revenue_2"/>
           <p:cNvSpPr txBox="1"/>
           <p:nvPr/>
         </p:nvSpPr>
@@ -9443,9 +9530,9 @@
                 <a:solidFill>
                   <a:schemeClr val="tx1"/>
                 </a:solidFill>
-                <a:latin typeface="Liberation Sans"/>
-                <a:ea typeface="Liberation Sans"/>
-                <a:cs typeface="Liberation Sans"/>
+                <a:latin typeface="Aptos Narrow"/>
+                <a:ea typeface="Aptos Narrow"/>
+                <a:cs typeface="Aptos Narrow"/>
               </a:rPr>
               <a:t>XX.XB</a:t>
             </a:r>
@@ -9453,15 +9540,15 @@
               <a:solidFill>
                 <a:schemeClr val="tx1"/>
               </a:solidFill>
-              <a:latin typeface="Liberation Sans"/>
-              <a:cs typeface="Liberation Sans"/>
-            </a:endParaRPr>
-          </a:p>
-        </p:txBody>
-      </p:sp>
-      <p:sp>
-        <p:nvSpPr>
-          <p:cNvPr id="1838244257" name="revenue_1"/>
+              <a:latin typeface="Aptos Narrow"/>
+              <a:cs typeface="Aptos Narrow"/>
+            </a:endParaRPr>
+          </a:p>
+        </p:txBody>
+      </p:sp>
+      <p:sp>
+        <p:nvSpPr>
+          <p:cNvPr id="807101555" name="revenue_1"/>
           <p:cNvSpPr txBox="1"/>
           <p:nvPr/>
         </p:nvSpPr>
@@ -9488,9 +9575,9 @@
                 <a:solidFill>
                   <a:schemeClr val="tx1"/>
                 </a:solidFill>
-                <a:latin typeface="Liberation Sans"/>
-                <a:ea typeface="Liberation Sans"/>
-                <a:cs typeface="Liberation Sans"/>
+                <a:latin typeface="Aptos Narrow"/>
+                <a:ea typeface="Aptos Narrow"/>
+                <a:cs typeface="Aptos Narrow"/>
               </a:rPr>
               <a:t>XX.XB</a:t>
             </a:r>
@@ -9498,21 +9585,21 @@
               <a:solidFill>
                 <a:schemeClr val="tx1"/>
               </a:solidFill>
-              <a:latin typeface="Liberation Sans"/>
-              <a:cs typeface="Liberation Sans"/>
-            </a:endParaRPr>
-          </a:p>
-        </p:txBody>
-      </p:sp>
-      <p:sp>
-        <p:nvSpPr>
-          <p:cNvPr id="525178788" name="revenue_m"/>
+              <a:latin typeface="Aptos Narrow"/>
+              <a:cs typeface="Aptos Narrow"/>
+            </a:endParaRPr>
+          </a:p>
+        </p:txBody>
+      </p:sp>
+      <p:sp>
+        <p:nvSpPr>
+          <p:cNvPr id="1551745561" name="revenue_m"/>
           <p:cNvSpPr txBox="1"/>
           <p:nvPr/>
         </p:nvSpPr>
         <p:spPr bwMode="auto">
           <a:xfrm rot="0" flipH="0" flipV="0">
-            <a:off x="5689598" y="2209798"/>
+            <a:off x="5689597" y="2209798"/>
             <a:ext cx="812799" cy="406396"/>
           </a:xfrm>
           <a:prstGeom prst="rect">
@@ -9533,9 +9620,9 @@
                 <a:solidFill>
                   <a:schemeClr val="tx1"/>
                 </a:solidFill>
-                <a:latin typeface="Liberation Sans"/>
-                <a:ea typeface="Liberation Sans"/>
-                <a:cs typeface="Liberation Sans"/>
+                <a:latin typeface="Aptos Narrow"/>
+                <a:ea typeface="Aptos Narrow"/>
+                <a:cs typeface="Aptos Narrow"/>
               </a:rPr>
               <a:t>X.X%</a:t>
             </a:r>
@@ -9543,15 +9630,15 @@
               <a:solidFill>
                 <a:schemeClr val="tx1"/>
               </a:solidFill>
-              <a:latin typeface="Liberation Sans"/>
-              <a:cs typeface="Liberation Sans"/>
-            </a:endParaRPr>
-          </a:p>
-        </p:txBody>
-      </p:sp>
-      <p:sp>
-        <p:nvSpPr>
-          <p:cNvPr id="1255752566" name="name"/>
+              <a:latin typeface="Aptos Narrow"/>
+              <a:cs typeface="Aptos Narrow"/>
+            </a:endParaRPr>
+          </a:p>
+        </p:txBody>
+      </p:sp>
+      <p:sp>
+        <p:nvSpPr>
+          <p:cNvPr id="691460297" name="name"/>
           <p:cNvSpPr txBox="1"/>
           <p:nvPr/>
         </p:nvSpPr>
@@ -9578,9 +9665,9 @@
                 <a:solidFill>
                   <a:schemeClr val="tx1"/>
                 </a:solidFill>
-                <a:latin typeface="Liberation Sans"/>
-                <a:ea typeface="Liberation Sans"/>
-                <a:cs typeface="Liberation Sans"/>
+                <a:latin typeface="Aptos Narrow"/>
+                <a:ea typeface="Aptos Narrow"/>
+                <a:cs typeface="Aptos Narrow"/>
               </a:rPr>
               <a:t>growth</a:t>
             </a:r>
@@ -9588,15 +9675,15 @@
               <a:solidFill>
                 <a:schemeClr val="tx1"/>
               </a:solidFill>
-              <a:latin typeface="Liberation Sans"/>
-              <a:cs typeface="Liberation Sans"/>
-            </a:endParaRPr>
-          </a:p>
-        </p:txBody>
-      </p:sp>
-      <p:sp>
-        <p:nvSpPr>
-          <p:cNvPr id="2108637618" name="gross_profit_3"/>
+              <a:latin typeface="Aptos Narrow"/>
+              <a:cs typeface="Aptos Narrow"/>
+            </a:endParaRPr>
+          </a:p>
+        </p:txBody>
+      </p:sp>
+      <p:sp>
+        <p:nvSpPr>
+          <p:cNvPr id="131708897" name="gross_profit_3"/>
           <p:cNvSpPr txBox="1"/>
           <p:nvPr/>
         </p:nvSpPr>
@@ -9623,9 +9710,9 @@
                 <a:solidFill>
                   <a:schemeClr val="tx1"/>
                 </a:solidFill>
-                <a:latin typeface="Liberation Sans"/>
-                <a:ea typeface="Liberation Sans"/>
-                <a:cs typeface="Liberation Sans"/>
+                <a:latin typeface="Aptos Narrow"/>
+                <a:ea typeface="Aptos Narrow"/>
+                <a:cs typeface="Aptos Narrow"/>
               </a:rPr>
               <a:t>XX.XB</a:t>
             </a:r>
@@ -9633,15 +9720,15 @@
               <a:solidFill>
                 <a:schemeClr val="tx1"/>
               </a:solidFill>
-              <a:latin typeface="Liberation Sans"/>
-              <a:cs typeface="Liberation Sans"/>
-            </a:endParaRPr>
-          </a:p>
-        </p:txBody>
-      </p:sp>
-      <p:sp>
-        <p:nvSpPr>
-          <p:cNvPr id="1348452646" name=""/>
+              <a:latin typeface="Aptos Narrow"/>
+              <a:cs typeface="Aptos Narrow"/>
+            </a:endParaRPr>
+          </a:p>
+        </p:txBody>
+      </p:sp>
+      <p:sp>
+        <p:nvSpPr>
+          <p:cNvPr id="1527547352" name=""/>
           <p:cNvSpPr txBox="1"/>
           <p:nvPr/>
         </p:nvSpPr>
@@ -9668,9 +9755,9 @@
                 <a:solidFill>
                   <a:schemeClr val="bg1"/>
                 </a:solidFill>
-                <a:latin typeface="Liberation Sans"/>
-                <a:ea typeface="Liberation Sans"/>
-                <a:cs typeface="Liberation Sans"/>
+                <a:latin typeface="Aptos Narrow"/>
+                <a:ea typeface="Aptos Narrow"/>
+                <a:cs typeface="Aptos Narrow"/>
               </a:rPr>
               <a:t>Gross profit</a:t>
             </a:r>
@@ -9678,15 +9765,15 @@
               <a:solidFill>
                 <a:schemeClr val="bg1"/>
               </a:solidFill>
-              <a:latin typeface="Liberation Sans"/>
-              <a:cs typeface="Liberation Sans"/>
-            </a:endParaRPr>
-          </a:p>
-        </p:txBody>
-      </p:sp>
-      <p:sp>
-        <p:nvSpPr>
-          <p:cNvPr id="1170215058" name="gross_profit_2"/>
+              <a:latin typeface="Aptos Narrow"/>
+              <a:cs typeface="Aptos Narrow"/>
+            </a:endParaRPr>
+          </a:p>
+        </p:txBody>
+      </p:sp>
+      <p:sp>
+        <p:nvSpPr>
+          <p:cNvPr id="1159930072" name="gross_profit_2"/>
           <p:cNvSpPr txBox="1"/>
           <p:nvPr/>
         </p:nvSpPr>
@@ -9713,9 +9800,9 @@
                 <a:solidFill>
                   <a:schemeClr val="tx1"/>
                 </a:solidFill>
-                <a:latin typeface="Liberation Sans"/>
-                <a:ea typeface="Liberation Sans"/>
-                <a:cs typeface="Liberation Sans"/>
+                <a:latin typeface="Aptos Narrow"/>
+                <a:ea typeface="Aptos Narrow"/>
+                <a:cs typeface="Aptos Narrow"/>
               </a:rPr>
               <a:t>XX.XB</a:t>
             </a:r>
@@ -9723,15 +9810,15 @@
               <a:solidFill>
                 <a:schemeClr val="tx1"/>
               </a:solidFill>
-              <a:latin typeface="Liberation Sans"/>
-              <a:cs typeface="Liberation Sans"/>
-            </a:endParaRPr>
-          </a:p>
-        </p:txBody>
-      </p:sp>
-      <p:sp>
-        <p:nvSpPr>
-          <p:cNvPr id="368056361" name="gross_profit_1"/>
+              <a:latin typeface="Aptos Narrow"/>
+              <a:cs typeface="Aptos Narrow"/>
+            </a:endParaRPr>
+          </a:p>
+        </p:txBody>
+      </p:sp>
+      <p:sp>
+        <p:nvSpPr>
+          <p:cNvPr id="1355834727" name="gross_profit_1"/>
           <p:cNvSpPr txBox="1"/>
           <p:nvPr/>
         </p:nvSpPr>
@@ -9758,9 +9845,9 @@
                 <a:solidFill>
                   <a:schemeClr val="tx1"/>
                 </a:solidFill>
-                <a:latin typeface="Liberation Sans"/>
-                <a:ea typeface="Liberation Sans"/>
-                <a:cs typeface="Liberation Sans"/>
+                <a:latin typeface="Aptos Narrow"/>
+                <a:ea typeface="Aptos Narrow"/>
+                <a:cs typeface="Aptos Narrow"/>
               </a:rPr>
               <a:t>XX.XB</a:t>
             </a:r>
@@ -9768,21 +9855,21 @@
               <a:solidFill>
                 <a:schemeClr val="tx1"/>
               </a:solidFill>
-              <a:latin typeface="Liberation Sans"/>
-              <a:cs typeface="Liberation Sans"/>
-            </a:endParaRPr>
-          </a:p>
-        </p:txBody>
-      </p:sp>
-      <p:sp>
-        <p:nvSpPr>
-          <p:cNvPr id="1559578225" name="gross_profit_m"/>
+              <a:latin typeface="Aptos Narrow"/>
+              <a:cs typeface="Aptos Narrow"/>
+            </a:endParaRPr>
+          </a:p>
+        </p:txBody>
+      </p:sp>
+      <p:sp>
+        <p:nvSpPr>
+          <p:cNvPr id="433021175" name="gross_profit_m"/>
           <p:cNvSpPr txBox="1"/>
           <p:nvPr/>
         </p:nvSpPr>
         <p:spPr bwMode="auto">
           <a:xfrm rot="0" flipH="0" flipV="0">
-            <a:off x="5689598" y="2641626"/>
+            <a:off x="5689597" y="2641626"/>
             <a:ext cx="812799" cy="406396"/>
           </a:xfrm>
           <a:prstGeom prst="rect">
@@ -9803,9 +9890,9 @@
                 <a:solidFill>
                   <a:schemeClr val="tx1"/>
                 </a:solidFill>
-                <a:latin typeface="Liberation Sans"/>
-                <a:ea typeface="Liberation Sans"/>
-                <a:cs typeface="Liberation Sans"/>
+                <a:latin typeface="Aptos Narrow"/>
+                <a:ea typeface="Aptos Narrow"/>
+                <a:cs typeface="Aptos Narrow"/>
               </a:rPr>
               <a:t>X.X%</a:t>
             </a:r>
@@ -9813,15 +9900,15 @@
               <a:solidFill>
                 <a:schemeClr val="tx1"/>
               </a:solidFill>
-              <a:latin typeface="Liberation Sans"/>
-              <a:cs typeface="Liberation Sans"/>
-            </a:endParaRPr>
-          </a:p>
-        </p:txBody>
-      </p:sp>
-      <p:sp>
-        <p:nvSpPr>
-          <p:cNvPr id="831652213" name="symbol"/>
+              <a:latin typeface="Aptos Narrow"/>
+              <a:cs typeface="Aptos Narrow"/>
+            </a:endParaRPr>
+          </a:p>
+        </p:txBody>
+      </p:sp>
+      <p:sp>
+        <p:nvSpPr>
+          <p:cNvPr id="1908565589" name="symbol"/>
           <p:cNvSpPr txBox="1"/>
           <p:nvPr/>
         </p:nvSpPr>
@@ -9848,9 +9935,9 @@
                 <a:solidFill>
                   <a:schemeClr val="tx1"/>
                 </a:solidFill>
-                <a:latin typeface="Liberation Sans"/>
-                <a:ea typeface="Liberation Sans"/>
-                <a:cs typeface="Liberation Sans"/>
+                <a:latin typeface="Aptos Narrow"/>
+                <a:ea typeface="Aptos Narrow"/>
+                <a:cs typeface="Aptos Narrow"/>
               </a:rPr>
               <a:t>margin</a:t>
             </a:r>
@@ -9858,15 +9945,15 @@
               <a:solidFill>
                 <a:schemeClr val="tx1"/>
               </a:solidFill>
-              <a:latin typeface="Liberation Sans"/>
-              <a:cs typeface="Liberation Sans"/>
-            </a:endParaRPr>
-          </a:p>
-        </p:txBody>
-      </p:sp>
-      <p:sp>
-        <p:nvSpPr>
-          <p:cNvPr id="2034043532" name="operating_profit_3"/>
+              <a:latin typeface="Aptos Narrow"/>
+              <a:cs typeface="Aptos Narrow"/>
+            </a:endParaRPr>
+          </a:p>
+        </p:txBody>
+      </p:sp>
+      <p:sp>
+        <p:nvSpPr>
+          <p:cNvPr id="872652071" name="operating_profit_3"/>
           <p:cNvSpPr txBox="1"/>
           <p:nvPr/>
         </p:nvSpPr>
@@ -9893,9 +9980,9 @@
                 <a:solidFill>
                   <a:schemeClr val="tx1"/>
                 </a:solidFill>
-                <a:latin typeface="Liberation Sans"/>
-                <a:ea typeface="Liberation Sans"/>
-                <a:cs typeface="Liberation Sans"/>
+                <a:latin typeface="Aptos Narrow"/>
+                <a:ea typeface="Aptos Narrow"/>
+                <a:cs typeface="Aptos Narrow"/>
               </a:rPr>
               <a:t>XX.XB</a:t>
             </a:r>
@@ -9903,15 +9990,15 @@
               <a:solidFill>
                 <a:schemeClr val="tx1"/>
               </a:solidFill>
-              <a:latin typeface="Liberation Sans"/>
-              <a:cs typeface="Liberation Sans"/>
-            </a:endParaRPr>
-          </a:p>
-        </p:txBody>
-      </p:sp>
-      <p:sp>
-        <p:nvSpPr>
-          <p:cNvPr id="70336290" name=""/>
+              <a:latin typeface="Aptos Narrow"/>
+              <a:cs typeface="Aptos Narrow"/>
+            </a:endParaRPr>
+          </a:p>
+        </p:txBody>
+      </p:sp>
+      <p:sp>
+        <p:nvSpPr>
+          <p:cNvPr id="2071473625" name=""/>
           <p:cNvSpPr txBox="1"/>
           <p:nvPr/>
         </p:nvSpPr>
@@ -9938,9 +10025,9 @@
                 <a:solidFill>
                   <a:schemeClr val="bg1"/>
                 </a:solidFill>
-                <a:latin typeface="Liberation Sans"/>
-                <a:ea typeface="Liberation Sans"/>
-                <a:cs typeface="Liberation Sans"/>
+                <a:latin typeface="Aptos Narrow"/>
+                <a:ea typeface="Aptos Narrow"/>
+                <a:cs typeface="Aptos Narrow"/>
               </a:rPr>
               <a:t>Operating profit</a:t>
             </a:r>
@@ -9948,15 +10035,15 @@
               <a:solidFill>
                 <a:schemeClr val="bg1"/>
               </a:solidFill>
-              <a:latin typeface="Liberation Sans"/>
-              <a:cs typeface="Liberation Sans"/>
-            </a:endParaRPr>
-          </a:p>
-        </p:txBody>
-      </p:sp>
-      <p:sp>
-        <p:nvSpPr>
-          <p:cNvPr id="1043401128" name="operating_profit_2"/>
+              <a:latin typeface="Aptos Narrow"/>
+              <a:cs typeface="Aptos Narrow"/>
+            </a:endParaRPr>
+          </a:p>
+        </p:txBody>
+      </p:sp>
+      <p:sp>
+        <p:nvSpPr>
+          <p:cNvPr id="1491320554" name="operating_profit_2"/>
           <p:cNvSpPr txBox="1"/>
           <p:nvPr/>
         </p:nvSpPr>
@@ -9983,9 +10070,9 @@
                 <a:solidFill>
                   <a:schemeClr val="tx1"/>
                 </a:solidFill>
-                <a:latin typeface="Liberation Sans"/>
-                <a:ea typeface="Liberation Sans"/>
-                <a:cs typeface="Liberation Sans"/>
+                <a:latin typeface="Aptos Narrow"/>
+                <a:ea typeface="Aptos Narrow"/>
+                <a:cs typeface="Aptos Narrow"/>
               </a:rPr>
               <a:t>XX.XB</a:t>
             </a:r>
@@ -9993,15 +10080,15 @@
               <a:solidFill>
                 <a:schemeClr val="tx1"/>
               </a:solidFill>
-              <a:latin typeface="Liberation Sans"/>
-              <a:cs typeface="Liberation Sans"/>
-            </a:endParaRPr>
-          </a:p>
-        </p:txBody>
-      </p:sp>
-      <p:sp>
-        <p:nvSpPr>
-          <p:cNvPr id="1285542416" name="operating_profit_1"/>
+              <a:latin typeface="Aptos Narrow"/>
+              <a:cs typeface="Aptos Narrow"/>
+            </a:endParaRPr>
+          </a:p>
+        </p:txBody>
+      </p:sp>
+      <p:sp>
+        <p:nvSpPr>
+          <p:cNvPr id="573871737" name="operating_profit_1"/>
           <p:cNvSpPr txBox="1"/>
           <p:nvPr/>
         </p:nvSpPr>
@@ -10028,9 +10115,9 @@
                 <a:solidFill>
                   <a:schemeClr val="tx1"/>
                 </a:solidFill>
-                <a:latin typeface="Liberation Sans"/>
-                <a:ea typeface="Liberation Sans"/>
-                <a:cs typeface="Liberation Sans"/>
+                <a:latin typeface="Aptos Narrow"/>
+                <a:ea typeface="Aptos Narrow"/>
+                <a:cs typeface="Aptos Narrow"/>
               </a:rPr>
               <a:t>XX.XB</a:t>
             </a:r>
@@ -10038,21 +10125,21 @@
               <a:solidFill>
                 <a:schemeClr val="tx1"/>
               </a:solidFill>
-              <a:latin typeface="Liberation Sans"/>
-              <a:cs typeface="Liberation Sans"/>
-            </a:endParaRPr>
-          </a:p>
-        </p:txBody>
-      </p:sp>
-      <p:sp>
-        <p:nvSpPr>
-          <p:cNvPr id="1603109262" name="operating_profit_m"/>
+              <a:latin typeface="Aptos Narrow"/>
+              <a:cs typeface="Aptos Narrow"/>
+            </a:endParaRPr>
+          </a:p>
+        </p:txBody>
+      </p:sp>
+      <p:sp>
+        <p:nvSpPr>
+          <p:cNvPr id="849240329" name="operating_profit_m"/>
           <p:cNvSpPr txBox="1"/>
           <p:nvPr/>
         </p:nvSpPr>
         <p:spPr bwMode="auto">
           <a:xfrm rot="0" flipH="0" flipV="0">
-            <a:off x="5689598" y="3073449"/>
+            <a:off x="5689597" y="3073449"/>
             <a:ext cx="812799" cy="406396"/>
           </a:xfrm>
           <a:prstGeom prst="rect">
@@ -10073,9 +10160,9 @@
                 <a:solidFill>
                   <a:schemeClr val="tx1"/>
                 </a:solidFill>
-                <a:latin typeface="Liberation Sans"/>
-                <a:ea typeface="Liberation Sans"/>
-                <a:cs typeface="Liberation Sans"/>
+                <a:latin typeface="Aptos Narrow"/>
+                <a:ea typeface="Aptos Narrow"/>
+                <a:cs typeface="Aptos Narrow"/>
               </a:rPr>
               <a:t>X.X%</a:t>
             </a:r>
@@ -10083,15 +10170,15 @@
               <a:solidFill>
                 <a:schemeClr val="tx1"/>
               </a:solidFill>
-              <a:latin typeface="Liberation Sans"/>
-              <a:cs typeface="Liberation Sans"/>
-            </a:endParaRPr>
-          </a:p>
-        </p:txBody>
-      </p:sp>
-      <p:sp>
-        <p:nvSpPr>
-          <p:cNvPr id="923565239" name="sector"/>
+              <a:latin typeface="Aptos Narrow"/>
+              <a:cs typeface="Aptos Narrow"/>
+            </a:endParaRPr>
+          </a:p>
+        </p:txBody>
+      </p:sp>
+      <p:sp>
+        <p:nvSpPr>
+          <p:cNvPr id="1209173856" name="sector"/>
           <p:cNvSpPr txBox="1"/>
           <p:nvPr/>
         </p:nvSpPr>
@@ -10118,9 +10205,9 @@
                 <a:solidFill>
                   <a:schemeClr val="tx1"/>
                 </a:solidFill>
-                <a:latin typeface="Liberation Sans"/>
-                <a:ea typeface="Liberation Sans"/>
-                <a:cs typeface="Liberation Sans"/>
+                <a:latin typeface="Aptos Narrow"/>
+                <a:ea typeface="Aptos Narrow"/>
+                <a:cs typeface="Aptos Narrow"/>
               </a:rPr>
               <a:t>margin</a:t>
             </a:r>
@@ -10128,15 +10215,15 @@
               <a:solidFill>
                 <a:schemeClr val="tx1"/>
               </a:solidFill>
-              <a:latin typeface="Liberation Sans"/>
-              <a:cs typeface="Liberation Sans"/>
-            </a:endParaRPr>
-          </a:p>
-        </p:txBody>
-      </p:sp>
-      <p:sp>
-        <p:nvSpPr>
-          <p:cNvPr id="55736236" name="net_income_3"/>
+              <a:latin typeface="Aptos Narrow"/>
+              <a:cs typeface="Aptos Narrow"/>
+            </a:endParaRPr>
+          </a:p>
+        </p:txBody>
+      </p:sp>
+      <p:sp>
+        <p:nvSpPr>
+          <p:cNvPr id="1529694397" name="net_income_3"/>
           <p:cNvSpPr txBox="1"/>
           <p:nvPr/>
         </p:nvSpPr>
@@ -10163,9 +10250,9 @@
                 <a:solidFill>
                   <a:schemeClr val="tx1"/>
                 </a:solidFill>
-                <a:latin typeface="Liberation Sans"/>
-                <a:ea typeface="Liberation Sans"/>
-                <a:cs typeface="Liberation Sans"/>
+                <a:latin typeface="Aptos Narrow"/>
+                <a:ea typeface="Aptos Narrow"/>
+                <a:cs typeface="Aptos Narrow"/>
               </a:rPr>
               <a:t>XX.XB</a:t>
             </a:r>
@@ -10173,15 +10260,15 @@
               <a:solidFill>
                 <a:schemeClr val="tx1"/>
               </a:solidFill>
-              <a:latin typeface="Liberation Sans"/>
-              <a:cs typeface="Liberation Sans"/>
-            </a:endParaRPr>
-          </a:p>
-        </p:txBody>
-      </p:sp>
-      <p:sp>
-        <p:nvSpPr>
-          <p:cNvPr id="620009610" name=""/>
+              <a:latin typeface="Aptos Narrow"/>
+              <a:cs typeface="Aptos Narrow"/>
+            </a:endParaRPr>
+          </a:p>
+        </p:txBody>
+      </p:sp>
+      <p:sp>
+        <p:nvSpPr>
+          <p:cNvPr id="1723374682" name=""/>
           <p:cNvSpPr txBox="1"/>
           <p:nvPr/>
         </p:nvSpPr>
@@ -10208,9 +10295,9 @@
                 <a:solidFill>
                   <a:schemeClr val="bg1"/>
                 </a:solidFill>
-                <a:latin typeface="Liberation Sans"/>
-                <a:ea typeface="Liberation Sans"/>
-                <a:cs typeface="Liberation Sans"/>
+                <a:latin typeface="Aptos Narrow"/>
+                <a:ea typeface="Aptos Narrow"/>
+                <a:cs typeface="Aptos Narrow"/>
               </a:rPr>
               <a:t>Net income</a:t>
             </a:r>
@@ -10218,15 +10305,15 @@
               <a:solidFill>
                 <a:schemeClr val="bg1"/>
               </a:solidFill>
-              <a:latin typeface="Liberation Sans"/>
-              <a:cs typeface="Liberation Sans"/>
-            </a:endParaRPr>
-          </a:p>
-        </p:txBody>
-      </p:sp>
-      <p:sp>
-        <p:nvSpPr>
-          <p:cNvPr id="1053461506" name="net_income_2"/>
+              <a:latin typeface="Aptos Narrow"/>
+              <a:cs typeface="Aptos Narrow"/>
+            </a:endParaRPr>
+          </a:p>
+        </p:txBody>
+      </p:sp>
+      <p:sp>
+        <p:nvSpPr>
+          <p:cNvPr id="1339638322" name="net_income_2"/>
           <p:cNvSpPr txBox="1"/>
           <p:nvPr/>
         </p:nvSpPr>
@@ -10253,9 +10340,9 @@
                 <a:solidFill>
                   <a:schemeClr val="tx1"/>
                 </a:solidFill>
-                <a:latin typeface="Liberation Sans"/>
-                <a:ea typeface="Liberation Sans"/>
-                <a:cs typeface="Liberation Sans"/>
+                <a:latin typeface="Aptos Narrow"/>
+                <a:ea typeface="Aptos Narrow"/>
+                <a:cs typeface="Aptos Narrow"/>
               </a:rPr>
               <a:t>XX.XB</a:t>
             </a:r>
@@ -10263,15 +10350,15 @@
               <a:solidFill>
                 <a:schemeClr val="tx1"/>
               </a:solidFill>
-              <a:latin typeface="Liberation Sans"/>
-              <a:cs typeface="Liberation Sans"/>
-            </a:endParaRPr>
-          </a:p>
-        </p:txBody>
-      </p:sp>
-      <p:sp>
-        <p:nvSpPr>
-          <p:cNvPr id="24027059" name="net_income_1"/>
+              <a:latin typeface="Aptos Narrow"/>
+              <a:cs typeface="Aptos Narrow"/>
+            </a:endParaRPr>
+          </a:p>
+        </p:txBody>
+      </p:sp>
+      <p:sp>
+        <p:nvSpPr>
+          <p:cNvPr id="1049983372" name="net_income_1"/>
           <p:cNvSpPr txBox="1"/>
           <p:nvPr/>
         </p:nvSpPr>
@@ -10298,9 +10385,9 @@
                 <a:solidFill>
                   <a:schemeClr val="tx1"/>
                 </a:solidFill>
-                <a:latin typeface="Liberation Sans"/>
-                <a:ea typeface="Liberation Sans"/>
-                <a:cs typeface="Liberation Sans"/>
+                <a:latin typeface="Aptos Narrow"/>
+                <a:ea typeface="Aptos Narrow"/>
+                <a:cs typeface="Aptos Narrow"/>
               </a:rPr>
               <a:t>XX.XB</a:t>
             </a:r>
@@ -10308,21 +10395,21 @@
               <a:solidFill>
                 <a:schemeClr val="tx1"/>
               </a:solidFill>
-              <a:latin typeface="Liberation Sans"/>
-              <a:cs typeface="Liberation Sans"/>
-            </a:endParaRPr>
-          </a:p>
-        </p:txBody>
-      </p:sp>
-      <p:sp>
-        <p:nvSpPr>
-          <p:cNvPr id="1113419882" name="net_income_m"/>
+              <a:latin typeface="Aptos Narrow"/>
+              <a:cs typeface="Aptos Narrow"/>
+            </a:endParaRPr>
+          </a:p>
+        </p:txBody>
+      </p:sp>
+      <p:sp>
+        <p:nvSpPr>
+          <p:cNvPr id="2106396214" name="net_income_m"/>
           <p:cNvSpPr txBox="1"/>
           <p:nvPr/>
         </p:nvSpPr>
         <p:spPr bwMode="auto">
           <a:xfrm rot="0" flipH="0" flipV="0">
-            <a:off x="5689598" y="3505208"/>
+            <a:off x="5689597" y="3505208"/>
             <a:ext cx="812799" cy="406396"/>
           </a:xfrm>
           <a:prstGeom prst="rect">
@@ -10343,9 +10430,9 @@
                 <a:solidFill>
                   <a:schemeClr val="tx1"/>
                 </a:solidFill>
-                <a:latin typeface="Liberation Sans"/>
-                <a:ea typeface="Liberation Sans"/>
-                <a:cs typeface="Liberation Sans"/>
+                <a:latin typeface="Aptos Narrow"/>
+                <a:ea typeface="Aptos Narrow"/>
+                <a:cs typeface="Aptos Narrow"/>
               </a:rPr>
               <a:t>X.X%</a:t>
             </a:r>
@@ -10353,15 +10440,15 @@
               <a:solidFill>
                 <a:schemeClr val="tx1"/>
               </a:solidFill>
-              <a:latin typeface="Liberation Sans"/>
-              <a:cs typeface="Liberation Sans"/>
-            </a:endParaRPr>
-          </a:p>
-        </p:txBody>
-      </p:sp>
-      <p:sp>
-        <p:nvSpPr>
-          <p:cNvPr id="1384149297" name="industry"/>
+              <a:latin typeface="Aptos Narrow"/>
+              <a:cs typeface="Aptos Narrow"/>
+            </a:endParaRPr>
+          </a:p>
+        </p:txBody>
+      </p:sp>
+      <p:sp>
+        <p:nvSpPr>
+          <p:cNvPr id="1978995322" name="industry"/>
           <p:cNvSpPr txBox="1"/>
           <p:nvPr/>
         </p:nvSpPr>
@@ -10388,9 +10475,9 @@
                 <a:solidFill>
                   <a:schemeClr val="tx1"/>
                 </a:solidFill>
-                <a:latin typeface="Liberation Sans"/>
-                <a:ea typeface="Liberation Sans"/>
-                <a:cs typeface="Liberation Sans"/>
+                <a:latin typeface="Aptos Narrow"/>
+                <a:ea typeface="Aptos Narrow"/>
+                <a:cs typeface="Aptos Narrow"/>
               </a:rPr>
               <a:t>margin</a:t>
             </a:r>
@@ -10398,21 +10485,21 @@
               <a:solidFill>
                 <a:schemeClr val="tx1"/>
               </a:solidFill>
-              <a:latin typeface="Liberation Sans"/>
-              <a:cs typeface="Liberation Sans"/>
-            </a:endParaRPr>
-          </a:p>
-        </p:txBody>
-      </p:sp>
-      <p:sp>
-        <p:nvSpPr>
-          <p:cNvPr id="309366340" name="invested_capital_3"/>
+              <a:latin typeface="Aptos Narrow"/>
+              <a:cs typeface="Aptos Narrow"/>
+            </a:endParaRPr>
+          </a:p>
+        </p:txBody>
+      </p:sp>
+      <p:sp>
+        <p:nvSpPr>
+          <p:cNvPr id="266936509" name="invested_capital_3"/>
           <p:cNvSpPr txBox="1"/>
           <p:nvPr/>
         </p:nvSpPr>
         <p:spPr bwMode="auto">
           <a:xfrm rot="0" flipH="0" flipV="0">
-            <a:off x="2438395" y="3937010"/>
+            <a:off x="2438395" y="3937009"/>
             <a:ext cx="812799" cy="406397"/>
           </a:xfrm>
           <a:prstGeom prst="rect">
@@ -10433,9 +10520,9 @@
                 <a:solidFill>
                   <a:schemeClr val="tx1"/>
                 </a:solidFill>
-                <a:latin typeface="Liberation Sans"/>
-                <a:ea typeface="Liberation Sans"/>
-                <a:cs typeface="Liberation Sans"/>
+                <a:latin typeface="Aptos Narrow"/>
+                <a:ea typeface="Aptos Narrow"/>
+                <a:cs typeface="Aptos Narrow"/>
               </a:rPr>
               <a:t>XX.XB</a:t>
             </a:r>
@@ -10443,21 +10530,21 @@
               <a:solidFill>
                 <a:schemeClr val="tx1"/>
               </a:solidFill>
-              <a:latin typeface="Liberation Sans"/>
-              <a:cs typeface="Liberation Sans"/>
-            </a:endParaRPr>
-          </a:p>
-        </p:txBody>
-      </p:sp>
-      <p:sp>
-        <p:nvSpPr>
-          <p:cNvPr id="130604559" name=""/>
+              <a:latin typeface="Aptos Narrow"/>
+              <a:cs typeface="Aptos Narrow"/>
+            </a:endParaRPr>
+          </a:p>
+        </p:txBody>
+      </p:sp>
+      <p:sp>
+        <p:nvSpPr>
+          <p:cNvPr id="2103103902" name=""/>
           <p:cNvSpPr txBox="1"/>
           <p:nvPr/>
         </p:nvSpPr>
         <p:spPr bwMode="auto">
           <a:xfrm rot="0" flipH="0" flipV="0">
-            <a:off x="406400" y="3937010"/>
+            <a:off x="406400" y="3937009"/>
             <a:ext cx="1828797" cy="406396"/>
           </a:xfrm>
           <a:prstGeom prst="rect">
@@ -10478,9 +10565,9 @@
                 <a:solidFill>
                   <a:schemeClr val="bg1"/>
                 </a:solidFill>
-                <a:latin typeface="Liberation Sans"/>
-                <a:ea typeface="Liberation Sans"/>
-                <a:cs typeface="Liberation Sans"/>
+                <a:latin typeface="Aptos Narrow"/>
+                <a:ea typeface="Aptos Narrow"/>
+                <a:cs typeface="Aptos Narrow"/>
               </a:rPr>
               <a:t>Invested capital</a:t>
             </a:r>
@@ -10488,21 +10575,21 @@
               <a:solidFill>
                 <a:schemeClr val="bg1"/>
               </a:solidFill>
-              <a:latin typeface="Liberation Sans"/>
-              <a:cs typeface="Liberation Sans"/>
-            </a:endParaRPr>
-          </a:p>
-        </p:txBody>
-      </p:sp>
-      <p:sp>
-        <p:nvSpPr>
-          <p:cNvPr id="1459423099" name="invested_capital_2"/>
+              <a:latin typeface="Aptos Narrow"/>
+              <a:cs typeface="Aptos Narrow"/>
+            </a:endParaRPr>
+          </a:p>
+        </p:txBody>
+      </p:sp>
+      <p:sp>
+        <p:nvSpPr>
+          <p:cNvPr id="355465432" name="invested_capital_2"/>
           <p:cNvSpPr txBox="1"/>
           <p:nvPr/>
         </p:nvSpPr>
         <p:spPr bwMode="auto">
           <a:xfrm rot="0" flipH="0" flipV="0">
-            <a:off x="3454398" y="3937010"/>
+            <a:off x="3454398" y="3937009"/>
             <a:ext cx="812799" cy="406397"/>
           </a:xfrm>
           <a:prstGeom prst="rect">
@@ -10523,9 +10610,9 @@
                 <a:solidFill>
                   <a:schemeClr val="tx1"/>
                 </a:solidFill>
-                <a:latin typeface="Liberation Sans"/>
-                <a:ea typeface="Liberation Sans"/>
-                <a:cs typeface="Liberation Sans"/>
+                <a:latin typeface="Aptos Narrow"/>
+                <a:ea typeface="Aptos Narrow"/>
+                <a:cs typeface="Aptos Narrow"/>
               </a:rPr>
               <a:t>XX.XB</a:t>
             </a:r>
@@ -10533,21 +10620,21 @@
               <a:solidFill>
                 <a:schemeClr val="tx1"/>
               </a:solidFill>
-              <a:latin typeface="Liberation Sans"/>
-              <a:cs typeface="Liberation Sans"/>
-            </a:endParaRPr>
-          </a:p>
-        </p:txBody>
-      </p:sp>
-      <p:sp>
-        <p:nvSpPr>
-          <p:cNvPr id="1874515150" name="invested_capital_1"/>
+              <a:latin typeface="Aptos Narrow"/>
+              <a:cs typeface="Aptos Narrow"/>
+            </a:endParaRPr>
+          </a:p>
+        </p:txBody>
+      </p:sp>
+      <p:sp>
+        <p:nvSpPr>
+          <p:cNvPr id="1539108509" name="invested_capital_1"/>
           <p:cNvSpPr txBox="1"/>
           <p:nvPr/>
         </p:nvSpPr>
         <p:spPr bwMode="auto">
           <a:xfrm rot="0" flipH="0" flipV="0">
-            <a:off x="4470397" y="3937010"/>
+            <a:off x="4470397" y="3937009"/>
             <a:ext cx="812799" cy="406397"/>
           </a:xfrm>
           <a:prstGeom prst="rect">
@@ -10568,9 +10655,9 @@
                 <a:solidFill>
                   <a:schemeClr val="tx1"/>
                 </a:solidFill>
-                <a:latin typeface="Liberation Sans"/>
-                <a:ea typeface="Liberation Sans"/>
-                <a:cs typeface="Liberation Sans"/>
+                <a:latin typeface="Aptos Narrow"/>
+                <a:ea typeface="Aptos Narrow"/>
+                <a:cs typeface="Aptos Narrow"/>
               </a:rPr>
               <a:t>XX.XB</a:t>
             </a:r>
@@ -10578,21 +10665,21 @@
               <a:solidFill>
                 <a:schemeClr val="tx1"/>
               </a:solidFill>
-              <a:latin typeface="Liberation Sans"/>
-              <a:cs typeface="Liberation Sans"/>
-            </a:endParaRPr>
-          </a:p>
-        </p:txBody>
-      </p:sp>
-      <p:sp>
-        <p:nvSpPr>
-          <p:cNvPr id="208921915" name="invested_capital_m"/>
+              <a:latin typeface="Aptos Narrow"/>
+              <a:cs typeface="Aptos Narrow"/>
+            </a:endParaRPr>
+          </a:p>
+        </p:txBody>
+      </p:sp>
+      <p:sp>
+        <p:nvSpPr>
+          <p:cNvPr id="916665546" name="invested_capital_m"/>
           <p:cNvSpPr txBox="1"/>
           <p:nvPr/>
         </p:nvSpPr>
         <p:spPr bwMode="auto">
           <a:xfrm rot="0" flipH="0" flipV="0">
-            <a:off x="5689598" y="3937010"/>
+            <a:off x="5689597" y="3937009"/>
             <a:ext cx="812799" cy="406396"/>
           </a:xfrm>
           <a:prstGeom prst="rect">
@@ -10613,9 +10700,9 @@
                 <a:solidFill>
                   <a:schemeClr val="tx1"/>
                 </a:solidFill>
-                <a:latin typeface="Liberation Sans"/>
-                <a:ea typeface="Liberation Sans"/>
-                <a:cs typeface="Liberation Sans"/>
+                <a:latin typeface="Aptos Narrow"/>
+                <a:ea typeface="Aptos Narrow"/>
+                <a:cs typeface="Aptos Narrow"/>
               </a:rPr>
               <a:t>X.X%</a:t>
             </a:r>
@@ -10623,15 +10710,15 @@
               <a:solidFill>
                 <a:schemeClr val="tx1"/>
               </a:solidFill>
-              <a:latin typeface="Liberation Sans"/>
-              <a:cs typeface="Liberation Sans"/>
-            </a:endParaRPr>
-          </a:p>
-        </p:txBody>
-      </p:sp>
-      <p:sp>
-        <p:nvSpPr>
-          <p:cNvPr id="445514744" name="market_cap"/>
+              <a:latin typeface="Aptos Narrow"/>
+              <a:cs typeface="Aptos Narrow"/>
+            </a:endParaRPr>
+          </a:p>
+        </p:txBody>
+      </p:sp>
+      <p:sp>
+        <p:nvSpPr>
+          <p:cNvPr id="825427361" name="market_cap"/>
           <p:cNvSpPr txBox="1"/>
           <p:nvPr/>
         </p:nvSpPr>
@@ -10658,9 +10745,9 @@
                 <a:solidFill>
                   <a:schemeClr val="tx1"/>
                 </a:solidFill>
-                <a:latin typeface="Liberation Sans"/>
-                <a:ea typeface="Liberation Sans"/>
-                <a:cs typeface="Liberation Sans"/>
+                <a:latin typeface="Aptos Narrow"/>
+                <a:ea typeface="Aptos Narrow"/>
+                <a:cs typeface="Aptos Narrow"/>
               </a:rPr>
               <a:t>ROIC</a:t>
             </a:r>
@@ -10668,15 +10755,15 @@
               <a:solidFill>
                 <a:schemeClr val="tx1"/>
               </a:solidFill>
-              <a:latin typeface="Liberation Sans"/>
-              <a:cs typeface="Liberation Sans"/>
-            </a:endParaRPr>
-          </a:p>
-        </p:txBody>
-      </p:sp>
-      <p:sp>
-        <p:nvSpPr>
-          <p:cNvPr id="306574910" name="debt_3"/>
+              <a:latin typeface="Aptos Narrow"/>
+              <a:cs typeface="Aptos Narrow"/>
+            </a:endParaRPr>
+          </a:p>
+        </p:txBody>
+      </p:sp>
+      <p:sp>
+        <p:nvSpPr>
+          <p:cNvPr id="2083242806" name="debt_3"/>
           <p:cNvSpPr txBox="1"/>
           <p:nvPr/>
         </p:nvSpPr>
@@ -10703,9 +10790,9 @@
                 <a:solidFill>
                   <a:schemeClr val="tx1"/>
                 </a:solidFill>
-                <a:latin typeface="Liberation Sans"/>
-                <a:ea typeface="Liberation Sans"/>
-                <a:cs typeface="Liberation Sans"/>
+                <a:latin typeface="Aptos Narrow"/>
+                <a:ea typeface="Aptos Narrow"/>
+                <a:cs typeface="Aptos Narrow"/>
               </a:rPr>
               <a:t>XX.XB</a:t>
             </a:r>
@@ -10713,15 +10800,15 @@
               <a:solidFill>
                 <a:schemeClr val="tx1"/>
               </a:solidFill>
-              <a:latin typeface="Liberation Sans"/>
-              <a:cs typeface="Liberation Sans"/>
-            </a:endParaRPr>
-          </a:p>
-        </p:txBody>
-      </p:sp>
-      <p:sp>
-        <p:nvSpPr>
-          <p:cNvPr id="1902781788" name=""/>
+              <a:latin typeface="Aptos Narrow"/>
+              <a:cs typeface="Aptos Narrow"/>
+            </a:endParaRPr>
+          </a:p>
+        </p:txBody>
+      </p:sp>
+      <p:sp>
+        <p:nvSpPr>
+          <p:cNvPr id="1255915047" name=""/>
           <p:cNvSpPr txBox="1"/>
           <p:nvPr/>
         </p:nvSpPr>
@@ -10748,9 +10835,9 @@
                 <a:solidFill>
                   <a:schemeClr val="bg1"/>
                 </a:solidFill>
-                <a:latin typeface="Liberation Sans"/>
-                <a:ea typeface="Liberation Sans"/>
-                <a:cs typeface="Liberation Sans"/>
+                <a:latin typeface="Aptos Narrow"/>
+                <a:ea typeface="Aptos Narrow"/>
+                <a:cs typeface="Aptos Narrow"/>
               </a:rPr>
               <a:t>Debt</a:t>
             </a:r>
@@ -10758,15 +10845,15 @@
               <a:solidFill>
                 <a:schemeClr val="bg1"/>
               </a:solidFill>
-              <a:latin typeface="Liberation Sans"/>
-              <a:cs typeface="Liberation Sans"/>
-            </a:endParaRPr>
-          </a:p>
-        </p:txBody>
-      </p:sp>
-      <p:sp>
-        <p:nvSpPr>
-          <p:cNvPr id="1900073939" name="debt_2"/>
+              <a:latin typeface="Aptos Narrow"/>
+              <a:cs typeface="Aptos Narrow"/>
+            </a:endParaRPr>
+          </a:p>
+        </p:txBody>
+      </p:sp>
+      <p:sp>
+        <p:nvSpPr>
+          <p:cNvPr id="539012147" name="debt_2"/>
           <p:cNvSpPr txBox="1"/>
           <p:nvPr/>
         </p:nvSpPr>
@@ -10793,9 +10880,9 @@
                 <a:solidFill>
                   <a:schemeClr val="tx1"/>
                 </a:solidFill>
-                <a:latin typeface="Liberation Sans"/>
-                <a:ea typeface="Liberation Sans"/>
-                <a:cs typeface="Liberation Sans"/>
+                <a:latin typeface="Aptos Narrow"/>
+                <a:ea typeface="Aptos Narrow"/>
+                <a:cs typeface="Aptos Narrow"/>
               </a:rPr>
               <a:t>XX.XB</a:t>
             </a:r>
@@ -10803,15 +10890,15 @@
               <a:solidFill>
                 <a:schemeClr val="tx1"/>
               </a:solidFill>
-              <a:latin typeface="Liberation Sans"/>
-              <a:cs typeface="Liberation Sans"/>
-            </a:endParaRPr>
-          </a:p>
-        </p:txBody>
-      </p:sp>
-      <p:sp>
-        <p:nvSpPr>
-          <p:cNvPr id="313930224" name="debt_1"/>
+              <a:latin typeface="Aptos Narrow"/>
+              <a:cs typeface="Aptos Narrow"/>
+            </a:endParaRPr>
+          </a:p>
+        </p:txBody>
+      </p:sp>
+      <p:sp>
+        <p:nvSpPr>
+          <p:cNvPr id="1153863669" name="debt_1"/>
           <p:cNvSpPr txBox="1"/>
           <p:nvPr/>
         </p:nvSpPr>
@@ -10838,9 +10925,9 @@
                 <a:solidFill>
                   <a:schemeClr val="tx1"/>
                 </a:solidFill>
-                <a:latin typeface="Liberation Sans"/>
-                <a:ea typeface="Liberation Sans"/>
-                <a:cs typeface="Liberation Sans"/>
+                <a:latin typeface="Aptos Narrow"/>
+                <a:ea typeface="Aptos Narrow"/>
+                <a:cs typeface="Aptos Narrow"/>
               </a:rPr>
               <a:t>XX.XB</a:t>
             </a:r>
@@ -10848,21 +10935,21 @@
               <a:solidFill>
                 <a:schemeClr val="tx1"/>
               </a:solidFill>
-              <a:latin typeface="Liberation Sans"/>
-              <a:cs typeface="Liberation Sans"/>
-            </a:endParaRPr>
-          </a:p>
-        </p:txBody>
-      </p:sp>
-      <p:sp>
-        <p:nvSpPr>
-          <p:cNvPr id="1028770126" name="debt_m"/>
+              <a:latin typeface="Aptos Narrow"/>
+              <a:cs typeface="Aptos Narrow"/>
+            </a:endParaRPr>
+          </a:p>
+        </p:txBody>
+      </p:sp>
+      <p:sp>
+        <p:nvSpPr>
+          <p:cNvPr id="1647303313" name="debt_m"/>
           <p:cNvSpPr txBox="1"/>
           <p:nvPr/>
         </p:nvSpPr>
         <p:spPr bwMode="auto">
           <a:xfrm rot="0" flipH="0" flipV="0">
-            <a:off x="5689598" y="4368771"/>
+            <a:off x="5689597" y="4368771"/>
             <a:ext cx="812799" cy="406396"/>
           </a:xfrm>
           <a:prstGeom prst="rect">
@@ -10883,9 +10970,9 @@
                 <a:solidFill>
                   <a:schemeClr val="tx1"/>
                 </a:solidFill>
-                <a:latin typeface="Liberation Sans"/>
-                <a:ea typeface="Liberation Sans"/>
-                <a:cs typeface="Liberation Sans"/>
+                <a:latin typeface="Aptos Narrow"/>
+                <a:ea typeface="Aptos Narrow"/>
+                <a:cs typeface="Aptos Narrow"/>
               </a:rPr>
               <a:t>X.X%</a:t>
             </a:r>
@@ -10893,15 +10980,15 @@
               <a:solidFill>
                 <a:schemeClr val="tx1"/>
               </a:solidFill>
-              <a:latin typeface="Liberation Sans"/>
-              <a:cs typeface="Liberation Sans"/>
-            </a:endParaRPr>
-          </a:p>
-        </p:txBody>
-      </p:sp>
-      <p:sp>
-        <p:nvSpPr>
-          <p:cNvPr id="1031783940" name="earnings"/>
+              <a:latin typeface="Aptos Narrow"/>
+              <a:cs typeface="Aptos Narrow"/>
+            </a:endParaRPr>
+          </a:p>
+        </p:txBody>
+      </p:sp>
+      <p:sp>
+        <p:nvSpPr>
+          <p:cNvPr id="450195430" name="earnings"/>
           <p:cNvSpPr txBox="1"/>
           <p:nvPr/>
         </p:nvSpPr>
@@ -10928,9 +11015,9 @@
                 <a:solidFill>
                   <a:schemeClr val="tx1"/>
                 </a:solidFill>
-                <a:latin typeface="Liberation Sans"/>
-                <a:ea typeface="Liberation Sans"/>
-                <a:cs typeface="Liberation Sans"/>
+                <a:latin typeface="Aptos Narrow"/>
+                <a:ea typeface="Aptos Narrow"/>
+                <a:cs typeface="Aptos Narrow"/>
               </a:rPr>
               <a:t>D/C ratio</a:t>
             </a:r>
@@ -10938,15 +11025,15 @@
               <a:solidFill>
                 <a:schemeClr val="tx1"/>
               </a:solidFill>
-              <a:latin typeface="Liberation Sans"/>
-              <a:cs typeface="Liberation Sans"/>
-            </a:endParaRPr>
-          </a:p>
-        </p:txBody>
-      </p:sp>
-      <p:sp>
-        <p:nvSpPr>
-          <p:cNvPr id="645729051" name="operating_cash_flow_3"/>
+              <a:latin typeface="Aptos Narrow"/>
+              <a:cs typeface="Aptos Narrow"/>
+            </a:endParaRPr>
+          </a:p>
+        </p:txBody>
+      </p:sp>
+      <p:sp>
+        <p:nvSpPr>
+          <p:cNvPr id="587511286" name="operating_cash_flow_3"/>
           <p:cNvSpPr txBox="1"/>
           <p:nvPr/>
         </p:nvSpPr>
@@ -10973,9 +11060,9 @@
                 <a:solidFill>
                   <a:schemeClr val="tx1"/>
                 </a:solidFill>
-                <a:latin typeface="Liberation Sans"/>
-                <a:ea typeface="Liberation Sans"/>
-                <a:cs typeface="Liberation Sans"/>
+                <a:latin typeface="Aptos Narrow"/>
+                <a:ea typeface="Aptos Narrow"/>
+                <a:cs typeface="Aptos Narrow"/>
               </a:rPr>
               <a:t>XX.XB</a:t>
             </a:r>
@@ -10983,15 +11070,15 @@
               <a:solidFill>
                 <a:schemeClr val="tx1"/>
               </a:solidFill>
-              <a:latin typeface="Liberation Sans"/>
-              <a:cs typeface="Liberation Sans"/>
-            </a:endParaRPr>
-          </a:p>
-        </p:txBody>
-      </p:sp>
-      <p:sp>
-        <p:nvSpPr>
-          <p:cNvPr id="1539096327" name=""/>
+              <a:latin typeface="Aptos Narrow"/>
+              <a:cs typeface="Aptos Narrow"/>
+            </a:endParaRPr>
+          </a:p>
+        </p:txBody>
+      </p:sp>
+      <p:sp>
+        <p:nvSpPr>
+          <p:cNvPr id="119781839" name=""/>
           <p:cNvSpPr txBox="1"/>
           <p:nvPr/>
         </p:nvSpPr>
@@ -11018,9 +11105,9 @@
                 <a:solidFill>
                   <a:schemeClr val="bg1"/>
                 </a:solidFill>
-                <a:latin typeface="Liberation Sans"/>
-                <a:ea typeface="Liberation Sans"/>
-                <a:cs typeface="Liberation Sans"/>
+                <a:latin typeface="Aptos Narrow"/>
+                <a:ea typeface="Aptos Narrow"/>
+                <a:cs typeface="Aptos Narrow"/>
               </a:rPr>
               <a:t>Opearting CF</a:t>
             </a:r>
@@ -11028,15 +11115,15 @@
               <a:solidFill>
                 <a:schemeClr val="bg1"/>
               </a:solidFill>
-              <a:latin typeface="Liberation Sans"/>
-              <a:cs typeface="Liberation Sans"/>
-            </a:endParaRPr>
-          </a:p>
-        </p:txBody>
-      </p:sp>
-      <p:sp>
-        <p:nvSpPr>
-          <p:cNvPr id="2122910770" name="operating_cash_flow_2"/>
+              <a:latin typeface="Aptos Narrow"/>
+              <a:cs typeface="Aptos Narrow"/>
+            </a:endParaRPr>
+          </a:p>
+        </p:txBody>
+      </p:sp>
+      <p:sp>
+        <p:nvSpPr>
+          <p:cNvPr id="1354104436" name="operating_cash_flow_2"/>
           <p:cNvSpPr txBox="1"/>
           <p:nvPr/>
         </p:nvSpPr>
@@ -11063,9 +11150,9 @@
                 <a:solidFill>
                   <a:schemeClr val="tx1"/>
                 </a:solidFill>
-                <a:latin typeface="Liberation Sans"/>
-                <a:ea typeface="Liberation Sans"/>
-                <a:cs typeface="Liberation Sans"/>
+                <a:latin typeface="Aptos Narrow"/>
+                <a:ea typeface="Aptos Narrow"/>
+                <a:cs typeface="Aptos Narrow"/>
               </a:rPr>
               <a:t>XX.XB</a:t>
             </a:r>
@@ -11073,15 +11160,15 @@
               <a:solidFill>
                 <a:schemeClr val="tx1"/>
               </a:solidFill>
-              <a:latin typeface="Liberation Sans"/>
-              <a:cs typeface="Liberation Sans"/>
-            </a:endParaRPr>
-          </a:p>
-        </p:txBody>
-      </p:sp>
-      <p:sp>
-        <p:nvSpPr>
-          <p:cNvPr id="599570348" name="operating_cash_flow_1"/>
+              <a:latin typeface="Aptos Narrow"/>
+              <a:cs typeface="Aptos Narrow"/>
+            </a:endParaRPr>
+          </a:p>
+        </p:txBody>
+      </p:sp>
+      <p:sp>
+        <p:nvSpPr>
+          <p:cNvPr id="74196186" name="operating_cash_flow_1"/>
           <p:cNvSpPr txBox="1"/>
           <p:nvPr/>
         </p:nvSpPr>
@@ -11108,9 +11195,9 @@
                 <a:solidFill>
                   <a:schemeClr val="tx1"/>
                 </a:solidFill>
-                <a:latin typeface="Liberation Sans"/>
-                <a:ea typeface="Liberation Sans"/>
-                <a:cs typeface="Liberation Sans"/>
+                <a:latin typeface="Aptos Narrow"/>
+                <a:ea typeface="Aptos Narrow"/>
+                <a:cs typeface="Aptos Narrow"/>
               </a:rPr>
               <a:t>XX.XB</a:t>
             </a:r>
@@ -11118,21 +11205,21 @@
               <a:solidFill>
                 <a:schemeClr val="tx1"/>
               </a:solidFill>
-              <a:latin typeface="Liberation Sans"/>
-              <a:cs typeface="Liberation Sans"/>
-            </a:endParaRPr>
-          </a:p>
-        </p:txBody>
-      </p:sp>
-      <p:sp>
-        <p:nvSpPr>
-          <p:cNvPr id="1576519319" name="operating_cash_flow_m"/>
+              <a:latin typeface="Aptos Narrow"/>
+              <a:cs typeface="Aptos Narrow"/>
+            </a:endParaRPr>
+          </a:p>
+        </p:txBody>
+      </p:sp>
+      <p:sp>
+        <p:nvSpPr>
+          <p:cNvPr id="1422938217" name="operating_cash_flow_m"/>
           <p:cNvSpPr txBox="1"/>
           <p:nvPr/>
         </p:nvSpPr>
         <p:spPr bwMode="auto">
           <a:xfrm rot="0" flipH="0" flipV="0">
-            <a:off x="5689598" y="4800530"/>
+            <a:off x="5689597" y="4800530"/>
             <a:ext cx="812799" cy="406396"/>
           </a:xfrm>
           <a:prstGeom prst="rect">
@@ -11153,9 +11240,9 @@
                 <a:solidFill>
                   <a:schemeClr val="tx1"/>
                 </a:solidFill>
-                <a:latin typeface="Liberation Sans"/>
-                <a:ea typeface="Liberation Sans"/>
-                <a:cs typeface="Liberation Sans"/>
+                <a:latin typeface="Aptos Narrow"/>
+                <a:ea typeface="Aptos Narrow"/>
+                <a:cs typeface="Aptos Narrow"/>
               </a:rPr>
               <a:t>X.X%</a:t>
             </a:r>
@@ -11163,15 +11250,15 @@
               <a:solidFill>
                 <a:schemeClr val="tx1"/>
               </a:solidFill>
-              <a:latin typeface="Liberation Sans"/>
-              <a:cs typeface="Liberation Sans"/>
-            </a:endParaRPr>
-          </a:p>
-        </p:txBody>
-      </p:sp>
-      <p:sp>
-        <p:nvSpPr>
-          <p:cNvPr id="1253344835" name="stock_price"/>
+              <a:latin typeface="Aptos Narrow"/>
+              <a:cs typeface="Aptos Narrow"/>
+            </a:endParaRPr>
+          </a:p>
+        </p:txBody>
+      </p:sp>
+      <p:sp>
+        <p:nvSpPr>
+          <p:cNvPr id="7614347" name="stock_price"/>
           <p:cNvSpPr txBox="1"/>
           <p:nvPr/>
         </p:nvSpPr>
@@ -11198,9 +11285,9 @@
                 <a:solidFill>
                   <a:schemeClr val="tx1"/>
                 </a:solidFill>
-                <a:latin typeface="Liberation Sans"/>
-                <a:ea typeface="Liberation Sans"/>
-                <a:cs typeface="Liberation Sans"/>
+                <a:latin typeface="Aptos Narrow"/>
+                <a:ea typeface="Aptos Narrow"/>
+                <a:cs typeface="Aptos Narrow"/>
               </a:rPr>
               <a:t>of revenue</a:t>
             </a:r>
@@ -11208,15 +11295,15 @@
               <a:solidFill>
                 <a:schemeClr val="tx1"/>
               </a:solidFill>
-              <a:latin typeface="Liberation Sans"/>
-              <a:cs typeface="Liberation Sans"/>
-            </a:endParaRPr>
-          </a:p>
-        </p:txBody>
-      </p:sp>
-      <p:sp>
-        <p:nvSpPr>
-          <p:cNvPr id="313328945" name="investing_cash_flow_3"/>
+              <a:latin typeface="Aptos Narrow"/>
+              <a:cs typeface="Aptos Narrow"/>
+            </a:endParaRPr>
+          </a:p>
+        </p:txBody>
+      </p:sp>
+      <p:sp>
+        <p:nvSpPr>
+          <p:cNvPr id="1975420472" name="investing_cash_flow_3"/>
           <p:cNvSpPr txBox="1"/>
           <p:nvPr/>
         </p:nvSpPr>
@@ -11243,9 +11330,9 @@
                 <a:solidFill>
                   <a:schemeClr val="tx1"/>
                 </a:solidFill>
-                <a:latin typeface="Liberation Sans"/>
-                <a:ea typeface="Liberation Sans"/>
-                <a:cs typeface="Liberation Sans"/>
+                <a:latin typeface="Aptos Narrow"/>
+                <a:ea typeface="Aptos Narrow"/>
+                <a:cs typeface="Aptos Narrow"/>
               </a:rPr>
               <a:t>XX.XB</a:t>
             </a:r>
@@ -11253,15 +11340,15 @@
               <a:solidFill>
                 <a:schemeClr val="tx1"/>
               </a:solidFill>
-              <a:latin typeface="Liberation Sans"/>
-              <a:cs typeface="Liberation Sans"/>
-            </a:endParaRPr>
-          </a:p>
-        </p:txBody>
-      </p:sp>
-      <p:sp>
-        <p:nvSpPr>
-          <p:cNvPr id="1257300371" name=""/>
+              <a:latin typeface="Aptos Narrow"/>
+              <a:cs typeface="Aptos Narrow"/>
+            </a:endParaRPr>
+          </a:p>
+        </p:txBody>
+      </p:sp>
+      <p:sp>
+        <p:nvSpPr>
+          <p:cNvPr id="1697246436" name=""/>
           <p:cNvSpPr txBox="1"/>
           <p:nvPr/>
         </p:nvSpPr>
@@ -11288,9 +11375,9 @@
                 <a:solidFill>
                   <a:schemeClr val="bg1"/>
                 </a:solidFill>
-                <a:latin typeface="Liberation Sans"/>
-                <a:ea typeface="Liberation Sans"/>
-                <a:cs typeface="Liberation Sans"/>
+                <a:latin typeface="Aptos Narrow"/>
+                <a:ea typeface="Aptos Narrow"/>
+                <a:cs typeface="Aptos Narrow"/>
               </a:rPr>
               <a:t>Investing CF</a:t>
             </a:r>
@@ -11298,15 +11385,15 @@
               <a:solidFill>
                 <a:schemeClr val="bg1"/>
               </a:solidFill>
-              <a:latin typeface="Liberation Sans"/>
-              <a:cs typeface="Liberation Sans"/>
-            </a:endParaRPr>
-          </a:p>
-        </p:txBody>
-      </p:sp>
-      <p:sp>
-        <p:nvSpPr>
-          <p:cNvPr id="70168265" name="investing_cash_flow_2"/>
+              <a:latin typeface="Aptos Narrow"/>
+              <a:cs typeface="Aptos Narrow"/>
+            </a:endParaRPr>
+          </a:p>
+        </p:txBody>
+      </p:sp>
+      <p:sp>
+        <p:nvSpPr>
+          <p:cNvPr id="2026156671" name="investing_cash_flow_2"/>
           <p:cNvSpPr txBox="1"/>
           <p:nvPr/>
         </p:nvSpPr>
@@ -11333,9 +11420,9 @@
                 <a:solidFill>
                   <a:schemeClr val="tx1"/>
                 </a:solidFill>
-                <a:latin typeface="Liberation Sans"/>
-                <a:ea typeface="Liberation Sans"/>
-                <a:cs typeface="Liberation Sans"/>
+                <a:latin typeface="Aptos Narrow"/>
+                <a:ea typeface="Aptos Narrow"/>
+                <a:cs typeface="Aptos Narrow"/>
               </a:rPr>
               <a:t>XX.XB</a:t>
             </a:r>
@@ -11343,15 +11430,15 @@
               <a:solidFill>
                 <a:schemeClr val="tx1"/>
               </a:solidFill>
-              <a:latin typeface="Liberation Sans"/>
-              <a:cs typeface="Liberation Sans"/>
-            </a:endParaRPr>
-          </a:p>
-        </p:txBody>
-      </p:sp>
-      <p:sp>
-        <p:nvSpPr>
-          <p:cNvPr id="2098840917" name="investing_cash_flow_1"/>
+              <a:latin typeface="Aptos Narrow"/>
+              <a:cs typeface="Aptos Narrow"/>
+            </a:endParaRPr>
+          </a:p>
+        </p:txBody>
+      </p:sp>
+      <p:sp>
+        <p:nvSpPr>
+          <p:cNvPr id="478273133" name="investing_cash_flow_1"/>
           <p:cNvSpPr txBox="1"/>
           <p:nvPr/>
         </p:nvSpPr>
@@ -11378,9 +11465,9 @@
                 <a:solidFill>
                   <a:schemeClr val="tx1"/>
                 </a:solidFill>
-                <a:latin typeface="Liberation Sans"/>
-                <a:ea typeface="Liberation Sans"/>
-                <a:cs typeface="Liberation Sans"/>
+                <a:latin typeface="Aptos Narrow"/>
+                <a:ea typeface="Aptos Narrow"/>
+                <a:cs typeface="Aptos Narrow"/>
               </a:rPr>
               <a:t>XX.XB</a:t>
             </a:r>
@@ -11388,21 +11475,21 @@
               <a:solidFill>
                 <a:schemeClr val="tx1"/>
               </a:solidFill>
-              <a:latin typeface="Liberation Sans"/>
-              <a:cs typeface="Liberation Sans"/>
-            </a:endParaRPr>
-          </a:p>
-        </p:txBody>
-      </p:sp>
-      <p:sp>
-        <p:nvSpPr>
-          <p:cNvPr id="1467057746" name="investing_cash_flow_m"/>
+              <a:latin typeface="Aptos Narrow"/>
+              <a:cs typeface="Aptos Narrow"/>
+            </a:endParaRPr>
+          </a:p>
+        </p:txBody>
+      </p:sp>
+      <p:sp>
+        <p:nvSpPr>
+          <p:cNvPr id="1978758114" name="investing_cash_flow_m"/>
           <p:cNvSpPr txBox="1"/>
           <p:nvPr/>
         </p:nvSpPr>
         <p:spPr bwMode="auto">
           <a:xfrm rot="0" flipH="0" flipV="0">
-            <a:off x="5689598" y="5232331"/>
+            <a:off x="5689597" y="5232331"/>
             <a:ext cx="812799" cy="406396"/>
           </a:xfrm>
           <a:prstGeom prst="rect">
@@ -11423,9 +11510,9 @@
                 <a:solidFill>
                   <a:schemeClr val="tx1"/>
                 </a:solidFill>
-                <a:latin typeface="Liberation Sans"/>
-                <a:ea typeface="Liberation Sans"/>
-                <a:cs typeface="Liberation Sans"/>
+                <a:latin typeface="Aptos Narrow"/>
+                <a:ea typeface="Aptos Narrow"/>
+                <a:cs typeface="Aptos Narrow"/>
               </a:rPr>
               <a:t>X.X%</a:t>
             </a:r>
@@ -11433,15 +11520,15 @@
               <a:solidFill>
                 <a:schemeClr val="tx1"/>
               </a:solidFill>
-              <a:latin typeface="Liberation Sans"/>
-              <a:cs typeface="Liberation Sans"/>
-            </a:endParaRPr>
-          </a:p>
-        </p:txBody>
-      </p:sp>
-      <p:sp>
-        <p:nvSpPr>
-          <p:cNvPr id="939470111" name="analyst_rating"/>
+              <a:latin typeface="Aptos Narrow"/>
+              <a:cs typeface="Aptos Narrow"/>
+            </a:endParaRPr>
+          </a:p>
+        </p:txBody>
+      </p:sp>
+      <p:sp>
+        <p:nvSpPr>
+          <p:cNvPr id="100304119" name="analyst_rating"/>
           <p:cNvSpPr txBox="1"/>
           <p:nvPr/>
         </p:nvSpPr>
@@ -11468,9 +11555,9 @@
                 <a:solidFill>
                   <a:schemeClr val="tx1"/>
                 </a:solidFill>
-                <a:latin typeface="Liberation Sans"/>
-                <a:ea typeface="Liberation Sans"/>
-                <a:cs typeface="Liberation Sans"/>
+                <a:latin typeface="Aptos Narrow"/>
+                <a:ea typeface="Aptos Narrow"/>
+                <a:cs typeface="Aptos Narrow"/>
               </a:rPr>
               <a:t>of revenue</a:t>
             </a:r>
@@ -11478,15 +11565,15 @@
               <a:solidFill>
                 <a:schemeClr val="tx1"/>
               </a:solidFill>
-              <a:latin typeface="Liberation Sans"/>
-              <a:cs typeface="Liberation Sans"/>
-            </a:endParaRPr>
-          </a:p>
-        </p:txBody>
-      </p:sp>
-      <p:sp>
-        <p:nvSpPr>
-          <p:cNvPr id="347780473" name=""/>
+              <a:latin typeface="Aptos Narrow"/>
+              <a:cs typeface="Aptos Narrow"/>
+            </a:endParaRPr>
+          </a:p>
+        </p:txBody>
+      </p:sp>
+      <p:sp>
+        <p:nvSpPr>
+          <p:cNvPr id="639718416" name=""/>
           <p:cNvSpPr txBox="1"/>
           <p:nvPr/>
         </p:nvSpPr>
@@ -11513,9 +11600,9 @@
                 <a:solidFill>
                   <a:schemeClr val="bg1"/>
                 </a:solidFill>
-                <a:latin typeface="Liberation Sans"/>
-                <a:ea typeface="Liberation Sans"/>
-                <a:cs typeface="Liberation Sans"/>
+                <a:latin typeface="Aptos Narrow"/>
+                <a:ea typeface="Aptos Narrow"/>
+                <a:cs typeface="Aptos Narrow"/>
               </a:rPr>
               <a:t>Free cash flow</a:t>
             </a:r>
@@ -11523,15 +11610,15 @@
               <a:solidFill>
                 <a:schemeClr val="bg1"/>
               </a:solidFill>
-              <a:latin typeface="Liberation Sans"/>
-              <a:cs typeface="Liberation Sans"/>
-            </a:endParaRPr>
-          </a:p>
-        </p:txBody>
-      </p:sp>
-      <p:sp>
-        <p:nvSpPr>
-          <p:cNvPr id="1373723498" name="free_cash_flow_3"/>
+              <a:latin typeface="Aptos Narrow"/>
+              <a:cs typeface="Aptos Narrow"/>
+            </a:endParaRPr>
+          </a:p>
+        </p:txBody>
+      </p:sp>
+      <p:sp>
+        <p:nvSpPr>
+          <p:cNvPr id="1210602920" name="free_cash_flow_3"/>
           <p:cNvSpPr txBox="1"/>
           <p:nvPr/>
         </p:nvSpPr>
@@ -11558,9 +11645,9 @@
                 <a:solidFill>
                   <a:schemeClr val="tx1"/>
                 </a:solidFill>
-                <a:latin typeface="Liberation Sans"/>
-                <a:ea typeface="Liberation Sans"/>
-                <a:cs typeface="Liberation Sans"/>
+                <a:latin typeface="Aptos Narrow"/>
+                <a:ea typeface="Aptos Narrow"/>
+                <a:cs typeface="Aptos Narrow"/>
               </a:rPr>
               <a:t>XX.XB</a:t>
             </a:r>
@@ -11568,15 +11655,15 @@
               <a:solidFill>
                 <a:schemeClr val="tx1"/>
               </a:solidFill>
-              <a:latin typeface="Liberation Sans"/>
-              <a:cs typeface="Liberation Sans"/>
-            </a:endParaRPr>
-          </a:p>
-        </p:txBody>
-      </p:sp>
-      <p:sp>
-        <p:nvSpPr>
-          <p:cNvPr id="72698928" name="free_cash_flow_2"/>
+              <a:latin typeface="Aptos Narrow"/>
+              <a:cs typeface="Aptos Narrow"/>
+            </a:endParaRPr>
+          </a:p>
+        </p:txBody>
+      </p:sp>
+      <p:sp>
+        <p:nvSpPr>
+          <p:cNvPr id="1103560410" name="free_cash_flow_2"/>
           <p:cNvSpPr txBox="1"/>
           <p:nvPr/>
         </p:nvSpPr>
@@ -11603,9 +11690,9 @@
                 <a:solidFill>
                   <a:schemeClr val="tx1"/>
                 </a:solidFill>
-                <a:latin typeface="Liberation Sans"/>
-                <a:ea typeface="Liberation Sans"/>
-                <a:cs typeface="Liberation Sans"/>
+                <a:latin typeface="Aptos Narrow"/>
+                <a:ea typeface="Aptos Narrow"/>
+                <a:cs typeface="Aptos Narrow"/>
               </a:rPr>
               <a:t>XX.XB</a:t>
             </a:r>
@@ -11613,15 +11700,15 @@
               <a:solidFill>
                 <a:schemeClr val="tx1"/>
               </a:solidFill>
-              <a:latin typeface="Liberation Sans"/>
-              <a:cs typeface="Liberation Sans"/>
-            </a:endParaRPr>
-          </a:p>
-        </p:txBody>
-      </p:sp>
-      <p:sp>
-        <p:nvSpPr>
-          <p:cNvPr id="63053690" name="free_cash_flow_1"/>
+              <a:latin typeface="Aptos Narrow"/>
+              <a:cs typeface="Aptos Narrow"/>
+            </a:endParaRPr>
+          </a:p>
+        </p:txBody>
+      </p:sp>
+      <p:sp>
+        <p:nvSpPr>
+          <p:cNvPr id="1868242619" name="free_cash_flow_1"/>
           <p:cNvSpPr txBox="1"/>
           <p:nvPr/>
         </p:nvSpPr>
@@ -11648,9 +11735,9 @@
                 <a:solidFill>
                   <a:schemeClr val="tx1"/>
                 </a:solidFill>
-                <a:latin typeface="Liberation Sans"/>
-                <a:ea typeface="Liberation Sans"/>
-                <a:cs typeface="Liberation Sans"/>
+                <a:latin typeface="Aptos Narrow"/>
+                <a:ea typeface="Aptos Narrow"/>
+                <a:cs typeface="Aptos Narrow"/>
               </a:rPr>
               <a:t>XX.XB</a:t>
             </a:r>
@@ -11658,21 +11745,21 @@
               <a:solidFill>
                 <a:schemeClr val="tx1"/>
               </a:solidFill>
-              <a:latin typeface="Liberation Sans"/>
-              <a:cs typeface="Liberation Sans"/>
-            </a:endParaRPr>
-          </a:p>
-        </p:txBody>
-      </p:sp>
-      <p:sp>
-        <p:nvSpPr>
-          <p:cNvPr id="1912630732" name="free_cash_flow_m"/>
+              <a:latin typeface="Aptos Narrow"/>
+              <a:cs typeface="Aptos Narrow"/>
+            </a:endParaRPr>
+          </a:p>
+        </p:txBody>
+      </p:sp>
+      <p:sp>
+        <p:nvSpPr>
+          <p:cNvPr id="369535547" name="free_cash_flow_m"/>
           <p:cNvSpPr txBox="1"/>
           <p:nvPr/>
         </p:nvSpPr>
         <p:spPr bwMode="auto">
           <a:xfrm rot="0" flipH="0" flipV="0">
-            <a:off x="5689598" y="5664198"/>
+            <a:off x="5689597" y="5664198"/>
             <a:ext cx="812799" cy="406396"/>
           </a:xfrm>
           <a:prstGeom prst="rect">
@@ -11693,9 +11780,9 @@
                 <a:solidFill>
                   <a:schemeClr val="tx1"/>
                 </a:solidFill>
-                <a:latin typeface="Liberation Sans"/>
-                <a:ea typeface="Liberation Sans"/>
-                <a:cs typeface="Liberation Sans"/>
+                <a:latin typeface="Aptos Narrow"/>
+                <a:ea typeface="Aptos Narrow"/>
+                <a:cs typeface="Aptos Narrow"/>
               </a:rPr>
               <a:t>X.X%</a:t>
             </a:r>
@@ -11703,15 +11790,15 @@
               <a:solidFill>
                 <a:schemeClr val="tx1"/>
               </a:solidFill>
-              <a:latin typeface="Liberation Sans"/>
-              <a:cs typeface="Liberation Sans"/>
-            </a:endParaRPr>
-          </a:p>
-        </p:txBody>
-      </p:sp>
-      <p:sp>
-        <p:nvSpPr>
-          <p:cNvPr id="403836670" name="beta"/>
+              <a:latin typeface="Aptos Narrow"/>
+              <a:cs typeface="Aptos Narrow"/>
+            </a:endParaRPr>
+          </a:p>
+        </p:txBody>
+      </p:sp>
+      <p:sp>
+        <p:nvSpPr>
+          <p:cNvPr id="1212938754" name="beta"/>
           <p:cNvSpPr txBox="1"/>
           <p:nvPr/>
         </p:nvSpPr>
@@ -11738,9 +11825,9 @@
                 <a:solidFill>
                   <a:schemeClr val="tx1"/>
                 </a:solidFill>
-                <a:latin typeface="Liberation Sans"/>
-                <a:ea typeface="Liberation Sans"/>
-                <a:cs typeface="Liberation Sans"/>
+                <a:latin typeface="Aptos Narrow"/>
+                <a:ea typeface="Aptos Narrow"/>
+                <a:cs typeface="Aptos Narrow"/>
               </a:rPr>
               <a:t>growth</a:t>
             </a:r>
@@ -11748,15 +11835,15 @@
               <a:solidFill>
                 <a:schemeClr val="tx1"/>
               </a:solidFill>
-              <a:latin typeface="Liberation Sans"/>
-              <a:cs typeface="Liberation Sans"/>
+              <a:latin typeface="Aptos Narrow"/>
+              <a:cs typeface="Aptos Narrow"/>
             </a:endParaRPr>
           </a:p>
         </p:txBody>
       </p:sp>
       <p:grpSp>
         <p:nvGrpSpPr>
-          <p:cNvPr id="208625309" name=""/>
+          <p:cNvPr id="1974635895" name=""/>
           <p:cNvGrpSpPr/>
           <p:nvPr/>
         </p:nvGrpSpPr>
@@ -11888,7 +11975,7 @@
       </p:grpSp>
       <p:grpSp>
         <p:nvGrpSpPr>
-          <p:cNvPr id="269783159" name=""/>
+          <p:cNvPr id="1834994646" name=""/>
           <p:cNvGrpSpPr/>
           <p:nvPr/>
         </p:nvGrpSpPr>
@@ -12020,7 +12107,7 @@
       </p:grpSp>
       <p:grpSp>
         <p:nvGrpSpPr>
-          <p:cNvPr id="280321001" name=""/>
+          <p:cNvPr id="1373217910" name=""/>
           <p:cNvGrpSpPr/>
           <p:nvPr/>
         </p:nvGrpSpPr>
@@ -12152,7 +12239,7 @@
       </p:grpSp>
       <p:grpSp>
         <p:nvGrpSpPr>
-          <p:cNvPr id="1356685955" name=""/>
+          <p:cNvPr id="1018919629" name=""/>
           <p:cNvGrpSpPr/>
           <p:nvPr/>
         </p:nvGrpSpPr>
@@ -12284,7 +12371,7 @@
       </p:grpSp>
       <p:grpSp>
         <p:nvGrpSpPr>
-          <p:cNvPr id="1718716677" name=""/>
+          <p:cNvPr id="1872328368" name=""/>
           <p:cNvGrpSpPr/>
           <p:nvPr/>
         </p:nvGrpSpPr>
@@ -12416,7 +12503,7 @@
       </p:grpSp>
       <p:grpSp>
         <p:nvGrpSpPr>
-          <p:cNvPr id="1854769100" name=""/>
+          <p:cNvPr id="295591005" name=""/>
           <p:cNvGrpSpPr/>
           <p:nvPr/>
         </p:nvGrpSpPr>
@@ -12548,7 +12635,7 @@
       </p:grpSp>
       <p:grpSp>
         <p:nvGrpSpPr>
-          <p:cNvPr id="252307598" name=""/>
+          <p:cNvPr id="934750425" name=""/>
           <p:cNvGrpSpPr/>
           <p:nvPr/>
         </p:nvGrpSpPr>
@@ -12680,7 +12767,7 @@
       </p:grpSp>
       <p:grpSp>
         <p:nvGrpSpPr>
-          <p:cNvPr id="2084922379" name=""/>
+          <p:cNvPr id="1616027137" name=""/>
           <p:cNvGrpSpPr/>
           <p:nvPr/>
         </p:nvGrpSpPr>
@@ -12845,7 +12932,7 @@
       </p:grpSpPr>
       <p:sp>
         <p:nvSpPr>
-          <p:cNvPr id="1333325587" name="Title 1"/>
+          <p:cNvPr id="1174977672" name="Title 1"/>
           <p:cNvSpPr>
             <a:spLocks noGrp="1"/>
           </p:cNvSpPr>
@@ -12866,9 +12953,9 @@
                 <a:solidFill>
                   <a:schemeClr val="accent1"/>
                 </a:solidFill>
-                <a:latin typeface="Arial"/>
-                <a:ea typeface="Arial"/>
-                <a:cs typeface="Arial"/>
+                <a:latin typeface="Aptos Narrow"/>
+                <a:ea typeface="Aptos Narrow"/>
+                <a:cs typeface="Aptos Narrow"/>
               </a:rPr>
               <a:t>{company_name}</a:t>
             </a:r>
@@ -12877,9 +12964,9 @@
                 <a:solidFill>
                   <a:schemeClr val="accent2"/>
                 </a:solidFill>
-                <a:latin typeface="Arial"/>
-                <a:ea typeface="Arial"/>
-                <a:cs typeface="Arial"/>
+                <a:latin typeface="Aptos Narrow"/>
+                <a:ea typeface="Aptos Narrow"/>
+                <a:cs typeface="Aptos Narrow"/>
               </a:rPr>
               <a:t> </a:t>
             </a:r>
@@ -12888,9 +12975,9 @@
                 <a:solidFill>
                   <a:schemeClr val="tx1"/>
                 </a:solidFill>
-                <a:latin typeface="+mj-lt"/>
-                <a:ea typeface="+mj-ea"/>
-                <a:cs typeface="+mj-cs"/>
+                <a:latin typeface="Aptos Narrow"/>
+                <a:ea typeface="Aptos Narrow"/>
+                <a:cs typeface="Aptos Narrow"/>
               </a:rPr>
               <a:t>| Current news</a:t>
             </a:r>
@@ -12898,13 +12985,15 @@
               <a:solidFill>
                 <a:schemeClr val="tx1"/>
               </a:solidFill>
-            </a:endParaRPr>
-          </a:p>
-        </p:txBody>
-      </p:sp>
-      <p:sp>
-        <p:nvSpPr>
-          <p:cNvPr id="1761126578" name="Footer Placeholder 4"/>
+              <a:latin typeface="Aptos Narrow"/>
+              <a:cs typeface="Aptos Narrow"/>
+            </a:endParaRPr>
+          </a:p>
+        </p:txBody>
+      </p:sp>
+      <p:sp>
+        <p:nvSpPr>
+          <p:cNvPr id="1934687515" name="Footer Placeholder 4"/>
           <p:cNvSpPr>
             <a:spLocks noGrp="1"/>
           </p:cNvSpPr>
@@ -12925,20 +13014,31 @@
               <a:defRPr/>
             </a:pPr>
             <a:r>
-              <a:rPr/>
+              <a:rPr>
+                <a:latin typeface="Aptos Narrow"/>
+                <a:ea typeface="Aptos Narrow"/>
+                <a:cs typeface="Aptos Narrow"/>
+              </a:rPr>
               <a:t>Source</a:t>
             </a:r>
             <a:r>
-              <a:rPr lang="it-IT"/>
+              <a:rPr lang="it-IT">
+                <a:latin typeface="Aptos Narrow"/>
+                <a:ea typeface="Aptos Narrow"/>
+                <a:cs typeface="Aptos Narrow"/>
+              </a:rPr>
               <a:t>: Yahoo Finance, Mistral</a:t>
             </a:r>
-            <a:endParaRPr/>
-          </a:p>
-        </p:txBody>
-      </p:sp>
-      <p:sp>
-        <p:nvSpPr>
-          <p:cNvPr id="1679673919" name="Slide Number Placeholder 5"/>
+            <a:endParaRPr>
+              <a:latin typeface="Aptos Narrow"/>
+              <a:cs typeface="Aptos Narrow"/>
+            </a:endParaRPr>
+          </a:p>
+        </p:txBody>
+      </p:sp>
+      <p:sp>
+        <p:nvSpPr>
+          <p:cNvPr id="467867098" name="Slide Number Placeholder 5"/>
           <p:cNvSpPr>
             <a:spLocks noGrp="1"/>
           </p:cNvSpPr>
@@ -12959,16 +13059,23 @@
               <a:defRPr/>
             </a:pPr>
             <a:fld id="{C9D403B2-8D87-49D1-E5D5-9F7B42A8873D}" type="slidenum">
-              <a:rPr lang="en-US"/>
+              <a:rPr lang="en-US">
+                <a:latin typeface="Aptos Narrow"/>
+                <a:ea typeface="Aptos Narrow"/>
+                <a:cs typeface="Aptos Narrow"/>
+              </a:rPr>
               <a:t>4</a:t>
             </a:fld>
-            <a:endParaRPr lang="en-US"/>
+            <a:endParaRPr>
+              <a:latin typeface="Aptos Narrow"/>
+              <a:cs typeface="Aptos Narrow"/>
+            </a:endParaRPr>
           </a:p>
         </p:txBody>
       </p:sp>
       <p:cxnSp>
         <p:nvCxnSpPr>
-          <p:cNvPr id="1311678184" name=""/>
+          <p:cNvPr id="387081750" name=""/>
           <p:cNvCxnSpPr/>
           <p:nvPr/>
         </p:nvCxnSpPr>
@@ -13007,7 +13114,7 @@
       </p:cxnSp>
       <p:sp>
         <p:nvSpPr>
-          <p:cNvPr id="2106336156" name=""/>
+          <p:cNvPr id="201570829" name=""/>
           <p:cNvSpPr txBox="1"/>
           <p:nvPr/>
         </p:nvSpPr>
@@ -13034,9 +13141,9 @@
                 <a:solidFill>
                   <a:schemeClr val="tx1"/>
                 </a:solidFill>
-                <a:latin typeface="Liberation Sans"/>
-                <a:ea typeface="Liberation Sans"/>
-                <a:cs typeface="Liberation Sans"/>
+                <a:latin typeface="Aptos Narrow"/>
+                <a:ea typeface="Aptos Narrow"/>
+                <a:cs typeface="Aptos Narrow"/>
               </a:rPr>
               <a:t>Top 3 topics in current news</a:t>
             </a:r>
@@ -13044,15 +13151,15 @@
               <a:solidFill>
                 <a:schemeClr val="tx1"/>
               </a:solidFill>
-              <a:latin typeface="Liberation Sans"/>
-              <a:cs typeface="Liberation Sans"/>
-            </a:endParaRPr>
-          </a:p>
-        </p:txBody>
-      </p:sp>
-      <p:sp>
-        <p:nvSpPr>
-          <p:cNvPr id="795405105" name="news_name_1"/>
+              <a:latin typeface="Aptos Narrow"/>
+              <a:cs typeface="Aptos Narrow"/>
+            </a:endParaRPr>
+          </a:p>
+        </p:txBody>
+      </p:sp>
+      <p:sp>
+        <p:nvSpPr>
+          <p:cNvPr id="362188383" name="news_name_1"/>
           <p:cNvSpPr/>
           <p:nvPr/>
         </p:nvSpPr>
@@ -13113,9 +13220,9 @@
                 <a:solidFill>
                   <a:schemeClr val="bg1"/>
                 </a:solidFill>
-                <a:latin typeface="Liberation Sans"/>
-                <a:ea typeface="Liberation Sans"/>
-                <a:cs typeface="Liberation Sans"/>
+                <a:latin typeface="Aptos Narrow"/>
+                <a:ea typeface="Aptos Narrow"/>
+                <a:cs typeface="Aptos Narrow"/>
               </a:rPr>
               <a:t>Lorem ipsum dolor sit amet</a:t>
             </a:r>
@@ -13123,15 +13230,15 @@
               <a:solidFill>
                 <a:schemeClr val="bg1"/>
               </a:solidFill>
-              <a:latin typeface="Liberation Sans"/>
-              <a:cs typeface="Liberation Sans"/>
-            </a:endParaRPr>
-          </a:p>
-        </p:txBody>
-      </p:sp>
-      <p:sp>
-        <p:nvSpPr>
-          <p:cNvPr id="1121890905" name="news_1"/>
+              <a:latin typeface="Aptos Narrow"/>
+              <a:cs typeface="Aptos Narrow"/>
+            </a:endParaRPr>
+          </a:p>
+        </p:txBody>
+      </p:sp>
+      <p:sp>
+        <p:nvSpPr>
+          <p:cNvPr id="1047532191" name="news_1"/>
           <p:cNvSpPr/>
           <p:nvPr/>
         </p:nvSpPr>
@@ -13191,9 +13298,9 @@
                 <a:solidFill>
                   <a:schemeClr val="tx1"/>
                 </a:solidFill>
-                <a:latin typeface="Liberation Sans"/>
-                <a:ea typeface="Liberation Sans"/>
-                <a:cs typeface="Liberation Sans"/>
+                <a:latin typeface="Aptos Narrow"/>
+                <a:ea typeface="Aptos Narrow"/>
+                <a:cs typeface="Aptos Narrow"/>
               </a:rPr>
               <a:t>Lorem ipsum dolor sit amet, consectetur adipiscing elit. Maecenas sed turpis ante. Vivamus id lorem orci. Phasellus ut quam purus. Nulla ligula leo, pharetra vitae sapien sit amet, pretium lacinia libero. Vivamus ligula ipsum, porta vel dapibus vel, tincidunt id libero. Duis euismod sit amet nisl eget molestie.</a:t>
             </a:r>
@@ -13201,15 +13308,15 @@
               <a:solidFill>
                 <a:schemeClr val="tx1"/>
               </a:solidFill>
-              <a:latin typeface="Liberation Sans"/>
-              <a:cs typeface="Liberation Sans"/>
-            </a:endParaRPr>
-          </a:p>
-        </p:txBody>
-      </p:sp>
-      <p:sp>
-        <p:nvSpPr>
-          <p:cNvPr id="201742281" name="news_name_2"/>
+              <a:latin typeface="Aptos Narrow"/>
+              <a:cs typeface="Aptos Narrow"/>
+            </a:endParaRPr>
+          </a:p>
+        </p:txBody>
+      </p:sp>
+      <p:sp>
+        <p:nvSpPr>
+          <p:cNvPr id="1624239741" name="news_name_2"/>
           <p:cNvSpPr/>
           <p:nvPr/>
         </p:nvSpPr>
@@ -13270,9 +13377,9 @@
                 <a:solidFill>
                   <a:schemeClr val="bg1"/>
                 </a:solidFill>
-                <a:latin typeface="Liberation Sans"/>
-                <a:ea typeface="Liberation Sans"/>
-                <a:cs typeface="Liberation Sans"/>
+                <a:latin typeface="Aptos Narrow"/>
+                <a:ea typeface="Aptos Narrow"/>
+                <a:cs typeface="Aptos Narrow"/>
               </a:rPr>
               <a:t>Lorem ipsum dolor sit amet</a:t>
             </a:r>
@@ -13280,15 +13387,15 @@
               <a:solidFill>
                 <a:schemeClr val="bg1"/>
               </a:solidFill>
-              <a:latin typeface="Liberation Sans"/>
-              <a:cs typeface="Liberation Sans"/>
-            </a:endParaRPr>
-          </a:p>
-        </p:txBody>
-      </p:sp>
-      <p:sp>
-        <p:nvSpPr>
-          <p:cNvPr id="263475843" name="news_2"/>
+              <a:latin typeface="Aptos Narrow"/>
+              <a:cs typeface="Aptos Narrow"/>
+            </a:endParaRPr>
+          </a:p>
+        </p:txBody>
+      </p:sp>
+      <p:sp>
+        <p:nvSpPr>
+          <p:cNvPr id="688228965" name="news_2"/>
           <p:cNvSpPr/>
           <p:nvPr/>
         </p:nvSpPr>
@@ -13348,9 +13455,9 @@
                 <a:solidFill>
                   <a:schemeClr val="tx1"/>
                 </a:solidFill>
-                <a:latin typeface="Liberation Sans"/>
-                <a:ea typeface="Liberation Sans"/>
-                <a:cs typeface="Liberation Sans"/>
+                <a:latin typeface="Aptos Narrow"/>
+                <a:ea typeface="Aptos Narrow"/>
+                <a:cs typeface="Aptos Narrow"/>
               </a:rPr>
               <a:t>Lorem ipsum dolor sit amet, consectetur adipiscing elit. Maecenas sed turpis ante. Vivamus id lorem orci. Phasellus ut quam purus. Nulla ligula leo, pharetra vitae sapien sit amet, pretium lacinia libero. Vivamus ligula ipsum, porta vel dapibus vel, tincidunt id libero. Duis euismod sit amet nisl eget molestie.</a:t>
             </a:r>
@@ -13358,15 +13465,15 @@
               <a:solidFill>
                 <a:schemeClr val="tx1"/>
               </a:solidFill>
-              <a:latin typeface="Liberation Sans"/>
-              <a:cs typeface="Liberation Sans"/>
-            </a:endParaRPr>
-          </a:p>
-        </p:txBody>
-      </p:sp>
-      <p:sp>
-        <p:nvSpPr>
-          <p:cNvPr id="22942487" name="news_name_3"/>
+              <a:latin typeface="Aptos Narrow"/>
+              <a:cs typeface="Aptos Narrow"/>
+            </a:endParaRPr>
+          </a:p>
+        </p:txBody>
+      </p:sp>
+      <p:sp>
+        <p:nvSpPr>
+          <p:cNvPr id="1616617812" name="news_name_3"/>
           <p:cNvSpPr/>
           <p:nvPr/>
         </p:nvSpPr>
@@ -13427,9 +13534,9 @@
                 <a:solidFill>
                   <a:schemeClr val="bg1"/>
                 </a:solidFill>
-                <a:latin typeface="Liberation Sans"/>
-                <a:ea typeface="Liberation Sans"/>
-                <a:cs typeface="Liberation Sans"/>
+                <a:latin typeface="Aptos Narrow"/>
+                <a:ea typeface="Aptos Narrow"/>
+                <a:cs typeface="Aptos Narrow"/>
               </a:rPr>
               <a:t>Lorem ipsum dolor sit amet</a:t>
             </a:r>
@@ -13437,15 +13544,15 @@
               <a:solidFill>
                 <a:schemeClr val="bg1"/>
               </a:solidFill>
-              <a:latin typeface="Liberation Sans"/>
-              <a:cs typeface="Liberation Sans"/>
-            </a:endParaRPr>
-          </a:p>
-        </p:txBody>
-      </p:sp>
-      <p:sp>
-        <p:nvSpPr>
-          <p:cNvPr id="907737130" name="news_3"/>
+              <a:latin typeface="Aptos Narrow"/>
+              <a:cs typeface="Aptos Narrow"/>
+            </a:endParaRPr>
+          </a:p>
+        </p:txBody>
+      </p:sp>
+      <p:sp>
+        <p:nvSpPr>
+          <p:cNvPr id="1724349472" name="news_3"/>
           <p:cNvSpPr/>
           <p:nvPr/>
         </p:nvSpPr>
@@ -13505,9 +13612,9 @@
                 <a:solidFill>
                   <a:schemeClr val="tx1"/>
                 </a:solidFill>
-                <a:latin typeface="Liberation Sans"/>
-                <a:ea typeface="Liberation Sans"/>
-                <a:cs typeface="Liberation Sans"/>
+                <a:latin typeface="Aptos Narrow"/>
+                <a:ea typeface="Aptos Narrow"/>
+                <a:cs typeface="Aptos Narrow"/>
               </a:rPr>
               <a:t>Lorem ipsum dolor sit amet, consectetur adipiscing elit. Maecenas sed turpis ante. Vivamus id lorem orci. Phasellus ut quam purus. Nulla ligula leo, pharetra vitae sapien sit amet, pretium lacinia libero. Vivamus ligula ipsum, porta vel dapibus vel, tincidunt id libero. Duis euismod sit amet nisl eget molestie.</a:t>
             </a:r>
@@ -13515,8 +13622,8 @@
               <a:solidFill>
                 <a:schemeClr val="tx1"/>
               </a:solidFill>
-              <a:latin typeface="Liberation Sans"/>
-              <a:cs typeface="Liberation Sans"/>
+              <a:latin typeface="Aptos Narrow"/>
+              <a:cs typeface="Aptos Narrow"/>
             </a:endParaRPr>
           </a:p>
         </p:txBody>

--- a/templates/deck.pptx
+++ b/templates/deck.pptx
@@ -138,7 +138,7 @@
       </p:grpSpPr>
       <p:sp>
         <p:nvSpPr>
-          <p:cNvPr id="23593898" name="Header Placeholder 1"/>
+          <p:cNvPr id="1986120398" name="Header Placeholder 1"/>
           <p:cNvSpPr>
             <a:spLocks noGrp="1"/>
           </p:cNvSpPr>
@@ -172,7 +172,7 @@
       </p:sp>
       <p:sp>
         <p:nvSpPr>
-          <p:cNvPr id="1892694564" name="Date Placeholder 2"/>
+          <p:cNvPr id="1492915702" name="Date Placeholder 2"/>
           <p:cNvSpPr>
             <a:spLocks noGrp="1"/>
           </p:cNvSpPr>
@@ -210,7 +210,7 @@
       </p:sp>
       <p:sp>
         <p:nvSpPr>
-          <p:cNvPr id="955964301" name="Slide Image Placeholder 3"/>
+          <p:cNvPr id="47906238" name="Slide Image Placeholder 3"/>
           <p:cNvSpPr>
             <a:spLocks noChangeAspect="1" noGrp="1" noRot="1"/>
           </p:cNvSpPr>
@@ -246,7 +246,7 @@
       </p:sp>
       <p:sp>
         <p:nvSpPr>
-          <p:cNvPr id="116100726" name="Notes Placeholder 4"/>
+          <p:cNvPr id="401955108" name="Notes Placeholder 4"/>
           <p:cNvSpPr>
             <a:spLocks noGrp="1"/>
           </p:cNvSpPr>
@@ -320,7 +320,7 @@
       </p:sp>
       <p:sp>
         <p:nvSpPr>
-          <p:cNvPr id="1691835220" name="Footer Placeholder 5"/>
+          <p:cNvPr id="958089075" name="Footer Placeholder 5"/>
           <p:cNvSpPr>
             <a:spLocks noGrp="1"/>
           </p:cNvSpPr>
@@ -354,7 +354,7 @@
       </p:sp>
       <p:sp>
         <p:nvSpPr>
-          <p:cNvPr id="1978663792" name="Slide Number Placeholder 6"/>
+          <p:cNvPr id="1070105755" name="Slide Number Placeholder 6"/>
           <p:cNvSpPr>
             <a:spLocks noGrp="1"/>
           </p:cNvSpPr>
@@ -508,7 +508,7 @@
       </p:grpSpPr>
       <p:sp>
         <p:nvSpPr>
-          <p:cNvPr id="1277807648" name="Slide Image Placeholder 1"/>
+          <p:cNvPr id="460932639" name="Slide Image Placeholder 1"/>
           <p:cNvSpPr>
             <a:spLocks noChangeAspect="1" noGrp="1" noRot="1"/>
           </p:cNvSpPr>
@@ -525,7 +525,7 @@
       </p:sp>
       <p:sp>
         <p:nvSpPr>
-          <p:cNvPr id="1192272784" name="Notes Placeholder 2"/>
+          <p:cNvPr id="1910425034" name="Notes Placeholder 2"/>
           <p:cNvSpPr>
             <a:spLocks noGrp="1"/>
           </p:cNvSpPr>
@@ -550,7 +550,7 @@
       </p:sp>
       <p:sp>
         <p:nvSpPr>
-          <p:cNvPr id="342950881" name="Slide Number Placeholder 3"/>
+          <p:cNvPr id="449028338" name="Slide Number Placeholder 3"/>
           <p:cNvSpPr>
             <a:spLocks noGrp="1"/>
           </p:cNvSpPr>
@@ -601,7 +601,7 @@
       </p:grpSpPr>
       <p:sp>
         <p:nvSpPr>
-          <p:cNvPr id="1637395676" name="Slide Image Placeholder 1"/>
+          <p:cNvPr id="527255475" name="Slide Image Placeholder 1"/>
           <p:cNvSpPr>
             <a:spLocks noChangeAspect="1" noGrp="1" noRot="1"/>
           </p:cNvSpPr>
@@ -613,7 +613,7 @@
       </p:sp>
       <p:sp>
         <p:nvSpPr>
-          <p:cNvPr id="1379254967" name="Notes Placeholder 2"/>
+          <p:cNvPr id="170307319" name="Notes Placeholder 2"/>
           <p:cNvSpPr>
             <a:spLocks noGrp="1"/>
           </p:cNvSpPr>
@@ -635,7 +635,7 @@
       </p:sp>
       <p:sp>
         <p:nvSpPr>
-          <p:cNvPr id="731807742" name="Slide Number Placeholder 3"/>
+          <p:cNvPr id="308038541" name="Slide Number Placeholder 3"/>
           <p:cNvSpPr>
             <a:spLocks noGrp="1"/>
           </p:cNvSpPr>
@@ -686,7 +686,7 @@
       </p:grpSpPr>
       <p:sp>
         <p:nvSpPr>
-          <p:cNvPr id="198765881" name="Slide Image Placeholder 1"/>
+          <p:cNvPr id="78037060" name="Slide Image Placeholder 1"/>
           <p:cNvSpPr>
             <a:spLocks noChangeAspect="1" noGrp="1" noRot="1"/>
           </p:cNvSpPr>
@@ -698,7 +698,7 @@
       </p:sp>
       <p:sp>
         <p:nvSpPr>
-          <p:cNvPr id="956551937" name="Notes Placeholder 2"/>
+          <p:cNvPr id="1443622122" name="Notes Placeholder 2"/>
           <p:cNvSpPr>
             <a:spLocks noGrp="1"/>
           </p:cNvSpPr>
@@ -720,7 +720,7 @@
       </p:sp>
       <p:sp>
         <p:nvSpPr>
-          <p:cNvPr id="854612861" name="Slide Number Placeholder 3"/>
+          <p:cNvPr id="992497594" name="Slide Number Placeholder 3"/>
           <p:cNvSpPr>
             <a:spLocks noGrp="1"/>
           </p:cNvSpPr>
@@ -771,7 +771,7 @@
       </p:grpSpPr>
       <p:sp>
         <p:nvSpPr>
-          <p:cNvPr id="1621052958" name="Slide Image Placeholder 1"/>
+          <p:cNvPr id="502043561" name="Slide Image Placeholder 1"/>
           <p:cNvSpPr>
             <a:spLocks noChangeAspect="1" noGrp="1" noRot="1"/>
           </p:cNvSpPr>
@@ -783,7 +783,7 @@
       </p:sp>
       <p:sp>
         <p:nvSpPr>
-          <p:cNvPr id="397380033" name="Notes Placeholder 2"/>
+          <p:cNvPr id="310392876" name="Notes Placeholder 2"/>
           <p:cNvSpPr>
             <a:spLocks noGrp="1"/>
           </p:cNvSpPr>
@@ -805,7 +805,7 @@
       </p:sp>
       <p:sp>
         <p:nvSpPr>
-          <p:cNvPr id="1704994492" name="Slide Number Placeholder 3"/>
+          <p:cNvPr id="1373502679" name="Slide Number Placeholder 3"/>
           <p:cNvSpPr>
             <a:spLocks noGrp="1"/>
           </p:cNvSpPr>
@@ -856,7 +856,7 @@
       </p:grpSpPr>
       <p:sp>
         <p:nvSpPr>
-          <p:cNvPr id="1717412697" name="Slide Image Placeholder 1"/>
+          <p:cNvPr id="2021533688" name="Slide Image Placeholder 1"/>
           <p:cNvSpPr>
             <a:spLocks noChangeAspect="1" noGrp="1" noRot="1"/>
           </p:cNvSpPr>
@@ -868,7 +868,7 @@
       </p:sp>
       <p:sp>
         <p:nvSpPr>
-          <p:cNvPr id="470450832" name="Notes Placeholder 2"/>
+          <p:cNvPr id="644205523" name="Notes Placeholder 2"/>
           <p:cNvSpPr>
             <a:spLocks noGrp="1"/>
           </p:cNvSpPr>
@@ -890,7 +890,7 @@
       </p:sp>
       <p:sp>
         <p:nvSpPr>
-          <p:cNvPr id="213769102" name="Slide Number Placeholder 3"/>
+          <p:cNvPr id="671498966" name="Slide Number Placeholder 3"/>
           <p:cNvSpPr>
             <a:spLocks noGrp="1"/>
           </p:cNvSpPr>
@@ -958,7 +958,7 @@
       </p:grpSpPr>
       <p:sp>
         <p:nvSpPr>
-          <p:cNvPr id="1048155354" name="Rectangle 1245485961"/>
+          <p:cNvPr id="700301250" name="Rectangle 1245485961"/>
           <p:cNvSpPr/>
           <p:nvPr/>
         </p:nvSpPr>
@@ -1006,10 +1006,22 @@
             <a:schemeClr val="lt1"/>
           </a:fontRef>
         </p:style>
+        <p:txBody>
+          <a:bodyPr anchor="ctr"/>
+          <a:p>
+            <a:pPr algn="ctr">
+              <a:defRPr/>
+            </a:pPr>
+            <a:endParaRPr>
+              <a:latin typeface="Aptos Narrow"/>
+              <a:cs typeface="Aptos Narrow"/>
+            </a:endParaRPr>
+          </a:p>
+        </p:txBody>
       </p:sp>
       <p:cxnSp>
         <p:nvCxnSpPr>
-          <p:cNvPr id="1307799707" name=""/>
+          <p:cNvPr id="1072396912" name=""/>
           <p:cNvCxnSpPr/>
           <p:nvPr/>
         </p:nvCxnSpPr>
@@ -1048,7 +1060,7 @@
       </p:cxnSp>
       <p:sp>
         <p:nvSpPr>
-          <p:cNvPr id="304512434" name="Title 1"/>
+          <p:cNvPr id="125540775" name="Title 1"/>
           <p:cNvSpPr>
             <a:spLocks noGrp="1"/>
           </p:cNvSpPr>
@@ -1070,9 +1082,9 @@
                 <a:solidFill>
                   <a:schemeClr val="tx1"/>
                 </a:solidFill>
-                <a:latin typeface="Liberation Sans"/>
-                <a:ea typeface="Liberation Sans"/>
-                <a:cs typeface="Liberation Sans"/>
+                <a:latin typeface="Aptos Narrow"/>
+                <a:ea typeface="Aptos Narrow"/>
+                <a:cs typeface="Aptos Narrow"/>
               </a:defRPr>
             </a:lvl1pPr>
             <a:lvl2pPr algn="l">
@@ -1080,9 +1092,9 @@
                 <a:solidFill>
                   <a:schemeClr val="tx1"/>
                 </a:solidFill>
-                <a:latin typeface="Liberation Sans"/>
-                <a:ea typeface="Liberation Sans"/>
-                <a:cs typeface="Liberation Sans"/>
+                <a:latin typeface="Aptos Narrow"/>
+                <a:ea typeface="Aptos Narrow"/>
+                <a:cs typeface="Aptos Narrow"/>
               </a:defRPr>
             </a:lvl2pPr>
             <a:lvl3pPr algn="l">
@@ -1090,9 +1102,9 @@
                 <a:solidFill>
                   <a:schemeClr val="tx1"/>
                 </a:solidFill>
-                <a:latin typeface="Liberation Sans"/>
-                <a:ea typeface="Liberation Sans"/>
-                <a:cs typeface="Liberation Sans"/>
+                <a:latin typeface="Aptos Narrow"/>
+                <a:ea typeface="Aptos Narrow"/>
+                <a:cs typeface="Aptos Narrow"/>
               </a:defRPr>
             </a:lvl3pPr>
             <a:lvl4pPr algn="l">
@@ -1100,9 +1112,9 @@
                 <a:solidFill>
                   <a:schemeClr val="tx1"/>
                 </a:solidFill>
-                <a:latin typeface="Liberation Sans"/>
-                <a:ea typeface="Liberation Sans"/>
-                <a:cs typeface="Liberation Sans"/>
+                <a:latin typeface="Aptos Narrow"/>
+                <a:ea typeface="Aptos Narrow"/>
+                <a:cs typeface="Aptos Narrow"/>
               </a:defRPr>
             </a:lvl4pPr>
             <a:lvl5pPr algn="l">
@@ -1110,9 +1122,9 @@
                 <a:solidFill>
                   <a:schemeClr val="tx1"/>
                 </a:solidFill>
-                <a:latin typeface="Liberation Sans"/>
-                <a:ea typeface="Liberation Sans"/>
-                <a:cs typeface="Liberation Sans"/>
+                <a:latin typeface="Aptos Narrow"/>
+                <a:ea typeface="Aptos Narrow"/>
+                <a:cs typeface="Aptos Narrow"/>
               </a:defRPr>
             </a:lvl5pPr>
             <a:lvl6pPr algn="l">
@@ -1120,9 +1132,9 @@
                 <a:solidFill>
                   <a:schemeClr val="tx1"/>
                 </a:solidFill>
-                <a:latin typeface="Liberation Sans"/>
-                <a:ea typeface="Liberation Sans"/>
-                <a:cs typeface="Liberation Sans"/>
+                <a:latin typeface="Aptos Narrow"/>
+                <a:ea typeface="Aptos Narrow"/>
+                <a:cs typeface="Aptos Narrow"/>
               </a:defRPr>
             </a:lvl6pPr>
             <a:lvl7pPr algn="l">
@@ -1130,9 +1142,9 @@
                 <a:solidFill>
                   <a:schemeClr val="tx1"/>
                 </a:solidFill>
-                <a:latin typeface="Liberation Sans"/>
-                <a:ea typeface="Liberation Sans"/>
-                <a:cs typeface="Liberation Sans"/>
+                <a:latin typeface="Aptos Narrow"/>
+                <a:ea typeface="Aptos Narrow"/>
+                <a:cs typeface="Aptos Narrow"/>
               </a:defRPr>
             </a:lvl7pPr>
             <a:lvl8pPr algn="l">
@@ -1140,9 +1152,9 @@
                 <a:solidFill>
                   <a:schemeClr val="tx1"/>
                 </a:solidFill>
-                <a:latin typeface="Liberation Sans"/>
-                <a:ea typeface="Liberation Sans"/>
-                <a:cs typeface="Liberation Sans"/>
+                <a:latin typeface="Aptos Narrow"/>
+                <a:ea typeface="Aptos Narrow"/>
+                <a:cs typeface="Aptos Narrow"/>
               </a:defRPr>
             </a:lvl8pPr>
             <a:lvl9pPr algn="l">
@@ -1150,9 +1162,9 @@
                 <a:solidFill>
                   <a:schemeClr val="tx1"/>
                 </a:solidFill>
-                <a:latin typeface="Liberation Sans"/>
-                <a:ea typeface="Liberation Sans"/>
-                <a:cs typeface="Liberation Sans"/>
+                <a:latin typeface="Aptos Narrow"/>
+                <a:ea typeface="Aptos Narrow"/>
+                <a:cs typeface="Aptos Narrow"/>
               </a:defRPr>
             </a:lvl9pPr>
           </a:lstStyle>
@@ -1170,7 +1182,7 @@
       </p:sp>
       <p:sp>
         <p:nvSpPr>
-          <p:cNvPr id="245793783" name="Subtitle 2"/>
+          <p:cNvPr id="679497811" name="Subtitle 2"/>
           <p:cNvSpPr>
             <a:spLocks noGrp="1"/>
           </p:cNvSpPr>
@@ -1193,9 +1205,9 @@
                 <a:solidFill>
                   <a:schemeClr val="tx1"/>
                 </a:solidFill>
-                <a:latin typeface="Liberation Sans"/>
-                <a:ea typeface="Liberation Sans"/>
-                <a:cs typeface="Liberation Sans"/>
+                <a:latin typeface="Aptos Narrow"/>
+                <a:ea typeface="Aptos Narrow"/>
+                <a:cs typeface="Aptos Narrow"/>
               </a:defRPr>
             </a:lvl1pPr>
             <a:lvl2pPr marL="457200" indent="0" algn="l">
@@ -1204,9 +1216,9 @@
                 <a:solidFill>
                   <a:schemeClr val="tx1"/>
                 </a:solidFill>
-                <a:latin typeface="Liberation Sans"/>
-                <a:ea typeface="Liberation Sans"/>
-                <a:cs typeface="Liberation Sans"/>
+                <a:latin typeface="Aptos Narrow"/>
+                <a:ea typeface="Aptos Narrow"/>
+                <a:cs typeface="Aptos Narrow"/>
               </a:defRPr>
             </a:lvl2pPr>
             <a:lvl3pPr marL="914400" indent="0" algn="l">
@@ -1215,9 +1227,9 @@
                 <a:solidFill>
                   <a:schemeClr val="tx1"/>
                 </a:solidFill>
-                <a:latin typeface="Liberation Sans"/>
-                <a:ea typeface="Liberation Sans"/>
-                <a:cs typeface="Liberation Sans"/>
+                <a:latin typeface="Aptos Narrow"/>
+                <a:ea typeface="Aptos Narrow"/>
+                <a:cs typeface="Aptos Narrow"/>
               </a:defRPr>
             </a:lvl3pPr>
             <a:lvl4pPr marL="1371600" indent="0" algn="l">
@@ -1226,9 +1238,9 @@
                 <a:solidFill>
                   <a:schemeClr val="tx1"/>
                 </a:solidFill>
-                <a:latin typeface="Liberation Sans"/>
-                <a:ea typeface="Liberation Sans"/>
-                <a:cs typeface="Liberation Sans"/>
+                <a:latin typeface="Aptos Narrow"/>
+                <a:ea typeface="Aptos Narrow"/>
+                <a:cs typeface="Aptos Narrow"/>
               </a:defRPr>
             </a:lvl4pPr>
             <a:lvl5pPr marL="1828800" indent="0" algn="l">
@@ -1237,9 +1249,9 @@
                 <a:solidFill>
                   <a:schemeClr val="tx1"/>
                 </a:solidFill>
-                <a:latin typeface="Liberation Sans"/>
-                <a:ea typeface="Liberation Sans"/>
-                <a:cs typeface="Liberation Sans"/>
+                <a:latin typeface="Aptos Narrow"/>
+                <a:ea typeface="Aptos Narrow"/>
+                <a:cs typeface="Aptos Narrow"/>
               </a:defRPr>
             </a:lvl5pPr>
             <a:lvl6pPr marL="2286000" indent="0" algn="l">
@@ -1248,9 +1260,9 @@
                 <a:solidFill>
                   <a:schemeClr val="tx1"/>
                 </a:solidFill>
-                <a:latin typeface="Liberation Sans"/>
-                <a:ea typeface="Liberation Sans"/>
-                <a:cs typeface="Liberation Sans"/>
+                <a:latin typeface="Aptos Narrow"/>
+                <a:ea typeface="Aptos Narrow"/>
+                <a:cs typeface="Aptos Narrow"/>
               </a:defRPr>
             </a:lvl6pPr>
             <a:lvl7pPr marL="2743200" indent="0" algn="l">
@@ -1259,9 +1271,9 @@
                 <a:solidFill>
                   <a:schemeClr val="tx1"/>
                 </a:solidFill>
-                <a:latin typeface="Liberation Sans"/>
-                <a:ea typeface="Liberation Sans"/>
-                <a:cs typeface="Liberation Sans"/>
+                <a:latin typeface="Aptos Narrow"/>
+                <a:ea typeface="Aptos Narrow"/>
+                <a:cs typeface="Aptos Narrow"/>
               </a:defRPr>
             </a:lvl7pPr>
             <a:lvl8pPr marL="3200400" indent="0" algn="l">
@@ -1270,9 +1282,9 @@
                 <a:solidFill>
                   <a:schemeClr val="tx1"/>
                 </a:solidFill>
-                <a:latin typeface="Liberation Sans"/>
-                <a:ea typeface="Liberation Sans"/>
-                <a:cs typeface="Liberation Sans"/>
+                <a:latin typeface="Aptos Narrow"/>
+                <a:ea typeface="Aptos Narrow"/>
+                <a:cs typeface="Aptos Narrow"/>
               </a:defRPr>
             </a:lvl8pPr>
             <a:lvl9pPr marL="3657600" indent="0" algn="l">
@@ -1281,9 +1293,9 @@
                 <a:solidFill>
                   <a:schemeClr val="tx1"/>
                 </a:solidFill>
-                <a:latin typeface="Liberation Sans"/>
-                <a:ea typeface="Liberation Sans"/>
-                <a:cs typeface="Liberation Sans"/>
+                <a:latin typeface="Aptos Narrow"/>
+                <a:ea typeface="Aptos Narrow"/>
+                <a:cs typeface="Aptos Narrow"/>
               </a:defRPr>
             </a:lvl9pPr>
           </a:lstStyle>
@@ -1333,7 +1345,7 @@
       </p:grpSpPr>
       <p:sp>
         <p:nvSpPr>
-          <p:cNvPr id="187451782" name="Title 1"/>
+          <p:cNvPr id="431267400" name="Title 1"/>
           <p:cNvSpPr>
             <a:spLocks noGrp="1"/>
           </p:cNvSpPr>
@@ -1357,9 +1369,9 @@
                 <a:solidFill>
                   <a:schemeClr val="tx1"/>
                 </a:solidFill>
-                <a:latin typeface="Liberation Sans"/>
-                <a:ea typeface="Liberation Sans"/>
-                <a:cs typeface="Liberation Sans"/>
+                <a:latin typeface="Aptos Narrow"/>
+                <a:ea typeface="Aptos Narrow"/>
+                <a:cs typeface="Aptos Narrow"/>
               </a:defRPr>
             </a:lvl1pPr>
             <a:lvl2pPr>
@@ -1367,9 +1379,9 @@
                 <a:solidFill>
                   <a:schemeClr val="tx1"/>
                 </a:solidFill>
-                <a:latin typeface="Liberation Sans"/>
-                <a:ea typeface="Liberation Sans"/>
-                <a:cs typeface="Liberation Sans"/>
+                <a:latin typeface="Aptos Narrow"/>
+                <a:ea typeface="Aptos Narrow"/>
+                <a:cs typeface="Aptos Narrow"/>
               </a:defRPr>
             </a:lvl2pPr>
             <a:lvl3pPr>
@@ -1377,9 +1389,9 @@
                 <a:solidFill>
                   <a:schemeClr val="tx1"/>
                 </a:solidFill>
-                <a:latin typeface="Liberation Sans"/>
-                <a:ea typeface="Liberation Sans"/>
-                <a:cs typeface="Liberation Sans"/>
+                <a:latin typeface="Aptos Narrow"/>
+                <a:ea typeface="Aptos Narrow"/>
+                <a:cs typeface="Aptos Narrow"/>
               </a:defRPr>
             </a:lvl3pPr>
             <a:lvl4pPr>
@@ -1387,9 +1399,9 @@
                 <a:solidFill>
                   <a:schemeClr val="tx1"/>
                 </a:solidFill>
-                <a:latin typeface="Liberation Sans"/>
-                <a:ea typeface="Liberation Sans"/>
-                <a:cs typeface="Liberation Sans"/>
+                <a:latin typeface="Aptos Narrow"/>
+                <a:ea typeface="Aptos Narrow"/>
+                <a:cs typeface="Aptos Narrow"/>
               </a:defRPr>
             </a:lvl4pPr>
             <a:lvl5pPr>
@@ -1397,9 +1409,9 @@
                 <a:solidFill>
                   <a:schemeClr val="tx1"/>
                 </a:solidFill>
-                <a:latin typeface="Liberation Sans"/>
-                <a:ea typeface="Liberation Sans"/>
-                <a:cs typeface="Liberation Sans"/>
+                <a:latin typeface="Aptos Narrow"/>
+                <a:ea typeface="Aptos Narrow"/>
+                <a:cs typeface="Aptos Narrow"/>
               </a:defRPr>
             </a:lvl5pPr>
             <a:lvl6pPr>
@@ -1407,9 +1419,9 @@
                 <a:solidFill>
                   <a:schemeClr val="tx1"/>
                 </a:solidFill>
-                <a:latin typeface="Liberation Sans"/>
-                <a:ea typeface="Liberation Sans"/>
-                <a:cs typeface="Liberation Sans"/>
+                <a:latin typeface="Aptos Narrow"/>
+                <a:ea typeface="Aptos Narrow"/>
+                <a:cs typeface="Aptos Narrow"/>
               </a:defRPr>
             </a:lvl6pPr>
             <a:lvl7pPr>
@@ -1417,9 +1429,9 @@
                 <a:solidFill>
                   <a:schemeClr val="tx1"/>
                 </a:solidFill>
-                <a:latin typeface="Liberation Sans"/>
-                <a:ea typeface="Liberation Sans"/>
-                <a:cs typeface="Liberation Sans"/>
+                <a:latin typeface="Aptos Narrow"/>
+                <a:ea typeface="Aptos Narrow"/>
+                <a:cs typeface="Aptos Narrow"/>
               </a:defRPr>
             </a:lvl7pPr>
             <a:lvl8pPr>
@@ -1427,9 +1439,9 @@
                 <a:solidFill>
                   <a:schemeClr val="tx1"/>
                 </a:solidFill>
-                <a:latin typeface="Liberation Sans"/>
-                <a:ea typeface="Liberation Sans"/>
-                <a:cs typeface="Liberation Sans"/>
+                <a:latin typeface="Aptos Narrow"/>
+                <a:ea typeface="Aptos Narrow"/>
+                <a:cs typeface="Aptos Narrow"/>
               </a:defRPr>
             </a:lvl8pPr>
             <a:lvl9pPr>
@@ -1437,9 +1449,9 @@
                 <a:solidFill>
                   <a:schemeClr val="tx1"/>
                 </a:solidFill>
-                <a:latin typeface="Liberation Sans"/>
-                <a:ea typeface="Liberation Sans"/>
-                <a:cs typeface="Liberation Sans"/>
+                <a:latin typeface="Aptos Narrow"/>
+                <a:ea typeface="Aptos Narrow"/>
+                <a:cs typeface="Aptos Narrow"/>
               </a:defRPr>
             </a:lvl9pPr>
           </a:lstStyle>
@@ -1457,7 +1469,7 @@
       </p:sp>
       <p:cxnSp>
         <p:nvCxnSpPr>
-          <p:cNvPr id="134335019" name=""/>
+          <p:cNvPr id="1717485862" name=""/>
           <p:cNvCxnSpPr/>
           <p:nvPr/>
         </p:nvCxnSpPr>
@@ -1496,7 +1508,7 @@
       </p:cxnSp>
       <p:sp>
         <p:nvSpPr>
-          <p:cNvPr id="718585496" name="Footer Placeholder 4"/>
+          <p:cNvPr id="801515744" name="Footer Placeholder 4"/>
           <p:cNvSpPr>
             <a:spLocks noGrp="1"/>
           </p:cNvSpPr>
@@ -1524,9 +1536,9 @@
                     <a:lumOff val="35000"/>
                   </a:schemeClr>
                 </a:solidFill>
-                <a:latin typeface="Liberation Sans"/>
-                <a:ea typeface="Liberation Sans"/>
-                <a:cs typeface="Liberation Sans"/>
+                <a:latin typeface="Aptos Narrow"/>
+                <a:ea typeface="Aptos Narrow"/>
+                <a:cs typeface="Aptos Narrow"/>
               </a:defRPr>
             </a:lvl1pPr>
             <a:lvl2pPr algn="l">
@@ -1537,9 +1549,9 @@
                     <a:lumOff val="35000"/>
                   </a:schemeClr>
                 </a:solidFill>
-                <a:latin typeface="Liberation Sans"/>
-                <a:ea typeface="Liberation Sans"/>
-                <a:cs typeface="Liberation Sans"/>
+                <a:latin typeface="Aptos Narrow"/>
+                <a:ea typeface="Aptos Narrow"/>
+                <a:cs typeface="Aptos Narrow"/>
               </a:defRPr>
             </a:lvl2pPr>
             <a:lvl3pPr algn="l">
@@ -1550,9 +1562,9 @@
                     <a:lumOff val="35000"/>
                   </a:schemeClr>
                 </a:solidFill>
-                <a:latin typeface="Liberation Sans"/>
-                <a:ea typeface="Liberation Sans"/>
-                <a:cs typeface="Liberation Sans"/>
+                <a:latin typeface="Aptos Narrow"/>
+                <a:ea typeface="Aptos Narrow"/>
+                <a:cs typeface="Aptos Narrow"/>
               </a:defRPr>
             </a:lvl3pPr>
             <a:lvl4pPr algn="l">
@@ -1563,9 +1575,9 @@
                     <a:lumOff val="35000"/>
                   </a:schemeClr>
                 </a:solidFill>
-                <a:latin typeface="Liberation Sans"/>
-                <a:ea typeface="Liberation Sans"/>
-                <a:cs typeface="Liberation Sans"/>
+                <a:latin typeface="Aptos Narrow"/>
+                <a:ea typeface="Aptos Narrow"/>
+                <a:cs typeface="Aptos Narrow"/>
               </a:defRPr>
             </a:lvl4pPr>
             <a:lvl5pPr algn="l">
@@ -1576,9 +1588,9 @@
                     <a:lumOff val="35000"/>
                   </a:schemeClr>
                 </a:solidFill>
-                <a:latin typeface="Liberation Sans"/>
-                <a:ea typeface="Liberation Sans"/>
-                <a:cs typeface="Liberation Sans"/>
+                <a:latin typeface="Aptos Narrow"/>
+                <a:ea typeface="Aptos Narrow"/>
+                <a:cs typeface="Aptos Narrow"/>
               </a:defRPr>
             </a:lvl5pPr>
             <a:lvl6pPr algn="l">
@@ -1589,9 +1601,9 @@
                     <a:lumOff val="35000"/>
                   </a:schemeClr>
                 </a:solidFill>
-                <a:latin typeface="Liberation Sans"/>
-                <a:ea typeface="Liberation Sans"/>
-                <a:cs typeface="Liberation Sans"/>
+                <a:latin typeface="Aptos Narrow"/>
+                <a:ea typeface="Aptos Narrow"/>
+                <a:cs typeface="Aptos Narrow"/>
               </a:defRPr>
             </a:lvl6pPr>
             <a:lvl7pPr algn="l">
@@ -1602,9 +1614,9 @@
                     <a:lumOff val="35000"/>
                   </a:schemeClr>
                 </a:solidFill>
-                <a:latin typeface="Liberation Sans"/>
-                <a:ea typeface="Liberation Sans"/>
-                <a:cs typeface="Liberation Sans"/>
+                <a:latin typeface="Aptos Narrow"/>
+                <a:ea typeface="Aptos Narrow"/>
+                <a:cs typeface="Aptos Narrow"/>
               </a:defRPr>
             </a:lvl7pPr>
             <a:lvl8pPr algn="l">
@@ -1615,9 +1627,9 @@
                     <a:lumOff val="35000"/>
                   </a:schemeClr>
                 </a:solidFill>
-                <a:latin typeface="Liberation Sans"/>
-                <a:ea typeface="Liberation Sans"/>
-                <a:cs typeface="Liberation Sans"/>
+                <a:latin typeface="Aptos Narrow"/>
+                <a:ea typeface="Aptos Narrow"/>
+                <a:cs typeface="Aptos Narrow"/>
               </a:defRPr>
             </a:lvl8pPr>
             <a:lvl9pPr algn="l">
@@ -1628,9 +1640,9 @@
                     <a:lumOff val="35000"/>
                   </a:schemeClr>
                 </a:solidFill>
-                <a:latin typeface="Liberation Sans"/>
-                <a:ea typeface="Liberation Sans"/>
-                <a:cs typeface="Liberation Sans"/>
+                <a:latin typeface="Aptos Narrow"/>
+                <a:ea typeface="Aptos Narrow"/>
+                <a:cs typeface="Aptos Narrow"/>
               </a:defRPr>
             </a:lvl9pPr>
           </a:lstStyle>
@@ -1648,7 +1660,7 @@
       </p:sp>
       <p:sp>
         <p:nvSpPr>
-          <p:cNvPr id="1415138488" name="Slide Number Placeholder 5"/>
+          <p:cNvPr id="122015148" name="Slide Number Placeholder 5"/>
           <p:cNvSpPr>
             <a:spLocks noGrp="1"/>
           </p:cNvSpPr>
@@ -1676,9 +1688,9 @@
                     <a:lumOff val="35000"/>
                   </a:schemeClr>
                 </a:solidFill>
-                <a:latin typeface="Liberation Sans"/>
-                <a:ea typeface="Liberation Sans"/>
-                <a:cs typeface="Liberation Sans"/>
+                <a:latin typeface="Aptos Narrow"/>
+                <a:ea typeface="Aptos Narrow"/>
+                <a:cs typeface="Aptos Narrow"/>
               </a:defRPr>
             </a:lvl1pPr>
             <a:lvl2pPr>
@@ -1689,9 +1701,9 @@
                     <a:lumOff val="35000"/>
                   </a:schemeClr>
                 </a:solidFill>
-                <a:latin typeface="Liberation Sans"/>
-                <a:ea typeface="Liberation Sans"/>
-                <a:cs typeface="Liberation Sans"/>
+                <a:latin typeface="Aptos Narrow"/>
+                <a:ea typeface="Aptos Narrow"/>
+                <a:cs typeface="Aptos Narrow"/>
               </a:defRPr>
             </a:lvl2pPr>
             <a:lvl3pPr>
@@ -1702,9 +1714,9 @@
                     <a:lumOff val="35000"/>
                   </a:schemeClr>
                 </a:solidFill>
-                <a:latin typeface="Liberation Sans"/>
-                <a:ea typeface="Liberation Sans"/>
-                <a:cs typeface="Liberation Sans"/>
+                <a:latin typeface="Aptos Narrow"/>
+                <a:ea typeface="Aptos Narrow"/>
+                <a:cs typeface="Aptos Narrow"/>
               </a:defRPr>
             </a:lvl3pPr>
             <a:lvl4pPr>
@@ -1715,9 +1727,9 @@
                     <a:lumOff val="35000"/>
                   </a:schemeClr>
                 </a:solidFill>
-                <a:latin typeface="Liberation Sans"/>
-                <a:ea typeface="Liberation Sans"/>
-                <a:cs typeface="Liberation Sans"/>
+                <a:latin typeface="Aptos Narrow"/>
+                <a:ea typeface="Aptos Narrow"/>
+                <a:cs typeface="Aptos Narrow"/>
               </a:defRPr>
             </a:lvl4pPr>
             <a:lvl5pPr>
@@ -1728,9 +1740,9 @@
                     <a:lumOff val="35000"/>
                   </a:schemeClr>
                 </a:solidFill>
-                <a:latin typeface="Liberation Sans"/>
-                <a:ea typeface="Liberation Sans"/>
-                <a:cs typeface="Liberation Sans"/>
+                <a:latin typeface="Aptos Narrow"/>
+                <a:ea typeface="Aptos Narrow"/>
+                <a:cs typeface="Aptos Narrow"/>
               </a:defRPr>
             </a:lvl5pPr>
             <a:lvl6pPr>
@@ -1741,9 +1753,9 @@
                     <a:lumOff val="35000"/>
                   </a:schemeClr>
                 </a:solidFill>
-                <a:latin typeface="Liberation Sans"/>
-                <a:ea typeface="Liberation Sans"/>
-                <a:cs typeface="Liberation Sans"/>
+                <a:latin typeface="Aptos Narrow"/>
+                <a:ea typeface="Aptos Narrow"/>
+                <a:cs typeface="Aptos Narrow"/>
               </a:defRPr>
             </a:lvl6pPr>
             <a:lvl7pPr>
@@ -1754,9 +1766,9 @@
                     <a:lumOff val="35000"/>
                   </a:schemeClr>
                 </a:solidFill>
-                <a:latin typeface="Liberation Sans"/>
-                <a:ea typeface="Liberation Sans"/>
-                <a:cs typeface="Liberation Sans"/>
+                <a:latin typeface="Aptos Narrow"/>
+                <a:ea typeface="Aptos Narrow"/>
+                <a:cs typeface="Aptos Narrow"/>
               </a:defRPr>
             </a:lvl7pPr>
             <a:lvl8pPr>
@@ -1767,9 +1779,9 @@
                     <a:lumOff val="35000"/>
                   </a:schemeClr>
                 </a:solidFill>
-                <a:latin typeface="Liberation Sans"/>
-                <a:ea typeface="Liberation Sans"/>
-                <a:cs typeface="Liberation Sans"/>
+                <a:latin typeface="Aptos Narrow"/>
+                <a:ea typeface="Aptos Narrow"/>
+                <a:cs typeface="Aptos Narrow"/>
               </a:defRPr>
             </a:lvl8pPr>
             <a:lvl9pPr>
@@ -1780,9 +1792,9 @@
                     <a:lumOff val="35000"/>
                   </a:schemeClr>
                 </a:solidFill>
-                <a:latin typeface="Liberation Sans"/>
-                <a:ea typeface="Liberation Sans"/>
-                <a:cs typeface="Liberation Sans"/>
+                <a:latin typeface="Aptos Narrow"/>
+                <a:ea typeface="Aptos Narrow"/>
+                <a:cs typeface="Aptos Narrow"/>
               </a:defRPr>
             </a:lvl9pPr>
           </a:lstStyle>
@@ -1832,7 +1844,7 @@
       </p:grpSpPr>
       <p:sp>
         <p:nvSpPr>
-          <p:cNvPr id="1224374373" name="Rectangle 1245485961"/>
+          <p:cNvPr id="1634881992" name="Rectangle 1245485961"/>
           <p:cNvSpPr/>
           <p:nvPr/>
         </p:nvSpPr>
@@ -1883,10 +1895,22 @@
             <a:schemeClr val="lt1"/>
           </a:fontRef>
         </p:style>
-      </p:sp>
-      <p:sp>
-        <p:nvSpPr>
-          <p:cNvPr id="1857367551" name="Title 1"/>
+        <p:txBody>
+          <a:bodyPr anchor="ctr"/>
+          <a:p>
+            <a:pPr algn="ctr">
+              <a:defRPr/>
+            </a:pPr>
+            <a:endParaRPr>
+              <a:latin typeface="Aptos Narrow"/>
+              <a:cs typeface="Aptos Narrow"/>
+            </a:endParaRPr>
+          </a:p>
+        </p:txBody>
+      </p:sp>
+      <p:sp>
+        <p:nvSpPr>
+          <p:cNvPr id="1953466692" name="Title 1"/>
           <p:cNvSpPr>
             <a:spLocks noGrp="1"/>
           </p:cNvSpPr>
@@ -1910,9 +1934,9 @@
                 <a:solidFill>
                   <a:schemeClr val="tx1"/>
                 </a:solidFill>
-                <a:latin typeface="Liberation Sans"/>
-                <a:ea typeface="Liberation Sans"/>
-                <a:cs typeface="Liberation Sans"/>
+                <a:latin typeface="Aptos Narrow"/>
+                <a:ea typeface="Aptos Narrow"/>
+                <a:cs typeface="Aptos Narrow"/>
               </a:defRPr>
             </a:lvl1pPr>
             <a:lvl2pPr>
@@ -1920,9 +1944,9 @@
                 <a:solidFill>
                   <a:schemeClr val="tx1"/>
                 </a:solidFill>
-                <a:latin typeface="Liberation Sans"/>
-                <a:ea typeface="Liberation Sans"/>
-                <a:cs typeface="Liberation Sans"/>
+                <a:latin typeface="Aptos Narrow"/>
+                <a:ea typeface="Aptos Narrow"/>
+                <a:cs typeface="Aptos Narrow"/>
               </a:defRPr>
             </a:lvl2pPr>
             <a:lvl3pPr>
@@ -1930,9 +1954,9 @@
                 <a:solidFill>
                   <a:schemeClr val="tx1"/>
                 </a:solidFill>
-                <a:latin typeface="Liberation Sans"/>
-                <a:ea typeface="Liberation Sans"/>
-                <a:cs typeface="Liberation Sans"/>
+                <a:latin typeface="Aptos Narrow"/>
+                <a:ea typeface="Aptos Narrow"/>
+                <a:cs typeface="Aptos Narrow"/>
               </a:defRPr>
             </a:lvl3pPr>
             <a:lvl4pPr>
@@ -1940,9 +1964,9 @@
                 <a:solidFill>
                   <a:schemeClr val="tx1"/>
                 </a:solidFill>
-                <a:latin typeface="Liberation Sans"/>
-                <a:ea typeface="Liberation Sans"/>
-                <a:cs typeface="Liberation Sans"/>
+                <a:latin typeface="Aptos Narrow"/>
+                <a:ea typeface="Aptos Narrow"/>
+                <a:cs typeface="Aptos Narrow"/>
               </a:defRPr>
             </a:lvl4pPr>
             <a:lvl5pPr>
@@ -1950,9 +1974,9 @@
                 <a:solidFill>
                   <a:schemeClr val="tx1"/>
                 </a:solidFill>
-                <a:latin typeface="Liberation Sans"/>
-                <a:ea typeface="Liberation Sans"/>
-                <a:cs typeface="Liberation Sans"/>
+                <a:latin typeface="Aptos Narrow"/>
+                <a:ea typeface="Aptos Narrow"/>
+                <a:cs typeface="Aptos Narrow"/>
               </a:defRPr>
             </a:lvl5pPr>
             <a:lvl6pPr>
@@ -1960,9 +1984,9 @@
                 <a:solidFill>
                   <a:schemeClr val="tx1"/>
                 </a:solidFill>
-                <a:latin typeface="Liberation Sans"/>
-                <a:ea typeface="Liberation Sans"/>
-                <a:cs typeface="Liberation Sans"/>
+                <a:latin typeface="Aptos Narrow"/>
+                <a:ea typeface="Aptos Narrow"/>
+                <a:cs typeface="Aptos Narrow"/>
               </a:defRPr>
             </a:lvl6pPr>
             <a:lvl7pPr>
@@ -1970,9 +1994,9 @@
                 <a:solidFill>
                   <a:schemeClr val="tx1"/>
                 </a:solidFill>
-                <a:latin typeface="Liberation Sans"/>
-                <a:ea typeface="Liberation Sans"/>
-                <a:cs typeface="Liberation Sans"/>
+                <a:latin typeface="Aptos Narrow"/>
+                <a:ea typeface="Aptos Narrow"/>
+                <a:cs typeface="Aptos Narrow"/>
               </a:defRPr>
             </a:lvl7pPr>
             <a:lvl8pPr>
@@ -1980,9 +2004,9 @@
                 <a:solidFill>
                   <a:schemeClr val="tx1"/>
                 </a:solidFill>
-                <a:latin typeface="Liberation Sans"/>
-                <a:ea typeface="Liberation Sans"/>
-                <a:cs typeface="Liberation Sans"/>
+                <a:latin typeface="Aptos Narrow"/>
+                <a:ea typeface="Aptos Narrow"/>
+                <a:cs typeface="Aptos Narrow"/>
               </a:defRPr>
             </a:lvl8pPr>
             <a:lvl9pPr>
@@ -1990,9 +2014,9 @@
                 <a:solidFill>
                   <a:schemeClr val="tx1"/>
                 </a:solidFill>
-                <a:latin typeface="Liberation Sans"/>
-                <a:ea typeface="Liberation Sans"/>
-                <a:cs typeface="Liberation Sans"/>
+                <a:latin typeface="Aptos Narrow"/>
+                <a:ea typeface="Aptos Narrow"/>
+                <a:cs typeface="Aptos Narrow"/>
               </a:defRPr>
             </a:lvl9pPr>
           </a:lstStyle>
@@ -2010,7 +2034,7 @@
       </p:sp>
       <p:cxnSp>
         <p:nvCxnSpPr>
-          <p:cNvPr id="665241031" name=""/>
+          <p:cNvPr id="1606061287" name=""/>
           <p:cNvCxnSpPr/>
           <p:nvPr/>
         </p:nvCxnSpPr>
@@ -2049,7 +2073,7 @@
       </p:cxnSp>
       <p:sp>
         <p:nvSpPr>
-          <p:cNvPr id="57425960" name="Footer Placeholder 4"/>
+          <p:cNvPr id="1623842257" name="Footer Placeholder 4"/>
           <p:cNvSpPr>
             <a:spLocks noGrp="1"/>
           </p:cNvSpPr>
@@ -2077,9 +2101,9 @@
                     <a:lumOff val="35000"/>
                   </a:schemeClr>
                 </a:solidFill>
-                <a:latin typeface="Liberation Sans"/>
-                <a:ea typeface="Liberation Sans"/>
-                <a:cs typeface="Liberation Sans"/>
+                <a:latin typeface="Aptos Narrow"/>
+                <a:ea typeface="Aptos Narrow"/>
+                <a:cs typeface="Aptos Narrow"/>
               </a:defRPr>
             </a:lvl1pPr>
             <a:lvl2pPr algn="l">
@@ -2090,9 +2114,9 @@
                     <a:lumOff val="35000"/>
                   </a:schemeClr>
                 </a:solidFill>
-                <a:latin typeface="Liberation Sans"/>
-                <a:ea typeface="Liberation Sans"/>
-                <a:cs typeface="Liberation Sans"/>
+                <a:latin typeface="Aptos Narrow"/>
+                <a:ea typeface="Aptos Narrow"/>
+                <a:cs typeface="Aptos Narrow"/>
               </a:defRPr>
             </a:lvl2pPr>
             <a:lvl3pPr algn="l">
@@ -2103,9 +2127,9 @@
                     <a:lumOff val="35000"/>
                   </a:schemeClr>
                 </a:solidFill>
-                <a:latin typeface="Liberation Sans"/>
-                <a:ea typeface="Liberation Sans"/>
-                <a:cs typeface="Liberation Sans"/>
+                <a:latin typeface="Aptos Narrow"/>
+                <a:ea typeface="Aptos Narrow"/>
+                <a:cs typeface="Aptos Narrow"/>
               </a:defRPr>
             </a:lvl3pPr>
             <a:lvl4pPr algn="l">
@@ -2116,9 +2140,9 @@
                     <a:lumOff val="35000"/>
                   </a:schemeClr>
                 </a:solidFill>
-                <a:latin typeface="Liberation Sans"/>
-                <a:ea typeface="Liberation Sans"/>
-                <a:cs typeface="Liberation Sans"/>
+                <a:latin typeface="Aptos Narrow"/>
+                <a:ea typeface="Aptos Narrow"/>
+                <a:cs typeface="Aptos Narrow"/>
               </a:defRPr>
             </a:lvl4pPr>
             <a:lvl5pPr algn="l">
@@ -2129,9 +2153,9 @@
                     <a:lumOff val="35000"/>
                   </a:schemeClr>
                 </a:solidFill>
-                <a:latin typeface="Liberation Sans"/>
-                <a:ea typeface="Liberation Sans"/>
-                <a:cs typeface="Liberation Sans"/>
+                <a:latin typeface="Aptos Narrow"/>
+                <a:ea typeface="Aptos Narrow"/>
+                <a:cs typeface="Aptos Narrow"/>
               </a:defRPr>
             </a:lvl5pPr>
             <a:lvl6pPr algn="l">
@@ -2142,9 +2166,9 @@
                     <a:lumOff val="35000"/>
                   </a:schemeClr>
                 </a:solidFill>
-                <a:latin typeface="Liberation Sans"/>
-                <a:ea typeface="Liberation Sans"/>
-                <a:cs typeface="Liberation Sans"/>
+                <a:latin typeface="Aptos Narrow"/>
+                <a:ea typeface="Aptos Narrow"/>
+                <a:cs typeface="Aptos Narrow"/>
               </a:defRPr>
             </a:lvl6pPr>
             <a:lvl7pPr algn="l">
@@ -2155,9 +2179,9 @@
                     <a:lumOff val="35000"/>
                   </a:schemeClr>
                 </a:solidFill>
-                <a:latin typeface="Liberation Sans"/>
-                <a:ea typeface="Liberation Sans"/>
-                <a:cs typeface="Liberation Sans"/>
+                <a:latin typeface="Aptos Narrow"/>
+                <a:ea typeface="Aptos Narrow"/>
+                <a:cs typeface="Aptos Narrow"/>
               </a:defRPr>
             </a:lvl7pPr>
             <a:lvl8pPr algn="l">
@@ -2168,9 +2192,9 @@
                     <a:lumOff val="35000"/>
                   </a:schemeClr>
                 </a:solidFill>
-                <a:latin typeface="Liberation Sans"/>
-                <a:ea typeface="Liberation Sans"/>
-                <a:cs typeface="Liberation Sans"/>
+                <a:latin typeface="Aptos Narrow"/>
+                <a:ea typeface="Aptos Narrow"/>
+                <a:cs typeface="Aptos Narrow"/>
               </a:defRPr>
             </a:lvl8pPr>
             <a:lvl9pPr algn="l">
@@ -2181,9 +2205,9 @@
                     <a:lumOff val="35000"/>
                   </a:schemeClr>
                 </a:solidFill>
-                <a:latin typeface="Liberation Sans"/>
-                <a:ea typeface="Liberation Sans"/>
-                <a:cs typeface="Liberation Sans"/>
+                <a:latin typeface="Aptos Narrow"/>
+                <a:ea typeface="Aptos Narrow"/>
+                <a:cs typeface="Aptos Narrow"/>
               </a:defRPr>
             </a:lvl9pPr>
           </a:lstStyle>
@@ -2201,7 +2225,7 @@
       </p:sp>
       <p:sp>
         <p:nvSpPr>
-          <p:cNvPr id="1806851520" name="Slide Number Placeholder 5"/>
+          <p:cNvPr id="536176233" name="Slide Number Placeholder 5"/>
           <p:cNvSpPr>
             <a:spLocks noGrp="1"/>
           </p:cNvSpPr>
@@ -2228,9 +2252,9 @@
                     <a:lumMod val="85000"/>
                   </a:schemeClr>
                 </a:solidFill>
-                <a:latin typeface="Liberation Sans"/>
-                <a:ea typeface="Liberation Sans"/>
-                <a:cs typeface="Liberation Sans"/>
+                <a:latin typeface="Aptos Narrow"/>
+                <a:ea typeface="Aptos Narrow"/>
+                <a:cs typeface="Aptos Narrow"/>
               </a:defRPr>
             </a:lvl1pPr>
             <a:lvl2pPr>
@@ -2240,9 +2264,9 @@
                     <a:lumMod val="85000"/>
                   </a:schemeClr>
                 </a:solidFill>
-                <a:latin typeface="Liberation Sans"/>
-                <a:ea typeface="Liberation Sans"/>
-                <a:cs typeface="Liberation Sans"/>
+                <a:latin typeface="Aptos Narrow"/>
+                <a:ea typeface="Aptos Narrow"/>
+                <a:cs typeface="Aptos Narrow"/>
               </a:defRPr>
             </a:lvl2pPr>
             <a:lvl3pPr>
@@ -2252,9 +2276,9 @@
                     <a:lumMod val="85000"/>
                   </a:schemeClr>
                 </a:solidFill>
-                <a:latin typeface="Liberation Sans"/>
-                <a:ea typeface="Liberation Sans"/>
-                <a:cs typeface="Liberation Sans"/>
+                <a:latin typeface="Aptos Narrow"/>
+                <a:ea typeface="Aptos Narrow"/>
+                <a:cs typeface="Aptos Narrow"/>
               </a:defRPr>
             </a:lvl3pPr>
             <a:lvl4pPr>
@@ -2264,9 +2288,9 @@
                     <a:lumMod val="85000"/>
                   </a:schemeClr>
                 </a:solidFill>
-                <a:latin typeface="Liberation Sans"/>
-                <a:ea typeface="Liberation Sans"/>
-                <a:cs typeface="Liberation Sans"/>
+                <a:latin typeface="Aptos Narrow"/>
+                <a:ea typeface="Aptos Narrow"/>
+                <a:cs typeface="Aptos Narrow"/>
               </a:defRPr>
             </a:lvl4pPr>
             <a:lvl5pPr>
@@ -2276,9 +2300,9 @@
                     <a:lumMod val="85000"/>
                   </a:schemeClr>
                 </a:solidFill>
-                <a:latin typeface="Liberation Sans"/>
-                <a:ea typeface="Liberation Sans"/>
-                <a:cs typeface="Liberation Sans"/>
+                <a:latin typeface="Aptos Narrow"/>
+                <a:ea typeface="Aptos Narrow"/>
+                <a:cs typeface="Aptos Narrow"/>
               </a:defRPr>
             </a:lvl5pPr>
             <a:lvl6pPr>
@@ -2288,9 +2312,9 @@
                     <a:lumMod val="85000"/>
                   </a:schemeClr>
                 </a:solidFill>
-                <a:latin typeface="Liberation Sans"/>
-                <a:ea typeface="Liberation Sans"/>
-                <a:cs typeface="Liberation Sans"/>
+                <a:latin typeface="Aptos Narrow"/>
+                <a:ea typeface="Aptos Narrow"/>
+                <a:cs typeface="Aptos Narrow"/>
               </a:defRPr>
             </a:lvl6pPr>
             <a:lvl7pPr>
@@ -2300,9 +2324,9 @@
                     <a:lumMod val="85000"/>
                   </a:schemeClr>
                 </a:solidFill>
-                <a:latin typeface="Liberation Sans"/>
-                <a:ea typeface="Liberation Sans"/>
-                <a:cs typeface="Liberation Sans"/>
+                <a:latin typeface="Aptos Narrow"/>
+                <a:ea typeface="Aptos Narrow"/>
+                <a:cs typeface="Aptos Narrow"/>
               </a:defRPr>
             </a:lvl7pPr>
             <a:lvl8pPr>
@@ -2312,9 +2336,9 @@
                     <a:lumMod val="85000"/>
                   </a:schemeClr>
                 </a:solidFill>
-                <a:latin typeface="Liberation Sans"/>
-                <a:ea typeface="Liberation Sans"/>
-                <a:cs typeface="Liberation Sans"/>
+                <a:latin typeface="Aptos Narrow"/>
+                <a:ea typeface="Aptos Narrow"/>
+                <a:cs typeface="Aptos Narrow"/>
               </a:defRPr>
             </a:lvl8pPr>
             <a:lvl9pPr>
@@ -2324,9 +2348,9 @@
                     <a:lumMod val="85000"/>
                   </a:schemeClr>
                 </a:solidFill>
-                <a:latin typeface="Liberation Sans"/>
-                <a:ea typeface="Liberation Sans"/>
-                <a:cs typeface="Liberation Sans"/>
+                <a:latin typeface="Aptos Narrow"/>
+                <a:ea typeface="Aptos Narrow"/>
+                <a:cs typeface="Aptos Narrow"/>
               </a:defRPr>
             </a:lvl9pPr>
           </a:lstStyle>
@@ -2344,7 +2368,7 @@
       </p:sp>
       <p:cxnSp>
         <p:nvCxnSpPr>
-          <p:cNvPr id="198327388" name=""/>
+          <p:cNvPr id="1713253953" name=""/>
           <p:cNvCxnSpPr/>
           <p:nvPr/>
         </p:nvCxnSpPr>
@@ -2383,7 +2407,7 @@
       </p:cxnSp>
       <p:sp>
         <p:nvSpPr>
-          <p:cNvPr id="1353279992" name="Text Placeholder 9"/>
+          <p:cNvPr id="2094904076" name="Text Placeholder 9"/>
           <p:cNvSpPr>
             <a:spLocks noGrp="1"/>
           </p:cNvSpPr>
@@ -2410,9 +2434,9 @@
                 <a:solidFill>
                   <a:schemeClr val="bg1"/>
                 </a:solidFill>
-                <a:latin typeface="Liberation Sans"/>
-                <a:ea typeface="Liberation Sans"/>
-                <a:cs typeface="Liberation Sans"/>
+                <a:latin typeface="Aptos Narrow"/>
+                <a:ea typeface="Aptos Narrow"/>
+                <a:cs typeface="Aptos Narrow"/>
               </a:defRPr>
             </a:lvl1pPr>
             <a:lvl2pPr algn="ctr">
@@ -2420,9 +2444,9 @@
                 <a:solidFill>
                   <a:schemeClr val="bg1"/>
                 </a:solidFill>
-                <a:latin typeface="Liberation Sans"/>
-                <a:ea typeface="Liberation Sans"/>
-                <a:cs typeface="Liberation Sans"/>
+                <a:latin typeface="Aptos Narrow"/>
+                <a:ea typeface="Aptos Narrow"/>
+                <a:cs typeface="Aptos Narrow"/>
               </a:defRPr>
             </a:lvl2pPr>
             <a:lvl3pPr algn="ctr">
@@ -2430,9 +2454,9 @@
                 <a:solidFill>
                   <a:schemeClr val="bg1"/>
                 </a:solidFill>
-                <a:latin typeface="Liberation Sans"/>
-                <a:ea typeface="Liberation Sans"/>
-                <a:cs typeface="Liberation Sans"/>
+                <a:latin typeface="Aptos Narrow"/>
+                <a:ea typeface="Aptos Narrow"/>
+                <a:cs typeface="Aptos Narrow"/>
               </a:defRPr>
             </a:lvl3pPr>
             <a:lvl4pPr algn="ctr">
@@ -2440,9 +2464,9 @@
                 <a:solidFill>
                   <a:schemeClr val="bg1"/>
                 </a:solidFill>
-                <a:latin typeface="Liberation Sans"/>
-                <a:ea typeface="Liberation Sans"/>
-                <a:cs typeface="Liberation Sans"/>
+                <a:latin typeface="Aptos Narrow"/>
+                <a:ea typeface="Aptos Narrow"/>
+                <a:cs typeface="Aptos Narrow"/>
               </a:defRPr>
             </a:lvl4pPr>
             <a:lvl5pPr algn="ctr">
@@ -2450,9 +2474,9 @@
                 <a:solidFill>
                   <a:schemeClr val="bg1"/>
                 </a:solidFill>
-                <a:latin typeface="Liberation Sans"/>
-                <a:ea typeface="Liberation Sans"/>
-                <a:cs typeface="Liberation Sans"/>
+                <a:latin typeface="Aptos Narrow"/>
+                <a:ea typeface="Aptos Narrow"/>
+                <a:cs typeface="Aptos Narrow"/>
               </a:defRPr>
             </a:lvl5pPr>
             <a:lvl6pPr algn="ctr">
@@ -2460,9 +2484,9 @@
                 <a:solidFill>
                   <a:schemeClr val="bg1"/>
                 </a:solidFill>
-                <a:latin typeface="Liberation Sans"/>
-                <a:ea typeface="Liberation Sans"/>
-                <a:cs typeface="Liberation Sans"/>
+                <a:latin typeface="Aptos Narrow"/>
+                <a:ea typeface="Aptos Narrow"/>
+                <a:cs typeface="Aptos Narrow"/>
               </a:defRPr>
             </a:lvl6pPr>
             <a:lvl7pPr algn="ctr">
@@ -2470,9 +2494,9 @@
                 <a:solidFill>
                   <a:schemeClr val="bg1"/>
                 </a:solidFill>
-                <a:latin typeface="Liberation Sans"/>
-                <a:ea typeface="Liberation Sans"/>
-                <a:cs typeface="Liberation Sans"/>
+                <a:latin typeface="Aptos Narrow"/>
+                <a:ea typeface="Aptos Narrow"/>
+                <a:cs typeface="Aptos Narrow"/>
               </a:defRPr>
             </a:lvl7pPr>
             <a:lvl8pPr algn="ctr">
@@ -2480,9 +2504,9 @@
                 <a:solidFill>
                   <a:schemeClr val="bg1"/>
                 </a:solidFill>
-                <a:latin typeface="Liberation Sans"/>
-                <a:ea typeface="Liberation Sans"/>
-                <a:cs typeface="Liberation Sans"/>
+                <a:latin typeface="Aptos Narrow"/>
+                <a:ea typeface="Aptos Narrow"/>
+                <a:cs typeface="Aptos Narrow"/>
               </a:defRPr>
             </a:lvl8pPr>
             <a:lvl9pPr algn="ctr">
@@ -2490,9 +2514,9 @@
                 <a:solidFill>
                   <a:schemeClr val="bg1"/>
                 </a:solidFill>
-                <a:latin typeface="Liberation Sans"/>
-                <a:ea typeface="Liberation Sans"/>
-                <a:cs typeface="Liberation Sans"/>
+                <a:latin typeface="Aptos Narrow"/>
+                <a:ea typeface="Aptos Narrow"/>
+                <a:cs typeface="Aptos Narrow"/>
               </a:defRPr>
             </a:lvl9pPr>
           </a:lstStyle>
@@ -2542,7 +2566,7 @@
       </p:grpSpPr>
       <p:sp>
         <p:nvSpPr>
-          <p:cNvPr id="1791999038" name="Title Placeholder 1"/>
+          <p:cNvPr id="2079416548" name="Title Placeholder 1"/>
           <p:cNvSpPr>
             <a:spLocks noGrp="1"/>
           </p:cNvSpPr>
@@ -2563,7 +2587,71 @@
           <a:bodyPr vert="horz" lIns="91440" tIns="45720" rIns="91440" bIns="45720" rtlCol="0" anchor="ctr">
             <a:normAutofit/>
           </a:bodyPr>
-          <a:lstStyle/>
+          <a:lstStyle>
+            <a:lvl1pPr>
+              <a:defRPr>
+                <a:latin typeface="Aptos Narrow"/>
+                <a:ea typeface="Aptos Narrow"/>
+                <a:cs typeface="Aptos Narrow"/>
+              </a:defRPr>
+            </a:lvl1pPr>
+            <a:lvl2pPr>
+              <a:defRPr>
+                <a:latin typeface="Aptos Narrow"/>
+                <a:ea typeface="Aptos Narrow"/>
+                <a:cs typeface="Aptos Narrow"/>
+              </a:defRPr>
+            </a:lvl2pPr>
+            <a:lvl3pPr>
+              <a:defRPr>
+                <a:latin typeface="Aptos Narrow"/>
+                <a:ea typeface="Aptos Narrow"/>
+                <a:cs typeface="Aptos Narrow"/>
+              </a:defRPr>
+            </a:lvl3pPr>
+            <a:lvl4pPr>
+              <a:defRPr>
+                <a:latin typeface="Aptos Narrow"/>
+                <a:ea typeface="Aptos Narrow"/>
+                <a:cs typeface="Aptos Narrow"/>
+              </a:defRPr>
+            </a:lvl4pPr>
+            <a:lvl5pPr>
+              <a:defRPr>
+                <a:latin typeface="Aptos Narrow"/>
+                <a:ea typeface="Aptos Narrow"/>
+                <a:cs typeface="Aptos Narrow"/>
+              </a:defRPr>
+            </a:lvl5pPr>
+            <a:lvl6pPr>
+              <a:defRPr>
+                <a:latin typeface="Aptos Narrow"/>
+                <a:ea typeface="Aptos Narrow"/>
+                <a:cs typeface="Aptos Narrow"/>
+              </a:defRPr>
+            </a:lvl6pPr>
+            <a:lvl7pPr>
+              <a:defRPr>
+                <a:latin typeface="Aptos Narrow"/>
+                <a:ea typeface="Aptos Narrow"/>
+                <a:cs typeface="Aptos Narrow"/>
+              </a:defRPr>
+            </a:lvl7pPr>
+            <a:lvl8pPr>
+              <a:defRPr>
+                <a:latin typeface="Aptos Narrow"/>
+                <a:ea typeface="Aptos Narrow"/>
+                <a:cs typeface="Aptos Narrow"/>
+              </a:defRPr>
+            </a:lvl8pPr>
+            <a:lvl9pPr>
+              <a:defRPr>
+                <a:latin typeface="Aptos Narrow"/>
+                <a:ea typeface="Aptos Narrow"/>
+                <a:cs typeface="Aptos Narrow"/>
+              </a:defRPr>
+            </a:lvl9pPr>
+          </a:lstStyle>
           <a:p>
             <a:pPr>
               <a:defRPr/>
@@ -2578,7 +2666,7 @@
       </p:sp>
       <p:sp>
         <p:nvSpPr>
-          <p:cNvPr id="1459677418" name="Text Placeholder 2"/>
+          <p:cNvPr id="1935269095" name="Text Placeholder 2"/>
           <p:cNvSpPr>
             <a:spLocks noGrp="1"/>
           </p:cNvSpPr>
@@ -2599,7 +2687,71 @@
           <a:bodyPr vert="horz" lIns="91440" tIns="45720" rIns="91440" bIns="45720" rtlCol="0">
             <a:normAutofit/>
           </a:bodyPr>
-          <a:lstStyle/>
+          <a:lstStyle>
+            <a:lvl1pPr>
+              <a:defRPr>
+                <a:latin typeface="Aptos Narrow"/>
+                <a:ea typeface="Aptos Narrow"/>
+                <a:cs typeface="Aptos Narrow"/>
+              </a:defRPr>
+            </a:lvl1pPr>
+            <a:lvl2pPr>
+              <a:defRPr>
+                <a:latin typeface="Aptos Narrow"/>
+                <a:ea typeface="Aptos Narrow"/>
+                <a:cs typeface="Aptos Narrow"/>
+              </a:defRPr>
+            </a:lvl2pPr>
+            <a:lvl3pPr>
+              <a:defRPr>
+                <a:latin typeface="Aptos Narrow"/>
+                <a:ea typeface="Aptos Narrow"/>
+                <a:cs typeface="Aptos Narrow"/>
+              </a:defRPr>
+            </a:lvl3pPr>
+            <a:lvl4pPr>
+              <a:defRPr>
+                <a:latin typeface="Aptos Narrow"/>
+                <a:ea typeface="Aptos Narrow"/>
+                <a:cs typeface="Aptos Narrow"/>
+              </a:defRPr>
+            </a:lvl4pPr>
+            <a:lvl5pPr>
+              <a:defRPr>
+                <a:latin typeface="Aptos Narrow"/>
+                <a:ea typeface="Aptos Narrow"/>
+                <a:cs typeface="Aptos Narrow"/>
+              </a:defRPr>
+            </a:lvl5pPr>
+            <a:lvl6pPr>
+              <a:defRPr>
+                <a:latin typeface="Aptos Narrow"/>
+                <a:ea typeface="Aptos Narrow"/>
+                <a:cs typeface="Aptos Narrow"/>
+              </a:defRPr>
+            </a:lvl6pPr>
+            <a:lvl7pPr>
+              <a:defRPr>
+                <a:latin typeface="Aptos Narrow"/>
+                <a:ea typeface="Aptos Narrow"/>
+                <a:cs typeface="Aptos Narrow"/>
+              </a:defRPr>
+            </a:lvl7pPr>
+            <a:lvl8pPr>
+              <a:defRPr>
+                <a:latin typeface="Aptos Narrow"/>
+                <a:ea typeface="Aptos Narrow"/>
+                <a:cs typeface="Aptos Narrow"/>
+              </a:defRPr>
+            </a:lvl8pPr>
+            <a:lvl9pPr>
+              <a:defRPr>
+                <a:latin typeface="Aptos Narrow"/>
+                <a:ea typeface="Aptos Narrow"/>
+                <a:cs typeface="Aptos Narrow"/>
+              </a:defRPr>
+            </a:lvl9pPr>
+          </a:lstStyle>
           <a:p>
             <a:pPr lvl="0">
               <a:defRPr/>
@@ -2654,7 +2806,7 @@
       </p:sp>
       <p:sp>
         <p:nvSpPr>
-          <p:cNvPr id="1146356192" name="Footer Placeholder 4"/>
+          <p:cNvPr id="643072507" name="Footer Placeholder 4"/>
           <p:cNvSpPr>
             <a:spLocks noGrp="1"/>
           </p:cNvSpPr>
@@ -2681,31 +2833,66 @@
                     <a:tint val="75000"/>
                   </a:schemeClr>
                 </a:solidFill>
+                <a:latin typeface="Aptos Narrow"/>
+                <a:ea typeface="Aptos Narrow"/>
+                <a:cs typeface="Aptos Narrow"/>
               </a:defRPr>
             </a:lvl1pPr>
             <a:lvl2pPr algn="l">
-              <a:defRPr/>
+              <a:defRPr>
+                <a:latin typeface="Aptos Narrow"/>
+                <a:ea typeface="Aptos Narrow"/>
+                <a:cs typeface="Aptos Narrow"/>
+              </a:defRPr>
             </a:lvl2pPr>
             <a:lvl3pPr algn="l">
-              <a:defRPr/>
+              <a:defRPr>
+                <a:latin typeface="Aptos Narrow"/>
+                <a:ea typeface="Aptos Narrow"/>
+                <a:cs typeface="Aptos Narrow"/>
+              </a:defRPr>
             </a:lvl3pPr>
             <a:lvl4pPr algn="l">
-              <a:defRPr/>
+              <a:defRPr>
+                <a:latin typeface="Aptos Narrow"/>
+                <a:ea typeface="Aptos Narrow"/>
+                <a:cs typeface="Aptos Narrow"/>
+              </a:defRPr>
             </a:lvl4pPr>
             <a:lvl5pPr algn="l">
-              <a:defRPr/>
+              <a:defRPr>
+                <a:latin typeface="Aptos Narrow"/>
+                <a:ea typeface="Aptos Narrow"/>
+                <a:cs typeface="Aptos Narrow"/>
+              </a:defRPr>
             </a:lvl5pPr>
             <a:lvl6pPr algn="l">
-              <a:defRPr/>
+              <a:defRPr>
+                <a:latin typeface="Aptos Narrow"/>
+                <a:ea typeface="Aptos Narrow"/>
+                <a:cs typeface="Aptos Narrow"/>
+              </a:defRPr>
             </a:lvl6pPr>
             <a:lvl7pPr algn="l">
-              <a:defRPr/>
+              <a:defRPr>
+                <a:latin typeface="Aptos Narrow"/>
+                <a:ea typeface="Aptos Narrow"/>
+                <a:cs typeface="Aptos Narrow"/>
+              </a:defRPr>
             </a:lvl7pPr>
             <a:lvl8pPr algn="l">
-              <a:defRPr/>
+              <a:defRPr>
+                <a:latin typeface="Aptos Narrow"/>
+                <a:ea typeface="Aptos Narrow"/>
+                <a:cs typeface="Aptos Narrow"/>
+              </a:defRPr>
             </a:lvl8pPr>
             <a:lvl9pPr algn="l">
-              <a:defRPr/>
+              <a:defRPr>
+                <a:latin typeface="Aptos Narrow"/>
+                <a:ea typeface="Aptos Narrow"/>
+                <a:cs typeface="Aptos Narrow"/>
+              </a:defRPr>
             </a:lvl9pPr>
           </a:lstStyle>
           <a:p>
@@ -2722,7 +2909,7 @@
       </p:sp>
       <p:sp>
         <p:nvSpPr>
-          <p:cNvPr id="2118605098" name="Slide Number Placeholder 5"/>
+          <p:cNvPr id="426811897" name="Slide Number Placeholder 5"/>
           <p:cNvSpPr>
             <a:spLocks noGrp="1"/>
           </p:cNvSpPr>
@@ -2749,8 +2936,67 @@
                     <a:tint val="75000"/>
                   </a:schemeClr>
                 </a:solidFill>
+                <a:latin typeface="Aptos Narrow"/>
+                <a:ea typeface="Aptos Narrow"/>
+                <a:cs typeface="Aptos Narrow"/>
               </a:defRPr>
             </a:lvl1pPr>
+            <a:lvl2pPr>
+              <a:defRPr>
+                <a:latin typeface="Aptos Narrow"/>
+                <a:ea typeface="Aptos Narrow"/>
+                <a:cs typeface="Aptos Narrow"/>
+              </a:defRPr>
+            </a:lvl2pPr>
+            <a:lvl3pPr>
+              <a:defRPr>
+                <a:latin typeface="Aptos Narrow"/>
+                <a:ea typeface="Aptos Narrow"/>
+                <a:cs typeface="Aptos Narrow"/>
+              </a:defRPr>
+            </a:lvl3pPr>
+            <a:lvl4pPr>
+              <a:defRPr>
+                <a:latin typeface="Aptos Narrow"/>
+                <a:ea typeface="Aptos Narrow"/>
+                <a:cs typeface="Aptos Narrow"/>
+              </a:defRPr>
+            </a:lvl4pPr>
+            <a:lvl5pPr>
+              <a:defRPr>
+                <a:latin typeface="Aptos Narrow"/>
+                <a:ea typeface="Aptos Narrow"/>
+                <a:cs typeface="Aptos Narrow"/>
+              </a:defRPr>
+            </a:lvl5pPr>
+            <a:lvl6pPr>
+              <a:defRPr>
+                <a:latin typeface="Aptos Narrow"/>
+                <a:ea typeface="Aptos Narrow"/>
+                <a:cs typeface="Aptos Narrow"/>
+              </a:defRPr>
+            </a:lvl6pPr>
+            <a:lvl7pPr>
+              <a:defRPr>
+                <a:latin typeface="Aptos Narrow"/>
+                <a:ea typeface="Aptos Narrow"/>
+                <a:cs typeface="Aptos Narrow"/>
+              </a:defRPr>
+            </a:lvl7pPr>
+            <a:lvl8pPr>
+              <a:defRPr>
+                <a:latin typeface="Aptos Narrow"/>
+                <a:ea typeface="Aptos Narrow"/>
+                <a:cs typeface="Aptos Narrow"/>
+              </a:defRPr>
+            </a:lvl8pPr>
+            <a:lvl9pPr>
+              <a:defRPr>
+                <a:latin typeface="Aptos Narrow"/>
+                <a:ea typeface="Aptos Narrow"/>
+                <a:cs typeface="Aptos Narrow"/>
+              </a:defRPr>
+            </a:lvl9pPr>
           </a:lstStyle>
           <a:p>
             <a:pPr>
@@ -3075,7 +3321,7 @@
       </p:grpSpPr>
       <p:sp>
         <p:nvSpPr>
-          <p:cNvPr id="911383372" name="Title"/>
+          <p:cNvPr id="8169978" name="Title"/>
           <p:cNvSpPr>
             <a:spLocks noGrp="1"/>
           </p:cNvSpPr>
@@ -3114,7 +3360,7 @@
       </p:sp>
       <p:sp>
         <p:nvSpPr>
-          <p:cNvPr id="744943182" name="Subtitle"/>
+          <p:cNvPr id="2066719869" name="Subtitle"/>
           <p:cNvSpPr>
             <a:spLocks noGrp="1"/>
           </p:cNvSpPr>
@@ -3221,7 +3467,7 @@
       </p:grpSpPr>
       <p:sp>
         <p:nvSpPr>
-          <p:cNvPr id="1075670188" name=""/>
+          <p:cNvPr id="186032147" name=""/>
           <p:cNvSpPr/>
           <p:nvPr/>
         </p:nvSpPr>
@@ -3285,7 +3531,7 @@
       </p:sp>
       <p:sp>
         <p:nvSpPr>
-          <p:cNvPr id="326445734" name=""/>
+          <p:cNvPr id="1617632549" name=""/>
           <p:cNvSpPr/>
           <p:nvPr/>
         </p:nvSpPr>
@@ -3350,7 +3596,7 @@
       </p:sp>
       <p:sp>
         <p:nvSpPr>
-          <p:cNvPr id="1624332511" name="name"/>
+          <p:cNvPr id="37193736" name="name"/>
           <p:cNvSpPr txBox="1"/>
           <p:nvPr/>
         </p:nvSpPr>
@@ -3395,7 +3641,7 @@
       </p:sp>
       <p:sp>
         <p:nvSpPr>
-          <p:cNvPr id="1505637232" name=""/>
+          <p:cNvPr id="942370674" name=""/>
           <p:cNvSpPr txBox="1"/>
           <p:nvPr/>
         </p:nvSpPr>
@@ -3440,7 +3686,7 @@
       </p:sp>
       <p:sp>
         <p:nvSpPr>
-          <p:cNvPr id="1346480302" name="symbol"/>
+          <p:cNvPr id="738249948" name="symbol"/>
           <p:cNvSpPr txBox="1"/>
           <p:nvPr/>
         </p:nvSpPr>
@@ -3485,7 +3731,7 @@
       </p:sp>
       <p:sp>
         <p:nvSpPr>
-          <p:cNvPr id="498847722" name=""/>
+          <p:cNvPr id="155721051" name=""/>
           <p:cNvSpPr txBox="1"/>
           <p:nvPr/>
         </p:nvSpPr>
@@ -3530,7 +3776,7 @@
       </p:sp>
       <p:sp>
         <p:nvSpPr>
-          <p:cNvPr id="1569395525" name="sector"/>
+          <p:cNvPr id="558652946" name="sector"/>
           <p:cNvSpPr txBox="1"/>
           <p:nvPr/>
         </p:nvSpPr>
@@ -3575,7 +3821,7 @@
       </p:sp>
       <p:sp>
         <p:nvSpPr>
-          <p:cNvPr id="1236601938" name=""/>
+          <p:cNvPr id="1706363105" name=""/>
           <p:cNvSpPr txBox="1"/>
           <p:nvPr/>
         </p:nvSpPr>
@@ -3620,7 +3866,7 @@
       </p:sp>
       <p:sp>
         <p:nvSpPr>
-          <p:cNvPr id="1671536131" name="industry"/>
+          <p:cNvPr id="1581269473" name="industry"/>
           <p:cNvSpPr txBox="1"/>
           <p:nvPr/>
         </p:nvSpPr>
@@ -3665,7 +3911,7 @@
       </p:sp>
       <p:sp>
         <p:nvSpPr>
-          <p:cNvPr id="388355719" name=""/>
+          <p:cNvPr id="332532107" name=""/>
           <p:cNvSpPr txBox="1"/>
           <p:nvPr/>
         </p:nvSpPr>
@@ -3710,7 +3956,7 @@
       </p:sp>
       <p:sp>
         <p:nvSpPr>
-          <p:cNvPr id="1469491165" name="market_cap"/>
+          <p:cNvPr id="1549883798" name="market_cap"/>
           <p:cNvSpPr txBox="1"/>
           <p:nvPr/>
         </p:nvSpPr>
@@ -3755,7 +4001,7 @@
       </p:sp>
       <p:sp>
         <p:nvSpPr>
-          <p:cNvPr id="1654500767" name=""/>
+          <p:cNvPr id="1159836426" name=""/>
           <p:cNvSpPr txBox="1"/>
           <p:nvPr/>
         </p:nvSpPr>
@@ -3800,7 +4046,7 @@
       </p:sp>
       <p:sp>
         <p:nvSpPr>
-          <p:cNvPr id="154398990" name="share_price"/>
+          <p:cNvPr id="1365653565" name="share_price"/>
           <p:cNvSpPr txBox="1"/>
           <p:nvPr/>
         </p:nvSpPr>
@@ -3845,7 +4091,7 @@
       </p:sp>
       <p:sp>
         <p:nvSpPr>
-          <p:cNvPr id="361513341" name=""/>
+          <p:cNvPr id="1036327689" name=""/>
           <p:cNvSpPr txBox="1"/>
           <p:nvPr/>
         </p:nvSpPr>
@@ -3890,7 +4136,7 @@
       </p:sp>
       <p:sp>
         <p:nvSpPr>
-          <p:cNvPr id="331405036" name="share_earnings"/>
+          <p:cNvPr id="1738473194" name="share_earnings"/>
           <p:cNvSpPr txBox="1"/>
           <p:nvPr/>
         </p:nvSpPr>
@@ -3935,7 +4181,7 @@
       </p:sp>
       <p:sp>
         <p:nvSpPr>
-          <p:cNvPr id="1750267214" name=""/>
+          <p:cNvPr id="233422256" name=""/>
           <p:cNvSpPr txBox="1"/>
           <p:nvPr/>
         </p:nvSpPr>
@@ -3980,7 +4226,7 @@
       </p:sp>
       <p:sp>
         <p:nvSpPr>
-          <p:cNvPr id="639771423" name="analyst_rating"/>
+          <p:cNvPr id="1488005342" name="analyst_rating"/>
           <p:cNvSpPr txBox="1"/>
           <p:nvPr/>
         </p:nvSpPr>
@@ -4025,7 +4271,7 @@
       </p:sp>
       <p:sp>
         <p:nvSpPr>
-          <p:cNvPr id="1125352973" name=""/>
+          <p:cNvPr id="227765549" name=""/>
           <p:cNvSpPr txBox="1"/>
           <p:nvPr/>
         </p:nvSpPr>
@@ -4070,7 +4316,7 @@
       </p:sp>
       <p:sp>
         <p:nvSpPr>
-          <p:cNvPr id="1964121637" name="beta"/>
+          <p:cNvPr id="1102142766" name="beta"/>
           <p:cNvSpPr txBox="1"/>
           <p:nvPr/>
         </p:nvSpPr>
@@ -4115,7 +4361,7 @@
       </p:sp>
       <p:sp>
         <p:nvSpPr>
-          <p:cNvPr id="2006255025" name=""/>
+          <p:cNvPr id="40684704" name=""/>
           <p:cNvSpPr txBox="1"/>
           <p:nvPr/>
         </p:nvSpPr>
@@ -4160,7 +4406,7 @@
       </p:sp>
       <p:sp>
         <p:nvSpPr>
-          <p:cNvPr id="2133063032" name=""/>
+          <p:cNvPr id="521001184" name=""/>
           <p:cNvSpPr/>
           <p:nvPr/>
         </p:nvSpPr>
@@ -4224,7 +4470,7 @@
       </p:sp>
       <p:sp>
         <p:nvSpPr>
-          <p:cNvPr id="177288340" name="Title 1"/>
+          <p:cNvPr id="76313564" name="Title 1"/>
           <p:cNvSpPr>
             <a:spLocks noGrp="1"/>
           </p:cNvSpPr>
@@ -4307,7 +4553,7 @@
       </p:sp>
       <p:sp>
         <p:nvSpPr>
-          <p:cNvPr id="60285565" name="Footer Placeholder 4"/>
+          <p:cNvPr id="988494416" name="Footer Placeholder 4"/>
           <p:cNvSpPr>
             <a:spLocks noGrp="1"/>
           </p:cNvSpPr>
@@ -4369,7 +4615,7 @@
       </p:sp>
       <p:sp>
         <p:nvSpPr>
-          <p:cNvPr id="334555045" name="Slide Number Placeholder 5"/>
+          <p:cNvPr id="905652232" name="Slide Number Placeholder 5"/>
           <p:cNvSpPr>
             <a:spLocks noGrp="1"/>
           </p:cNvSpPr>
@@ -4406,7 +4652,7 @@
       </p:sp>
       <p:cxnSp>
         <p:nvCxnSpPr>
-          <p:cNvPr id="1842571458" name=""/>
+          <p:cNvPr id="1648361201" name=""/>
           <p:cNvCxnSpPr/>
           <p:nvPr/>
         </p:nvCxnSpPr>
@@ -4445,7 +4691,7 @@
       </p:cxnSp>
       <p:cxnSp>
         <p:nvCxnSpPr>
-          <p:cNvPr id="1065701629" name=""/>
+          <p:cNvPr id="1071562212" name=""/>
           <p:cNvCxnSpPr/>
           <p:nvPr/>
         </p:nvCxnSpPr>
@@ -4484,7 +4730,7 @@
       </p:cxnSp>
       <p:sp>
         <p:nvSpPr>
-          <p:cNvPr id="1842734150" name=""/>
+          <p:cNvPr id="2042799472" name=""/>
           <p:cNvSpPr txBox="1"/>
           <p:nvPr/>
         </p:nvSpPr>
@@ -4529,7 +4775,7 @@
       </p:sp>
       <p:sp>
         <p:nvSpPr>
-          <p:cNvPr id="1809521249" name=""/>
+          <p:cNvPr id="56000241" name=""/>
           <p:cNvSpPr txBox="1"/>
           <p:nvPr/>
         </p:nvSpPr>
@@ -4574,7 +4820,7 @@
       </p:sp>
       <p:sp>
         <p:nvSpPr>
-          <p:cNvPr id="2027079376" name="description"/>
+          <p:cNvPr id="1555786118" name="description"/>
           <p:cNvSpPr txBox="1"/>
           <p:nvPr/>
         </p:nvSpPr>
@@ -4637,7 +4883,7 @@
       </p:sp>
       <p:cxnSp>
         <p:nvCxnSpPr>
-          <p:cNvPr id="257698639" name=""/>
+          <p:cNvPr id="1652232494" name=""/>
           <p:cNvCxnSpPr/>
           <p:nvPr/>
         </p:nvCxnSpPr>
@@ -4676,7 +4922,7 @@
       </p:cxnSp>
       <p:sp>
         <p:nvSpPr>
-          <p:cNvPr id="1936355256" name="ltm_revenue"/>
+          <p:cNvPr id="875000945" name="ltm_revenue"/>
           <p:cNvSpPr txBox="1"/>
           <p:nvPr/>
         </p:nvSpPr>
@@ -4721,7 +4967,7 @@
       </p:sp>
       <p:sp>
         <p:nvSpPr>
-          <p:cNvPr id="1977612834" name=""/>
+          <p:cNvPr id="1587624905" name=""/>
           <p:cNvSpPr txBox="1"/>
           <p:nvPr/>
         </p:nvSpPr>
@@ -4766,7 +5012,7 @@
       </p:sp>
       <p:cxnSp>
         <p:nvCxnSpPr>
-          <p:cNvPr id="647898387" name=""/>
+          <p:cNvPr id="1722973870" name=""/>
           <p:cNvCxnSpPr/>
           <p:nvPr/>
         </p:nvCxnSpPr>
@@ -4805,7 +5051,7 @@
       </p:cxnSp>
       <p:sp>
         <p:nvSpPr>
-          <p:cNvPr id="1921017296" name="revenue_growth"/>
+          <p:cNvPr id="1578010714" name="revenue_growth"/>
           <p:cNvSpPr txBox="1"/>
           <p:nvPr/>
         </p:nvSpPr>
@@ -4850,7 +5096,7 @@
       </p:sp>
       <p:sp>
         <p:nvSpPr>
-          <p:cNvPr id="286425450" name=""/>
+          <p:cNvPr id="571184061" name=""/>
           <p:cNvSpPr txBox="1"/>
           <p:nvPr/>
         </p:nvSpPr>
@@ -4895,7 +5141,7 @@
       </p:sp>
       <p:cxnSp>
         <p:nvCxnSpPr>
-          <p:cNvPr id="1531801383" name=""/>
+          <p:cNvPr id="743902426" name=""/>
           <p:cNvCxnSpPr/>
           <p:nvPr/>
         </p:nvCxnSpPr>
@@ -4934,7 +5180,7 @@
       </p:cxnSp>
       <p:sp>
         <p:nvSpPr>
-          <p:cNvPr id="1215495915" name="ltm_ebitda"/>
+          <p:cNvPr id="492007483" name="ltm_ebitda"/>
           <p:cNvSpPr txBox="1"/>
           <p:nvPr/>
         </p:nvSpPr>
@@ -4979,7 +5225,7 @@
       </p:sp>
       <p:sp>
         <p:nvSpPr>
-          <p:cNvPr id="1699076555" name=""/>
+          <p:cNvPr id="1902079935" name=""/>
           <p:cNvSpPr txBox="1"/>
           <p:nvPr/>
         </p:nvSpPr>
@@ -5024,7 +5270,7 @@
       </p:sp>
       <p:cxnSp>
         <p:nvCxnSpPr>
-          <p:cNvPr id="1497541660" name=""/>
+          <p:cNvPr id="1237881614" name=""/>
           <p:cNvCxnSpPr/>
           <p:nvPr/>
         </p:nvCxnSpPr>
@@ -5063,7 +5309,7 @@
       </p:cxnSp>
       <p:sp>
         <p:nvSpPr>
-          <p:cNvPr id="1779395040" name="ebitda_margin"/>
+          <p:cNvPr id="830729917" name="ebitda_margin"/>
           <p:cNvSpPr txBox="1"/>
           <p:nvPr/>
         </p:nvSpPr>
@@ -5108,7 +5354,7 @@
       </p:sp>
       <p:sp>
         <p:nvSpPr>
-          <p:cNvPr id="480091914" name=""/>
+          <p:cNvPr id="1316996574" name=""/>
           <p:cNvSpPr txBox="1"/>
           <p:nvPr/>
         </p:nvSpPr>
@@ -5153,7 +5399,7 @@
       </p:sp>
       <p:sp>
         <p:nvSpPr>
-          <p:cNvPr id="953030831" name=""/>
+          <p:cNvPr id="1285659088" name=""/>
           <p:cNvSpPr txBox="1"/>
           <p:nvPr/>
         </p:nvSpPr>
@@ -5217,7 +5463,7 @@
       </p:sp>
       <p:cxnSp>
         <p:nvCxnSpPr>
-          <p:cNvPr id="1850083378" name=""/>
+          <p:cNvPr id="504080021" name=""/>
           <p:cNvCxnSpPr/>
           <p:nvPr/>
         </p:nvCxnSpPr>
@@ -5256,7 +5502,7 @@
       </p:cxnSp>
       <p:cxnSp>
         <p:nvCxnSpPr>
-          <p:cNvPr id="1281726721" name=""/>
+          <p:cNvPr id="1117872809" name=""/>
           <p:cNvCxnSpPr/>
           <p:nvPr/>
         </p:nvCxnSpPr>
@@ -5295,7 +5541,7 @@
       </p:cxnSp>
       <p:cxnSp>
         <p:nvCxnSpPr>
-          <p:cNvPr id="464366003" name=""/>
+          <p:cNvPr id="501863300" name=""/>
           <p:cNvCxnSpPr/>
           <p:nvPr/>
         </p:nvCxnSpPr>
@@ -5334,7 +5580,7 @@
       </p:cxnSp>
       <p:cxnSp>
         <p:nvCxnSpPr>
-          <p:cNvPr id="1326514694" name=""/>
+          <p:cNvPr id="602991021" name=""/>
           <p:cNvCxnSpPr/>
           <p:nvPr/>
         </p:nvCxnSpPr>
@@ -5373,7 +5619,7 @@
       </p:cxnSp>
       <p:cxnSp>
         <p:nvCxnSpPr>
-          <p:cNvPr id="1208989823" name=""/>
+          <p:cNvPr id="481435199" name=""/>
           <p:cNvCxnSpPr/>
           <p:nvPr/>
         </p:nvCxnSpPr>
@@ -5412,7 +5658,7 @@
       </p:cxnSp>
       <p:cxnSp>
         <p:nvCxnSpPr>
-          <p:cNvPr id="1103733350" name=""/>
+          <p:cNvPr id="1748219864" name=""/>
           <p:cNvCxnSpPr/>
           <p:nvPr/>
         </p:nvCxnSpPr>
@@ -5451,7 +5697,7 @@
       </p:cxnSp>
       <p:cxnSp>
         <p:nvCxnSpPr>
-          <p:cNvPr id="1730335108" name=""/>
+          <p:cNvPr id="1330390344" name=""/>
           <p:cNvCxnSpPr/>
           <p:nvPr/>
         </p:nvCxnSpPr>
@@ -5490,7 +5736,7 @@
       </p:cxnSp>
       <p:cxnSp>
         <p:nvCxnSpPr>
-          <p:cNvPr id="236593648" name=""/>
+          <p:cNvPr id="1547793031" name=""/>
           <p:cNvCxnSpPr/>
           <p:nvPr/>
         </p:nvCxnSpPr>
@@ -5529,7 +5775,7 @@
       </p:cxnSp>
       <p:cxnSp>
         <p:nvCxnSpPr>
-          <p:cNvPr id="1136183172" name=""/>
+          <p:cNvPr id="391801643" name=""/>
           <p:cNvCxnSpPr/>
           <p:nvPr/>
         </p:nvCxnSpPr>
@@ -5568,7 +5814,7 @@
       </p:cxnSp>
       <p:cxnSp>
         <p:nvCxnSpPr>
-          <p:cNvPr id="1426056785" name=""/>
+          <p:cNvPr id="90340978" name=""/>
           <p:cNvCxnSpPr/>
           <p:nvPr/>
         </p:nvCxnSpPr>
@@ -5607,7 +5853,7 @@
       </p:cxnSp>
       <p:cxnSp>
         <p:nvCxnSpPr>
-          <p:cNvPr id="824741038" name=""/>
+          <p:cNvPr id="853844139" name=""/>
           <p:cNvCxnSpPr/>
           <p:nvPr/>
         </p:nvCxnSpPr>
@@ -5646,7 +5892,7 @@
       </p:cxnSp>
       <p:cxnSp>
         <p:nvCxnSpPr>
-          <p:cNvPr id="594242458" name=""/>
+          <p:cNvPr id="1243874021" name=""/>
           <p:cNvCxnSpPr/>
           <p:nvPr/>
         </p:nvCxnSpPr>
@@ -5685,7 +5931,7 @@
       </p:cxnSp>
       <p:cxnSp>
         <p:nvCxnSpPr>
-          <p:cNvPr id="1973086408" name=""/>
+          <p:cNvPr id="712750214" name=""/>
           <p:cNvCxnSpPr/>
           <p:nvPr/>
         </p:nvCxnSpPr>
@@ -5724,7 +5970,7 @@
       </p:cxnSp>
       <p:cxnSp>
         <p:nvCxnSpPr>
-          <p:cNvPr id="204858409" name=""/>
+          <p:cNvPr id="1716148243" name=""/>
           <p:cNvCxnSpPr/>
           <p:nvPr/>
         </p:nvCxnSpPr>
@@ -5763,7 +6009,7 @@
       </p:cxnSp>
       <p:cxnSp>
         <p:nvCxnSpPr>
-          <p:cNvPr id="1396683120" name=""/>
+          <p:cNvPr id="450295000" name=""/>
           <p:cNvCxnSpPr/>
           <p:nvPr/>
         </p:nvCxnSpPr>
@@ -5802,7 +6048,7 @@
       </p:cxnSp>
       <p:cxnSp>
         <p:nvCxnSpPr>
-          <p:cNvPr id="143510679" name=""/>
+          <p:cNvPr id="1262010546" name=""/>
           <p:cNvCxnSpPr/>
           <p:nvPr/>
         </p:nvCxnSpPr>
@@ -5874,7 +6120,7 @@
       </p:grpSpPr>
       <p:sp>
         <p:nvSpPr>
-          <p:cNvPr id="2105729178" name="Footer Placeholder 4"/>
+          <p:cNvPr id="120366909" name="Footer Placeholder 4"/>
           <p:cNvSpPr>
             <a:spLocks noGrp="1"/>
           </p:cNvSpPr>
@@ -5936,7 +6182,7 @@
       </p:sp>
       <p:sp>
         <p:nvSpPr>
-          <p:cNvPr id="1012086158" name="Rectangle 155402662"/>
+          <p:cNvPr id="144057939" name="Rectangle 155402662"/>
           <p:cNvSpPr txBox="1"/>
           <p:nvPr/>
         </p:nvSpPr>
@@ -5992,7 +6238,7 @@
       </p:sp>
       <p:sp>
         <p:nvSpPr>
-          <p:cNvPr id="58888146" name="Rectangle 155402662"/>
+          <p:cNvPr id="656131169" name="Rectangle 155402662"/>
           <p:cNvSpPr txBox="1"/>
           <p:nvPr/>
         </p:nvSpPr>
@@ -6037,7 +6283,7 @@
       </p:sp>
       <p:sp>
         <p:nvSpPr>
-          <p:cNvPr id="196938319" name="Rectangle 155402662"/>
+          <p:cNvPr id="400614566" name="Rectangle 155402662"/>
           <p:cNvSpPr txBox="1"/>
           <p:nvPr/>
         </p:nvSpPr>
@@ -6082,7 +6328,7 @@
       </p:sp>
       <p:sp>
         <p:nvSpPr>
-          <p:cNvPr id="395957939" name=""/>
+          <p:cNvPr id="776583228" name=""/>
           <p:cNvSpPr/>
           <p:nvPr/>
         </p:nvSpPr>
@@ -6146,7 +6392,7 @@
       </p:sp>
       <p:sp>
         <p:nvSpPr>
-          <p:cNvPr id="287554380" name=""/>
+          <p:cNvPr id="1273989582" name=""/>
           <p:cNvSpPr/>
           <p:nvPr/>
         </p:nvSpPr>
@@ -6210,7 +6456,7 @@
       </p:sp>
       <p:sp>
         <p:nvSpPr>
-          <p:cNvPr id="525072123" name="Title 1"/>
+          <p:cNvPr id="50561139" name="Title 1"/>
           <p:cNvSpPr>
             <a:spLocks noGrp="1"/>
           </p:cNvSpPr>
@@ -6271,7 +6517,7 @@
       </p:sp>
       <p:sp>
         <p:nvSpPr>
-          <p:cNvPr id="957509489" name="Slide Number Placeholder 5"/>
+          <p:cNvPr id="442248667" name="Slide Number Placeholder 5"/>
           <p:cNvSpPr>
             <a:spLocks noGrp="1"/>
           </p:cNvSpPr>
@@ -6308,7 +6554,7 @@
       </p:sp>
       <p:cxnSp>
         <p:nvCxnSpPr>
-          <p:cNvPr id="776401926" name=""/>
+          <p:cNvPr id="668499557" name=""/>
           <p:cNvCxnSpPr/>
           <p:nvPr/>
         </p:nvCxnSpPr>
@@ -6347,7 +6593,7 @@
       </p:cxnSp>
       <p:cxnSp>
         <p:nvCxnSpPr>
-          <p:cNvPr id="690482887" name=""/>
+          <p:cNvPr id="181260099" name=""/>
           <p:cNvCxnSpPr/>
           <p:nvPr/>
         </p:nvCxnSpPr>
@@ -6386,7 +6632,7 @@
       </p:cxnSp>
       <p:sp>
         <p:nvSpPr>
-          <p:cNvPr id="1695357591" name=""/>
+          <p:cNvPr id="1443260438" name=""/>
           <p:cNvSpPr txBox="1"/>
           <p:nvPr/>
         </p:nvSpPr>
@@ -6431,7 +6677,7 @@
       </p:sp>
       <p:sp>
         <p:nvSpPr>
-          <p:cNvPr id="1059978103" name=""/>
+          <p:cNvPr id="400710706" name=""/>
           <p:cNvSpPr txBox="1"/>
           <p:nvPr/>
         </p:nvSpPr>
@@ -6476,7 +6722,7 @@
       </p:sp>
       <p:sp>
         <p:nvSpPr>
-          <p:cNvPr id="2041523442" name=""/>
+          <p:cNvPr id="1837600556" name=""/>
           <p:cNvSpPr/>
           <p:nvPr/>
         </p:nvSpPr>
@@ -6541,7 +6787,7 @@
       </p:sp>
       <p:cxnSp>
         <p:nvCxnSpPr>
-          <p:cNvPr id="1274373384" name=""/>
+          <p:cNvPr id="2114907070" name=""/>
           <p:cNvCxnSpPr/>
           <p:nvPr/>
         </p:nvCxnSpPr>
@@ -6580,7 +6826,7 @@
       </p:cxnSp>
       <p:cxnSp>
         <p:nvCxnSpPr>
-          <p:cNvPr id="983734188" name=""/>
+          <p:cNvPr id="1417787339" name=""/>
           <p:cNvCxnSpPr/>
           <p:nvPr/>
         </p:nvCxnSpPr>
@@ -6619,7 +6865,7 @@
       </p:cxnSp>
       <p:cxnSp>
         <p:nvCxnSpPr>
-          <p:cNvPr id="696171894" name=""/>
+          <p:cNvPr id="1099033788" name=""/>
           <p:cNvCxnSpPr/>
           <p:nvPr/>
         </p:nvCxnSpPr>
@@ -6658,7 +6904,7 @@
       </p:cxnSp>
       <p:cxnSp>
         <p:nvCxnSpPr>
-          <p:cNvPr id="851874978" name=""/>
+          <p:cNvPr id="1161785644" name=""/>
           <p:cNvCxnSpPr/>
           <p:nvPr/>
         </p:nvCxnSpPr>
@@ -6697,7 +6943,7 @@
       </p:cxnSp>
       <p:cxnSp>
         <p:nvCxnSpPr>
-          <p:cNvPr id="1044940067" name=""/>
+          <p:cNvPr id="1846338639" name=""/>
           <p:cNvCxnSpPr/>
           <p:nvPr/>
         </p:nvCxnSpPr>
@@ -6736,7 +6982,7 @@
       </p:cxnSp>
       <p:sp>
         <p:nvSpPr>
-          <p:cNvPr id="388147475" name="mean_price"/>
+          <p:cNvPr id="337467447" name="mean_price"/>
           <p:cNvSpPr txBox="1"/>
           <p:nvPr/>
         </p:nvSpPr>
@@ -6781,7 +7027,7 @@
       </p:sp>
       <p:sp>
         <p:nvSpPr>
-          <p:cNvPr id="1091193202" name="max_price"/>
+          <p:cNvPr id="1960619593" name="max_price"/>
           <p:cNvSpPr txBox="1"/>
           <p:nvPr/>
         </p:nvSpPr>
@@ -6826,7 +7072,7 @@
       </p:sp>
       <p:sp>
         <p:nvSpPr>
-          <p:cNvPr id="1302606865" name="50p_price"/>
+          <p:cNvPr id="244148815" name="50p_price"/>
           <p:cNvSpPr txBox="1"/>
           <p:nvPr/>
         </p:nvSpPr>
@@ -6871,7 +7117,7 @@
       </p:sp>
       <p:sp>
         <p:nvSpPr>
-          <p:cNvPr id="1704068235" name="25p_price"/>
+          <p:cNvPr id="1860988197" name="25p_price"/>
           <p:cNvSpPr txBox="1"/>
           <p:nvPr/>
         </p:nvSpPr>
@@ -6916,7 +7162,7 @@
       </p:sp>
       <p:sp>
         <p:nvSpPr>
-          <p:cNvPr id="1998764105" name="min_price"/>
+          <p:cNvPr id="1309398630" name="min_price"/>
           <p:cNvSpPr txBox="1"/>
           <p:nvPr/>
         </p:nvSpPr>
@@ -6961,7 +7207,7 @@
       </p:sp>
       <p:sp>
         <p:nvSpPr>
-          <p:cNvPr id="63745802" name="std_price"/>
+          <p:cNvPr id="1226606281" name="std_price"/>
           <p:cNvSpPr txBox="1"/>
           <p:nvPr/>
         </p:nvSpPr>
@@ -7006,7 +7252,7 @@
       </p:sp>
       <p:sp>
         <p:nvSpPr>
-          <p:cNvPr id="1507845737" name="75p_price"/>
+          <p:cNvPr id="1318664120" name="75p_price"/>
           <p:cNvSpPr txBox="1"/>
           <p:nvPr/>
         </p:nvSpPr>
@@ -7051,7 +7297,7 @@
       </p:sp>
       <p:cxnSp>
         <p:nvCxnSpPr>
-          <p:cNvPr id="1821411618" name=""/>
+          <p:cNvPr id="561954521" name=""/>
           <p:cNvCxnSpPr/>
           <p:nvPr/>
         </p:nvCxnSpPr>
@@ -7090,7 +7336,7 @@
       </p:cxnSp>
       <p:cxnSp>
         <p:nvCxnSpPr>
-          <p:cNvPr id="1669566200" name=""/>
+          <p:cNvPr id="1062526859" name=""/>
           <p:cNvCxnSpPr/>
           <p:nvPr/>
         </p:nvCxnSpPr>
@@ -7129,7 +7375,7 @@
       </p:cxnSp>
       <p:sp>
         <p:nvSpPr>
-          <p:cNvPr id="668639529" name="current_price"/>
+          <p:cNvPr id="2113104059" name="current_price"/>
           <p:cNvSpPr txBox="1"/>
           <p:nvPr/>
         </p:nvSpPr>
@@ -7174,7 +7420,7 @@
       </p:sp>
       <p:cxnSp>
         <p:nvCxnSpPr>
-          <p:cNvPr id="482991369" name=""/>
+          <p:cNvPr id="639742468" name=""/>
           <p:cNvCxnSpPr/>
           <p:nvPr/>
         </p:nvCxnSpPr>
@@ -7213,7 +7459,7 @@
       </p:cxnSp>
       <p:sp>
         <p:nvSpPr>
-          <p:cNvPr id="1766964854" name=""/>
+          <p:cNvPr id="1474930182" name=""/>
           <p:cNvSpPr txBox="1"/>
           <p:nvPr/>
         </p:nvSpPr>
@@ -7258,7 +7504,7 @@
       </p:sp>
       <p:sp>
         <p:nvSpPr>
-          <p:cNvPr id="820026779" name=""/>
+          <p:cNvPr id="1577649619" name=""/>
           <p:cNvSpPr txBox="1"/>
           <p:nvPr/>
         </p:nvSpPr>
@@ -7303,7 +7549,7 @@
       </p:sp>
       <p:sp>
         <p:nvSpPr>
-          <p:cNvPr id="1533868838" name=""/>
+          <p:cNvPr id="829308820" name=""/>
           <p:cNvSpPr txBox="1"/>
           <p:nvPr/>
         </p:nvSpPr>
@@ -7348,7 +7594,7 @@
       </p:sp>
       <p:sp>
         <p:nvSpPr>
-          <p:cNvPr id="39125655" name=""/>
+          <p:cNvPr id="894636338" name=""/>
           <p:cNvSpPr txBox="1"/>
           <p:nvPr/>
         </p:nvSpPr>
@@ -7393,7 +7639,7 @@
       </p:sp>
       <p:sp>
         <p:nvSpPr>
-          <p:cNvPr id="1120492519" name=""/>
+          <p:cNvPr id="357910755" name=""/>
           <p:cNvSpPr txBox="1"/>
           <p:nvPr/>
         </p:nvSpPr>
@@ -7438,7 +7684,7 @@
       </p:sp>
       <p:sp>
         <p:nvSpPr>
-          <p:cNvPr id="662308237" name=""/>
+          <p:cNvPr id="920370990" name=""/>
           <p:cNvSpPr txBox="1"/>
           <p:nvPr/>
         </p:nvSpPr>
@@ -7483,7 +7729,7 @@
       </p:sp>
       <p:sp>
         <p:nvSpPr>
-          <p:cNvPr id="1562890499" name=""/>
+          <p:cNvPr id="1921925712" name=""/>
           <p:cNvSpPr txBox="1"/>
           <p:nvPr/>
         </p:nvSpPr>
@@ -7528,7 +7774,7 @@
       </p:sp>
       <p:cxnSp>
         <p:nvCxnSpPr>
-          <p:cNvPr id="1754893700" name=""/>
+          <p:cNvPr id="839068739" name=""/>
           <p:cNvCxnSpPr/>
           <p:nvPr/>
         </p:nvCxnSpPr>
@@ -7567,7 +7813,7 @@
       </p:cxnSp>
       <p:cxnSp>
         <p:nvCxnSpPr>
-          <p:cNvPr id="1179401546" name=""/>
+          <p:cNvPr id="1362851758" name=""/>
           <p:cNvCxnSpPr/>
           <p:nvPr/>
         </p:nvCxnSpPr>
@@ -7606,7 +7852,7 @@
       </p:cxnSp>
       <p:cxnSp>
         <p:nvCxnSpPr>
-          <p:cNvPr id="1412505054" name=""/>
+          <p:cNvPr id="1017081605" name=""/>
           <p:cNvCxnSpPr/>
           <p:nvPr/>
         </p:nvCxnSpPr>
@@ -7645,7 +7891,7 @@
       </p:cxnSp>
       <p:cxnSp>
         <p:nvCxnSpPr>
-          <p:cNvPr id="424243116" name=""/>
+          <p:cNvPr id="1286068174" name=""/>
           <p:cNvCxnSpPr/>
           <p:nvPr/>
         </p:nvCxnSpPr>
@@ -7684,7 +7930,7 @@
       </p:cxnSp>
       <p:cxnSp>
         <p:nvCxnSpPr>
-          <p:cNvPr id="1733251558" name=""/>
+          <p:cNvPr id="133538622" name=""/>
           <p:cNvCxnSpPr/>
           <p:nvPr/>
         </p:nvCxnSpPr>
@@ -7723,7 +7969,7 @@
       </p:cxnSp>
       <p:cxnSp>
         <p:nvCxnSpPr>
-          <p:cNvPr id="1077223833" name=""/>
+          <p:cNvPr id="793567203" name=""/>
           <p:cNvCxnSpPr/>
           <p:nvPr/>
         </p:nvCxnSpPr>
@@ -7762,7 +8008,7 @@
       </p:cxnSp>
       <p:sp>
         <p:nvSpPr>
-          <p:cNvPr id="1949939337" name=""/>
+          <p:cNvPr id="1205128172" name=""/>
           <p:cNvSpPr txBox="1"/>
           <p:nvPr/>
         </p:nvSpPr>
@@ -7807,7 +8053,7 @@
       </p:sp>
       <p:cxnSp>
         <p:nvCxnSpPr>
-          <p:cNvPr id="1379343377" name=""/>
+          <p:cNvPr id="1300879047" name=""/>
           <p:cNvCxnSpPr/>
           <p:nvPr/>
         </p:nvCxnSpPr>
@@ -7846,7 +8092,7 @@
       </p:cxnSp>
       <p:cxnSp>
         <p:nvCxnSpPr>
-          <p:cNvPr id="1651033834" name=""/>
+          <p:cNvPr id="37157639" name=""/>
           <p:cNvCxnSpPr/>
           <p:nvPr/>
         </p:nvCxnSpPr>
@@ -7885,7 +8131,7 @@
       </p:cxnSp>
       <p:sp>
         <p:nvSpPr>
-          <p:cNvPr id="40199576" name="analyst_expectation"/>
+          <p:cNvPr id="1695807561" name="analyst_expectation"/>
           <p:cNvSpPr txBox="1"/>
           <p:nvPr/>
         </p:nvSpPr>
@@ -7930,7 +8176,7 @@
       </p:sp>
       <p:sp>
         <p:nvSpPr>
-          <p:cNvPr id="2026957689" name=""/>
+          <p:cNvPr id="1457279468" name=""/>
           <p:cNvSpPr txBox="1"/>
           <p:nvPr/>
         </p:nvSpPr>
@@ -7975,7 +8221,7 @@
       </p:sp>
       <p:pic>
         <p:nvPicPr>
-          <p:cNvPr id="1403495795" name="price_chart" descr="image.png"/>
+          <p:cNvPr id="800118625" name="price_chart" descr="image.png"/>
           <p:cNvPicPr>
             <a:picLocks noChangeAspect="1"/>
           </p:cNvPicPr>
@@ -7997,7 +8243,7 @@
       </p:pic>
       <p:sp>
         <p:nvSpPr>
-          <p:cNvPr id="1555835639" name=""/>
+          <p:cNvPr id="585842896" name=""/>
           <p:cNvSpPr/>
           <p:nvPr/>
         </p:nvSpPr>
@@ -8060,7 +8306,7 @@
       </p:sp>
       <p:sp>
         <p:nvSpPr>
-          <p:cNvPr id="744645555" name=""/>
+          <p:cNvPr id="1916440290" name=""/>
           <p:cNvSpPr/>
           <p:nvPr/>
         </p:nvSpPr>
@@ -8123,7 +8369,7 @@
       </p:sp>
       <p:sp>
         <p:nvSpPr>
-          <p:cNvPr id="1662835774" name=""/>
+          <p:cNvPr id="2038782337" name=""/>
           <p:cNvSpPr/>
           <p:nvPr/>
         </p:nvSpPr>
@@ -8186,7 +8432,7 @@
       </p:sp>
       <p:cxnSp>
         <p:nvCxnSpPr>
-          <p:cNvPr id="259273861" name=""/>
+          <p:cNvPr id="1295174894" name=""/>
           <p:cNvCxnSpPr/>
           <p:nvPr/>
         </p:nvCxnSpPr>
@@ -8225,7 +8471,7 @@
       </p:cxnSp>
       <p:cxnSp>
         <p:nvCxnSpPr>
-          <p:cNvPr id="455745283" name=""/>
+          <p:cNvPr id="448328447" name=""/>
           <p:cNvCxnSpPr/>
           <p:nvPr/>
         </p:nvCxnSpPr>
@@ -8297,7 +8543,7 @@
       </p:grpSpPr>
       <p:sp>
         <p:nvSpPr>
-          <p:cNvPr id="552081189" name=""/>
+          <p:cNvPr id="121022220" name=""/>
           <p:cNvSpPr/>
           <p:nvPr/>
         </p:nvSpPr>
@@ -8363,7 +8609,7 @@
       </p:sp>
       <p:sp>
         <p:nvSpPr>
-          <p:cNvPr id="1215562909" name="Title 1"/>
+          <p:cNvPr id="959911692" name="Title 1"/>
           <p:cNvSpPr>
             <a:spLocks noGrp="1"/>
           </p:cNvSpPr>
@@ -8424,7 +8670,7 @@
       </p:sp>
       <p:sp>
         <p:nvSpPr>
-          <p:cNvPr id="606589058" name="Footer Placeholder 4"/>
+          <p:cNvPr id="1554728073" name="Footer Placeholder 4"/>
           <p:cNvSpPr>
             <a:spLocks noGrp="1"/>
           </p:cNvSpPr>
@@ -8486,7 +8732,7 @@
       </p:sp>
       <p:sp>
         <p:nvSpPr>
-          <p:cNvPr id="1297523459" name="Slide Number Placeholder 5"/>
+          <p:cNvPr id="105667225" name="Slide Number Placeholder 5"/>
           <p:cNvSpPr>
             <a:spLocks noGrp="1"/>
           </p:cNvSpPr>
@@ -8523,7 +8769,7 @@
       </p:sp>
       <p:cxnSp>
         <p:nvCxnSpPr>
-          <p:cNvPr id="1243110188" name=""/>
+          <p:cNvPr id="1270951185" name=""/>
           <p:cNvCxnSpPr/>
           <p:nvPr/>
         </p:nvCxnSpPr>
@@ -8562,7 +8808,7 @@
       </p:cxnSp>
       <p:cxnSp>
         <p:nvCxnSpPr>
-          <p:cNvPr id="902775469" name=""/>
+          <p:cNvPr id="798870496" name=""/>
           <p:cNvCxnSpPr/>
           <p:nvPr/>
         </p:nvCxnSpPr>
@@ -8601,7 +8847,7 @@
       </p:cxnSp>
       <p:sp>
         <p:nvSpPr>
-          <p:cNvPr id="298396434" name=""/>
+          <p:cNvPr id="1092166642" name=""/>
           <p:cNvSpPr txBox="1"/>
           <p:nvPr/>
         </p:nvSpPr>
@@ -8646,7 +8892,7 @@
       </p:sp>
       <p:sp>
         <p:nvSpPr>
-          <p:cNvPr id="910370791" name=""/>
+          <p:cNvPr id="1663839856" name=""/>
           <p:cNvSpPr txBox="1"/>
           <p:nvPr/>
         </p:nvSpPr>
@@ -8691,7 +8937,7 @@
       </p:sp>
       <p:sp>
         <p:nvSpPr>
-          <p:cNvPr id="574208032" name=""/>
+          <p:cNvPr id="626391209" name=""/>
           <p:cNvSpPr/>
           <p:nvPr/>
         </p:nvSpPr>
@@ -8759,7 +9005,7 @@
       </p:sp>
       <p:sp>
         <p:nvSpPr>
-          <p:cNvPr id="139788643" name="year_3"/>
+          <p:cNvPr id="337473124" name="year_3"/>
           <p:cNvSpPr txBox="1"/>
           <p:nvPr/>
         </p:nvSpPr>
@@ -8804,7 +9050,7 @@
       </p:sp>
       <p:sp>
         <p:nvSpPr>
-          <p:cNvPr id="888019242" name="year_2"/>
+          <p:cNvPr id="1598784722" name="year_2"/>
           <p:cNvSpPr txBox="1"/>
           <p:nvPr/>
         </p:nvSpPr>
@@ -8849,7 +9095,7 @@
       </p:sp>
       <p:sp>
         <p:nvSpPr>
-          <p:cNvPr id="666675202" name="year_1"/>
+          <p:cNvPr id="799915660" name="year_1"/>
           <p:cNvSpPr txBox="1"/>
           <p:nvPr/>
         </p:nvSpPr>
@@ -8894,7 +9140,7 @@
       </p:sp>
       <p:sp>
         <p:nvSpPr>
-          <p:cNvPr id="1713036480" name="name"/>
+          <p:cNvPr id="1499117635" name="name"/>
           <p:cNvSpPr txBox="1"/>
           <p:nvPr/>
         </p:nvSpPr>
@@ -8939,7 +9185,7 @@
       </p:sp>
       <p:sp>
         <p:nvSpPr>
-          <p:cNvPr id="907310921" name="name"/>
+          <p:cNvPr id="1842555620" name="name"/>
           <p:cNvSpPr txBox="1"/>
           <p:nvPr/>
         </p:nvSpPr>
@@ -8984,7 +9230,7 @@
       </p:sp>
       <p:sp>
         <p:nvSpPr>
-          <p:cNvPr id="1988098932" name=""/>
+          <p:cNvPr id="801620018" name=""/>
           <p:cNvSpPr/>
           <p:nvPr/>
         </p:nvSpPr>
@@ -9049,7 +9295,7 @@
       </p:sp>
       <p:sp>
         <p:nvSpPr>
-          <p:cNvPr id="1497498320" name="comment_1"/>
+          <p:cNvPr id="1913643110" name="comment_1"/>
           <p:cNvSpPr/>
           <p:nvPr/>
         </p:nvSpPr>
@@ -9127,7 +9373,7 @@
       </p:sp>
       <p:sp>
         <p:nvSpPr>
-          <p:cNvPr id="802574729" name=""/>
+          <p:cNvPr id="1666014654" name=""/>
           <p:cNvSpPr/>
           <p:nvPr/>
         </p:nvSpPr>
@@ -9192,7 +9438,7 @@
       </p:sp>
       <p:sp>
         <p:nvSpPr>
-          <p:cNvPr id="347230070" name="comment_2"/>
+          <p:cNvPr id="1884908358" name="comment_2"/>
           <p:cNvSpPr/>
           <p:nvPr/>
         </p:nvSpPr>
@@ -9270,7 +9516,7 @@
       </p:sp>
       <p:sp>
         <p:nvSpPr>
-          <p:cNvPr id="213758942" name=""/>
+          <p:cNvPr id="1476158215" name=""/>
           <p:cNvSpPr/>
           <p:nvPr/>
         </p:nvSpPr>
@@ -9335,7 +9581,7 @@
       </p:sp>
       <p:sp>
         <p:nvSpPr>
-          <p:cNvPr id="1376940115" name="comment_3"/>
+          <p:cNvPr id="1366838717" name="comment_3"/>
           <p:cNvSpPr/>
           <p:nvPr/>
         </p:nvSpPr>
@@ -9413,7 +9659,7 @@
       </p:sp>
       <p:sp>
         <p:nvSpPr>
-          <p:cNvPr id="778265145" name="revenue_3"/>
+          <p:cNvPr id="861424098" name="revenue_3"/>
           <p:cNvSpPr txBox="1"/>
           <p:nvPr/>
         </p:nvSpPr>
@@ -9458,7 +9704,7 @@
       </p:sp>
       <p:sp>
         <p:nvSpPr>
-          <p:cNvPr id="1736611552" name=""/>
+          <p:cNvPr id="1265129676" name=""/>
           <p:cNvSpPr txBox="1"/>
           <p:nvPr/>
         </p:nvSpPr>
@@ -9503,7 +9749,7 @@
       </p:sp>
       <p:sp>
         <p:nvSpPr>
-          <p:cNvPr id="1910315942" name="revenue_2"/>
+          <p:cNvPr id="1400800407" name="revenue_2"/>
           <p:cNvSpPr txBox="1"/>
           <p:nvPr/>
         </p:nvSpPr>
@@ -9548,7 +9794,7 @@
       </p:sp>
       <p:sp>
         <p:nvSpPr>
-          <p:cNvPr id="807101555" name="revenue_1"/>
+          <p:cNvPr id="1581098564" name="revenue_1"/>
           <p:cNvSpPr txBox="1"/>
           <p:nvPr/>
         </p:nvSpPr>
@@ -9593,7 +9839,7 @@
       </p:sp>
       <p:sp>
         <p:nvSpPr>
-          <p:cNvPr id="1551745561" name="revenue_m"/>
+          <p:cNvPr id="1911978698" name="revenue_m"/>
           <p:cNvSpPr txBox="1"/>
           <p:nvPr/>
         </p:nvSpPr>
@@ -9638,7 +9884,7 @@
       </p:sp>
       <p:sp>
         <p:nvSpPr>
-          <p:cNvPr id="691460297" name="name"/>
+          <p:cNvPr id="1830318906" name="name"/>
           <p:cNvSpPr txBox="1"/>
           <p:nvPr/>
         </p:nvSpPr>
@@ -9683,7 +9929,7 @@
       </p:sp>
       <p:sp>
         <p:nvSpPr>
-          <p:cNvPr id="131708897" name="gross_profit_3"/>
+          <p:cNvPr id="908458907" name="gross_profit_3"/>
           <p:cNvSpPr txBox="1"/>
           <p:nvPr/>
         </p:nvSpPr>
@@ -9728,7 +9974,7 @@
       </p:sp>
       <p:sp>
         <p:nvSpPr>
-          <p:cNvPr id="1527547352" name=""/>
+          <p:cNvPr id="470217800" name=""/>
           <p:cNvSpPr txBox="1"/>
           <p:nvPr/>
         </p:nvSpPr>
@@ -9773,7 +10019,7 @@
       </p:sp>
       <p:sp>
         <p:nvSpPr>
-          <p:cNvPr id="1159930072" name="gross_profit_2"/>
+          <p:cNvPr id="108886169" name="gross_profit_2"/>
           <p:cNvSpPr txBox="1"/>
           <p:nvPr/>
         </p:nvSpPr>
@@ -9818,7 +10064,7 @@
       </p:sp>
       <p:sp>
         <p:nvSpPr>
-          <p:cNvPr id="1355834727" name="gross_profit_1"/>
+          <p:cNvPr id="274199118" name="gross_profit_1"/>
           <p:cNvSpPr txBox="1"/>
           <p:nvPr/>
         </p:nvSpPr>
@@ -9863,7 +10109,7 @@
       </p:sp>
       <p:sp>
         <p:nvSpPr>
-          <p:cNvPr id="433021175" name="gross_profit_m"/>
+          <p:cNvPr id="1965487069" name="gross_profit_m"/>
           <p:cNvSpPr txBox="1"/>
           <p:nvPr/>
         </p:nvSpPr>
@@ -9908,7 +10154,7 @@
       </p:sp>
       <p:sp>
         <p:nvSpPr>
-          <p:cNvPr id="1908565589" name="symbol"/>
+          <p:cNvPr id="358932771" name="symbol"/>
           <p:cNvSpPr txBox="1"/>
           <p:nvPr/>
         </p:nvSpPr>
@@ -9953,7 +10199,7 @@
       </p:sp>
       <p:sp>
         <p:nvSpPr>
-          <p:cNvPr id="872652071" name="operating_profit_3"/>
+          <p:cNvPr id="1836383875" name="operating_profit_3"/>
           <p:cNvSpPr txBox="1"/>
           <p:nvPr/>
         </p:nvSpPr>
@@ -9998,7 +10244,7 @@
       </p:sp>
       <p:sp>
         <p:nvSpPr>
-          <p:cNvPr id="2071473625" name=""/>
+          <p:cNvPr id="1737852710" name=""/>
           <p:cNvSpPr txBox="1"/>
           <p:nvPr/>
         </p:nvSpPr>
@@ -10043,7 +10289,7 @@
       </p:sp>
       <p:sp>
         <p:nvSpPr>
-          <p:cNvPr id="1491320554" name="operating_profit_2"/>
+          <p:cNvPr id="1620485650" name="operating_profit_2"/>
           <p:cNvSpPr txBox="1"/>
           <p:nvPr/>
         </p:nvSpPr>
@@ -10088,7 +10334,7 @@
       </p:sp>
       <p:sp>
         <p:nvSpPr>
-          <p:cNvPr id="573871737" name="operating_profit_1"/>
+          <p:cNvPr id="836976116" name="operating_profit_1"/>
           <p:cNvSpPr txBox="1"/>
           <p:nvPr/>
         </p:nvSpPr>
@@ -10133,7 +10379,7 @@
       </p:sp>
       <p:sp>
         <p:nvSpPr>
-          <p:cNvPr id="849240329" name="operating_profit_m"/>
+          <p:cNvPr id="317986756" name="operating_profit_m"/>
           <p:cNvSpPr txBox="1"/>
           <p:nvPr/>
         </p:nvSpPr>
@@ -10178,7 +10424,7 @@
       </p:sp>
       <p:sp>
         <p:nvSpPr>
-          <p:cNvPr id="1209173856" name="sector"/>
+          <p:cNvPr id="181205779" name="sector"/>
           <p:cNvSpPr txBox="1"/>
           <p:nvPr/>
         </p:nvSpPr>
@@ -10223,7 +10469,7 @@
       </p:sp>
       <p:sp>
         <p:nvSpPr>
-          <p:cNvPr id="1529694397" name="net_income_3"/>
+          <p:cNvPr id="1561427051" name="net_income_3"/>
           <p:cNvSpPr txBox="1"/>
           <p:nvPr/>
         </p:nvSpPr>
@@ -10268,7 +10514,7 @@
       </p:sp>
       <p:sp>
         <p:nvSpPr>
-          <p:cNvPr id="1723374682" name=""/>
+          <p:cNvPr id="856589925" name=""/>
           <p:cNvSpPr txBox="1"/>
           <p:nvPr/>
         </p:nvSpPr>
@@ -10313,7 +10559,7 @@
       </p:sp>
       <p:sp>
         <p:nvSpPr>
-          <p:cNvPr id="1339638322" name="net_income_2"/>
+          <p:cNvPr id="2009268787" name="net_income_2"/>
           <p:cNvSpPr txBox="1"/>
           <p:nvPr/>
         </p:nvSpPr>
@@ -10358,7 +10604,7 @@
       </p:sp>
       <p:sp>
         <p:nvSpPr>
-          <p:cNvPr id="1049983372" name="net_income_1"/>
+          <p:cNvPr id="614021169" name="net_income_1"/>
           <p:cNvSpPr txBox="1"/>
           <p:nvPr/>
         </p:nvSpPr>
@@ -10403,7 +10649,7 @@
       </p:sp>
       <p:sp>
         <p:nvSpPr>
-          <p:cNvPr id="2106396214" name="net_income_m"/>
+          <p:cNvPr id="602796192" name="net_income_m"/>
           <p:cNvSpPr txBox="1"/>
           <p:nvPr/>
         </p:nvSpPr>
@@ -10448,7 +10694,7 @@
       </p:sp>
       <p:sp>
         <p:nvSpPr>
-          <p:cNvPr id="1978995322" name="industry"/>
+          <p:cNvPr id="1071587356" name="industry"/>
           <p:cNvSpPr txBox="1"/>
           <p:nvPr/>
         </p:nvSpPr>
@@ -10493,7 +10739,7 @@
       </p:sp>
       <p:sp>
         <p:nvSpPr>
-          <p:cNvPr id="266936509" name="invested_capital_3"/>
+          <p:cNvPr id="2047707373" name="invested_capital_3"/>
           <p:cNvSpPr txBox="1"/>
           <p:nvPr/>
         </p:nvSpPr>
@@ -10538,7 +10784,7 @@
       </p:sp>
       <p:sp>
         <p:nvSpPr>
-          <p:cNvPr id="2103103902" name=""/>
+          <p:cNvPr id="1214786138" name=""/>
           <p:cNvSpPr txBox="1"/>
           <p:nvPr/>
         </p:nvSpPr>
@@ -10583,7 +10829,7 @@
       </p:sp>
       <p:sp>
         <p:nvSpPr>
-          <p:cNvPr id="355465432" name="invested_capital_2"/>
+          <p:cNvPr id="2071015158" name="invested_capital_2"/>
           <p:cNvSpPr txBox="1"/>
           <p:nvPr/>
         </p:nvSpPr>
@@ -10628,7 +10874,7 @@
       </p:sp>
       <p:sp>
         <p:nvSpPr>
-          <p:cNvPr id="1539108509" name="invested_capital_1"/>
+          <p:cNvPr id="2051757803" name="invested_capital_1"/>
           <p:cNvSpPr txBox="1"/>
           <p:nvPr/>
         </p:nvSpPr>
@@ -10673,7 +10919,7 @@
       </p:sp>
       <p:sp>
         <p:nvSpPr>
-          <p:cNvPr id="916665546" name="invested_capital_m"/>
+          <p:cNvPr id="2122876686" name="invested_capital_m"/>
           <p:cNvSpPr txBox="1"/>
           <p:nvPr/>
         </p:nvSpPr>
@@ -10718,7 +10964,7 @@
       </p:sp>
       <p:sp>
         <p:nvSpPr>
-          <p:cNvPr id="825427361" name="market_cap"/>
+          <p:cNvPr id="1238258744" name="market_cap"/>
           <p:cNvSpPr txBox="1"/>
           <p:nvPr/>
         </p:nvSpPr>
@@ -10763,7 +11009,7 @@
       </p:sp>
       <p:sp>
         <p:nvSpPr>
-          <p:cNvPr id="2083242806" name="debt_3"/>
+          <p:cNvPr id="1805473178" name="debt_3"/>
           <p:cNvSpPr txBox="1"/>
           <p:nvPr/>
         </p:nvSpPr>
@@ -10808,7 +11054,7 @@
       </p:sp>
       <p:sp>
         <p:nvSpPr>
-          <p:cNvPr id="1255915047" name=""/>
+          <p:cNvPr id="1328461620" name=""/>
           <p:cNvSpPr txBox="1"/>
           <p:nvPr/>
         </p:nvSpPr>
@@ -10853,7 +11099,7 @@
       </p:sp>
       <p:sp>
         <p:nvSpPr>
-          <p:cNvPr id="539012147" name="debt_2"/>
+          <p:cNvPr id="1402231685" name="debt_2"/>
           <p:cNvSpPr txBox="1"/>
           <p:nvPr/>
         </p:nvSpPr>
@@ -10898,7 +11144,7 @@
       </p:sp>
       <p:sp>
         <p:nvSpPr>
-          <p:cNvPr id="1153863669" name="debt_1"/>
+          <p:cNvPr id="204420586" name="debt_1"/>
           <p:cNvSpPr txBox="1"/>
           <p:nvPr/>
         </p:nvSpPr>
@@ -10943,7 +11189,7 @@
       </p:sp>
       <p:sp>
         <p:nvSpPr>
-          <p:cNvPr id="1647303313" name="debt_m"/>
+          <p:cNvPr id="1450725628" name="debt_m"/>
           <p:cNvSpPr txBox="1"/>
           <p:nvPr/>
         </p:nvSpPr>
@@ -10988,7 +11234,7 @@
       </p:sp>
       <p:sp>
         <p:nvSpPr>
-          <p:cNvPr id="450195430" name="earnings"/>
+          <p:cNvPr id="2000097013" name="earnings"/>
           <p:cNvSpPr txBox="1"/>
           <p:nvPr/>
         </p:nvSpPr>
@@ -11033,7 +11279,7 @@
       </p:sp>
       <p:sp>
         <p:nvSpPr>
-          <p:cNvPr id="587511286" name="operating_cash_flow_3"/>
+          <p:cNvPr id="2101876442" name="operating_cash_flow_3"/>
           <p:cNvSpPr txBox="1"/>
           <p:nvPr/>
         </p:nvSpPr>
@@ -11078,7 +11324,7 @@
       </p:sp>
       <p:sp>
         <p:nvSpPr>
-          <p:cNvPr id="119781839" name=""/>
+          <p:cNvPr id="1686286609" name=""/>
           <p:cNvSpPr txBox="1"/>
           <p:nvPr/>
         </p:nvSpPr>
@@ -11123,7 +11369,7 @@
       </p:sp>
       <p:sp>
         <p:nvSpPr>
-          <p:cNvPr id="1354104436" name="operating_cash_flow_2"/>
+          <p:cNvPr id="861084848" name="operating_cash_flow_2"/>
           <p:cNvSpPr txBox="1"/>
           <p:nvPr/>
         </p:nvSpPr>
@@ -11168,7 +11414,7 @@
       </p:sp>
       <p:sp>
         <p:nvSpPr>
-          <p:cNvPr id="74196186" name="operating_cash_flow_1"/>
+          <p:cNvPr id="19235766" name="operating_cash_flow_1"/>
           <p:cNvSpPr txBox="1"/>
           <p:nvPr/>
         </p:nvSpPr>
@@ -11213,7 +11459,7 @@
       </p:sp>
       <p:sp>
         <p:nvSpPr>
-          <p:cNvPr id="1422938217" name="operating_cash_flow_m"/>
+          <p:cNvPr id="327521265" name="operating_cash_flow_m"/>
           <p:cNvSpPr txBox="1"/>
           <p:nvPr/>
         </p:nvSpPr>
@@ -11258,7 +11504,7 @@
       </p:sp>
       <p:sp>
         <p:nvSpPr>
-          <p:cNvPr id="7614347" name="stock_price"/>
+          <p:cNvPr id="1620141419" name="stock_price"/>
           <p:cNvSpPr txBox="1"/>
           <p:nvPr/>
         </p:nvSpPr>
@@ -11303,7 +11549,7 @@
       </p:sp>
       <p:sp>
         <p:nvSpPr>
-          <p:cNvPr id="1975420472" name="investing_cash_flow_3"/>
+          <p:cNvPr id="669923753" name="investing_cash_flow_3"/>
           <p:cNvSpPr txBox="1"/>
           <p:nvPr/>
         </p:nvSpPr>
@@ -11348,7 +11594,7 @@
       </p:sp>
       <p:sp>
         <p:nvSpPr>
-          <p:cNvPr id="1697246436" name=""/>
+          <p:cNvPr id="2049119597" name=""/>
           <p:cNvSpPr txBox="1"/>
           <p:nvPr/>
         </p:nvSpPr>
@@ -11393,7 +11639,7 @@
       </p:sp>
       <p:sp>
         <p:nvSpPr>
-          <p:cNvPr id="2026156671" name="investing_cash_flow_2"/>
+          <p:cNvPr id="86628382" name="investing_cash_flow_2"/>
           <p:cNvSpPr txBox="1"/>
           <p:nvPr/>
         </p:nvSpPr>
@@ -11438,7 +11684,7 @@
       </p:sp>
       <p:sp>
         <p:nvSpPr>
-          <p:cNvPr id="478273133" name="investing_cash_flow_1"/>
+          <p:cNvPr id="1342146064" name="investing_cash_flow_1"/>
           <p:cNvSpPr txBox="1"/>
           <p:nvPr/>
         </p:nvSpPr>
@@ -11483,7 +11729,7 @@
       </p:sp>
       <p:sp>
         <p:nvSpPr>
-          <p:cNvPr id="1978758114" name="investing_cash_flow_m"/>
+          <p:cNvPr id="678709510" name="investing_cash_flow_m"/>
           <p:cNvSpPr txBox="1"/>
           <p:nvPr/>
         </p:nvSpPr>
@@ -11528,7 +11774,7 @@
       </p:sp>
       <p:sp>
         <p:nvSpPr>
-          <p:cNvPr id="100304119" name="analyst_rating"/>
+          <p:cNvPr id="1329272415" name="analyst_rating"/>
           <p:cNvSpPr txBox="1"/>
           <p:nvPr/>
         </p:nvSpPr>
@@ -11573,7 +11819,7 @@
       </p:sp>
       <p:sp>
         <p:nvSpPr>
-          <p:cNvPr id="639718416" name=""/>
+          <p:cNvPr id="80289055" name=""/>
           <p:cNvSpPr txBox="1"/>
           <p:nvPr/>
         </p:nvSpPr>
@@ -11618,7 +11864,7 @@
       </p:sp>
       <p:sp>
         <p:nvSpPr>
-          <p:cNvPr id="1210602920" name="free_cash_flow_3"/>
+          <p:cNvPr id="776508240" name="free_cash_flow_3"/>
           <p:cNvSpPr txBox="1"/>
           <p:nvPr/>
         </p:nvSpPr>
@@ -11663,7 +11909,7 @@
       </p:sp>
       <p:sp>
         <p:nvSpPr>
-          <p:cNvPr id="1103560410" name="free_cash_flow_2"/>
+          <p:cNvPr id="1697242602" name="free_cash_flow_2"/>
           <p:cNvSpPr txBox="1"/>
           <p:nvPr/>
         </p:nvSpPr>
@@ -11708,7 +11954,7 @@
       </p:sp>
       <p:sp>
         <p:nvSpPr>
-          <p:cNvPr id="1868242619" name="free_cash_flow_1"/>
+          <p:cNvPr id="1955636419" name="free_cash_flow_1"/>
           <p:cNvSpPr txBox="1"/>
           <p:nvPr/>
         </p:nvSpPr>
@@ -11753,7 +11999,7 @@
       </p:sp>
       <p:sp>
         <p:nvSpPr>
-          <p:cNvPr id="369535547" name="free_cash_flow_m"/>
+          <p:cNvPr id="1828256605" name="free_cash_flow_m"/>
           <p:cNvSpPr txBox="1"/>
           <p:nvPr/>
         </p:nvSpPr>
@@ -11798,7 +12044,7 @@
       </p:sp>
       <p:sp>
         <p:nvSpPr>
-          <p:cNvPr id="1212938754" name="beta"/>
+          <p:cNvPr id="590166541" name="beta"/>
           <p:cNvSpPr txBox="1"/>
           <p:nvPr/>
         </p:nvSpPr>
@@ -11843,7 +12089,7 @@
       </p:sp>
       <p:grpSp>
         <p:nvGrpSpPr>
-          <p:cNvPr id="1974635895" name=""/>
+          <p:cNvPr id="1991118806" name=""/>
           <p:cNvGrpSpPr/>
           <p:nvPr/>
         </p:nvGrpSpPr>
@@ -11975,7 +12221,7 @@
       </p:grpSp>
       <p:grpSp>
         <p:nvGrpSpPr>
-          <p:cNvPr id="1834994646" name=""/>
+          <p:cNvPr id="165784448" name=""/>
           <p:cNvGrpSpPr/>
           <p:nvPr/>
         </p:nvGrpSpPr>
@@ -12107,7 +12353,7 @@
       </p:grpSp>
       <p:grpSp>
         <p:nvGrpSpPr>
-          <p:cNvPr id="1373217910" name=""/>
+          <p:cNvPr id="1144225173" name=""/>
           <p:cNvGrpSpPr/>
           <p:nvPr/>
         </p:nvGrpSpPr>
@@ -12239,7 +12485,7 @@
       </p:grpSp>
       <p:grpSp>
         <p:nvGrpSpPr>
-          <p:cNvPr id="1018919629" name=""/>
+          <p:cNvPr id="782568604" name=""/>
           <p:cNvGrpSpPr/>
           <p:nvPr/>
         </p:nvGrpSpPr>
@@ -12371,7 +12617,7 @@
       </p:grpSp>
       <p:grpSp>
         <p:nvGrpSpPr>
-          <p:cNvPr id="1872328368" name=""/>
+          <p:cNvPr id="1277906513" name=""/>
           <p:cNvGrpSpPr/>
           <p:nvPr/>
         </p:nvGrpSpPr>
@@ -12503,7 +12749,7 @@
       </p:grpSp>
       <p:grpSp>
         <p:nvGrpSpPr>
-          <p:cNvPr id="295591005" name=""/>
+          <p:cNvPr id="2142333670" name=""/>
           <p:cNvGrpSpPr/>
           <p:nvPr/>
         </p:nvGrpSpPr>
@@ -12635,7 +12881,7 @@
       </p:grpSp>
       <p:grpSp>
         <p:nvGrpSpPr>
-          <p:cNvPr id="934750425" name=""/>
+          <p:cNvPr id="849008303" name=""/>
           <p:cNvGrpSpPr/>
           <p:nvPr/>
         </p:nvGrpSpPr>
@@ -12767,7 +13013,7 @@
       </p:grpSp>
       <p:grpSp>
         <p:nvGrpSpPr>
-          <p:cNvPr id="1616027137" name=""/>
+          <p:cNvPr id="938624100" name=""/>
           <p:cNvGrpSpPr/>
           <p:nvPr/>
         </p:nvGrpSpPr>
@@ -12932,7 +13178,7 @@
       </p:grpSpPr>
       <p:sp>
         <p:nvSpPr>
-          <p:cNvPr id="1174977672" name="Title 1"/>
+          <p:cNvPr id="2033098733" name="Title 1"/>
           <p:cNvSpPr>
             <a:spLocks noGrp="1"/>
           </p:cNvSpPr>
@@ -12993,7 +13239,7 @@
       </p:sp>
       <p:sp>
         <p:nvSpPr>
-          <p:cNvPr id="1934687515" name="Footer Placeholder 4"/>
+          <p:cNvPr id="1815364624" name="Footer Placeholder 4"/>
           <p:cNvSpPr>
             <a:spLocks noGrp="1"/>
           </p:cNvSpPr>
@@ -13038,7 +13284,7 @@
       </p:sp>
       <p:sp>
         <p:nvSpPr>
-          <p:cNvPr id="467867098" name="Slide Number Placeholder 5"/>
+          <p:cNvPr id="1762660194" name="Slide Number Placeholder 5"/>
           <p:cNvSpPr>
             <a:spLocks noGrp="1"/>
           </p:cNvSpPr>
@@ -13075,7 +13321,7 @@
       </p:sp>
       <p:cxnSp>
         <p:nvCxnSpPr>
-          <p:cNvPr id="387081750" name=""/>
+          <p:cNvPr id="908148663" name=""/>
           <p:cNvCxnSpPr/>
           <p:nvPr/>
         </p:nvCxnSpPr>
@@ -13114,7 +13360,7 @@
       </p:cxnSp>
       <p:sp>
         <p:nvSpPr>
-          <p:cNvPr id="201570829" name=""/>
+          <p:cNvPr id="171705771" name=""/>
           <p:cNvSpPr txBox="1"/>
           <p:nvPr/>
         </p:nvSpPr>
@@ -13159,7 +13405,7 @@
       </p:sp>
       <p:sp>
         <p:nvSpPr>
-          <p:cNvPr id="362188383" name="news_name_1"/>
+          <p:cNvPr id="1213478633" name="news_name_1"/>
           <p:cNvSpPr/>
           <p:nvPr/>
         </p:nvSpPr>
@@ -13238,7 +13484,7 @@
       </p:sp>
       <p:sp>
         <p:nvSpPr>
-          <p:cNvPr id="1047532191" name="news_1"/>
+          <p:cNvPr id="747970552" name="news_1"/>
           <p:cNvSpPr/>
           <p:nvPr/>
         </p:nvSpPr>
@@ -13316,7 +13562,7 @@
       </p:sp>
       <p:sp>
         <p:nvSpPr>
-          <p:cNvPr id="1624239741" name="news_name_2"/>
+          <p:cNvPr id="1018746483" name="news_name_2"/>
           <p:cNvSpPr/>
           <p:nvPr/>
         </p:nvSpPr>
@@ -13395,7 +13641,7 @@
       </p:sp>
       <p:sp>
         <p:nvSpPr>
-          <p:cNvPr id="688228965" name="news_2"/>
+          <p:cNvPr id="515081109" name="news_2"/>
           <p:cNvSpPr/>
           <p:nvPr/>
         </p:nvSpPr>
@@ -13473,7 +13719,7 @@
       </p:sp>
       <p:sp>
         <p:nvSpPr>
-          <p:cNvPr id="1616617812" name="news_name_3"/>
+          <p:cNvPr id="1132270404" name="news_name_3"/>
           <p:cNvSpPr/>
           <p:nvPr/>
         </p:nvSpPr>
@@ -13552,7 +13798,7 @@
       </p:sp>
       <p:sp>
         <p:nvSpPr>
-          <p:cNvPr id="1724349472" name="news_3"/>
+          <p:cNvPr id="171148408" name="news_3"/>
           <p:cNvSpPr/>
           <p:nvPr/>
         </p:nvSpPr>
